--- a/protected-downloads/praesentation/M12.pptx
+++ b/protected-downloads/praesentation/M12.pptx
@@ -8,13 +8,14 @@
     <p:sldId id="256" r:id="rId7"/>
     <p:sldId id="257" r:id="rId8"/>
     <p:sldId id="258" r:id="rId9"/>
-    <p:sldId id="259" r:id="rId10"/>
-    <p:sldId id="260" r:id="rId11"/>
-    <p:sldId id="261" r:id="rId12"/>
-    <p:sldId id="262" r:id="rId13"/>
-    <p:sldId id="263" r:id="rId14"/>
-    <p:sldId id="264" r:id="rId15"/>
-    <p:sldId id="265" r:id="rId16"/>
+    <p:sldId id="259" r:id="rId11"/>
+    <p:sldId id="260" r:id="rId12"/>
+    <p:sldId id="261" r:id="rId13"/>
+    <p:sldId id="262" r:id="rId14"/>
+    <p:sldId id="263" r:id="rId15"/>
+    <p:sldId id="264" r:id="rId16"/>
+    <p:sldId id="265" r:id="rId17"/>
+    <p:sldId id="266" r:id="rId18"/>
   </p:sldIdLst>
   <p:sldSz cx="12188952" cy="6858000" type="screen4x3"/>
   <p:notesSz cx="6858000" cy="9144000"/>
@@ -114,6 +115,846 @@
     </a:lvl9pPr>
   </p:defaultTextStyle>
 </p:presentation>
+</file>
+
+<file path=ppt/notesMasters/notesMaster1.xml><?xml version="1.0" encoding="utf-8"?>
+<p:notesMaster xmlns:a="http://schemas.openxmlformats.org/drawingml/2006/main" xmlns:p="http://schemas.openxmlformats.org/presentationml/2006/main" xmlns:r="http://schemas.openxmlformats.org/officeDocument/2006/relationships">
+  <p:cSld>
+    <p:bg>
+      <p:bgRef idx="1001">
+        <a:schemeClr val="bg1"/>
+      </p:bgRef>
+    </p:bg>
+    <p:spTree>
+      <p:nvGrpSpPr>
+        <p:cNvPr id="1" name=""/>
+        <p:cNvGrpSpPr/>
+        <p:nvPr/>
+      </p:nvGrpSpPr>
+      <p:grpSpPr>
+        <a:xfrm>
+          <a:off x="0" y="0"/>
+          <a:ext cx="0" cy="0"/>
+          <a:chOff x="0" y="0"/>
+          <a:chExt cx="0" cy="0"/>
+        </a:xfrm>
+      </p:grpSpPr>
+      <p:sp>
+        <p:nvSpPr>
+          <p:cNvPr id="2" name="Header Placeholder 1"/>
+          <p:cNvSpPr>
+            <a:spLocks noGrp="1"/>
+          </p:cNvSpPr>
+          <p:nvPr>
+            <p:ph type="hdr" sz="quarter"/>
+          </p:nvPr>
+        </p:nvSpPr>
+        <p:spPr>
+          <a:xfrm>
+            <a:off x="0" y="0"/>
+            <a:ext cx="2971800" cy="457200"/>
+          </a:xfrm>
+          <a:prstGeom prst="rect">
+            <a:avLst/>
+          </a:prstGeom>
+        </p:spPr>
+        <p:txBody>
+          <a:bodyPr vert="horz" lIns="91440" tIns="45720" rIns="91440" bIns="45720" rtlCol="0"/>
+          <a:lstStyle>
+            <a:lvl1pPr algn="l">
+              <a:defRPr sz="1200"/>
+            </a:lvl1pPr>
+          </a:lstStyle>
+          <a:p>
+            <a:endParaRPr lang="en-US"/>
+          </a:p>
+        </p:txBody>
+      </p:sp>
+      <p:sp>
+        <p:nvSpPr>
+          <p:cNvPr id="3" name="Date Placeholder 2"/>
+          <p:cNvSpPr>
+            <a:spLocks noGrp="1"/>
+          </p:cNvSpPr>
+          <p:nvPr>
+            <p:ph type="dt" idx="1"/>
+          </p:nvPr>
+        </p:nvSpPr>
+        <p:spPr>
+          <a:xfrm>
+            <a:off x="3884613" y="0"/>
+            <a:ext cx="2971800" cy="457200"/>
+          </a:xfrm>
+          <a:prstGeom prst="rect">
+            <a:avLst/>
+          </a:prstGeom>
+        </p:spPr>
+        <p:txBody>
+          <a:bodyPr vert="horz" lIns="91440" tIns="45720" rIns="91440" bIns="45720" rtlCol="0"/>
+          <a:lstStyle>
+            <a:lvl1pPr algn="r">
+              <a:defRPr sz="1200"/>
+            </a:lvl1pPr>
+          </a:lstStyle>
+          <a:p>
+            <a:fld id="{0F89C1C7-3DCD-1040-A9CF-14679D8B5DDD}" type="datetimeFigureOut">
+              <a:rPr lang="en-US" smtClean="0"/>
+              <a:t>10/17/16</a:t>
+            </a:fld>
+            <a:endParaRPr lang="en-US"/>
+          </a:p>
+        </p:txBody>
+      </p:sp>
+      <p:sp>
+        <p:nvSpPr>
+          <p:cNvPr id="4" name="Slide Image Placeholder 3"/>
+          <p:cNvSpPr>
+            <a:spLocks noGrp="1" noRot="1" noChangeAspect="1"/>
+          </p:cNvSpPr>
+          <p:nvPr>
+            <p:ph type="sldImg" idx="2"/>
+          </p:nvPr>
+        </p:nvSpPr>
+        <p:spPr>
+          <a:xfrm>
+            <a:off x="1143000" y="685800"/>
+            <a:ext cx="4572000" cy="3429000"/>
+          </a:xfrm>
+          <a:prstGeom prst="rect">
+            <a:avLst/>
+          </a:prstGeom>
+          <a:noFill/>
+          <a:ln w="12700">
+            <a:solidFill>
+              <a:prstClr val="black"/>
+            </a:solidFill>
+          </a:ln>
+        </p:spPr>
+        <p:txBody>
+          <a:bodyPr vert="horz" lIns="91440" tIns="45720" rIns="91440" bIns="45720" rtlCol="0" anchor="ctr"/>
+          <a:lstStyle/>
+          <a:p>
+            <a:endParaRPr lang="en-US"/>
+          </a:p>
+        </p:txBody>
+      </p:sp>
+      <p:sp>
+        <p:nvSpPr>
+          <p:cNvPr id="5" name="Notes Placeholder 4"/>
+          <p:cNvSpPr>
+            <a:spLocks noGrp="1"/>
+          </p:cNvSpPr>
+          <p:nvPr>
+            <p:ph type="body" sz="quarter" idx="3"/>
+          </p:nvPr>
+        </p:nvSpPr>
+        <p:spPr>
+          <a:xfrm>
+            <a:off x="685800" y="4343400"/>
+            <a:ext cx="5486400" cy="4114800"/>
+          </a:xfrm>
+          <a:prstGeom prst="rect">
+            <a:avLst/>
+          </a:prstGeom>
+        </p:spPr>
+        <p:txBody>
+          <a:bodyPr vert="horz" lIns="91440" tIns="45720" rIns="91440" bIns="45720" rtlCol="0"/>
+          <a:lstStyle/>
+          <a:p>
+            <a:pPr lvl="0"/>
+            <a:r>
+              <a:rPr lang="en-US" smtClean="0"/>
+              <a:t>Click to edit Master text styles</a:t>
+            </a:r>
+          </a:p>
+          <a:p>
+            <a:pPr lvl="1"/>
+            <a:r>
+              <a:rPr lang="en-US" smtClean="0"/>
+              <a:t>Second level</a:t>
+            </a:r>
+          </a:p>
+          <a:p>
+            <a:pPr lvl="2"/>
+            <a:r>
+              <a:rPr lang="en-US" smtClean="0"/>
+              <a:t>Third level</a:t>
+            </a:r>
+          </a:p>
+          <a:p>
+            <a:pPr lvl="3"/>
+            <a:r>
+              <a:rPr lang="en-US" smtClean="0"/>
+              <a:t>Fourth level</a:t>
+            </a:r>
+          </a:p>
+          <a:p>
+            <a:pPr lvl="4"/>
+            <a:r>
+              <a:rPr lang="en-US" smtClean="0"/>
+              <a:t>Fifth level</a:t>
+            </a:r>
+            <a:endParaRPr lang="en-US"/>
+          </a:p>
+        </p:txBody>
+      </p:sp>
+      <p:sp>
+        <p:nvSpPr>
+          <p:cNvPr id="6" name="Footer Placeholder 5"/>
+          <p:cNvSpPr>
+            <a:spLocks noGrp="1"/>
+          </p:cNvSpPr>
+          <p:nvPr>
+            <p:ph type="ftr" sz="quarter" idx="4"/>
+          </p:nvPr>
+        </p:nvSpPr>
+        <p:spPr>
+          <a:xfrm>
+            <a:off x="0" y="8685213"/>
+            <a:ext cx="2971800" cy="457200"/>
+          </a:xfrm>
+          <a:prstGeom prst="rect">
+            <a:avLst/>
+          </a:prstGeom>
+        </p:spPr>
+        <p:txBody>
+          <a:bodyPr vert="horz" lIns="91440" tIns="45720" rIns="91440" bIns="45720" rtlCol="0" anchor="b"/>
+          <a:lstStyle>
+            <a:lvl1pPr algn="l">
+              <a:defRPr sz="1200"/>
+            </a:lvl1pPr>
+          </a:lstStyle>
+          <a:p>
+            <a:endParaRPr lang="en-US"/>
+          </a:p>
+        </p:txBody>
+      </p:sp>
+      <p:sp>
+        <p:nvSpPr>
+          <p:cNvPr id="7" name="Slide Number Placeholder 6"/>
+          <p:cNvSpPr>
+            <a:spLocks noGrp="1"/>
+          </p:cNvSpPr>
+          <p:nvPr>
+            <p:ph type="sldNum" sz="quarter" idx="5"/>
+          </p:nvPr>
+        </p:nvSpPr>
+        <p:spPr>
+          <a:xfrm>
+            <a:off x="3884613" y="8685213"/>
+            <a:ext cx="2971800" cy="457200"/>
+          </a:xfrm>
+          <a:prstGeom prst="rect">
+            <a:avLst/>
+          </a:prstGeom>
+        </p:spPr>
+        <p:txBody>
+          <a:bodyPr vert="horz" lIns="91440" tIns="45720" rIns="91440" bIns="45720" rtlCol="0" anchor="b"/>
+          <a:lstStyle>
+            <a:lvl1pPr algn="r">
+              <a:defRPr sz="1200"/>
+            </a:lvl1pPr>
+          </a:lstStyle>
+          <a:p>
+            <a:fld id="{BB5E49A5-4136-284D-997B-48E1D791AD67}" type="slidenum">
+              <a:rPr lang="en-US" smtClean="0"/>
+              <a:t>‹#›</a:t>
+            </a:fld>
+            <a:endParaRPr lang="en-US"/>
+          </a:p>
+        </p:txBody>
+      </p:sp>
+    </p:spTree>
+    <p:extLst>
+      <p:ext uri="{BB962C8B-B14F-4D97-AF65-F5344CB8AC3E}">
+        <p14:creationId xmlns:p14="http://schemas.microsoft.com/office/powerpoint/2010/main" val="2623252185"/>
+      </p:ext>
+    </p:extLst>
+  </p:cSld>
+  <p:clrMap bg1="lt1" tx1="dk1" bg2="lt2" tx2="dk2" accent1="accent1" accent2="accent2" accent3="accent3" accent4="accent4" accent5="accent5" accent6="accent6" hlink="hlink" folHlink="folHlink"/>
+  <p:notesStyle>
+    <a:lvl1pPr marL="0" algn="l" defTabSz="457200" rtl="0" eaLnBrk="1" latinLnBrk="0" hangingPunct="1">
+      <a:defRPr sz="1200" kern="1200">
+        <a:solidFill>
+          <a:schemeClr val="tx1"/>
+        </a:solidFill>
+        <a:latin typeface="+mn-lt"/>
+        <a:ea typeface="+mn-ea"/>
+        <a:cs typeface="+mn-cs"/>
+      </a:defRPr>
+    </a:lvl1pPr>
+    <a:lvl2pPr marL="457200" algn="l" defTabSz="457200" rtl="0" eaLnBrk="1" latinLnBrk="0" hangingPunct="1">
+      <a:defRPr sz="1200" kern="1200">
+        <a:solidFill>
+          <a:schemeClr val="tx1"/>
+        </a:solidFill>
+        <a:latin typeface="+mn-lt"/>
+        <a:ea typeface="+mn-ea"/>
+        <a:cs typeface="+mn-cs"/>
+      </a:defRPr>
+    </a:lvl2pPr>
+    <a:lvl3pPr marL="914400" algn="l" defTabSz="457200" rtl="0" eaLnBrk="1" latinLnBrk="0" hangingPunct="1">
+      <a:defRPr sz="1200" kern="1200">
+        <a:solidFill>
+          <a:schemeClr val="tx1"/>
+        </a:solidFill>
+        <a:latin typeface="+mn-lt"/>
+        <a:ea typeface="+mn-ea"/>
+        <a:cs typeface="+mn-cs"/>
+      </a:defRPr>
+    </a:lvl3pPr>
+    <a:lvl4pPr marL="1371600" algn="l" defTabSz="457200" rtl="0" eaLnBrk="1" latinLnBrk="0" hangingPunct="1">
+      <a:defRPr sz="1200" kern="1200">
+        <a:solidFill>
+          <a:schemeClr val="tx1"/>
+        </a:solidFill>
+        <a:latin typeface="+mn-lt"/>
+        <a:ea typeface="+mn-ea"/>
+        <a:cs typeface="+mn-cs"/>
+      </a:defRPr>
+    </a:lvl4pPr>
+    <a:lvl5pPr marL="1828800" algn="l" defTabSz="457200" rtl="0" eaLnBrk="1" latinLnBrk="0" hangingPunct="1">
+      <a:defRPr sz="1200" kern="1200">
+        <a:solidFill>
+          <a:schemeClr val="tx1"/>
+        </a:solidFill>
+        <a:latin typeface="+mn-lt"/>
+        <a:ea typeface="+mn-ea"/>
+        <a:cs typeface="+mn-cs"/>
+      </a:defRPr>
+    </a:lvl5pPr>
+    <a:lvl6pPr marL="2286000" algn="l" defTabSz="457200" rtl="0" eaLnBrk="1" latinLnBrk="0" hangingPunct="1">
+      <a:defRPr sz="1200" kern="1200">
+        <a:solidFill>
+          <a:schemeClr val="tx1"/>
+        </a:solidFill>
+        <a:latin typeface="+mn-lt"/>
+        <a:ea typeface="+mn-ea"/>
+        <a:cs typeface="+mn-cs"/>
+      </a:defRPr>
+    </a:lvl6pPr>
+    <a:lvl7pPr marL="2743200" algn="l" defTabSz="457200" rtl="0" eaLnBrk="1" latinLnBrk="0" hangingPunct="1">
+      <a:defRPr sz="1200" kern="1200">
+        <a:solidFill>
+          <a:schemeClr val="tx1"/>
+        </a:solidFill>
+        <a:latin typeface="+mn-lt"/>
+        <a:ea typeface="+mn-ea"/>
+        <a:cs typeface="+mn-cs"/>
+      </a:defRPr>
+    </a:lvl7pPr>
+    <a:lvl8pPr marL="3200400" algn="l" defTabSz="457200" rtl="0" eaLnBrk="1" latinLnBrk="0" hangingPunct="1">
+      <a:defRPr sz="1200" kern="1200">
+        <a:solidFill>
+          <a:schemeClr val="tx1"/>
+        </a:solidFill>
+        <a:latin typeface="+mn-lt"/>
+        <a:ea typeface="+mn-ea"/>
+        <a:cs typeface="+mn-cs"/>
+      </a:defRPr>
+    </a:lvl8pPr>
+    <a:lvl9pPr marL="3657600" algn="l" defTabSz="457200" rtl="0" eaLnBrk="1" latinLnBrk="0" hangingPunct="1">
+      <a:defRPr sz="1200" kern="1200">
+        <a:solidFill>
+          <a:schemeClr val="tx1"/>
+        </a:solidFill>
+        <a:latin typeface="+mn-lt"/>
+        <a:ea typeface="+mn-ea"/>
+        <a:cs typeface="+mn-cs"/>
+      </a:defRPr>
+    </a:lvl9pPr>
+  </p:notesStyle>
+</p:notesMaster>
+</file>
+
+<file path=ppt/notesSlides/notesSlide1.xml><?xml version="1.0" encoding="utf-8"?>
+<p:notes xmlns:a="http://schemas.openxmlformats.org/drawingml/2006/main" xmlns:p="http://schemas.openxmlformats.org/presentationml/2006/main" xmlns:r="http://schemas.openxmlformats.org/officeDocument/2006/relationships">
+  <p:cSld>
+    <p:spTree>
+      <p:nvGrpSpPr>
+        <p:cNvPr id="1" name=""/>
+        <p:cNvGrpSpPr/>
+        <p:nvPr/>
+      </p:nvGrpSpPr>
+      <p:grpSpPr>
+        <a:xfrm>
+          <a:off x="0" y="0"/>
+          <a:ext cx="0" cy="0"/>
+          <a:chOff x="0" y="0"/>
+          <a:chExt cx="0" cy="0"/>
+        </a:xfrm>
+      </p:grpSpPr>
+      <p:sp>
+        <p:nvSpPr>
+          <p:cNvPr id="2" name="Slide Image Placeholder 1"/>
+          <p:cNvSpPr>
+            <a:spLocks noGrp="1"/>
+          </p:cNvSpPr>
+          <p:nvPr>
+            <p:ph type="sldImg" idx="2"/>
+          </p:nvPr>
+        </p:nvSpPr>
+        <p:spPr/>
+      </p:sp>
+      <p:sp>
+        <p:nvSpPr>
+          <p:cNvPr id="3" name="Notes Placeholder 2"/>
+          <p:cNvSpPr>
+            <a:spLocks noGrp="1"/>
+          </p:cNvSpPr>
+          <p:nvPr>
+            <p:ph type="body" idx="3" sz="quarter"/>
+          </p:nvPr>
+        </p:nvSpPr>
+        <p:spPr/>
+        <p:txBody>
+          <a:bodyPr/>
+          <a:lstStyle/>
+          <a:p>
+            <a:r>
+              <a:t>Agenda-Überblick. Timing und Pausen siehe Ablaufplan im Trainerhandbuch (Sektion 3).</a:t>
+            </a:r>
+          </a:p>
+        </p:txBody>
+      </p:sp>
+      <p:sp>
+        <p:nvSpPr>
+          <p:cNvPr id="4" name="Slide Number Placeholder 3"/>
+          <p:cNvSpPr>
+            <a:spLocks noGrp="1"/>
+          </p:cNvSpPr>
+          <p:nvPr>
+            <p:ph type="sldNum" idx="5" sz="quarter"/>
+          </p:nvPr>
+        </p:nvSpPr>
+        <p:spPr/>
+      </p:sp>
+    </p:spTree>
+  </p:cSld>
+  <p:clrMapOvr>
+    <a:masterClrMapping/>
+  </p:clrMapOvr>
+</p:notes>
+</file>
+
+<file path=ppt/notesSlides/notesSlide2.xml><?xml version="1.0" encoding="utf-8"?>
+<p:notes xmlns:a="http://schemas.openxmlformats.org/drawingml/2006/main" xmlns:p="http://schemas.openxmlformats.org/presentationml/2006/main" xmlns:r="http://schemas.openxmlformats.org/officeDocument/2006/relationships">
+  <p:cSld>
+    <p:spTree>
+      <p:nvGrpSpPr>
+        <p:cNvPr id="1" name=""/>
+        <p:cNvGrpSpPr/>
+        <p:nvPr/>
+      </p:nvGrpSpPr>
+      <p:grpSpPr>
+        <a:xfrm>
+          <a:off x="0" y="0"/>
+          <a:ext cx="0" cy="0"/>
+          <a:chOff x="0" y="0"/>
+          <a:chExt cx="0" cy="0"/>
+        </a:xfrm>
+      </p:grpSpPr>
+      <p:sp>
+        <p:nvSpPr>
+          <p:cNvPr id="2" name="Slide Image Placeholder 1"/>
+          <p:cNvSpPr>
+            <a:spLocks noGrp="1"/>
+          </p:cNvSpPr>
+          <p:nvPr>
+            <p:ph type="sldImg" idx="2"/>
+          </p:nvPr>
+        </p:nvSpPr>
+        <p:spPr/>
+      </p:sp>
+      <p:sp>
+        <p:nvSpPr>
+          <p:cNvPr id="3" name="Notes Placeholder 2"/>
+          <p:cNvSpPr>
+            <a:spLocks noGrp="1"/>
+          </p:cNvSpPr>
+          <p:nvPr>
+            <p:ph type="body" idx="3" sz="quarter"/>
+          </p:nvPr>
+        </p:nvSpPr>
+        <p:spPr/>
+        <p:txBody>
+          <a:bodyPr/>
+          <a:lstStyle/>
+          <a:p>
+            <a:r>
+              <a:t>Moderation (HB Sec 3): Kern des Inputs: Warum CEO-Dialoge scheitern – und was strukturell anders ist. Fokus: McClelland &amp; Burnham (Q-154) zu Machtmotivation, Edmondson (Q-148) zu psychologischer Sicherheit. Visualisierung: „Gesprächsarchitektur eines CEO-Dialogs" auf Flipchart (3 Ebenen: Einstieg → Vertiefung → Commitment). Trainer-Hinweis: Kein akademischer Vortrag – jede Theorie an einem eigenen Erlebnis verankern. „Ich hatte mal einen Kunden, der nach 15 Jahren zum ersten Mal über sein Unternehmen gesprochen hat – weil ich eine andere Frage gestellt habe." Persönliche Glaubwürdigkeit ist die Eintrittskarte zur Stufe-4-Kompetenzentwicklung.</a:t>
+            </a:r>
+          </a:p>
+        </p:txBody>
+      </p:sp>
+      <p:sp>
+        <p:nvSpPr>
+          <p:cNvPr id="4" name="Slide Number Placeholder 3"/>
+          <p:cNvSpPr>
+            <a:spLocks noGrp="1"/>
+          </p:cNvSpPr>
+          <p:nvPr>
+            <p:ph type="sldNum" idx="5" sz="quarter"/>
+          </p:nvPr>
+        </p:nvSpPr>
+        <p:spPr/>
+      </p:sp>
+    </p:spTree>
+  </p:cSld>
+  <p:clrMapOvr>
+    <a:masterClrMapping/>
+  </p:clrMapOvr>
+</p:notes>
+</file>
+
+<file path=ppt/notesSlides/notesSlide3.xml><?xml version="1.0" encoding="utf-8"?>
+<p:notes xmlns:a="http://schemas.openxmlformats.org/drawingml/2006/main" xmlns:p="http://schemas.openxmlformats.org/presentationml/2006/main" xmlns:r="http://schemas.openxmlformats.org/officeDocument/2006/relationships">
+  <p:cSld>
+    <p:spTree>
+      <p:nvGrpSpPr>
+        <p:cNvPr id="1" name=""/>
+        <p:cNvGrpSpPr/>
+        <p:nvPr/>
+      </p:nvGrpSpPr>
+      <p:grpSpPr>
+        <a:xfrm>
+          <a:off x="0" y="0"/>
+          <a:ext cx="0" cy="0"/>
+          <a:chOff x="0" y="0"/>
+          <a:chExt cx="0" cy="0"/>
+        </a:xfrm>
+      </p:grpSpPr>
+      <p:sp>
+        <p:nvSpPr>
+          <p:cNvPr id="2" name="Slide Image Placeholder 1"/>
+          <p:cNvSpPr>
+            <a:spLocks noGrp="1"/>
+          </p:cNvSpPr>
+          <p:nvPr>
+            <p:ph type="sldImg" idx="2"/>
+          </p:nvPr>
+        </p:nvSpPr>
+        <p:spPr/>
+      </p:sp>
+      <p:sp>
+        <p:nvSpPr>
+          <p:cNvPr id="3" name="Notes Placeholder 2"/>
+          <p:cNvSpPr>
+            <a:spLocks noGrp="1"/>
+          </p:cNvSpPr>
+          <p:nvPr>
+            <p:ph type="body" idx="3" sz="quarter"/>
+          </p:nvPr>
+        </p:nvSpPr>
+        <p:spPr/>
+        <p:txBody>
+          <a:bodyPr/>
+          <a:lstStyle/>
+          <a:p>
+            <a:r>
+              <a:t>Moderation (HB Sec 3): Einführung der drei Kernwerkzeuge: 1. Wunderfrage (de Shazer, 1985 ): Angenommen, über Nacht wäre das Problem gelöst – was wäre morgen anders? 2. Zirkuläre Frage (Penn, 1982 ; Tomm, 1987 ): Was würde Ihr Steuerberater sagen, wenn ich ihn fragen würde, was Ihr größtes Hindernis ist? 3. Hypothetische Frage: Wenn Sie wüssten, dass Ihr Unternehmen in 5 Jahren verkauft wird – was würden Sie heute anders machen? Übung im Plenum: Jeder TN formuliert eine zirkuläre Frage für seinen wichtigsten Nachfolge-Kunden. Kurze Partnerdiskussion (5 min), dann zwei Beispiele im Plenum vorstellen.</a:t>
+            </a:r>
+          </a:p>
+        </p:txBody>
+      </p:sp>
+      <p:sp>
+        <p:nvSpPr>
+          <p:cNvPr id="4" name="Slide Number Placeholder 3"/>
+          <p:cNvSpPr>
+            <a:spLocks noGrp="1"/>
+          </p:cNvSpPr>
+          <p:nvPr>
+            <p:ph type="sldNum" idx="5" sz="quarter"/>
+          </p:nvPr>
+        </p:nvSpPr>
+        <p:spPr/>
+      </p:sp>
+    </p:spTree>
+  </p:cSld>
+  <p:clrMapOvr>
+    <a:masterClrMapping/>
+  </p:clrMapOvr>
+</p:notes>
+</file>
+
+<file path=ppt/notesSlides/notesSlide4.xml><?xml version="1.0" encoding="utf-8"?>
+<p:notes xmlns:a="http://schemas.openxmlformats.org/drawingml/2006/main" xmlns:p="http://schemas.openxmlformats.org/presentationml/2006/main" xmlns:r="http://schemas.openxmlformats.org/officeDocument/2006/relationships">
+  <p:cSld>
+    <p:spTree>
+      <p:nvGrpSpPr>
+        <p:cNvPr id="1" name=""/>
+        <p:cNvGrpSpPr/>
+        <p:nvPr/>
+      </p:nvGrpSpPr>
+      <p:grpSpPr>
+        <a:xfrm>
+          <a:off x="0" y="0"/>
+          <a:ext cx="0" cy="0"/>
+          <a:chOff x="0" y="0"/>
+          <a:chExt cx="0" cy="0"/>
+        </a:xfrm>
+      </p:grpSpPr>
+      <p:sp>
+        <p:nvSpPr>
+          <p:cNvPr id="2" name="Slide Image Placeholder 1"/>
+          <p:cNvSpPr>
+            <a:spLocks noGrp="1"/>
+          </p:cNvSpPr>
+          <p:nvPr>
+            <p:ph type="sldImg" idx="2"/>
+          </p:nvPr>
+        </p:nvSpPr>
+        <p:spPr/>
+      </p:sp>
+      <p:sp>
+        <p:nvSpPr>
+          <p:cNvPr id="3" name="Notes Placeholder 2"/>
+          <p:cNvSpPr>
+            <a:spLocks noGrp="1"/>
+          </p:cNvSpPr>
+          <p:nvPr>
+            <p:ph type="body" idx="3" sz="quarter"/>
+          </p:nvPr>
+        </p:nvSpPr>
+        <p:spPr/>
+        <p:txBody>
+          <a:bodyPr/>
+          <a:lstStyle/>
+          <a:p>
+            <a:r>
+              <a:t>Siehe Trainerhandbuch (Sektion 3) für Moderationshinweise, Timing und erwartete Teilnehmerreaktionen.</a:t>
+            </a:r>
+          </a:p>
+        </p:txBody>
+      </p:sp>
+      <p:sp>
+        <p:nvSpPr>
+          <p:cNvPr id="4" name="Slide Number Placeholder 3"/>
+          <p:cNvSpPr>
+            <a:spLocks noGrp="1"/>
+          </p:cNvSpPr>
+          <p:nvPr>
+            <p:ph type="sldNum" idx="5" sz="quarter"/>
+          </p:nvPr>
+        </p:nvSpPr>
+        <p:spPr/>
+      </p:sp>
+    </p:spTree>
+  </p:cSld>
+  <p:clrMapOvr>
+    <a:masterClrMapping/>
+  </p:clrMapOvr>
+</p:notes>
+</file>
+
+<file path=ppt/notesSlides/notesSlide5.xml><?xml version="1.0" encoding="utf-8"?>
+<p:notes xmlns:a="http://schemas.openxmlformats.org/drawingml/2006/main" xmlns:p="http://schemas.openxmlformats.org/presentationml/2006/main" xmlns:r="http://schemas.openxmlformats.org/officeDocument/2006/relationships">
+  <p:cSld>
+    <p:spTree>
+      <p:nvGrpSpPr>
+        <p:cNvPr id="1" name=""/>
+        <p:cNvGrpSpPr/>
+        <p:nvPr/>
+      </p:nvGrpSpPr>
+      <p:grpSpPr>
+        <a:xfrm>
+          <a:off x="0" y="0"/>
+          <a:ext cx="0" cy="0"/>
+          <a:chOff x="0" y="0"/>
+          <a:chExt cx="0" cy="0"/>
+        </a:xfrm>
+      </p:grpSpPr>
+      <p:sp>
+        <p:nvSpPr>
+          <p:cNvPr id="2" name="Slide Image Placeholder 1"/>
+          <p:cNvSpPr>
+            <a:spLocks noGrp="1"/>
+          </p:cNvSpPr>
+          <p:nvPr>
+            <p:ph type="sldImg" idx="2"/>
+          </p:nvPr>
+        </p:nvSpPr>
+        <p:spPr/>
+      </p:sp>
+      <p:sp>
+        <p:nvSpPr>
+          <p:cNvPr id="3" name="Notes Placeholder 2"/>
+          <p:cNvSpPr>
+            <a:spLocks noGrp="1"/>
+          </p:cNvSpPr>
+          <p:nvPr>
+            <p:ph type="body" idx="3" sz="quarter"/>
+          </p:nvPr>
+        </p:nvSpPr>
+        <p:spPr/>
+        <p:txBody>
+          <a:bodyPr/>
+          <a:lstStyle/>
+          <a:p>
+            <a:r>
+              <a:t>Siehe Trainerhandbuch (Sektion 3) für Moderationshinweise, Timing und erwartete Teilnehmerreaktionen.</a:t>
+            </a:r>
+          </a:p>
+        </p:txBody>
+      </p:sp>
+      <p:sp>
+        <p:nvSpPr>
+          <p:cNvPr id="4" name="Slide Number Placeholder 3"/>
+          <p:cNvSpPr>
+            <a:spLocks noGrp="1"/>
+          </p:cNvSpPr>
+          <p:nvPr>
+            <p:ph type="sldNum" idx="5" sz="quarter"/>
+          </p:nvPr>
+        </p:nvSpPr>
+        <p:spPr/>
+      </p:sp>
+    </p:spTree>
+  </p:cSld>
+  <p:clrMapOvr>
+    <a:masterClrMapping/>
+  </p:clrMapOvr>
+</p:notes>
+</file>
+
+<file path=ppt/notesSlides/notesSlide6.xml><?xml version="1.0" encoding="utf-8"?>
+<p:notes xmlns:a="http://schemas.openxmlformats.org/drawingml/2006/main" xmlns:p="http://schemas.openxmlformats.org/presentationml/2006/main" xmlns:r="http://schemas.openxmlformats.org/officeDocument/2006/relationships">
+  <p:cSld>
+    <p:spTree>
+      <p:nvGrpSpPr>
+        <p:cNvPr id="1" name=""/>
+        <p:cNvGrpSpPr/>
+        <p:nvPr/>
+      </p:nvGrpSpPr>
+      <p:grpSpPr>
+        <a:xfrm>
+          <a:off x="0" y="0"/>
+          <a:ext cx="0" cy="0"/>
+          <a:chOff x="0" y="0"/>
+          <a:chExt cx="0" cy="0"/>
+        </a:xfrm>
+      </p:grpSpPr>
+      <p:sp>
+        <p:nvSpPr>
+          <p:cNvPr id="2" name="Slide Image Placeholder 1"/>
+          <p:cNvSpPr>
+            <a:spLocks noGrp="1"/>
+          </p:cNvSpPr>
+          <p:nvPr>
+            <p:ph type="sldImg" idx="2"/>
+          </p:nvPr>
+        </p:nvSpPr>
+        <p:spPr/>
+      </p:sp>
+      <p:sp>
+        <p:nvSpPr>
+          <p:cNvPr id="3" name="Notes Placeholder 2"/>
+          <p:cNvSpPr>
+            <a:spLocks noGrp="1"/>
+          </p:cNvSpPr>
+          <p:nvPr>
+            <p:ph type="body" idx="3" sz="quarter"/>
+          </p:nvPr>
+        </p:nvSpPr>
+        <p:spPr/>
+        <p:txBody>
+          <a:bodyPr/>
+          <a:lstStyle/>
+          <a:p>
+            <a:r>
+              <a:t>Moderation (HB Sec 3): 4 Kleingruppen à 2 Personen analysieren denselben Fall mit unterschiedlichen Fragestellungen (Aufgabenverteilung auf Analysekarten). Jede Gruppe präsentiert 5 Minuten, dann Plenumsdiskussion zu den divergierenden Empfehlungen. Trainer-Hinweis: Divergierende Gruppenempfehlungen sind erwünscht und lehrreich. Der Trainer moderiert die Debatte, gibt keine „richtige" Antwort vor – stattdessen: „Was würden Sie dem Unternehmer tatsächlich sagen? Und warum?" Der Mut zur eigenen Einschätzung ist ein Kennzeichen von Stufe 4.</a:t>
+            </a:r>
+          </a:p>
+        </p:txBody>
+      </p:sp>
+      <p:sp>
+        <p:nvSpPr>
+          <p:cNvPr id="4" name="Slide Number Placeholder 3"/>
+          <p:cNvSpPr>
+            <a:spLocks noGrp="1"/>
+          </p:cNvSpPr>
+          <p:nvPr>
+            <p:ph type="sldNum" idx="5" sz="quarter"/>
+          </p:nvPr>
+        </p:nvSpPr>
+        <p:spPr/>
+      </p:sp>
+    </p:spTree>
+  </p:cSld>
+  <p:clrMapOvr>
+    <a:masterClrMapping/>
+  </p:clrMapOvr>
+</p:notes>
+</file>
+
+<file path=ppt/notesSlides/notesSlide7.xml><?xml version="1.0" encoding="utf-8"?>
+<p:notes xmlns:a="http://schemas.openxmlformats.org/drawingml/2006/main" xmlns:p="http://schemas.openxmlformats.org/presentationml/2006/main" xmlns:r="http://schemas.openxmlformats.org/officeDocument/2006/relationships">
+  <p:cSld>
+    <p:spTree>
+      <p:nvGrpSpPr>
+        <p:cNvPr id="1" name=""/>
+        <p:cNvGrpSpPr/>
+        <p:nvPr/>
+      </p:nvGrpSpPr>
+      <p:grpSpPr>
+        <a:xfrm>
+          <a:off x="0" y="0"/>
+          <a:ext cx="0" cy="0"/>
+          <a:chOff x="0" y="0"/>
+          <a:chExt cx="0" cy="0"/>
+        </a:xfrm>
+      </p:grpSpPr>
+      <p:sp>
+        <p:nvSpPr>
+          <p:cNvPr id="2" name="Slide Image Placeholder 1"/>
+          <p:cNvSpPr>
+            <a:spLocks noGrp="1"/>
+          </p:cNvSpPr>
+          <p:nvPr>
+            <p:ph type="sldImg" idx="2"/>
+          </p:nvPr>
+        </p:nvSpPr>
+        <p:spPr/>
+      </p:sp>
+      <p:sp>
+        <p:nvSpPr>
+          <p:cNvPr id="3" name="Notes Placeholder 2"/>
+          <p:cNvSpPr>
+            <a:spLocks noGrp="1"/>
+          </p:cNvSpPr>
+          <p:nvPr>
+            <p:ph type="body" idx="3" sz="quarter"/>
+          </p:nvPr>
+        </p:nvSpPr>
+        <p:spPr/>
+        <p:txBody>
+          <a:bodyPr/>
+          <a:lstStyle/>
+          <a:p>
+            <a:r>
+              <a:t>Siehe Trainerhandbuch (Sektion 3) für Moderationshinweise, Timing und erwartete Teilnehmerreaktionen.</a:t>
+            </a:r>
+          </a:p>
+        </p:txBody>
+      </p:sp>
+      <p:sp>
+        <p:nvSpPr>
+          <p:cNvPr id="4" name="Slide Number Placeholder 3"/>
+          <p:cNvSpPr>
+            <a:spLocks noGrp="1"/>
+          </p:cNvSpPr>
+          <p:nvPr>
+            <p:ph type="sldNum" idx="5" sz="quarter"/>
+          </p:nvPr>
+        </p:nvSpPr>
+        <p:spPr/>
+      </p:sp>
+    </p:spTree>
+  </p:cSld>
+  <p:clrMapOvr>
+    <a:masterClrMapping/>
+  </p:clrMapOvr>
+</p:notes>
 </file>
 
 <file path=ppt/slideLayouts/slideLayout1.xml><?xml version="1.0" encoding="utf-8"?>
@@ -3909,6 +4750,595 @@
                 </a:solidFill>
                 <a:latin typeface="Source Serif 4"/>
               </a:rPr>
+              <a:t>Praxisfall: Metallverarbeitung Wagner KG, Stuttgart</a:t>
+            </a:r>
+          </a:p>
+        </p:txBody>
+      </p:sp>
+      <p:sp>
+        <p:nvSpPr>
+          <p:cNvPr id="8" name="TextBox 7"/>
+          <p:cNvSpPr txBox="1"/>
+          <p:nvPr/>
+        </p:nvSpPr>
+        <p:spPr>
+          <a:xfrm>
+            <a:off x="685800" y="1417320"/>
+            <a:ext cx="10817352" cy="5029200"/>
+          </a:xfrm>
+          <a:prstGeom prst="rect">
+            <a:avLst/>
+          </a:prstGeom>
+          <a:noFill/>
+        </p:spPr>
+        <p:txBody>
+          <a:bodyPr wrap="square">
+            <a:spAutoFit/>
+          </a:bodyPr>
+          <a:lstStyle/>
+          <a:p>
+            <a:pPr>
+              <a:spcBef>
+                <a:spcPts val="1000"/>
+              </a:spcBef>
+              <a:spcAft>
+                <a:spcPts val="200"/>
+              </a:spcAft>
+            </a:pPr>
+            <a:r>
+              <a:rPr sz="800" b="1">
+                <a:solidFill>
+                  <a:srgbClr val="78808C"/>
+                </a:solidFill>
+                <a:latin typeface="JetBrains Mono"/>
+              </a:rPr>
+              <a:t>UNTERNEHMENSPROFIL</a:t>
+            </a:r>
+          </a:p>
+          <a:p>
+            <a:pPr>
+              <a:spcBef>
+                <a:spcPts val="1000"/>
+              </a:spcBef>
+              <a:spcAft>
+                <a:spcPts val="200"/>
+              </a:spcAft>
+            </a:pPr>
+            <a:r>
+              <a:rPr sz="800" b="1">
+                <a:solidFill>
+                  <a:srgbClr val="78808C"/>
+                </a:solidFill>
+                <a:latin typeface="JetBrains Mono"/>
+              </a:rPr>
+              <a:t>AUSGANGSSITUATION</a:t>
+            </a:r>
+          </a:p>
+          <a:p>
+            <a:pPr>
+              <a:spcBef>
+                <a:spcPts val="1000"/>
+              </a:spcBef>
+              <a:spcAft>
+                <a:spcPts val="200"/>
+              </a:spcAft>
+            </a:pPr>
+            <a:r>
+              <a:rPr sz="800" b="1">
+                <a:solidFill>
+                  <a:srgbClr val="78808C"/>
+                </a:solidFill>
+                <a:latin typeface="JetBrains Mono"/>
+              </a:rPr>
+              <a:t>DIAGNOSTISCHE AUFGABEN FÜR CLAUDIA</a:t>
+            </a:r>
+          </a:p>
+          <a:p>
+            <a:pPr>
+              <a:spcBef>
+                <a:spcPts val="400"/>
+              </a:spcBef>
+              <a:spcAft>
+                <a:spcPts val="200"/>
+              </a:spcAft>
+            </a:pPr>
+            <a:r>
+              <a:rPr sz="1300">
+                <a:solidFill>
+                  <a:srgbClr val="3D5466"/>
+                </a:solidFill>
+                <a:latin typeface="Arial"/>
+              </a:rPr>
+              <a:t>▸  Emotionaler Zustand: Ist Karl müde, oder ist das eine echte Nachfolgekrise?</a:t>
+            </a:r>
+          </a:p>
+          <a:p>
+            <a:pPr>
+              <a:spcBef>
+                <a:spcPts val="400"/>
+              </a:spcBef>
+              <a:spcAft>
+                <a:spcPts val="200"/>
+              </a:spcAft>
+            </a:pPr>
+            <a:r>
+              <a:rPr sz="1300">
+                <a:solidFill>
+                  <a:srgbClr val="3D5466"/>
+                </a:solidFill>
+                <a:latin typeface="Arial"/>
+              </a:rPr>
+              <a:t>▸  Nachfolgepotenziale: Sind die Kinder wirklich ausgeschlossen, oder ist die Kommunikation schlecht?</a:t>
+            </a:r>
+          </a:p>
+          <a:p>
+            <a:pPr>
+              <a:spcBef>
+                <a:spcPts val="400"/>
+              </a:spcBef>
+              <a:spcAft>
+                <a:spcPts val="200"/>
+              </a:spcAft>
+            </a:pPr>
+            <a:r>
+              <a:rPr sz="1300">
+                <a:solidFill>
+                  <a:srgbClr val="3D5466"/>
+                </a:solidFill>
+                <a:latin typeface="Arial"/>
+              </a:rPr>
+              <a:t>▸  Alternativen: Wären MBO (Meister Dieter als Käufer) oder strategischer Verkauf denkbar?</a:t>
+            </a:r>
+          </a:p>
+          <a:p>
+            <a:pPr>
+              <a:spcBef>
+                <a:spcPts val="400"/>
+              </a:spcBef>
+              <a:spcAft>
+                <a:spcPts val="200"/>
+              </a:spcAft>
+            </a:pPr>
+            <a:r>
+              <a:rPr sz="1300">
+                <a:solidFill>
+                  <a:srgbClr val="3D5466"/>
+                </a:solidFill>
+                <a:latin typeface="Arial"/>
+              </a:rPr>
+              <a:t>▸  Finanzielle Lage: Ist das Unternehmen stabil genug für eine Nachfolgeplanung?</a:t>
+            </a:r>
+          </a:p>
+          <a:p>
+            <a:pPr>
+              <a:spcBef>
+                <a:spcPts val="400"/>
+              </a:spcBef>
+              <a:spcAft>
+                <a:spcPts val="200"/>
+              </a:spcAft>
+            </a:pPr>
+            <a:r>
+              <a:rPr sz="1300">
+                <a:solidFill>
+                  <a:srgbClr val="3D5466"/>
+                </a:solidFill>
+                <a:latin typeface="Arial"/>
+              </a:rPr>
+              <a:t>▸  Zeithorizont: Wie dringend ist das Thema (gesundheitliche Gründe? Burnout?)?</a:t>
+            </a:r>
+          </a:p>
+          <a:p>
+            <a:pPr>
+              <a:spcBef>
+                <a:spcPts val="1000"/>
+              </a:spcBef>
+              <a:spcAft>
+                <a:spcPts val="200"/>
+              </a:spcAft>
+            </a:pPr>
+            <a:r>
+              <a:rPr sz="800" b="1">
+                <a:solidFill>
+                  <a:srgbClr val="78808C"/>
+                </a:solidFill>
+                <a:latin typeface="JetBrains Mono"/>
+              </a:rPr>
+              <a:t>BEISPIEL-GESPRÄCHSVERLAUF (SYSTEMISCHE TECHNIK)</a:t>
+            </a:r>
+          </a:p>
+          <a:p>
+            <a:pPr>
+              <a:spcBef>
+                <a:spcPts val="400"/>
+              </a:spcBef>
+              <a:spcAft>
+                <a:spcPts val="200"/>
+              </a:spcAft>
+            </a:pPr>
+            <a:r>
+              <a:rPr sz="1200">
+                <a:solidFill>
+                  <a:srgbClr val="3D5466"/>
+                </a:solidFill>
+                <a:latin typeface="Arial"/>
+              </a:rPr>
+              <a:t>Karl: [Nickt]</a:t>
+            </a:r>
+          </a:p>
+          <a:p>
+            <a:pPr>
+              <a:spcBef>
+                <a:spcPts val="400"/>
+              </a:spcBef>
+              <a:spcAft>
+                <a:spcPts val="200"/>
+              </a:spcAft>
+            </a:pPr>
+            <a:r>
+              <a:rPr sz="1200">
+                <a:solidFill>
+                  <a:srgbClr val="3D5466"/>
+                </a:solidFill>
+                <a:latin typeface="Arial"/>
+              </a:rPr>
+              <a:t>Claudia: „Wenn Sie sagen ‚ich weiß nicht, wie ich das übergeben soll' – was ist das Größte daran, das Ihnen Sorge macht?"</a:t>
+            </a:r>
+          </a:p>
+          <a:p>
+            <a:pPr>
+              <a:spcBef>
+                <a:spcPts val="400"/>
+              </a:spcBef>
+              <a:spcAft>
+                <a:spcPts val="200"/>
+              </a:spcAft>
+            </a:pPr>
+            <a:r>
+              <a:rPr sz="1200">
+                <a:solidFill>
+                  <a:srgbClr val="3D5466"/>
+                </a:solidFill>
+                <a:latin typeface="Arial"/>
+              </a:rPr>
+              <a:t>Karl: „Dass das Unternehmen in schlechte Hände kommt. Meine Mitarbeiter sind wie meine Familie. Ich kann mir nicht vorstellen, dass jemand Fremdes einfach reinkommt und alles ändert."</a:t>
+            </a:r>
+          </a:p>
+        </p:txBody>
+      </p:sp>
+      <p:sp>
+        <p:nvSpPr>
+          <p:cNvPr id="9" name="Rectangle 8"/>
+          <p:cNvSpPr/>
+          <p:nvPr/>
+        </p:nvSpPr>
+        <p:spPr>
+          <a:xfrm>
+            <a:off x="0" y="6510528"/>
+            <a:ext cx="12188952" cy="347472"/>
+          </a:xfrm>
+          <a:prstGeom prst="rect">
+            <a:avLst/>
+          </a:prstGeom>
+          <a:solidFill>
+            <a:srgbClr val="0A1937"/>
+          </a:solidFill>
+          <a:ln>
+            <a:noFill/>
+          </a:ln>
+        </p:spPr>
+        <p:style>
+          <a:lnRef idx="1">
+            <a:schemeClr val="accent1"/>
+          </a:lnRef>
+          <a:fillRef idx="3">
+            <a:schemeClr val="accent1"/>
+          </a:fillRef>
+          <a:effectRef idx="2">
+            <a:schemeClr val="accent1"/>
+          </a:effectRef>
+          <a:fontRef idx="minor">
+            <a:schemeClr val="lt1"/>
+          </a:fontRef>
+        </p:style>
+        <p:txBody>
+          <a:bodyPr rtlCol="0" anchor="ctr"/>
+          <a:lstStyle/>
+          <a:p>
+            <a:pPr algn="ctr"/>
+          </a:p>
+        </p:txBody>
+      </p:sp>
+      <p:sp>
+        <p:nvSpPr>
+          <p:cNvPr id="10" name="TextBox 9"/>
+          <p:cNvSpPr txBox="1"/>
+          <p:nvPr/>
+        </p:nvSpPr>
+        <p:spPr>
+          <a:xfrm>
+            <a:off x="685800" y="6583680"/>
+            <a:ext cx="6490411" cy="256032"/>
+          </a:xfrm>
+          <a:prstGeom prst="rect">
+            <a:avLst/>
+          </a:prstGeom>
+          <a:noFill/>
+        </p:spPr>
+        <p:txBody>
+          <a:bodyPr wrap="none">
+            <a:spAutoFit/>
+          </a:bodyPr>
+          <a:lstStyle/>
+          <a:p>
+            <a:pPr algn="l"/>
+            <a:r>
+              <a:rPr sz="700">
+                <a:solidFill>
+                  <a:srgbClr val="A0B4D2"/>
+                </a:solidFill>
+                <a:latin typeface="JetBrains Mono"/>
+              </a:rPr>
+              <a:t>Benedikt Zoller Coaching  ·  FKB Campus  ·  M12</a:t>
+            </a:r>
+          </a:p>
+        </p:txBody>
+      </p:sp>
+    </p:spTree>
+  </p:cSld>
+  <p:clrMapOvr>
+    <a:masterClrMapping/>
+  </p:clrMapOvr>
+</p:sld>
+</file>
+
+<file path=ppt/slides/slide11.xml><?xml version="1.0" encoding="utf-8"?>
+<p:sld xmlns:a="http://schemas.openxmlformats.org/drawingml/2006/main" xmlns:p="http://schemas.openxmlformats.org/presentationml/2006/main" xmlns:r="http://schemas.openxmlformats.org/officeDocument/2006/relationships">
+  <p:cSld>
+    <p:spTree>
+      <p:nvGrpSpPr>
+        <p:cNvPr id="1" name=""/>
+        <p:cNvGrpSpPr/>
+        <p:nvPr/>
+      </p:nvGrpSpPr>
+      <p:grpSpPr/>
+      <p:sp>
+        <p:nvSpPr>
+          <p:cNvPr id="2" name="Rectangle 1"/>
+          <p:cNvSpPr/>
+          <p:nvPr/>
+        </p:nvSpPr>
+        <p:spPr>
+          <a:xfrm>
+            <a:off x="0" y="0"/>
+            <a:ext cx="12188952" cy="6858000"/>
+          </a:xfrm>
+          <a:prstGeom prst="rect">
+            <a:avLst/>
+          </a:prstGeom>
+          <a:solidFill>
+            <a:srgbClr val="EDEDF3"/>
+          </a:solidFill>
+          <a:ln>
+            <a:noFill/>
+          </a:ln>
+        </p:spPr>
+        <p:style>
+          <a:lnRef idx="1">
+            <a:schemeClr val="accent1"/>
+          </a:lnRef>
+          <a:fillRef idx="3">
+            <a:schemeClr val="accent1"/>
+          </a:fillRef>
+          <a:effectRef idx="2">
+            <a:schemeClr val="accent1"/>
+          </a:effectRef>
+          <a:fontRef idx="minor">
+            <a:schemeClr val="lt1"/>
+          </a:fontRef>
+        </p:style>
+        <p:txBody>
+          <a:bodyPr rtlCol="0" anchor="ctr"/>
+          <a:lstStyle/>
+          <a:p>
+            <a:pPr algn="ctr"/>
+          </a:p>
+        </p:txBody>
+      </p:sp>
+      <p:sp>
+        <p:nvSpPr>
+          <p:cNvPr id="3" name="Rectangle 2"/>
+          <p:cNvSpPr/>
+          <p:nvPr/>
+        </p:nvSpPr>
+        <p:spPr>
+          <a:xfrm>
+            <a:off x="0" y="0"/>
+            <a:ext cx="12188952" cy="50292"/>
+          </a:xfrm>
+          <a:prstGeom prst="rect">
+            <a:avLst/>
+          </a:prstGeom>
+          <a:solidFill>
+            <a:srgbClr val="1F2C56"/>
+          </a:solidFill>
+          <a:ln>
+            <a:noFill/>
+          </a:ln>
+        </p:spPr>
+        <p:style>
+          <a:lnRef idx="1">
+            <a:schemeClr val="accent1"/>
+          </a:lnRef>
+          <a:fillRef idx="3">
+            <a:schemeClr val="accent1"/>
+          </a:fillRef>
+          <a:effectRef idx="2">
+            <a:schemeClr val="accent1"/>
+          </a:effectRef>
+          <a:fontRef idx="minor">
+            <a:schemeClr val="lt1"/>
+          </a:fontRef>
+        </p:style>
+        <p:txBody>
+          <a:bodyPr rtlCol="0" anchor="ctr"/>
+          <a:lstStyle/>
+          <a:p>
+            <a:pPr algn="ctr"/>
+          </a:p>
+        </p:txBody>
+      </p:sp>
+      <p:sp>
+        <p:nvSpPr>
+          <p:cNvPr id="4" name="TextBox 3"/>
+          <p:cNvSpPr txBox="1"/>
+          <p:nvPr/>
+        </p:nvSpPr>
+        <p:spPr>
+          <a:xfrm>
+            <a:off x="685800" y="109728"/>
+            <a:ext cx="10817352" cy="228600"/>
+          </a:xfrm>
+          <a:prstGeom prst="rect">
+            <a:avLst/>
+          </a:prstGeom>
+          <a:noFill/>
+        </p:spPr>
+        <p:txBody>
+          <a:bodyPr wrap="none">
+            <a:spAutoFit/>
+          </a:bodyPr>
+          <a:lstStyle/>
+          <a:p>
+            <a:pPr algn="l"/>
+            <a:r>
+              <a:rPr sz="750">
+                <a:solidFill>
+                  <a:srgbClr val="78808C"/>
+                </a:solidFill>
+                <a:latin typeface="JetBrains Mono"/>
+              </a:rPr>
+              <a:t>M12  ·  INHALT</a:t>
+            </a:r>
+          </a:p>
+        </p:txBody>
+      </p:sp>
+      <p:sp>
+        <p:nvSpPr>
+          <p:cNvPr id="5" name="Rectangle 4"/>
+          <p:cNvSpPr/>
+          <p:nvPr/>
+        </p:nvSpPr>
+        <p:spPr>
+          <a:xfrm>
+            <a:off x="0" y="1234440"/>
+            <a:ext cx="12188952" cy="12700"/>
+          </a:xfrm>
+          <a:prstGeom prst="rect">
+            <a:avLst/>
+          </a:prstGeom>
+          <a:solidFill>
+            <a:srgbClr val="D8DFE4"/>
+          </a:solidFill>
+          <a:ln>
+            <a:noFill/>
+          </a:ln>
+        </p:spPr>
+        <p:style>
+          <a:lnRef idx="1">
+            <a:schemeClr val="accent1"/>
+          </a:lnRef>
+          <a:fillRef idx="3">
+            <a:schemeClr val="accent1"/>
+          </a:fillRef>
+          <a:effectRef idx="2">
+            <a:schemeClr val="accent1"/>
+          </a:effectRef>
+          <a:fontRef idx="minor">
+            <a:schemeClr val="lt1"/>
+          </a:fontRef>
+        </p:style>
+        <p:txBody>
+          <a:bodyPr rtlCol="0" anchor="ctr"/>
+          <a:lstStyle/>
+          <a:p>
+            <a:pPr algn="ctr"/>
+          </a:p>
+        </p:txBody>
+      </p:sp>
+      <p:sp>
+        <p:nvSpPr>
+          <p:cNvPr id="6" name="Rectangle 5"/>
+          <p:cNvSpPr/>
+          <p:nvPr/>
+        </p:nvSpPr>
+        <p:spPr>
+          <a:xfrm>
+            <a:off x="685800" y="502920"/>
+            <a:ext cx="36576" cy="658368"/>
+          </a:xfrm>
+          <a:prstGeom prst="rect">
+            <a:avLst/>
+          </a:prstGeom>
+          <a:solidFill>
+            <a:srgbClr val="D9C089"/>
+          </a:solidFill>
+          <a:ln>
+            <a:noFill/>
+          </a:ln>
+        </p:spPr>
+        <p:style>
+          <a:lnRef idx="1">
+            <a:schemeClr val="accent1"/>
+          </a:lnRef>
+          <a:fillRef idx="3">
+            <a:schemeClr val="accent1"/>
+          </a:fillRef>
+          <a:effectRef idx="2">
+            <a:schemeClr val="accent1"/>
+          </a:effectRef>
+          <a:fontRef idx="minor">
+            <a:schemeClr val="lt1"/>
+          </a:fontRef>
+        </p:style>
+        <p:txBody>
+          <a:bodyPr rtlCol="0" anchor="ctr"/>
+          <a:lstStyle/>
+          <a:p>
+            <a:pPr algn="ctr"/>
+          </a:p>
+        </p:txBody>
+      </p:sp>
+      <p:sp>
+        <p:nvSpPr>
+          <p:cNvPr id="7" name="TextBox 6"/>
+          <p:cNvSpPr txBox="1"/>
+          <p:nvPr/>
+        </p:nvSpPr>
+        <p:spPr>
+          <a:xfrm>
+            <a:off x="813816" y="502920"/>
+            <a:ext cx="10634472" cy="685800"/>
+          </a:xfrm>
+          <a:prstGeom prst="rect">
+            <a:avLst/>
+          </a:prstGeom>
+          <a:noFill/>
+        </p:spPr>
+        <p:txBody>
+          <a:bodyPr wrap="square">
+            <a:spAutoFit/>
+          </a:bodyPr>
+          <a:lstStyle/>
+          <a:p>
+            <a:pPr algn="l"/>
+            <a:r>
+              <a:rPr sz="2400" b="1" i="0">
+                <a:solidFill>
+                  <a:srgbClr val="1F2C56"/>
+                </a:solidFill>
+                <a:latin typeface="Source Serif 4"/>
+              </a:rPr>
               <a:t>Arbeitsblatt: Nachfolge-Erstgespräch strukturieren</a:t>
             </a:r>
           </a:p>
@@ -4790,7 +6220,7 @@
                 </a:solidFill>
                 <a:latin typeface="JetBrains Mono"/>
               </a:rPr>
-              <a:t>M12  ·  INHALT</a:t>
+              <a:t>AGENDA  ·  M12</a:t>
             </a:r>
           </a:p>
         </p:txBody>
@@ -4840,44 +6270,36 @@
       </p:sp>
       <p:sp>
         <p:nvSpPr>
-          <p:cNvPr id="6" name="Rectangle 5"/>
-          <p:cNvSpPr/>
+          <p:cNvPr id="6" name="TextBox 5"/>
+          <p:cNvSpPr txBox="1"/>
           <p:nvPr/>
         </p:nvSpPr>
         <p:spPr>
           <a:xfrm>
             <a:off x="685800" y="502920"/>
-            <a:ext cx="36576" cy="658368"/>
-          </a:xfrm>
-          <a:prstGeom prst="rect">
-            <a:avLst/>
-          </a:prstGeom>
-          <a:solidFill>
-            <a:srgbClr val="D9C089"/>
-          </a:solidFill>
-          <a:ln>
-            <a:noFill/>
-          </a:ln>
-        </p:spPr>
-        <p:style>
-          <a:lnRef idx="1">
-            <a:schemeClr val="accent1"/>
-          </a:lnRef>
-          <a:fillRef idx="3">
-            <a:schemeClr val="accent1"/>
-          </a:fillRef>
-          <a:effectRef idx="2">
-            <a:schemeClr val="accent1"/>
-          </a:effectRef>
-          <a:fontRef idx="minor">
-            <a:schemeClr val="lt1"/>
-          </a:fontRef>
-        </p:style>
-        <p:txBody>
-          <a:bodyPr rtlCol="0" anchor="ctr"/>
-          <a:lstStyle/>
-          <a:p>
-            <a:pPr algn="ctr"/>
+            <a:ext cx="10817352" cy="658368"/>
+          </a:xfrm>
+          <a:prstGeom prst="rect">
+            <a:avLst/>
+          </a:prstGeom>
+          <a:noFill/>
+        </p:spPr>
+        <p:txBody>
+          <a:bodyPr wrap="square">
+            <a:spAutoFit/>
+          </a:bodyPr>
+          <a:lstStyle/>
+          <a:p>
+            <a:pPr algn="l"/>
+            <a:r>
+              <a:rPr sz="2600" b="1" i="0">
+                <a:solidFill>
+                  <a:srgbClr val="1F2C56"/>
+                </a:solidFill>
+                <a:latin typeface="Source Serif 4"/>
+              </a:rPr>
+              <a:t>Agenda</a:t>
+            </a:r>
           </a:p>
         </p:txBody>
       </p:sp>
@@ -4889,8 +6311,8 @@
         </p:nvSpPr>
         <p:spPr>
           <a:xfrm>
-            <a:off x="813816" y="502920"/>
-            <a:ext cx="10634472" cy="685800"/>
+            <a:off x="685800" y="1463040"/>
+            <a:ext cx="10817352" cy="4937760"/>
           </a:xfrm>
           <a:prstGeom prst="rect">
             <a:avLst/>
@@ -4903,254 +6325,124 @@
           </a:bodyPr>
           <a:lstStyle/>
           <a:p>
-            <a:pPr algn="l"/>
-            <a:r>
-              <a:rPr sz="2400" b="1" i="0">
-                <a:solidFill>
-                  <a:srgbClr val="1F2C56"/>
-                </a:solidFill>
-                <a:latin typeface="Source Serif 4"/>
-              </a:rPr>
-              <a:t>Theorie-Input: Das CEO-Gespräch – Mindset und Vorbereitung</a:t>
-            </a:r>
-          </a:p>
-        </p:txBody>
-      </p:sp>
-      <p:sp>
-        <p:nvSpPr>
-          <p:cNvPr id="8" name="TextBox 7"/>
-          <p:cNvSpPr txBox="1"/>
-          <p:nvPr/>
-        </p:nvSpPr>
-        <p:spPr>
-          <a:xfrm>
-            <a:off x="685800" y="1417320"/>
-            <a:ext cx="10817352" cy="5029200"/>
-          </a:xfrm>
-          <a:prstGeom prst="rect">
-            <a:avLst/>
-          </a:prstGeom>
-          <a:noFill/>
-        </p:spPr>
-        <p:txBody>
-          <a:bodyPr wrap="square">
-            <a:spAutoFit/>
-          </a:bodyPr>
-          <a:lstStyle/>
-          <a:p>
             <a:pPr>
               <a:spcBef>
-                <a:spcPts val="1000"/>
+                <a:spcPts val="800"/>
               </a:spcBef>
               <a:spcAft>
                 <a:spcPts val="200"/>
               </a:spcAft>
             </a:pPr>
             <a:r>
-              <a:rPr sz="800" b="1">
-                <a:solidFill>
-                  <a:srgbClr val="78808C"/>
-                </a:solidFill>
-                <a:latin typeface="JetBrains Mono"/>
-              </a:rPr>
-              <a:t>DEN ERSTEN SCHRITT GEHEN: WIE INITIIERT MAN DAS CEO-GESPRÄCH BEI EINEM BESTANDSKUNDEN?</a:t>
+              <a:rPr sz="1500">
+                <a:solidFill>
+                  <a:srgbClr val="3D5466"/>
+                </a:solidFill>
+                <a:latin typeface="Arial"/>
+              </a:rPr>
+              <a:t>01   Theorie-Input: Das CEO-Gespräch – Mindset und Vorbereitung</a:t>
             </a:r>
           </a:p>
           <a:p>
             <a:pPr>
               <a:spcBef>
-                <a:spcPts val="400"/>
+                <a:spcPts val="800"/>
               </a:spcBef>
               <a:spcAft>
                 <a:spcPts val="200"/>
               </a:spcAft>
             </a:pPr>
             <a:r>
-              <a:rPr sz="1200">
+              <a:rPr sz="1500">
                 <a:solidFill>
                   <a:srgbClr val="3D5466"/>
                 </a:solidFill>
                 <a:latin typeface="Arial"/>
               </a:rPr>
-              <a:t>Drei bewährte Einstiegs-Anlässe:</a:t>
+              <a:t>02   Theorie-Input: Fragetechniken auf Strategieebene</a:t>
             </a:r>
           </a:p>
           <a:p>
             <a:pPr>
               <a:spcBef>
-                <a:spcPts val="1000"/>
+                <a:spcPts val="800"/>
               </a:spcBef>
               <a:spcAft>
                 <a:spcPts val="200"/>
               </a:spcAft>
             </a:pPr>
             <a:r>
-              <a:rPr sz="800" b="1">
-                <a:solidFill>
-                  <a:srgbClr val="78808C"/>
-                </a:solidFill>
-                <a:latin typeface="JetBrains Mono"/>
-              </a:rPr>
-              <a:t>PSYCHOLOGISCHE SICHERHEIT ALS GESPRÄCHSGRUNDLAGE</a:t>
+              <a:rPr sz="1500">
+                <a:solidFill>
+                  <a:srgbClr val="3D5466"/>
+                </a:solidFill>
+                <a:latin typeface="Arial"/>
+              </a:rPr>
+              <a:t>03   Theorie-Input: Nachfolge-Typen und Prozess im Überblick</a:t>
             </a:r>
           </a:p>
           <a:p>
             <a:pPr>
               <a:spcBef>
-                <a:spcPts val="400"/>
+                <a:spcPts val="800"/>
               </a:spcBef>
               <a:spcAft>
                 <a:spcPts val="200"/>
               </a:spcAft>
             </a:pPr>
             <a:r>
-              <a:rPr sz="1300">
+              <a:rPr sz="1500">
                 <a:solidFill>
                   <a:srgbClr val="3D5466"/>
                 </a:solidFill>
                 <a:latin typeface="Arial"/>
               </a:rPr>
-              <a:t>▸  Gleichwertigkeit: „Ich bin nicht hier, um Sie zu prüfen oder zu belehren, sondern um gemeinsam zu schauen, was für Ihre Zukunft sinnvoll ist."</a:t>
+              <a:t>04   Theorie-Input: Die emotionale Dimension der Nachfolge</a:t>
             </a:r>
           </a:p>
           <a:p>
             <a:pPr>
               <a:spcBef>
-                <a:spcPts val="400"/>
+                <a:spcPts val="800"/>
               </a:spcBef>
               <a:spcAft>
                 <a:spcPts val="200"/>
               </a:spcAft>
             </a:pPr>
             <a:r>
-              <a:rPr sz="1300">
+              <a:rPr sz="1500">
                 <a:solidFill>
                   <a:srgbClr val="3D5466"/>
                 </a:solidFill>
                 <a:latin typeface="Arial"/>
               </a:rPr>
-              <a:t>▸  Vertraulichkeit: „Was Sie mir anvertrauen, bleibt zwischen uns."</a:t>
+              <a:t>05   Praxisfall: Metallverarbeitung Wagner KG, Stuttgart</a:t>
             </a:r>
           </a:p>
           <a:p>
             <a:pPr>
               <a:spcBef>
-                <a:spcPts val="400"/>
+                <a:spcPts val="800"/>
               </a:spcBef>
               <a:spcAft>
                 <a:spcPts val="200"/>
               </a:spcAft>
             </a:pPr>
             <a:r>
-              <a:rPr sz="1300">
+              <a:rPr sz="1500">
                 <a:solidFill>
                   <a:srgbClr val="3D5466"/>
                 </a:solidFill>
                 <a:latin typeface="Arial"/>
               </a:rPr>
-              <a:t>▸  Kompetenz: Subtile Signale, dass der FK das Nachfolge-Thema ernst nimmt und Erfahrung hat.</a:t>
-            </a:r>
-          </a:p>
-          <a:p>
-            <a:pPr>
-              <a:spcBef>
-                <a:spcPts val="1000"/>
-              </a:spcBef>
-              <a:spcAft>
-                <a:spcPts val="200"/>
-              </a:spcAft>
-            </a:pPr>
-            <a:r>
-              <a:rPr sz="800" b="1">
-                <a:solidFill>
-                  <a:srgbClr val="78808C"/>
-                </a:solidFill>
-                <a:latin typeface="JetBrains Mono"/>
-              </a:rPr>
-              <a:t>DAS BOARD-ROOM-MINDSET</a:t>
-            </a:r>
-          </a:p>
-          <a:p>
-            <a:pPr>
-              <a:spcBef>
-                <a:spcPts val="400"/>
-              </a:spcBef>
-              <a:spcAft>
-                <a:spcPts val="200"/>
-              </a:spcAft>
-            </a:pPr>
-            <a:r>
-              <a:rPr sz="1300">
-                <a:solidFill>
-                  <a:srgbClr val="3D5466"/>
-                </a:solidFill>
-                <a:latin typeface="Arial"/>
-              </a:rPr>
-              <a:t>▸  Nicht unterordnend sprechen („Ich möchte ja nicht in Ihre Geschäfte reingrätschen, aber…") → stattdessen direkt: „Das habe ich in ähnlichen Fällen anders gesehen. Darf ich dazu eine Frage stellen?"</a:t>
-            </a:r>
-          </a:p>
-          <a:p>
-            <a:pPr>
-              <a:spcBef>
-                <a:spcPts val="400"/>
-              </a:spcBef>
-              <a:spcAft>
-                <a:spcPts val="200"/>
-              </a:spcAft>
-            </a:pPr>
-            <a:r>
-              <a:rPr sz="1300">
-                <a:solidFill>
-                  <a:srgbClr val="3D5466"/>
-                </a:solidFill>
-                <a:latin typeface="Arial"/>
-              </a:rPr>
-              <a:t>▸  Eigene Expertise einbringen ohne Demut: „Nachfolgen begleite ich seit Jahren. Wir sehen dabei Muster, die nicht sofort auffallen."</a:t>
-            </a:r>
-          </a:p>
-          <a:p>
-            <a:pPr>
-              <a:spcBef>
-                <a:spcPts val="400"/>
-              </a:spcBef>
-              <a:spcAft>
-                <a:spcPts val="200"/>
-              </a:spcAft>
-            </a:pPr>
-            <a:r>
-              <a:rPr sz="1300">
-                <a:solidFill>
-                  <a:srgbClr val="3D5466"/>
-                </a:solidFill>
-                <a:latin typeface="Arial"/>
-              </a:rPr>
-              <a:t>▸  Produktiven Widerspruch anbringen, wenn nötig: „Das ergibt für mich weniger Sinn, weil … Was denken Sie dazu?"</a:t>
-            </a:r>
-          </a:p>
-          <a:p>
-            <a:pPr>
-              <a:spcBef>
-                <a:spcPts val="1000"/>
-              </a:spcBef>
-              <a:spcAft>
-                <a:spcPts val="200"/>
-              </a:spcAft>
-            </a:pPr>
-            <a:r>
-              <a:rPr sz="800" b="1">
-                <a:solidFill>
-                  <a:srgbClr val="78808C"/>
-                </a:solidFill>
-                <a:latin typeface="JetBrains Mono"/>
-              </a:rPr>
-              <a:t>VORBEREITUNGS-CHECKLISTE FÜR DEN CEO-DIALOG</a:t>
-            </a:r>
-          </a:p>
-        </p:txBody>
-      </p:sp>
-      <p:sp>
-        <p:nvSpPr>
-          <p:cNvPr id="9" name="Rectangle 8"/>
+              <a:t>06   Arbeitsblatt: Nachfolge-Erstgespräch strukturieren</a:t>
+            </a:r>
+          </a:p>
+        </p:txBody>
+      </p:sp>
+      <p:sp>
+        <p:nvSpPr>
+          <p:cNvPr id="8" name="Rectangle 7"/>
           <p:cNvSpPr/>
           <p:nvPr/>
         </p:nvSpPr>
@@ -5193,7 +6485,7 @@
       </p:sp>
       <p:sp>
         <p:nvSpPr>
-          <p:cNvPr id="10" name="TextBox 9"/>
+          <p:cNvPr id="9" name="TextBox 8"/>
           <p:cNvSpPr txBox="1"/>
           <p:nvPr/>
         </p:nvSpPr>
@@ -5481,7 +6773,7 @@
                 </a:solidFill>
                 <a:latin typeface="Source Serif 4"/>
               </a:rPr>
-              <a:t>Theorie-Input: Fragetechniken auf Strategieebene</a:t>
+              <a:t>Theorie-Input: Das CEO-Gespräch – Mindset und Vorbereitung</a:t>
             </a:r>
           </a:p>
         </p:txBody>
@@ -5523,7 +6815,7 @@
                 </a:solidFill>
                 <a:latin typeface="JetBrains Mono"/>
               </a:rPr>
-              <a:t>SYSTEMISCHE FRAGEN (JENSEITS VON SPIN)</a:t>
+              <a:t>DEN ERSTEN SCHRITT GEHEN: WIE INITIIERT MAN DAS CEO-GESPRÄCH BEI EINEM BESTANDSKUNDEN?</a:t>
             </a:r>
           </a:p>
           <a:p>
@@ -5542,7 +6834,26 @@
                 </a:solidFill>
                 <a:latin typeface="Arial"/>
               </a:rPr>
-              <a:t>Systemische Fragen machen die Vernetzung von Elementen sichtbar:</a:t>
+              <a:t>Drei bewährte Einstiegs-Anlässe:</a:t>
+            </a:r>
+          </a:p>
+          <a:p>
+            <a:pPr>
+              <a:spcBef>
+                <a:spcPts val="1000"/>
+              </a:spcBef>
+              <a:spcAft>
+                <a:spcPts val="200"/>
+              </a:spcAft>
+            </a:pPr>
+            <a:r>
+              <a:rPr sz="800" b="1">
+                <a:solidFill>
+                  <a:srgbClr val="78808C"/>
+                </a:solidFill>
+                <a:latin typeface="JetBrains Mono"/>
+              </a:rPr>
+              <a:t>PSYCHOLOGISCHE SICHERHEIT ALS GESPRÄCHSGRUNDLAGE</a:t>
             </a:r>
           </a:p>
           <a:p>
@@ -5561,7 +6872,7 @@
                 </a:solidFill>
                 <a:latin typeface="Arial"/>
               </a:rPr>
-              <a:t>▸  „Wie hängt Ihre Nachfolgeplanung mit der Situation Ihrer Kinder zusammen?"</a:t>
+              <a:t>▸  Gleichwertigkeit: „Ich bin nicht hier, um Sie zu prüfen oder zu belehren, sondern um gemeinsam zu schauen, was für Ihre Zukunft sinnvoll ist."</a:t>
             </a:r>
           </a:p>
           <a:p>
@@ -5580,7 +6891,7 @@
                 </a:solidFill>
                 <a:latin typeface="Arial"/>
               </a:rPr>
-              <a:t>▸  „Welche Rolle spielt Ihr Unternehmen in Ihrem Selbstverständnis – und was würde sich ändern, wenn Sie es übergeben?"</a:t>
+              <a:t>▸  Vertraulichkeit: „Was Sie mir anvertrauen, bleibt zwischen uns."</a:t>
             </a:r>
           </a:p>
           <a:p>
@@ -5599,7 +6910,26 @@
                 </a:solidFill>
                 <a:latin typeface="Arial"/>
               </a:rPr>
-              <a:t>▸  „Welche Stakeholder (Mitarbeiter, Familie, Kunden, Bank) haben ein Interesse an einer Nachfolge – und wo könnte es Konflikte geben?"</a:t>
+              <a:t>▸  Kompetenz: Subtile Signale, dass der FK das Nachfolge-Thema ernst nimmt und Erfahrung hat.</a:t>
+            </a:r>
+          </a:p>
+          <a:p>
+            <a:pPr>
+              <a:spcBef>
+                <a:spcPts val="1000"/>
+              </a:spcBef>
+              <a:spcAft>
+                <a:spcPts val="200"/>
+              </a:spcAft>
+            </a:pPr>
+            <a:r>
+              <a:rPr sz="800" b="1">
+                <a:solidFill>
+                  <a:srgbClr val="78808C"/>
+                </a:solidFill>
+                <a:latin typeface="JetBrains Mono"/>
+              </a:rPr>
+              <a:t>DAS BOARD-ROOM-MINDSET</a:t>
             </a:r>
           </a:p>
           <a:p>
@@ -5612,13 +6942,13 @@
               </a:spcAft>
             </a:pPr>
             <a:r>
-              <a:rPr sz="1200">
+              <a:rPr sz="1300">
                 <a:solidFill>
                   <a:srgbClr val="3D5466"/>
                 </a:solidFill>
                 <a:latin typeface="Arial"/>
               </a:rPr>
-              <a:t>Zirkuläre Fragen (Penn, 1982 ) erforschen, wie andere den Unternehmer und sein Dilemma wahrnehmen:</a:t>
+              <a:t>▸  Nicht unterordnend sprechen („Ich möchte ja nicht in Ihre Geschäfte reingrätschen, aber…") → stattdessen direkt: „Das habe ich in ähnlichen Fällen anders gesehen. Darf ich dazu eine Frage stellen?"</a:t>
             </a:r>
           </a:p>
           <a:p>
@@ -5637,7 +6967,7 @@
                 </a:solidFill>
                 <a:latin typeface="Arial"/>
               </a:rPr>
-              <a:t>▸  „Wie würde Ihr ältester Sohn die aktuelle Situation beschreiben – denken Sie?"</a:t>
+              <a:t>▸  Eigene Expertise einbringen ohne Demut: „Nachfolgen begleite ich seit Jahren. Wir sehen dabei Muster, die nicht sofort auffallen."</a:t>
             </a:r>
           </a:p>
           <a:p>
@@ -5656,45 +6986,7 @@
                 </a:solidFill>
                 <a:latin typeface="Arial"/>
               </a:rPr>
-              <a:t>▸  „Was würde Ihr engster Mitarbeiter sagen, wenn ich ihn fragen würde, ob er eine Übergabe an Ihren Sohn für sinnvoll hält?"</a:t>
-            </a:r>
-          </a:p>
-          <a:p>
-            <a:pPr>
-              <a:spcBef>
-                <a:spcPts val="400"/>
-              </a:spcBef>
-              <a:spcAft>
-                <a:spcPts val="200"/>
-              </a:spcAft>
-            </a:pPr>
-            <a:r>
-              <a:rPr sz="1300">
-                <a:solidFill>
-                  <a:srgbClr val="3D5466"/>
-                </a:solidFill>
-                <a:latin typeface="Arial"/>
-              </a:rPr>
-              <a:t>▸  „Wenn wir in fünf Jahren hier säßen und Sie hätten die Nachfolge geregelt: Wie hätte Ihr Ehepartner den Prozess erlebt?"</a:t>
-            </a:r>
-          </a:p>
-          <a:p>
-            <a:pPr>
-              <a:spcBef>
-                <a:spcPts val="400"/>
-              </a:spcBef>
-              <a:spcAft>
-                <a:spcPts val="200"/>
-              </a:spcAft>
-            </a:pPr>
-            <a:r>
-              <a:rPr sz="1200">
-                <a:solidFill>
-                  <a:srgbClr val="3D5466"/>
-                </a:solidFill>
-                <a:latin typeface="Arial"/>
-              </a:rPr>
-              <a:t>Zirkuläre Fragen decken implizite Ängste und Blockaden auf, ohne direkt zu fragen: „Haben Sie Angst vor Kontrollverlust?"</a:t>
+              <a:t>▸  Produktiven Widerspruch anbringen, wenn nötig: „Das ergibt für mich weniger Sinn, weil … Was denken Sie dazu?"</a:t>
             </a:r>
           </a:p>
           <a:p>
@@ -5713,26 +7005,7 @@
                 </a:solidFill>
                 <a:latin typeface="JetBrains Mono"/>
               </a:rPr>
-              <a:t>LÖSUNGSORIENTIERTE ZUKUNFTSFRAGEN (DE SHAZER, 1985)</a:t>
-            </a:r>
-          </a:p>
-          <a:p>
-            <a:pPr>
-              <a:spcBef>
-                <a:spcPts val="400"/>
-              </a:spcBef>
-              <a:spcAft>
-                <a:spcPts val="200"/>
-              </a:spcAft>
-            </a:pPr>
-            <a:r>
-              <a:rPr sz="1200">
-                <a:solidFill>
-                  <a:srgbClr val="3D5466"/>
-                </a:solidFill>
-                <a:latin typeface="Arial"/>
-              </a:rPr>
-              <a:t>Die lösungsorientierte Gesprächsführung hilft, den Unternehmer aus Lähmung oder Verdrängung herauszuholen:</a:t>
+              <a:t>VORBEREITUNGS-CHECKLISTE FÜR DEN CEO-DIALOG</a:t>
             </a:r>
           </a:p>
         </p:txBody>
@@ -6070,7 +7343,7 @@
                 </a:solidFill>
                 <a:latin typeface="Source Serif 4"/>
               </a:rPr>
-              <a:t>Theorie-Input: Nachfolge-Typen und Prozess im Überblick</a:t>
+              <a:t>Theorie-Input: Fragetechniken auf Strategieebene</a:t>
             </a:r>
           </a:p>
         </p:txBody>
@@ -6112,7 +7385,178 @@
                 </a:solidFill>
                 <a:latin typeface="JetBrains Mono"/>
               </a:rPr>
-              <a:t>DIE VIER HAUPTNACHFOLGEARTEN</a:t>
+              <a:t>SYSTEMISCHE FRAGEN (JENSEITS VON SPIN)</a:t>
+            </a:r>
+          </a:p>
+          <a:p>
+            <a:pPr>
+              <a:spcBef>
+                <a:spcPts val="400"/>
+              </a:spcBef>
+              <a:spcAft>
+                <a:spcPts val="200"/>
+              </a:spcAft>
+            </a:pPr>
+            <a:r>
+              <a:rPr sz="1200">
+                <a:solidFill>
+                  <a:srgbClr val="3D5466"/>
+                </a:solidFill>
+                <a:latin typeface="Arial"/>
+              </a:rPr>
+              <a:t>Systemische Fragen machen die Vernetzung von Elementen sichtbar:</a:t>
+            </a:r>
+          </a:p>
+          <a:p>
+            <a:pPr>
+              <a:spcBef>
+                <a:spcPts val="400"/>
+              </a:spcBef>
+              <a:spcAft>
+                <a:spcPts val="200"/>
+              </a:spcAft>
+            </a:pPr>
+            <a:r>
+              <a:rPr sz="1300">
+                <a:solidFill>
+                  <a:srgbClr val="3D5466"/>
+                </a:solidFill>
+                <a:latin typeface="Arial"/>
+              </a:rPr>
+              <a:t>▸  „Wie hängt Ihre Nachfolgeplanung mit der Situation Ihrer Kinder zusammen?"</a:t>
+            </a:r>
+          </a:p>
+          <a:p>
+            <a:pPr>
+              <a:spcBef>
+                <a:spcPts val="400"/>
+              </a:spcBef>
+              <a:spcAft>
+                <a:spcPts val="200"/>
+              </a:spcAft>
+            </a:pPr>
+            <a:r>
+              <a:rPr sz="1300">
+                <a:solidFill>
+                  <a:srgbClr val="3D5466"/>
+                </a:solidFill>
+                <a:latin typeface="Arial"/>
+              </a:rPr>
+              <a:t>▸  „Welche Rolle spielt Ihr Unternehmen in Ihrem Selbstverständnis – und was würde sich ändern, wenn Sie es übergeben?"</a:t>
+            </a:r>
+          </a:p>
+          <a:p>
+            <a:pPr>
+              <a:spcBef>
+                <a:spcPts val="400"/>
+              </a:spcBef>
+              <a:spcAft>
+                <a:spcPts val="200"/>
+              </a:spcAft>
+            </a:pPr>
+            <a:r>
+              <a:rPr sz="1300">
+                <a:solidFill>
+                  <a:srgbClr val="3D5466"/>
+                </a:solidFill>
+                <a:latin typeface="Arial"/>
+              </a:rPr>
+              <a:t>▸  „Welche Stakeholder (Mitarbeiter, Familie, Kunden, Bank) haben ein Interesse an einer Nachfolge – und wo könnte es Konflikte geben?"</a:t>
+            </a:r>
+          </a:p>
+          <a:p>
+            <a:pPr>
+              <a:spcBef>
+                <a:spcPts val="400"/>
+              </a:spcBef>
+              <a:spcAft>
+                <a:spcPts val="200"/>
+              </a:spcAft>
+            </a:pPr>
+            <a:r>
+              <a:rPr sz="1200">
+                <a:solidFill>
+                  <a:srgbClr val="3D5466"/>
+                </a:solidFill>
+                <a:latin typeface="Arial"/>
+              </a:rPr>
+              <a:t>Zirkuläre Fragen (Penn, 1982 ) erforschen, wie andere den Unternehmer und sein Dilemma wahrnehmen:</a:t>
+            </a:r>
+          </a:p>
+          <a:p>
+            <a:pPr>
+              <a:spcBef>
+                <a:spcPts val="400"/>
+              </a:spcBef>
+              <a:spcAft>
+                <a:spcPts val="200"/>
+              </a:spcAft>
+            </a:pPr>
+            <a:r>
+              <a:rPr sz="1300">
+                <a:solidFill>
+                  <a:srgbClr val="3D5466"/>
+                </a:solidFill>
+                <a:latin typeface="Arial"/>
+              </a:rPr>
+              <a:t>▸  „Wie würde Ihr ältester Sohn die aktuelle Situation beschreiben – denken Sie?"</a:t>
+            </a:r>
+          </a:p>
+          <a:p>
+            <a:pPr>
+              <a:spcBef>
+                <a:spcPts val="400"/>
+              </a:spcBef>
+              <a:spcAft>
+                <a:spcPts val="200"/>
+              </a:spcAft>
+            </a:pPr>
+            <a:r>
+              <a:rPr sz="1300">
+                <a:solidFill>
+                  <a:srgbClr val="3D5466"/>
+                </a:solidFill>
+                <a:latin typeface="Arial"/>
+              </a:rPr>
+              <a:t>▸  „Was würde Ihr engster Mitarbeiter sagen, wenn ich ihn fragen würde, ob er eine Übergabe an Ihren Sohn für sinnvoll hält?"</a:t>
+            </a:r>
+          </a:p>
+          <a:p>
+            <a:pPr>
+              <a:spcBef>
+                <a:spcPts val="400"/>
+              </a:spcBef>
+              <a:spcAft>
+                <a:spcPts val="200"/>
+              </a:spcAft>
+            </a:pPr>
+            <a:r>
+              <a:rPr sz="1300">
+                <a:solidFill>
+                  <a:srgbClr val="3D5466"/>
+                </a:solidFill>
+                <a:latin typeface="Arial"/>
+              </a:rPr>
+              <a:t>▸  „Wenn wir in fünf Jahren hier säßen und Sie hätten die Nachfolge geregelt: Wie hätte Ihr Ehepartner den Prozess erlebt?"</a:t>
+            </a:r>
+          </a:p>
+          <a:p>
+            <a:pPr>
+              <a:spcBef>
+                <a:spcPts val="400"/>
+              </a:spcBef>
+              <a:spcAft>
+                <a:spcPts val="200"/>
+              </a:spcAft>
+            </a:pPr>
+            <a:r>
+              <a:rPr sz="1200">
+                <a:solidFill>
+                  <a:srgbClr val="3D5466"/>
+                </a:solidFill>
+                <a:latin typeface="Arial"/>
+              </a:rPr>
+              <a:t>Zirkuläre Fragen decken implizite Ängste und Blockaden auf, ohne direkt zu fragen: „Haben Sie Angst vor Kontrollverlust?"</a:t>
             </a:r>
           </a:p>
           <a:p>
@@ -6131,7 +7575,7 @@
                 </a:solidFill>
                 <a:latin typeface="JetBrains Mono"/>
               </a:rPr>
-              <a:t>NACHFOLGEPROZESS – FÜNF PHASEN</a:t>
+              <a:t>LÖSUNGSORIENTIERTE ZUKUNFTSFRAGEN (DE SHAZER, 1985)</a:t>
             </a:r>
           </a:p>
           <a:p>
@@ -6150,178 +7594,7 @@
                 </a:solidFill>
                 <a:latin typeface="Arial"/>
               </a:rPr>
-              <a:t>Erfolgreiche Unternehmernachfolgen benötigen empirisch 3–7 Jahre Vorlaufzeit (IfM Bonn, 2016 ):</a:t>
-            </a:r>
-          </a:p>
-          <a:p>
-            <a:pPr>
-              <a:spcBef>
-                <a:spcPts val="1000"/>
-              </a:spcBef>
-              <a:spcAft>
-                <a:spcPts val="200"/>
-              </a:spcAft>
-            </a:pPr>
-            <a:r>
-              <a:rPr sz="800" b="1">
-                <a:solidFill>
-                  <a:srgbClr val="78808C"/>
-                </a:solidFill>
-                <a:latin typeface="JetBrains Mono"/>
-              </a:rPr>
-              <a:t>REGULATORISCHE ECKPUNKTE (ORIENTIERUNGSRAHMEN)</a:t>
-            </a:r>
-          </a:p>
-          <a:p>
-            <a:pPr>
-              <a:spcBef>
-                <a:spcPts val="400"/>
-              </a:spcBef>
-              <a:spcAft>
-                <a:spcPts val="200"/>
-              </a:spcAft>
-            </a:pPr>
-            <a:r>
-              <a:rPr sz="1200">
-                <a:solidFill>
-                  <a:srgbClr val="3D5466"/>
-                </a:solidFill>
-                <a:latin typeface="Arial"/>
-              </a:rPr>
-              <a:t>Der FK zeigt dem Unternehmer die wichtigsten Felder auf und verweist an Spezialisten:</a:t>
-            </a:r>
-          </a:p>
-          <a:p>
-            <a:pPr>
-              <a:spcBef>
-                <a:spcPts val="400"/>
-              </a:spcBef>
-              <a:spcAft>
-                <a:spcPts val="200"/>
-              </a:spcAft>
-            </a:pPr>
-            <a:r>
-              <a:rPr sz="1300">
-                <a:solidFill>
-                  <a:srgbClr val="3D5466"/>
-                </a:solidFill>
-                <a:latin typeface="Arial"/>
-              </a:rPr>
-              <a:t>▸  Erbschaftsteuer / Schenkungsteuer: § 13a ErbStG regelt die Begünstigungen für Betriebsvermögen bei familieninterner Übergabe (Verschonungsabschlag 85 %; Optionsverschonung 100 %; Behaltensfristen 5 bzw. 7 Jahre). Der persönliche Freibetrag nach § 16 Abs. 1 Nr. 2 ErbStG beträgt 400.000 EUR je Elternteil und je Kind – d.h. ein Kind kann im Erbfall von beiden Elternteilen zusammen bis zu 800.000 EUR steuerfrei erhalten. Wichtig: Dieser Freibetrag kann alle 10 Jahre erneut genutzt werden – eine schrittweise Schenkung über mehrere Jahre kann daher steuerlich deutlich günstiger sein als eine Einmal-Übertragung. Hinweis: Diese Orientierungsinformation ersetzt keine steuerrechtliche Beratung – stets Steuerberater einbinden.</a:t>
-            </a:r>
-          </a:p>
-          <a:p>
-            <a:pPr>
-              <a:spcBef>
-                <a:spcPts val="400"/>
-              </a:spcBef>
-              <a:spcAft>
-                <a:spcPts val="200"/>
-              </a:spcAft>
-            </a:pPr>
-            <a:r>
-              <a:rPr sz="1300">
-                <a:solidFill>
-                  <a:srgbClr val="3D5466"/>
-                </a:solidFill>
-                <a:latin typeface="Arial"/>
-              </a:rPr>
-              <a:t>▸  Gesellschaftsrechtliche Fragen (GmbH-G, HGB): Sind Gesellschafterverträge aktuell? Gibt es Vorkaufsrechte?</a:t>
-            </a:r>
-          </a:p>
-          <a:p>
-            <a:pPr>
-              <a:spcBef>
-                <a:spcPts val="600"/>
-              </a:spcBef>
-              <a:spcAft>
-                <a:spcPts val="200"/>
-              </a:spcAft>
-            </a:pPr>
-            <a:r>
-              <a:rPr sz="1200" i="1">
-                <a:solidFill>
-                  <a:srgbClr val="3D5466"/>
-                </a:solidFill>
-                <a:latin typeface="Arial"/>
-              </a:rPr>
-              <a:t>→  Praxishinweis: Der Steuerberater als Gatekeeper</a:t>
-            </a:r>
-          </a:p>
-          <a:p>
-            <a:pPr>
-              <a:spcBef>
-                <a:spcPts val="600"/>
-              </a:spcBef>
-              <a:spcAft>
-                <a:spcPts val="200"/>
-              </a:spcAft>
-            </a:pPr>
-            <a:r>
-              <a:rPr sz="1200" i="1">
-                <a:solidFill>
-                  <a:srgbClr val="3D5466"/>
-                </a:solidFill>
-                <a:latin typeface="Arial"/>
-              </a:rPr>
-              <a:t>→  Strategische Partnerschaft statt Konkurrenz:</a:t>
-            </a:r>
-          </a:p>
-          <a:p>
-            <a:pPr>
-              <a:spcBef>
-                <a:spcPts val="600"/>
-              </a:spcBef>
-              <a:spcAft>
-                <a:spcPts val="200"/>
-              </a:spcAft>
-            </a:pPr>
-            <a:r>
-              <a:rPr sz="1200" i="1">
-                <a:solidFill>
-                  <a:srgbClr val="3D5466"/>
-                </a:solidFill>
-                <a:latin typeface="Arial"/>
-              </a:rPr>
-              <a:t>→  - Gemeinsame Termine mit Steuerberater und Kunden als Stärke positionieren, nicht als Verlust von Kontrolle</a:t>
-            </a:r>
-          </a:p>
-          <a:p>
-            <a:pPr>
-              <a:spcBef>
-                <a:spcPts val="600"/>
-              </a:spcBef>
-              <a:spcAft>
-                <a:spcPts val="200"/>
-              </a:spcAft>
-            </a:pPr>
-            <a:r>
-              <a:rPr sz="1200" i="1">
-                <a:solidFill>
-                  <a:srgbClr val="3D5466"/>
-                </a:solidFill>
-                <a:latin typeface="Arial"/>
-              </a:rPr>
-              <a:t>→  - Dem Steuerberater nützliche Informationen geben (Finanzierbarkeits-Check), ohne das Mandat anzutasten</a:t>
-            </a:r>
-          </a:p>
-          <a:p>
-            <a:pPr>
-              <a:spcBef>
-                <a:spcPts val="600"/>
-              </a:spcBef>
-              <a:spcAft>
-                <a:spcPts val="200"/>
-              </a:spcAft>
-            </a:pPr>
-            <a:r>
-              <a:rPr sz="1200" i="1">
-                <a:solidFill>
-                  <a:srgbClr val="3D5466"/>
-                </a:solidFill>
-                <a:latin typeface="Arial"/>
-              </a:rPr>
-              <a:t>→  - Aufbau einer längerfristigen Beziehung: Steuerberater im Kammerbezirk kennenlernen, z.B. über IHK-Veranstaltungen oder gemeinsame Unternehmer-Foren</a:t>
+              <a:t>Die lösungsorientierte Gesprächsführung hilft, den Unternehmer aus Lähmung oder Verdrängung herauszuholen:</a:t>
             </a:r>
           </a:p>
         </p:txBody>
@@ -6437,7 +7710,7 @@
             <a:avLst/>
           </a:prstGeom>
           <a:solidFill>
-            <a:srgbClr val="FFFFFF"/>
+            <a:srgbClr val="EDEDF3"/>
           </a:solidFill>
           <a:ln>
             <a:noFill/>
@@ -6538,43 +7811,51 @@
                 </a:solidFill>
                 <a:latin typeface="JetBrains Mono"/>
               </a:rPr>
-              <a:t>M12  ·  SCHAUBILD</a:t>
-            </a:r>
-          </a:p>
-        </p:txBody>
-      </p:sp>
-      <p:sp>
-        <p:nvSpPr>
-          <p:cNvPr id="5" name="TextBox 4"/>
-          <p:cNvSpPr txBox="1"/>
+              <a:t>M12  ·  INHALT</a:t>
+            </a:r>
+          </a:p>
+        </p:txBody>
+      </p:sp>
+      <p:sp>
+        <p:nvSpPr>
+          <p:cNvPr id="5" name="Rectangle 4"/>
+          <p:cNvSpPr/>
           <p:nvPr/>
         </p:nvSpPr>
         <p:spPr>
           <a:xfrm>
-            <a:off x="685800" y="502920"/>
-            <a:ext cx="10817352" cy="594360"/>
-          </a:xfrm>
-          <a:prstGeom prst="rect">
-            <a:avLst/>
-          </a:prstGeom>
-          <a:noFill/>
-        </p:spPr>
-        <p:txBody>
-          <a:bodyPr wrap="square">
-            <a:spAutoFit/>
-          </a:bodyPr>
-          <a:lstStyle/>
-          <a:p>
-            <a:pPr algn="l"/>
-            <a:r>
-              <a:rPr sz="2000" b="1" i="0">
-                <a:solidFill>
-                  <a:srgbClr val="1F2C56"/>
-                </a:solidFill>
-                <a:latin typeface="Source Serif 4"/>
-              </a:rPr>
-              <a:t>Nachfolge-Phasenmodell</a:t>
-            </a:r>
+            <a:off x="0" y="1234440"/>
+            <a:ext cx="12188952" cy="12700"/>
+          </a:xfrm>
+          <a:prstGeom prst="rect">
+            <a:avLst/>
+          </a:prstGeom>
+          <a:solidFill>
+            <a:srgbClr val="D8DFE4"/>
+          </a:solidFill>
+          <a:ln>
+            <a:noFill/>
+          </a:ln>
+        </p:spPr>
+        <p:style>
+          <a:lnRef idx="1">
+            <a:schemeClr val="accent1"/>
+          </a:lnRef>
+          <a:fillRef idx="3">
+            <a:schemeClr val="accent1"/>
+          </a:fillRef>
+          <a:effectRef idx="2">
+            <a:schemeClr val="accent1"/>
+          </a:effectRef>
+          <a:fontRef idx="minor">
+            <a:schemeClr val="lt1"/>
+          </a:fontRef>
+        </p:style>
+        <p:txBody>
+          <a:bodyPr rtlCol="0" anchor="ctr"/>
+          <a:lstStyle/>
+          <a:p>
+            <a:pPr algn="ctr"/>
           </a:p>
         </p:txBody>
       </p:sp>
@@ -6586,8 +7867,8 @@
         </p:nvSpPr>
         <p:spPr>
           <a:xfrm>
-            <a:off x="685800" y="1143000"/>
-            <a:ext cx="10817352" cy="25400"/>
+            <a:off x="685800" y="502920"/>
+            <a:ext cx="36576" cy="658368"/>
           </a:xfrm>
           <a:prstGeom prst="rect">
             <a:avLst/>
@@ -6621,33 +7902,295 @@
           </a:p>
         </p:txBody>
       </p:sp>
-      <p:pic>
-        <p:nvPicPr>
-          <p:cNvPr id="7" name="Picture 6" descr="image.png"/>
-          <p:cNvPicPr>
-            <a:picLocks noChangeAspect="1"/>
-          </p:cNvPicPr>
+      <p:sp>
+        <p:nvSpPr>
+          <p:cNvPr id="7" name="TextBox 6"/>
+          <p:cNvSpPr txBox="1"/>
           <p:nvPr/>
-        </p:nvPicPr>
-        <p:blipFill>
-          <a:blip r:embed="rId2"/>
-          <a:stretch>
-            <a:fillRect/>
-          </a:stretch>
-        </p:blipFill>
-        <p:spPr>
-          <a:xfrm>
-            <a:off x="2163921" y="1325880"/>
-            <a:ext cx="7861110" cy="4937760"/>
-          </a:xfrm>
-          <a:prstGeom prst="rect">
-            <a:avLst/>
-          </a:prstGeom>
-        </p:spPr>
-      </p:pic>
-      <p:sp>
-        <p:nvSpPr>
-          <p:cNvPr id="8" name="Rectangle 7"/>
+        </p:nvSpPr>
+        <p:spPr>
+          <a:xfrm>
+            <a:off x="813816" y="502920"/>
+            <a:ext cx="10634472" cy="685800"/>
+          </a:xfrm>
+          <a:prstGeom prst="rect">
+            <a:avLst/>
+          </a:prstGeom>
+          <a:noFill/>
+        </p:spPr>
+        <p:txBody>
+          <a:bodyPr wrap="square">
+            <a:spAutoFit/>
+          </a:bodyPr>
+          <a:lstStyle/>
+          <a:p>
+            <a:pPr algn="l"/>
+            <a:r>
+              <a:rPr sz="2400" b="1" i="0">
+                <a:solidFill>
+                  <a:srgbClr val="1F2C56"/>
+                </a:solidFill>
+                <a:latin typeface="Source Serif 4"/>
+              </a:rPr>
+              <a:t>Theorie-Input: Nachfolge-Typen und Prozess im Überblick</a:t>
+            </a:r>
+          </a:p>
+        </p:txBody>
+      </p:sp>
+      <p:sp>
+        <p:nvSpPr>
+          <p:cNvPr id="8" name="TextBox 7"/>
+          <p:cNvSpPr txBox="1"/>
+          <p:nvPr/>
+        </p:nvSpPr>
+        <p:spPr>
+          <a:xfrm>
+            <a:off x="685800" y="1417320"/>
+            <a:ext cx="10817352" cy="5029200"/>
+          </a:xfrm>
+          <a:prstGeom prst="rect">
+            <a:avLst/>
+          </a:prstGeom>
+          <a:noFill/>
+        </p:spPr>
+        <p:txBody>
+          <a:bodyPr wrap="square">
+            <a:spAutoFit/>
+          </a:bodyPr>
+          <a:lstStyle/>
+          <a:p>
+            <a:pPr>
+              <a:spcBef>
+                <a:spcPts val="1000"/>
+              </a:spcBef>
+              <a:spcAft>
+                <a:spcPts val="200"/>
+              </a:spcAft>
+            </a:pPr>
+            <a:r>
+              <a:rPr sz="800" b="1">
+                <a:solidFill>
+                  <a:srgbClr val="78808C"/>
+                </a:solidFill>
+                <a:latin typeface="JetBrains Mono"/>
+              </a:rPr>
+              <a:t>DIE VIER HAUPTNACHFOLGEARTEN</a:t>
+            </a:r>
+          </a:p>
+          <a:p>
+            <a:pPr>
+              <a:spcBef>
+                <a:spcPts val="1000"/>
+              </a:spcBef>
+              <a:spcAft>
+                <a:spcPts val="200"/>
+              </a:spcAft>
+            </a:pPr>
+            <a:r>
+              <a:rPr sz="800" b="1">
+                <a:solidFill>
+                  <a:srgbClr val="78808C"/>
+                </a:solidFill>
+                <a:latin typeface="JetBrains Mono"/>
+              </a:rPr>
+              <a:t>NACHFOLGEPROZESS – FÜNF PHASEN</a:t>
+            </a:r>
+          </a:p>
+          <a:p>
+            <a:pPr>
+              <a:spcBef>
+                <a:spcPts val="400"/>
+              </a:spcBef>
+              <a:spcAft>
+                <a:spcPts val="200"/>
+              </a:spcAft>
+            </a:pPr>
+            <a:r>
+              <a:rPr sz="1200">
+                <a:solidFill>
+                  <a:srgbClr val="3D5466"/>
+                </a:solidFill>
+                <a:latin typeface="Arial"/>
+              </a:rPr>
+              <a:t>Erfolgreiche Unternehmernachfolgen benötigen empirisch 3–7 Jahre Vorlaufzeit (IfM Bonn, 2016 ):</a:t>
+            </a:r>
+          </a:p>
+          <a:p>
+            <a:pPr>
+              <a:spcBef>
+                <a:spcPts val="1000"/>
+              </a:spcBef>
+              <a:spcAft>
+                <a:spcPts val="200"/>
+              </a:spcAft>
+            </a:pPr>
+            <a:r>
+              <a:rPr sz="800" b="1">
+                <a:solidFill>
+                  <a:srgbClr val="78808C"/>
+                </a:solidFill>
+                <a:latin typeface="JetBrains Mono"/>
+              </a:rPr>
+              <a:t>REGULATORISCHE ECKPUNKTE (ORIENTIERUNGSRAHMEN)</a:t>
+            </a:r>
+          </a:p>
+          <a:p>
+            <a:pPr>
+              <a:spcBef>
+                <a:spcPts val="400"/>
+              </a:spcBef>
+              <a:spcAft>
+                <a:spcPts val="200"/>
+              </a:spcAft>
+            </a:pPr>
+            <a:r>
+              <a:rPr sz="1200">
+                <a:solidFill>
+                  <a:srgbClr val="3D5466"/>
+                </a:solidFill>
+                <a:latin typeface="Arial"/>
+              </a:rPr>
+              <a:t>Der FK zeigt dem Unternehmer die wichtigsten Felder auf und verweist an Spezialisten:</a:t>
+            </a:r>
+          </a:p>
+          <a:p>
+            <a:pPr>
+              <a:spcBef>
+                <a:spcPts val="400"/>
+              </a:spcBef>
+              <a:spcAft>
+                <a:spcPts val="200"/>
+              </a:spcAft>
+            </a:pPr>
+            <a:r>
+              <a:rPr sz="1300">
+                <a:solidFill>
+                  <a:srgbClr val="3D5466"/>
+                </a:solidFill>
+                <a:latin typeface="Arial"/>
+              </a:rPr>
+              <a:t>▸  Erbschaftsteuer / Schenkungsteuer: § 13a ErbStG regelt die Begünstigungen für Betriebsvermögen bei familieninterner Übergabe (Verschonungsabschlag 85 %; Optionsverschonung 100 %; Behaltensfristen 5 bzw. 7 Jahre). Der persönliche Freibetrag nach § 16 Abs. 1 Nr. 2 ErbStG beträgt 400.000 EUR je Elternteil und je Kind – d.h. ein Kind kann im Erbfall von beiden Elternteilen zusammen bis zu 800.000 EUR steuerfrei erhalten. Wichtig: Dieser Freibetrag kann alle 10 Jahre erneut genutzt werden – eine schrittweise Schenkung über mehrere Jahre kann daher steuerlich deutlich günstiger sein als eine Einmal-Übertragung. Hinweis: Diese Orientierungsinformation ersetzt keine steuerrechtliche Beratung – stets Steuerberater einbinden.</a:t>
+            </a:r>
+          </a:p>
+          <a:p>
+            <a:pPr>
+              <a:spcBef>
+                <a:spcPts val="400"/>
+              </a:spcBef>
+              <a:spcAft>
+                <a:spcPts val="200"/>
+              </a:spcAft>
+            </a:pPr>
+            <a:r>
+              <a:rPr sz="1300">
+                <a:solidFill>
+                  <a:srgbClr val="3D5466"/>
+                </a:solidFill>
+                <a:latin typeface="Arial"/>
+              </a:rPr>
+              <a:t>▸  Gesellschaftsrechtliche Fragen (GmbH-G, HGB): Sind Gesellschafterverträge aktuell? Gibt es Vorkaufsrechte?</a:t>
+            </a:r>
+          </a:p>
+          <a:p>
+            <a:pPr>
+              <a:spcBef>
+                <a:spcPts val="600"/>
+              </a:spcBef>
+              <a:spcAft>
+                <a:spcPts val="200"/>
+              </a:spcAft>
+            </a:pPr>
+            <a:r>
+              <a:rPr sz="1200" i="1">
+                <a:solidFill>
+                  <a:srgbClr val="3D5466"/>
+                </a:solidFill>
+                <a:latin typeface="Arial"/>
+              </a:rPr>
+              <a:t>→  Praxishinweis: Der Steuerberater als Gatekeeper</a:t>
+            </a:r>
+          </a:p>
+          <a:p>
+            <a:pPr>
+              <a:spcBef>
+                <a:spcPts val="600"/>
+              </a:spcBef>
+              <a:spcAft>
+                <a:spcPts val="200"/>
+              </a:spcAft>
+            </a:pPr>
+            <a:r>
+              <a:rPr sz="1200" i="1">
+                <a:solidFill>
+                  <a:srgbClr val="3D5466"/>
+                </a:solidFill>
+                <a:latin typeface="Arial"/>
+              </a:rPr>
+              <a:t>→  Strategische Partnerschaft statt Konkurrenz:</a:t>
+            </a:r>
+          </a:p>
+          <a:p>
+            <a:pPr>
+              <a:spcBef>
+                <a:spcPts val="600"/>
+              </a:spcBef>
+              <a:spcAft>
+                <a:spcPts val="200"/>
+              </a:spcAft>
+            </a:pPr>
+            <a:r>
+              <a:rPr sz="1200" i="1">
+                <a:solidFill>
+                  <a:srgbClr val="3D5466"/>
+                </a:solidFill>
+                <a:latin typeface="Arial"/>
+              </a:rPr>
+              <a:t>→  - Gemeinsame Termine mit Steuerberater und Kunden als Stärke positionieren, nicht als Verlust von Kontrolle</a:t>
+            </a:r>
+          </a:p>
+          <a:p>
+            <a:pPr>
+              <a:spcBef>
+                <a:spcPts val="600"/>
+              </a:spcBef>
+              <a:spcAft>
+                <a:spcPts val="200"/>
+              </a:spcAft>
+            </a:pPr>
+            <a:r>
+              <a:rPr sz="1200" i="1">
+                <a:solidFill>
+                  <a:srgbClr val="3D5466"/>
+                </a:solidFill>
+                <a:latin typeface="Arial"/>
+              </a:rPr>
+              <a:t>→  - Dem Steuerberater nützliche Informationen geben (Finanzierbarkeits-Check), ohne das Mandat anzutasten</a:t>
+            </a:r>
+          </a:p>
+          <a:p>
+            <a:pPr>
+              <a:spcBef>
+                <a:spcPts val="600"/>
+              </a:spcBef>
+              <a:spcAft>
+                <a:spcPts val="200"/>
+              </a:spcAft>
+            </a:pPr>
+            <a:r>
+              <a:rPr sz="1200" i="1">
+                <a:solidFill>
+                  <a:srgbClr val="3D5466"/>
+                </a:solidFill>
+                <a:latin typeface="Arial"/>
+              </a:rPr>
+              <a:t>→  - Aufbau einer längerfristigen Beziehung: Steuerberater im Kammerbezirk kennenlernen, z.B. über IHK-Veranstaltungen oder gemeinsame Unternehmer-Foren</a:t>
+            </a:r>
+          </a:p>
+        </p:txBody>
+      </p:sp>
+      <p:sp>
+        <p:nvSpPr>
+          <p:cNvPr id="9" name="Rectangle 8"/>
           <p:cNvSpPr/>
           <p:nvPr/>
         </p:nvSpPr>
@@ -6690,7 +8233,7 @@
       </p:sp>
       <p:sp>
         <p:nvSpPr>
-          <p:cNvPr id="9" name="TextBox 8"/>
+          <p:cNvPr id="10" name="TextBox 9"/>
           <p:cNvSpPr txBox="1"/>
           <p:nvPr/>
         </p:nvSpPr>
@@ -6719,41 +8262,6 @@
                 <a:latin typeface="JetBrains Mono"/>
               </a:rPr>
               <a:t>Benedikt Zoller Coaching  ·  FKB Campus  ·  M12</a:t>
-            </a:r>
-          </a:p>
-        </p:txBody>
-      </p:sp>
-      <p:sp>
-        <p:nvSpPr>
-          <p:cNvPr id="10" name="TextBox 9"/>
-          <p:cNvSpPr txBox="1"/>
-          <p:nvPr/>
-        </p:nvSpPr>
-        <p:spPr>
-          <a:xfrm>
-            <a:off x="7176211" y="6583680"/>
-            <a:ext cx="4326940" cy="256032"/>
-          </a:xfrm>
-          <a:prstGeom prst="rect">
-            <a:avLst/>
-          </a:prstGeom>
-          <a:noFill/>
-        </p:spPr>
-        <p:txBody>
-          <a:bodyPr wrap="none">
-            <a:spAutoFit/>
-          </a:bodyPr>
-          <a:lstStyle/>
-          <a:p>
-            <a:pPr algn="r"/>
-            <a:r>
-              <a:rPr sz="700">
-                <a:solidFill>
-                  <a:srgbClr val="A0B4D2"/>
-                </a:solidFill>
-                <a:latin typeface="JetBrains Mono"/>
-              </a:rPr>
-              <a:t>Schaubild</a:t>
             </a:r>
           </a:p>
         </p:txBody>
@@ -6791,7 +8299,7 @@
             <a:avLst/>
           </a:prstGeom>
           <a:solidFill>
-            <a:srgbClr val="EDEDF3"/>
+            <a:srgbClr val="FFFFFF"/>
           </a:solidFill>
           <a:ln>
             <a:noFill/>
@@ -6892,51 +8400,43 @@
                 </a:solidFill>
                 <a:latin typeface="JetBrains Mono"/>
               </a:rPr>
-              <a:t>M12  ·  INHALT</a:t>
-            </a:r>
-          </a:p>
-        </p:txBody>
-      </p:sp>
-      <p:sp>
-        <p:nvSpPr>
-          <p:cNvPr id="5" name="Rectangle 4"/>
-          <p:cNvSpPr/>
+              <a:t>M12  ·  SCHAUBILD</a:t>
+            </a:r>
+          </a:p>
+        </p:txBody>
+      </p:sp>
+      <p:sp>
+        <p:nvSpPr>
+          <p:cNvPr id="5" name="TextBox 4"/>
+          <p:cNvSpPr txBox="1"/>
           <p:nvPr/>
         </p:nvSpPr>
         <p:spPr>
           <a:xfrm>
-            <a:off x="0" y="1234440"/>
-            <a:ext cx="12188952" cy="12700"/>
-          </a:xfrm>
-          <a:prstGeom prst="rect">
-            <a:avLst/>
-          </a:prstGeom>
-          <a:solidFill>
-            <a:srgbClr val="D8DFE4"/>
-          </a:solidFill>
-          <a:ln>
-            <a:noFill/>
-          </a:ln>
-        </p:spPr>
-        <p:style>
-          <a:lnRef idx="1">
-            <a:schemeClr val="accent1"/>
-          </a:lnRef>
-          <a:fillRef idx="3">
-            <a:schemeClr val="accent1"/>
-          </a:fillRef>
-          <a:effectRef idx="2">
-            <a:schemeClr val="accent1"/>
-          </a:effectRef>
-          <a:fontRef idx="minor">
-            <a:schemeClr val="lt1"/>
-          </a:fontRef>
-        </p:style>
-        <p:txBody>
-          <a:bodyPr rtlCol="0" anchor="ctr"/>
-          <a:lstStyle/>
-          <a:p>
-            <a:pPr algn="ctr"/>
+            <a:off x="685800" y="502920"/>
+            <a:ext cx="10817352" cy="594360"/>
+          </a:xfrm>
+          <a:prstGeom prst="rect">
+            <a:avLst/>
+          </a:prstGeom>
+          <a:noFill/>
+        </p:spPr>
+        <p:txBody>
+          <a:bodyPr wrap="square">
+            <a:spAutoFit/>
+          </a:bodyPr>
+          <a:lstStyle/>
+          <a:p>
+            <a:pPr algn="l"/>
+            <a:r>
+              <a:rPr sz="2000" b="1" i="0">
+                <a:solidFill>
+                  <a:srgbClr val="1F2C56"/>
+                </a:solidFill>
+                <a:latin typeface="Source Serif 4"/>
+              </a:rPr>
+              <a:t>Nachfolge-Phasenmodell</a:t>
+            </a:r>
           </a:p>
         </p:txBody>
       </p:sp>
@@ -6948,8 +8448,8 @@
         </p:nvSpPr>
         <p:spPr>
           <a:xfrm>
-            <a:off x="685800" y="502920"/>
-            <a:ext cx="36576" cy="658368"/>
+            <a:off x="685800" y="1143000"/>
+            <a:ext cx="10817352" cy="25400"/>
           </a:xfrm>
           <a:prstGeom prst="rect">
             <a:avLst/>
@@ -6983,295 +8483,33 @@
           </a:p>
         </p:txBody>
       </p:sp>
-      <p:sp>
-        <p:nvSpPr>
-          <p:cNvPr id="7" name="TextBox 6"/>
-          <p:cNvSpPr txBox="1"/>
+      <p:pic>
+        <p:nvPicPr>
+          <p:cNvPr id="7" name="Picture 6" descr="image.png"/>
+          <p:cNvPicPr>
+            <a:picLocks noChangeAspect="1"/>
+          </p:cNvPicPr>
           <p:nvPr/>
-        </p:nvSpPr>
-        <p:spPr>
-          <a:xfrm>
-            <a:off x="813816" y="502920"/>
-            <a:ext cx="10634472" cy="685800"/>
-          </a:xfrm>
-          <a:prstGeom prst="rect">
-            <a:avLst/>
-          </a:prstGeom>
-          <a:noFill/>
-        </p:spPr>
-        <p:txBody>
-          <a:bodyPr wrap="square">
-            <a:spAutoFit/>
-          </a:bodyPr>
-          <a:lstStyle/>
-          <a:p>
-            <a:pPr algn="l"/>
-            <a:r>
-              <a:rPr sz="2400" b="1" i="0">
-                <a:solidFill>
-                  <a:srgbClr val="1F2C56"/>
-                </a:solidFill>
-                <a:latin typeface="Source Serif 4"/>
-              </a:rPr>
-              <a:t>Theorie-Input: Die emotionale Dimension der Nachfolge</a:t>
-            </a:r>
-          </a:p>
-        </p:txBody>
-      </p:sp>
-      <p:sp>
-        <p:nvSpPr>
-          <p:cNvPr id="8" name="TextBox 7"/>
-          <p:cNvSpPr txBox="1"/>
-          <p:nvPr/>
-        </p:nvSpPr>
-        <p:spPr>
-          <a:xfrm>
-            <a:off x="685800" y="1417320"/>
-            <a:ext cx="10817352" cy="5029200"/>
-          </a:xfrm>
-          <a:prstGeom prst="rect">
-            <a:avLst/>
-          </a:prstGeom>
-          <a:noFill/>
-        </p:spPr>
-        <p:txBody>
-          <a:bodyPr wrap="square">
-            <a:spAutoFit/>
-          </a:bodyPr>
-          <a:lstStyle/>
-          <a:p>
-            <a:pPr>
-              <a:spcBef>
-                <a:spcPts val="1000"/>
-              </a:spcBef>
-              <a:spcAft>
-                <a:spcPts val="200"/>
-              </a:spcAft>
-            </a:pPr>
-            <a:r>
-              <a:rPr sz="800" b="1">
-                <a:solidFill>
-                  <a:srgbClr val="78808C"/>
-                </a:solidFill>
-                <a:latin typeface="JetBrains Mono"/>
-              </a:rPr>
-              <a:t>KONTROLLVERLUST UND IDENTITÄTSBEDROHUNG</a:t>
-            </a:r>
-          </a:p>
-          <a:p>
-            <a:pPr>
-              <a:spcBef>
-                <a:spcPts val="400"/>
-              </a:spcBef>
-              <a:spcAft>
-                <a:spcPts val="200"/>
-              </a:spcAft>
-            </a:pPr>
-            <a:r>
-              <a:rPr sz="1200">
-                <a:solidFill>
-                  <a:srgbClr val="3D5466"/>
-                </a:solidFill>
-                <a:latin typeface="Arial"/>
-              </a:rPr>
-              <a:t>Diese existenzielle Angst wird oft verdrängt oder rationalisiert. Psychologisch handelt es sich um einen Trauerprozess (adaptiert nach Kübler-Ross, 1969 ):</a:t>
-            </a:r>
-          </a:p>
-          <a:p>
-            <a:pPr>
-              <a:spcBef>
-                <a:spcPts val="400"/>
-              </a:spcBef>
-              <a:spcAft>
-                <a:spcPts val="200"/>
-              </a:spcAft>
-            </a:pPr>
-            <a:r>
-              <a:rPr sz="1300">
-                <a:solidFill>
-                  <a:srgbClr val="3D5466"/>
-                </a:solidFill>
-                <a:latin typeface="Arial"/>
-              </a:rPr>
-              <a:t>▸  Verleugnung: „Das Thema ist noch gar nicht aktuell."</a:t>
-            </a:r>
-          </a:p>
-          <a:p>
-            <a:pPr>
-              <a:spcBef>
-                <a:spcPts val="400"/>
-              </a:spcBef>
-              <a:spcAft>
-                <a:spcPts val="200"/>
-              </a:spcAft>
-            </a:pPr>
-            <a:r>
-              <a:rPr sz="1300">
-                <a:solidFill>
-                  <a:srgbClr val="3D5466"/>
-                </a:solidFill>
-                <a:latin typeface="Arial"/>
-              </a:rPr>
-              <a:t>▸  Widerstand: „Mein Sohn ist noch nicht bereit."</a:t>
-            </a:r>
-          </a:p>
-          <a:p>
-            <a:pPr>
-              <a:spcBef>
-                <a:spcPts val="400"/>
-              </a:spcBef>
-              <a:spcAft>
-                <a:spcPts val="200"/>
-              </a:spcAft>
-            </a:pPr>
-            <a:r>
-              <a:rPr sz="1300">
-                <a:solidFill>
-                  <a:srgbClr val="3D5466"/>
-                </a:solidFill>
-                <a:latin typeface="Arial"/>
-              </a:rPr>
-              <a:t>▸  Verhandeln: „Vielleicht mache ich noch ein paar Jahre."</a:t>
-            </a:r>
-          </a:p>
-          <a:p>
-            <a:pPr>
-              <a:spcBef>
-                <a:spcPts val="400"/>
-              </a:spcBef>
-              <a:spcAft>
-                <a:spcPts val="200"/>
-              </a:spcAft>
-            </a:pPr>
-            <a:r>
-              <a:rPr sz="1300">
-                <a:solidFill>
-                  <a:srgbClr val="3D5466"/>
-                </a:solidFill>
-                <a:latin typeface="Arial"/>
-              </a:rPr>
-              <a:t>▸  Trauer: Tiefe emotionale Aufarbeitung des Loslassens.</a:t>
-            </a:r>
-          </a:p>
-          <a:p>
-            <a:pPr>
-              <a:spcBef>
-                <a:spcPts val="400"/>
-              </a:spcBef>
-              <a:spcAft>
-                <a:spcPts val="200"/>
-              </a:spcAft>
-            </a:pPr>
-            <a:r>
-              <a:rPr sz="1300">
-                <a:solidFill>
-                  <a:srgbClr val="3D5466"/>
-                </a:solidFill>
-                <a:latin typeface="Arial"/>
-              </a:rPr>
-              <a:t>▸  Akzeptanz: Umgestaltung der Identität: „Ich bin jetzt Mentor."</a:t>
-            </a:r>
-          </a:p>
-          <a:p>
-            <a:pPr>
-              <a:spcBef>
-                <a:spcPts val="400"/>
-              </a:spcBef>
-              <a:spcAft>
-                <a:spcPts val="200"/>
-              </a:spcAft>
-            </a:pPr>
-            <a:r>
-              <a:rPr sz="1200">
-                <a:solidFill>
-                  <a:srgbClr val="3D5466"/>
-                </a:solidFill>
-                <a:latin typeface="Arial"/>
-              </a:rPr>
-              <a:t>Der FK, der diesen Prozess versteht, behandelt Loslasswiderstände nicht als Irrationalität, sondern als normal und bearbeitbar.</a:t>
-            </a:r>
-          </a:p>
-          <a:p>
-            <a:pPr>
-              <a:spcBef>
-                <a:spcPts val="1000"/>
-              </a:spcBef>
-              <a:spcAft>
-                <a:spcPts val="200"/>
-              </a:spcAft>
-            </a:pPr>
-            <a:r>
-              <a:rPr sz="800" b="1">
-                <a:solidFill>
-                  <a:srgbClr val="78808C"/>
-                </a:solidFill>
-                <a:latin typeface="JetBrains Mono"/>
-              </a:rPr>
-              <a:t>DAS VERMÄCHTNIS-DILEMMA</a:t>
-            </a:r>
-          </a:p>
-          <a:p>
-            <a:pPr>
-              <a:spcBef>
-                <a:spcPts val="400"/>
-              </a:spcBef>
-              <a:spcAft>
-                <a:spcPts val="200"/>
-              </a:spcAft>
-            </a:pPr>
-            <a:r>
-              <a:rPr sz="1200">
-                <a:solidFill>
-                  <a:srgbClr val="3D5466"/>
-                </a:solidFill>
-                <a:latin typeface="Arial"/>
-              </a:rPr>
-              <a:t>Viele Unternehmer tragen zwei widersprüchliche Wünsche:</a:t>
-            </a:r>
-          </a:p>
-          <a:p>
-            <a:pPr>
-              <a:spcBef>
-                <a:spcPts val="400"/>
-              </a:spcBef>
-              <a:spcAft>
-                <a:spcPts val="200"/>
-              </a:spcAft>
-            </a:pPr>
-            <a:r>
-              <a:rPr sz="1300">
-                <a:solidFill>
-                  <a:srgbClr val="3D5466"/>
-                </a:solidFill>
-                <a:latin typeface="Arial"/>
-              </a:rPr>
-              <a:t>▸  Kontrolle bewahren: „Nur ich kann das Unternehmen richtig führen."</a:t>
-            </a:r>
-          </a:p>
-          <a:p>
-            <a:pPr>
-              <a:spcBef>
-                <a:spcPts val="400"/>
-              </a:spcBef>
-              <a:spcAft>
-                <a:spcPts val="200"/>
-              </a:spcAft>
-            </a:pPr>
-            <a:r>
-              <a:rPr sz="1300">
-                <a:solidFill>
-                  <a:srgbClr val="3D5466"/>
-                </a:solidFill>
-                <a:latin typeface="Arial"/>
-              </a:rPr>
-              <a:t>▸  Vermächtnis hinterlassen: „Mein Lebenswerk soll weiterleben und florieren."</a:t>
-            </a:r>
-          </a:p>
-        </p:txBody>
-      </p:sp>
-      <p:sp>
-        <p:nvSpPr>
-          <p:cNvPr id="9" name="Rectangle 8"/>
+        </p:nvPicPr>
+        <p:blipFill>
+          <a:blip r:embed="rId2"/>
+          <a:stretch>
+            <a:fillRect/>
+          </a:stretch>
+        </p:blipFill>
+        <p:spPr>
+          <a:xfrm>
+            <a:off x="2163921" y="1325880"/>
+            <a:ext cx="7861110" cy="4937760"/>
+          </a:xfrm>
+          <a:prstGeom prst="rect">
+            <a:avLst/>
+          </a:prstGeom>
+        </p:spPr>
+      </p:pic>
+      <p:sp>
+        <p:nvSpPr>
+          <p:cNvPr id="8" name="Rectangle 7"/>
           <p:cNvSpPr/>
           <p:nvPr/>
         </p:nvSpPr>
@@ -7314,14 +8552,49 @@
       </p:sp>
       <p:sp>
         <p:nvSpPr>
+          <p:cNvPr id="9" name="TextBox 8"/>
+          <p:cNvSpPr txBox="1"/>
+          <p:nvPr/>
+        </p:nvSpPr>
+        <p:spPr>
+          <a:xfrm>
+            <a:off x="685800" y="6583680"/>
+            <a:ext cx="6490411" cy="256032"/>
+          </a:xfrm>
+          <a:prstGeom prst="rect">
+            <a:avLst/>
+          </a:prstGeom>
+          <a:noFill/>
+        </p:spPr>
+        <p:txBody>
+          <a:bodyPr wrap="none">
+            <a:spAutoFit/>
+          </a:bodyPr>
+          <a:lstStyle/>
+          <a:p>
+            <a:pPr algn="l"/>
+            <a:r>
+              <a:rPr sz="700">
+                <a:solidFill>
+                  <a:srgbClr val="A0B4D2"/>
+                </a:solidFill>
+                <a:latin typeface="JetBrains Mono"/>
+              </a:rPr>
+              <a:t>Benedikt Zoller Coaching  ·  FKB Campus  ·  M12</a:t>
+            </a:r>
+          </a:p>
+        </p:txBody>
+      </p:sp>
+      <p:sp>
+        <p:nvSpPr>
           <p:cNvPr id="10" name="TextBox 9"/>
           <p:cNvSpPr txBox="1"/>
           <p:nvPr/>
         </p:nvSpPr>
         <p:spPr>
           <a:xfrm>
-            <a:off x="685800" y="6583680"/>
-            <a:ext cx="6490411" cy="256032"/>
+            <a:off x="7176211" y="6583680"/>
+            <a:ext cx="4326940" cy="256032"/>
           </a:xfrm>
           <a:prstGeom prst="rect">
             <a:avLst/>
@@ -7334,7 +8607,7 @@
           </a:bodyPr>
           <a:lstStyle/>
           <a:p>
-            <a:pPr algn="l"/>
+            <a:pPr algn="r"/>
             <a:r>
               <a:rPr sz="700">
                 <a:solidFill>
@@ -7342,7 +8615,7 @@
                 </a:solidFill>
                 <a:latin typeface="JetBrains Mono"/>
               </a:rPr>
-              <a:t>Benedikt Zoller Coaching  ·  FKB Campus  ·  M12</a:t>
+              <a:t>Schaubild</a:t>
             </a:r>
           </a:p>
         </p:txBody>
@@ -7380,7 +8653,7 @@
             <a:avLst/>
           </a:prstGeom>
           <a:solidFill>
-            <a:srgbClr val="FFFFFF"/>
+            <a:srgbClr val="EDEDF3"/>
           </a:solidFill>
           <a:ln>
             <a:noFill/>
@@ -7481,43 +8754,51 @@
                 </a:solidFill>
                 <a:latin typeface="JetBrains Mono"/>
               </a:rPr>
-              <a:t>M12  ·  SCHAUBILD</a:t>
-            </a:r>
-          </a:p>
-        </p:txBody>
-      </p:sp>
-      <p:sp>
-        <p:nvSpPr>
-          <p:cNvPr id="5" name="TextBox 4"/>
-          <p:cNvSpPr txBox="1"/>
+              <a:t>M12  ·  INHALT</a:t>
+            </a:r>
+          </a:p>
+        </p:txBody>
+      </p:sp>
+      <p:sp>
+        <p:nvSpPr>
+          <p:cNvPr id="5" name="Rectangle 4"/>
+          <p:cNvSpPr/>
           <p:nvPr/>
         </p:nvSpPr>
         <p:spPr>
           <a:xfrm>
-            <a:off x="685800" y="502920"/>
-            <a:ext cx="10817352" cy="594360"/>
-          </a:xfrm>
-          <a:prstGeom prst="rect">
-            <a:avLst/>
-          </a:prstGeom>
-          <a:noFill/>
-        </p:spPr>
-        <p:txBody>
-          <a:bodyPr wrap="square">
-            <a:spAutoFit/>
-          </a:bodyPr>
-          <a:lstStyle/>
-          <a:p>
-            <a:pPr algn="l"/>
-            <a:r>
-              <a:rPr sz="2000" b="1" i="0">
-                <a:solidFill>
-                  <a:srgbClr val="1F2C56"/>
-                </a:solidFill>
-                <a:latin typeface="Source Serif 4"/>
-              </a:rPr>
-              <a:t>Veränderungskurve nach Kübler-Ross</a:t>
-            </a:r>
+            <a:off x="0" y="1234440"/>
+            <a:ext cx="12188952" cy="12700"/>
+          </a:xfrm>
+          <a:prstGeom prst="rect">
+            <a:avLst/>
+          </a:prstGeom>
+          <a:solidFill>
+            <a:srgbClr val="D8DFE4"/>
+          </a:solidFill>
+          <a:ln>
+            <a:noFill/>
+          </a:ln>
+        </p:spPr>
+        <p:style>
+          <a:lnRef idx="1">
+            <a:schemeClr val="accent1"/>
+          </a:lnRef>
+          <a:fillRef idx="3">
+            <a:schemeClr val="accent1"/>
+          </a:fillRef>
+          <a:effectRef idx="2">
+            <a:schemeClr val="accent1"/>
+          </a:effectRef>
+          <a:fontRef idx="minor">
+            <a:schemeClr val="lt1"/>
+          </a:fontRef>
+        </p:style>
+        <p:txBody>
+          <a:bodyPr rtlCol="0" anchor="ctr"/>
+          <a:lstStyle/>
+          <a:p>
+            <a:pPr algn="ctr"/>
           </a:p>
         </p:txBody>
       </p:sp>
@@ -7529,8 +8810,8 @@
         </p:nvSpPr>
         <p:spPr>
           <a:xfrm>
-            <a:off x="685800" y="1143000"/>
-            <a:ext cx="10817352" cy="25400"/>
+            <a:off x="685800" y="502920"/>
+            <a:ext cx="36576" cy="658368"/>
           </a:xfrm>
           <a:prstGeom prst="rect">
             <a:avLst/>
@@ -7564,33 +8845,295 @@
           </a:p>
         </p:txBody>
       </p:sp>
-      <p:pic>
-        <p:nvPicPr>
-          <p:cNvPr id="7" name="Picture 6" descr="image.png"/>
-          <p:cNvPicPr>
-            <a:picLocks noChangeAspect="1"/>
-          </p:cNvPicPr>
+      <p:sp>
+        <p:nvSpPr>
+          <p:cNvPr id="7" name="TextBox 6"/>
+          <p:cNvSpPr txBox="1"/>
           <p:nvPr/>
-        </p:nvPicPr>
-        <p:blipFill>
-          <a:blip r:embed="rId2"/>
-          <a:stretch>
-            <a:fillRect/>
-          </a:stretch>
-        </p:blipFill>
-        <p:spPr>
-          <a:xfrm>
-            <a:off x="2303489" y="1325880"/>
-            <a:ext cx="7581973" cy="4937760"/>
-          </a:xfrm>
-          <a:prstGeom prst="rect">
-            <a:avLst/>
-          </a:prstGeom>
-        </p:spPr>
-      </p:pic>
-      <p:sp>
-        <p:nvSpPr>
-          <p:cNvPr id="8" name="Rectangle 7"/>
+        </p:nvSpPr>
+        <p:spPr>
+          <a:xfrm>
+            <a:off x="813816" y="502920"/>
+            <a:ext cx="10634472" cy="685800"/>
+          </a:xfrm>
+          <a:prstGeom prst="rect">
+            <a:avLst/>
+          </a:prstGeom>
+          <a:noFill/>
+        </p:spPr>
+        <p:txBody>
+          <a:bodyPr wrap="square">
+            <a:spAutoFit/>
+          </a:bodyPr>
+          <a:lstStyle/>
+          <a:p>
+            <a:pPr algn="l"/>
+            <a:r>
+              <a:rPr sz="2400" b="1" i="0">
+                <a:solidFill>
+                  <a:srgbClr val="1F2C56"/>
+                </a:solidFill>
+                <a:latin typeface="Source Serif 4"/>
+              </a:rPr>
+              <a:t>Theorie-Input: Die emotionale Dimension der Nachfolge</a:t>
+            </a:r>
+          </a:p>
+        </p:txBody>
+      </p:sp>
+      <p:sp>
+        <p:nvSpPr>
+          <p:cNvPr id="8" name="TextBox 7"/>
+          <p:cNvSpPr txBox="1"/>
+          <p:nvPr/>
+        </p:nvSpPr>
+        <p:spPr>
+          <a:xfrm>
+            <a:off x="685800" y="1417320"/>
+            <a:ext cx="10817352" cy="5029200"/>
+          </a:xfrm>
+          <a:prstGeom prst="rect">
+            <a:avLst/>
+          </a:prstGeom>
+          <a:noFill/>
+        </p:spPr>
+        <p:txBody>
+          <a:bodyPr wrap="square">
+            <a:spAutoFit/>
+          </a:bodyPr>
+          <a:lstStyle/>
+          <a:p>
+            <a:pPr>
+              <a:spcBef>
+                <a:spcPts val="1000"/>
+              </a:spcBef>
+              <a:spcAft>
+                <a:spcPts val="200"/>
+              </a:spcAft>
+            </a:pPr>
+            <a:r>
+              <a:rPr sz="800" b="1">
+                <a:solidFill>
+                  <a:srgbClr val="78808C"/>
+                </a:solidFill>
+                <a:latin typeface="JetBrains Mono"/>
+              </a:rPr>
+              <a:t>KONTROLLVERLUST UND IDENTITÄTSBEDROHUNG</a:t>
+            </a:r>
+          </a:p>
+          <a:p>
+            <a:pPr>
+              <a:spcBef>
+                <a:spcPts val="400"/>
+              </a:spcBef>
+              <a:spcAft>
+                <a:spcPts val="200"/>
+              </a:spcAft>
+            </a:pPr>
+            <a:r>
+              <a:rPr sz="1200">
+                <a:solidFill>
+                  <a:srgbClr val="3D5466"/>
+                </a:solidFill>
+                <a:latin typeface="Arial"/>
+              </a:rPr>
+              <a:t>Diese existenzielle Angst wird oft verdrängt oder rationalisiert. Psychologisch handelt es sich um einen Trauerprozess (adaptiert nach Kübler-Ross, 1969 ):</a:t>
+            </a:r>
+          </a:p>
+          <a:p>
+            <a:pPr>
+              <a:spcBef>
+                <a:spcPts val="400"/>
+              </a:spcBef>
+              <a:spcAft>
+                <a:spcPts val="200"/>
+              </a:spcAft>
+            </a:pPr>
+            <a:r>
+              <a:rPr sz="1300">
+                <a:solidFill>
+                  <a:srgbClr val="3D5466"/>
+                </a:solidFill>
+                <a:latin typeface="Arial"/>
+              </a:rPr>
+              <a:t>▸  Verleugnung: „Das Thema ist noch gar nicht aktuell."</a:t>
+            </a:r>
+          </a:p>
+          <a:p>
+            <a:pPr>
+              <a:spcBef>
+                <a:spcPts val="400"/>
+              </a:spcBef>
+              <a:spcAft>
+                <a:spcPts val="200"/>
+              </a:spcAft>
+            </a:pPr>
+            <a:r>
+              <a:rPr sz="1300">
+                <a:solidFill>
+                  <a:srgbClr val="3D5466"/>
+                </a:solidFill>
+                <a:latin typeface="Arial"/>
+              </a:rPr>
+              <a:t>▸  Widerstand: „Mein Sohn ist noch nicht bereit."</a:t>
+            </a:r>
+          </a:p>
+          <a:p>
+            <a:pPr>
+              <a:spcBef>
+                <a:spcPts val="400"/>
+              </a:spcBef>
+              <a:spcAft>
+                <a:spcPts val="200"/>
+              </a:spcAft>
+            </a:pPr>
+            <a:r>
+              <a:rPr sz="1300">
+                <a:solidFill>
+                  <a:srgbClr val="3D5466"/>
+                </a:solidFill>
+                <a:latin typeface="Arial"/>
+              </a:rPr>
+              <a:t>▸  Verhandeln: „Vielleicht mache ich noch ein paar Jahre."</a:t>
+            </a:r>
+          </a:p>
+          <a:p>
+            <a:pPr>
+              <a:spcBef>
+                <a:spcPts val="400"/>
+              </a:spcBef>
+              <a:spcAft>
+                <a:spcPts val="200"/>
+              </a:spcAft>
+            </a:pPr>
+            <a:r>
+              <a:rPr sz="1300">
+                <a:solidFill>
+                  <a:srgbClr val="3D5466"/>
+                </a:solidFill>
+                <a:latin typeface="Arial"/>
+              </a:rPr>
+              <a:t>▸  Trauer: Tiefe emotionale Aufarbeitung des Loslassens.</a:t>
+            </a:r>
+          </a:p>
+          <a:p>
+            <a:pPr>
+              <a:spcBef>
+                <a:spcPts val="400"/>
+              </a:spcBef>
+              <a:spcAft>
+                <a:spcPts val="200"/>
+              </a:spcAft>
+            </a:pPr>
+            <a:r>
+              <a:rPr sz="1300">
+                <a:solidFill>
+                  <a:srgbClr val="3D5466"/>
+                </a:solidFill>
+                <a:latin typeface="Arial"/>
+              </a:rPr>
+              <a:t>▸  Akzeptanz: Umgestaltung der Identität: „Ich bin jetzt Mentor."</a:t>
+            </a:r>
+          </a:p>
+          <a:p>
+            <a:pPr>
+              <a:spcBef>
+                <a:spcPts val="400"/>
+              </a:spcBef>
+              <a:spcAft>
+                <a:spcPts val="200"/>
+              </a:spcAft>
+            </a:pPr>
+            <a:r>
+              <a:rPr sz="1200">
+                <a:solidFill>
+                  <a:srgbClr val="3D5466"/>
+                </a:solidFill>
+                <a:latin typeface="Arial"/>
+              </a:rPr>
+              <a:t>Der FK, der diesen Prozess versteht, behandelt Loslasswiderstände nicht als Irrationalität, sondern als normal und bearbeitbar.</a:t>
+            </a:r>
+          </a:p>
+          <a:p>
+            <a:pPr>
+              <a:spcBef>
+                <a:spcPts val="1000"/>
+              </a:spcBef>
+              <a:spcAft>
+                <a:spcPts val="200"/>
+              </a:spcAft>
+            </a:pPr>
+            <a:r>
+              <a:rPr sz="800" b="1">
+                <a:solidFill>
+                  <a:srgbClr val="78808C"/>
+                </a:solidFill>
+                <a:latin typeface="JetBrains Mono"/>
+              </a:rPr>
+              <a:t>DAS VERMÄCHTNIS-DILEMMA</a:t>
+            </a:r>
+          </a:p>
+          <a:p>
+            <a:pPr>
+              <a:spcBef>
+                <a:spcPts val="400"/>
+              </a:spcBef>
+              <a:spcAft>
+                <a:spcPts val="200"/>
+              </a:spcAft>
+            </a:pPr>
+            <a:r>
+              <a:rPr sz="1200">
+                <a:solidFill>
+                  <a:srgbClr val="3D5466"/>
+                </a:solidFill>
+                <a:latin typeface="Arial"/>
+              </a:rPr>
+              <a:t>Viele Unternehmer tragen zwei widersprüchliche Wünsche:</a:t>
+            </a:r>
+          </a:p>
+          <a:p>
+            <a:pPr>
+              <a:spcBef>
+                <a:spcPts val="400"/>
+              </a:spcBef>
+              <a:spcAft>
+                <a:spcPts val="200"/>
+              </a:spcAft>
+            </a:pPr>
+            <a:r>
+              <a:rPr sz="1300">
+                <a:solidFill>
+                  <a:srgbClr val="3D5466"/>
+                </a:solidFill>
+                <a:latin typeface="Arial"/>
+              </a:rPr>
+              <a:t>▸  Kontrolle bewahren: „Nur ich kann das Unternehmen richtig führen."</a:t>
+            </a:r>
+          </a:p>
+          <a:p>
+            <a:pPr>
+              <a:spcBef>
+                <a:spcPts val="400"/>
+              </a:spcBef>
+              <a:spcAft>
+                <a:spcPts val="200"/>
+              </a:spcAft>
+            </a:pPr>
+            <a:r>
+              <a:rPr sz="1300">
+                <a:solidFill>
+                  <a:srgbClr val="3D5466"/>
+                </a:solidFill>
+                <a:latin typeface="Arial"/>
+              </a:rPr>
+              <a:t>▸  Vermächtnis hinterlassen: „Mein Lebenswerk soll weiterleben und florieren."</a:t>
+            </a:r>
+          </a:p>
+        </p:txBody>
+      </p:sp>
+      <p:sp>
+        <p:nvSpPr>
+          <p:cNvPr id="9" name="Rectangle 8"/>
           <p:cNvSpPr/>
           <p:nvPr/>
         </p:nvSpPr>
@@ -7633,7 +9176,7 @@
       </p:sp>
       <p:sp>
         <p:nvSpPr>
-          <p:cNvPr id="9" name="TextBox 8"/>
+          <p:cNvPr id="10" name="TextBox 9"/>
           <p:cNvSpPr txBox="1"/>
           <p:nvPr/>
         </p:nvSpPr>
@@ -7662,41 +9205,6 @@
                 <a:latin typeface="JetBrains Mono"/>
               </a:rPr>
               <a:t>Benedikt Zoller Coaching  ·  FKB Campus  ·  M12</a:t>
-            </a:r>
-          </a:p>
-        </p:txBody>
-      </p:sp>
-      <p:sp>
-        <p:nvSpPr>
-          <p:cNvPr id="10" name="TextBox 9"/>
-          <p:cNvSpPr txBox="1"/>
-          <p:nvPr/>
-        </p:nvSpPr>
-        <p:spPr>
-          <a:xfrm>
-            <a:off x="7176211" y="6583680"/>
-            <a:ext cx="4326940" cy="256032"/>
-          </a:xfrm>
-          <a:prstGeom prst="rect">
-            <a:avLst/>
-          </a:prstGeom>
-          <a:noFill/>
-        </p:spPr>
-        <p:txBody>
-          <a:bodyPr wrap="none">
-            <a:spAutoFit/>
-          </a:bodyPr>
-          <a:lstStyle/>
-          <a:p>
-            <a:pPr algn="r"/>
-            <a:r>
-              <a:rPr sz="700">
-                <a:solidFill>
-                  <a:srgbClr val="A0B4D2"/>
-                </a:solidFill>
-                <a:latin typeface="JetBrains Mono"/>
-              </a:rPr>
-              <a:t>Schaubild</a:t>
             </a:r>
           </a:p>
         </p:txBody>
@@ -7734,7 +9242,7 @@
             <a:avLst/>
           </a:prstGeom>
           <a:solidFill>
-            <a:srgbClr val="EDEDF3"/>
+            <a:srgbClr val="FFFFFF"/>
           </a:solidFill>
           <a:ln>
             <a:noFill/>
@@ -7835,51 +9343,43 @@
                 </a:solidFill>
                 <a:latin typeface="JetBrains Mono"/>
               </a:rPr>
-              <a:t>M12  ·  INHALT</a:t>
-            </a:r>
-          </a:p>
-        </p:txBody>
-      </p:sp>
-      <p:sp>
-        <p:nvSpPr>
-          <p:cNvPr id="5" name="Rectangle 4"/>
-          <p:cNvSpPr/>
+              <a:t>M12  ·  SCHAUBILD</a:t>
+            </a:r>
+          </a:p>
+        </p:txBody>
+      </p:sp>
+      <p:sp>
+        <p:nvSpPr>
+          <p:cNvPr id="5" name="TextBox 4"/>
+          <p:cNvSpPr txBox="1"/>
           <p:nvPr/>
         </p:nvSpPr>
         <p:spPr>
           <a:xfrm>
-            <a:off x="0" y="1234440"/>
-            <a:ext cx="12188952" cy="12700"/>
-          </a:xfrm>
-          <a:prstGeom prst="rect">
-            <a:avLst/>
-          </a:prstGeom>
-          <a:solidFill>
-            <a:srgbClr val="D8DFE4"/>
-          </a:solidFill>
-          <a:ln>
-            <a:noFill/>
-          </a:ln>
-        </p:spPr>
-        <p:style>
-          <a:lnRef idx="1">
-            <a:schemeClr val="accent1"/>
-          </a:lnRef>
-          <a:fillRef idx="3">
-            <a:schemeClr val="accent1"/>
-          </a:fillRef>
-          <a:effectRef idx="2">
-            <a:schemeClr val="accent1"/>
-          </a:effectRef>
-          <a:fontRef idx="minor">
-            <a:schemeClr val="lt1"/>
-          </a:fontRef>
-        </p:style>
-        <p:txBody>
-          <a:bodyPr rtlCol="0" anchor="ctr"/>
-          <a:lstStyle/>
-          <a:p>
-            <a:pPr algn="ctr"/>
+            <a:off x="685800" y="502920"/>
+            <a:ext cx="10817352" cy="594360"/>
+          </a:xfrm>
+          <a:prstGeom prst="rect">
+            <a:avLst/>
+          </a:prstGeom>
+          <a:noFill/>
+        </p:spPr>
+        <p:txBody>
+          <a:bodyPr wrap="square">
+            <a:spAutoFit/>
+          </a:bodyPr>
+          <a:lstStyle/>
+          <a:p>
+            <a:pPr algn="l"/>
+            <a:r>
+              <a:rPr sz="2000" b="1" i="0">
+                <a:solidFill>
+                  <a:srgbClr val="1F2C56"/>
+                </a:solidFill>
+                <a:latin typeface="Source Serif 4"/>
+              </a:rPr>
+              <a:t>Veränderungskurve nach Kübler-Ross</a:t>
+            </a:r>
           </a:p>
         </p:txBody>
       </p:sp>
@@ -7891,8 +9391,8 @@
         </p:nvSpPr>
         <p:spPr>
           <a:xfrm>
-            <a:off x="685800" y="502920"/>
-            <a:ext cx="36576" cy="658368"/>
+            <a:off x="685800" y="1143000"/>
+            <a:ext cx="10817352" cy="25400"/>
           </a:xfrm>
           <a:prstGeom prst="rect">
             <a:avLst/>
@@ -7926,295 +9426,33 @@
           </a:p>
         </p:txBody>
       </p:sp>
-      <p:sp>
-        <p:nvSpPr>
-          <p:cNvPr id="7" name="TextBox 6"/>
-          <p:cNvSpPr txBox="1"/>
+      <p:pic>
+        <p:nvPicPr>
+          <p:cNvPr id="7" name="Picture 6" descr="image.png"/>
+          <p:cNvPicPr>
+            <a:picLocks noChangeAspect="1"/>
+          </p:cNvPicPr>
           <p:nvPr/>
-        </p:nvSpPr>
-        <p:spPr>
-          <a:xfrm>
-            <a:off x="813816" y="502920"/>
-            <a:ext cx="10634472" cy="685800"/>
-          </a:xfrm>
-          <a:prstGeom prst="rect">
-            <a:avLst/>
-          </a:prstGeom>
-          <a:noFill/>
-        </p:spPr>
-        <p:txBody>
-          <a:bodyPr wrap="square">
-            <a:spAutoFit/>
-          </a:bodyPr>
-          <a:lstStyle/>
-          <a:p>
-            <a:pPr algn="l"/>
-            <a:r>
-              <a:rPr sz="2400" b="1" i="0">
-                <a:solidFill>
-                  <a:srgbClr val="1F2C56"/>
-                </a:solidFill>
-                <a:latin typeface="Source Serif 4"/>
-              </a:rPr>
-              <a:t>Praxisfall: Metallverarbeitung Wagner KG, Stuttgart</a:t>
-            </a:r>
-          </a:p>
-        </p:txBody>
-      </p:sp>
-      <p:sp>
-        <p:nvSpPr>
-          <p:cNvPr id="8" name="TextBox 7"/>
-          <p:cNvSpPr txBox="1"/>
-          <p:nvPr/>
-        </p:nvSpPr>
-        <p:spPr>
-          <a:xfrm>
-            <a:off x="685800" y="1417320"/>
-            <a:ext cx="10817352" cy="5029200"/>
-          </a:xfrm>
-          <a:prstGeom prst="rect">
-            <a:avLst/>
-          </a:prstGeom>
-          <a:noFill/>
-        </p:spPr>
-        <p:txBody>
-          <a:bodyPr wrap="square">
-            <a:spAutoFit/>
-          </a:bodyPr>
-          <a:lstStyle/>
-          <a:p>
-            <a:pPr>
-              <a:spcBef>
-                <a:spcPts val="1000"/>
-              </a:spcBef>
-              <a:spcAft>
-                <a:spcPts val="200"/>
-              </a:spcAft>
-            </a:pPr>
-            <a:r>
-              <a:rPr sz="800" b="1">
-                <a:solidFill>
-                  <a:srgbClr val="78808C"/>
-                </a:solidFill>
-                <a:latin typeface="JetBrains Mono"/>
-              </a:rPr>
-              <a:t>UNTERNEHMENSPROFIL</a:t>
-            </a:r>
-          </a:p>
-          <a:p>
-            <a:pPr>
-              <a:spcBef>
-                <a:spcPts val="1000"/>
-              </a:spcBef>
-              <a:spcAft>
-                <a:spcPts val="200"/>
-              </a:spcAft>
-            </a:pPr>
-            <a:r>
-              <a:rPr sz="800" b="1">
-                <a:solidFill>
-                  <a:srgbClr val="78808C"/>
-                </a:solidFill>
-                <a:latin typeface="JetBrains Mono"/>
-              </a:rPr>
-              <a:t>AUSGANGSSITUATION</a:t>
-            </a:r>
-          </a:p>
-          <a:p>
-            <a:pPr>
-              <a:spcBef>
-                <a:spcPts val="1000"/>
-              </a:spcBef>
-              <a:spcAft>
-                <a:spcPts val="200"/>
-              </a:spcAft>
-            </a:pPr>
-            <a:r>
-              <a:rPr sz="800" b="1">
-                <a:solidFill>
-                  <a:srgbClr val="78808C"/>
-                </a:solidFill>
-                <a:latin typeface="JetBrains Mono"/>
-              </a:rPr>
-              <a:t>DIAGNOSTISCHE AUFGABEN FÜR CLAUDIA</a:t>
-            </a:r>
-          </a:p>
-          <a:p>
-            <a:pPr>
-              <a:spcBef>
-                <a:spcPts val="400"/>
-              </a:spcBef>
-              <a:spcAft>
-                <a:spcPts val="200"/>
-              </a:spcAft>
-            </a:pPr>
-            <a:r>
-              <a:rPr sz="1300">
-                <a:solidFill>
-                  <a:srgbClr val="3D5466"/>
-                </a:solidFill>
-                <a:latin typeface="Arial"/>
-              </a:rPr>
-              <a:t>▸  Emotionaler Zustand: Ist Karl müde, oder ist das eine echte Nachfolgekrise?</a:t>
-            </a:r>
-          </a:p>
-          <a:p>
-            <a:pPr>
-              <a:spcBef>
-                <a:spcPts val="400"/>
-              </a:spcBef>
-              <a:spcAft>
-                <a:spcPts val="200"/>
-              </a:spcAft>
-            </a:pPr>
-            <a:r>
-              <a:rPr sz="1300">
-                <a:solidFill>
-                  <a:srgbClr val="3D5466"/>
-                </a:solidFill>
-                <a:latin typeface="Arial"/>
-              </a:rPr>
-              <a:t>▸  Nachfolgepotenziale: Sind die Kinder wirklich ausgeschlossen, oder ist die Kommunikation schlecht?</a:t>
-            </a:r>
-          </a:p>
-          <a:p>
-            <a:pPr>
-              <a:spcBef>
-                <a:spcPts val="400"/>
-              </a:spcBef>
-              <a:spcAft>
-                <a:spcPts val="200"/>
-              </a:spcAft>
-            </a:pPr>
-            <a:r>
-              <a:rPr sz="1300">
-                <a:solidFill>
-                  <a:srgbClr val="3D5466"/>
-                </a:solidFill>
-                <a:latin typeface="Arial"/>
-              </a:rPr>
-              <a:t>▸  Alternativen: Wären MBO (Meister Dieter als Käufer) oder strategischer Verkauf denkbar?</a:t>
-            </a:r>
-          </a:p>
-          <a:p>
-            <a:pPr>
-              <a:spcBef>
-                <a:spcPts val="400"/>
-              </a:spcBef>
-              <a:spcAft>
-                <a:spcPts val="200"/>
-              </a:spcAft>
-            </a:pPr>
-            <a:r>
-              <a:rPr sz="1300">
-                <a:solidFill>
-                  <a:srgbClr val="3D5466"/>
-                </a:solidFill>
-                <a:latin typeface="Arial"/>
-              </a:rPr>
-              <a:t>▸  Finanzielle Lage: Ist das Unternehmen stabil genug für eine Nachfolgeplanung?</a:t>
-            </a:r>
-          </a:p>
-          <a:p>
-            <a:pPr>
-              <a:spcBef>
-                <a:spcPts val="400"/>
-              </a:spcBef>
-              <a:spcAft>
-                <a:spcPts val="200"/>
-              </a:spcAft>
-            </a:pPr>
-            <a:r>
-              <a:rPr sz="1300">
-                <a:solidFill>
-                  <a:srgbClr val="3D5466"/>
-                </a:solidFill>
-                <a:latin typeface="Arial"/>
-              </a:rPr>
-              <a:t>▸  Zeithorizont: Wie dringend ist das Thema (gesundheitliche Gründe? Burnout?)?</a:t>
-            </a:r>
-          </a:p>
-          <a:p>
-            <a:pPr>
-              <a:spcBef>
-                <a:spcPts val="1000"/>
-              </a:spcBef>
-              <a:spcAft>
-                <a:spcPts val="200"/>
-              </a:spcAft>
-            </a:pPr>
-            <a:r>
-              <a:rPr sz="800" b="1">
-                <a:solidFill>
-                  <a:srgbClr val="78808C"/>
-                </a:solidFill>
-                <a:latin typeface="JetBrains Mono"/>
-              </a:rPr>
-              <a:t>BEISPIEL-GESPRÄCHSVERLAUF (SYSTEMISCHE TECHNIK)</a:t>
-            </a:r>
-          </a:p>
-          <a:p>
-            <a:pPr>
-              <a:spcBef>
-                <a:spcPts val="400"/>
-              </a:spcBef>
-              <a:spcAft>
-                <a:spcPts val="200"/>
-              </a:spcAft>
-            </a:pPr>
-            <a:r>
-              <a:rPr sz="1200">
-                <a:solidFill>
-                  <a:srgbClr val="3D5466"/>
-                </a:solidFill>
-                <a:latin typeface="Arial"/>
-              </a:rPr>
-              <a:t>Karl: [Nickt]</a:t>
-            </a:r>
-          </a:p>
-          <a:p>
-            <a:pPr>
-              <a:spcBef>
-                <a:spcPts val="400"/>
-              </a:spcBef>
-              <a:spcAft>
-                <a:spcPts val="200"/>
-              </a:spcAft>
-            </a:pPr>
-            <a:r>
-              <a:rPr sz="1200">
-                <a:solidFill>
-                  <a:srgbClr val="3D5466"/>
-                </a:solidFill>
-                <a:latin typeface="Arial"/>
-              </a:rPr>
-              <a:t>Claudia: „Wenn Sie sagen ‚ich weiß nicht, wie ich das übergeben soll' – was ist das Größte daran, das Ihnen Sorge macht?"</a:t>
-            </a:r>
-          </a:p>
-          <a:p>
-            <a:pPr>
-              <a:spcBef>
-                <a:spcPts val="400"/>
-              </a:spcBef>
-              <a:spcAft>
-                <a:spcPts val="200"/>
-              </a:spcAft>
-            </a:pPr>
-            <a:r>
-              <a:rPr sz="1200">
-                <a:solidFill>
-                  <a:srgbClr val="3D5466"/>
-                </a:solidFill>
-                <a:latin typeface="Arial"/>
-              </a:rPr>
-              <a:t>Karl: „Dass das Unternehmen in schlechte Hände kommt. Meine Mitarbeiter sind wie meine Familie. Ich kann mir nicht vorstellen, dass jemand Fremdes einfach reinkommt und alles ändert."</a:t>
-            </a:r>
-          </a:p>
-        </p:txBody>
-      </p:sp>
-      <p:sp>
-        <p:nvSpPr>
-          <p:cNvPr id="9" name="Rectangle 8"/>
+        </p:nvPicPr>
+        <p:blipFill>
+          <a:blip r:embed="rId2"/>
+          <a:stretch>
+            <a:fillRect/>
+          </a:stretch>
+        </p:blipFill>
+        <p:spPr>
+          <a:xfrm>
+            <a:off x="2303489" y="1325880"/>
+            <a:ext cx="7581973" cy="4937760"/>
+          </a:xfrm>
+          <a:prstGeom prst="rect">
+            <a:avLst/>
+          </a:prstGeom>
+        </p:spPr>
+      </p:pic>
+      <p:sp>
+        <p:nvSpPr>
+          <p:cNvPr id="8" name="Rectangle 7"/>
           <p:cNvSpPr/>
           <p:nvPr/>
         </p:nvSpPr>
@@ -8257,14 +9495,49 @@
       </p:sp>
       <p:sp>
         <p:nvSpPr>
+          <p:cNvPr id="9" name="TextBox 8"/>
+          <p:cNvSpPr txBox="1"/>
+          <p:nvPr/>
+        </p:nvSpPr>
+        <p:spPr>
+          <a:xfrm>
+            <a:off x="685800" y="6583680"/>
+            <a:ext cx="6490411" cy="256032"/>
+          </a:xfrm>
+          <a:prstGeom prst="rect">
+            <a:avLst/>
+          </a:prstGeom>
+          <a:noFill/>
+        </p:spPr>
+        <p:txBody>
+          <a:bodyPr wrap="none">
+            <a:spAutoFit/>
+          </a:bodyPr>
+          <a:lstStyle/>
+          <a:p>
+            <a:pPr algn="l"/>
+            <a:r>
+              <a:rPr sz="700">
+                <a:solidFill>
+                  <a:srgbClr val="A0B4D2"/>
+                </a:solidFill>
+                <a:latin typeface="JetBrains Mono"/>
+              </a:rPr>
+              <a:t>Benedikt Zoller Coaching  ·  FKB Campus  ·  M12</a:t>
+            </a:r>
+          </a:p>
+        </p:txBody>
+      </p:sp>
+      <p:sp>
+        <p:nvSpPr>
           <p:cNvPr id="10" name="TextBox 9"/>
           <p:cNvSpPr txBox="1"/>
           <p:nvPr/>
         </p:nvSpPr>
         <p:spPr>
           <a:xfrm>
-            <a:off x="685800" y="6583680"/>
-            <a:ext cx="6490411" cy="256032"/>
+            <a:off x="7176211" y="6583680"/>
+            <a:ext cx="4326940" cy="256032"/>
           </a:xfrm>
           <a:prstGeom prst="rect">
             <a:avLst/>
@@ -8277,7 +9550,7 @@
           </a:bodyPr>
           <a:lstStyle/>
           <a:p>
-            <a:pPr algn="l"/>
+            <a:pPr algn="r"/>
             <a:r>
               <a:rPr sz="700">
                 <a:solidFill>
@@ -8285,7 +9558,7 @@
                 </a:solidFill>
                 <a:latin typeface="JetBrains Mono"/>
               </a:rPr>
-              <a:t>Benedikt Zoller Coaching  ·  FKB Campus  ·  M12</a:t>
+              <a:t>Schaubild</a:t>
             </a:r>
           </a:p>
         </p:txBody>
@@ -8616,4 +9889,324 @@
   </a:objectDefaults>
   <a:extraClrSchemeLst/>
 </a:theme>
+</file>
+
+<file path=ppt/theme/theme2.xml><?xml version="1.0" encoding="utf-8"?>
+<a:theme xmlns:a="http://schemas.openxmlformats.org/drawingml/2006/main" name="Office Theme">
+  <a:themeElements>
+    <a:clrScheme name="Office">
+      <a:dk1>
+        <a:sysClr val="windowText" lastClr="000000"/>
+      </a:dk1>
+      <a:lt1>
+        <a:sysClr val="window" lastClr="FFFFFF"/>
+      </a:lt1>
+      <a:dk2>
+        <a:srgbClr val="1F497D"/>
+      </a:dk2>
+      <a:lt2>
+        <a:srgbClr val="EEECE1"/>
+      </a:lt2>
+      <a:accent1>
+        <a:srgbClr val="4F81BD"/>
+      </a:accent1>
+      <a:accent2>
+        <a:srgbClr val="C0504D"/>
+      </a:accent2>
+      <a:accent3>
+        <a:srgbClr val="9BBB59"/>
+      </a:accent3>
+      <a:accent4>
+        <a:srgbClr val="8064A2"/>
+      </a:accent4>
+      <a:accent5>
+        <a:srgbClr val="4BACC6"/>
+      </a:accent5>
+      <a:accent6>
+        <a:srgbClr val="F79646"/>
+      </a:accent6>
+      <a:hlink>
+        <a:srgbClr val="0000FF"/>
+      </a:hlink>
+      <a:folHlink>
+        <a:srgbClr val="800080"/>
+      </a:folHlink>
+    </a:clrScheme>
+    <a:fontScheme name="Office">
+      <a:majorFont>
+        <a:latin typeface="Calibri"/>
+        <a:ea typeface=""/>
+        <a:cs typeface=""/>
+        <a:font script="Jpan" typeface="ＭＳ Ｐゴシック"/>
+        <a:font script="Hang" typeface="맑은 고딕"/>
+        <a:font script="Hans" typeface="宋体"/>
+        <a:font script="Hant" typeface="新細明體"/>
+        <a:font script="Arab" typeface="Times New Roman"/>
+        <a:font script="Hebr" typeface="Times New Roman"/>
+        <a:font script="Thai" typeface="Angsana New"/>
+        <a:font script="Ethi" typeface="Nyala"/>
+        <a:font script="Beng" typeface="Vrinda"/>
+        <a:font script="Gujr" typeface="Shruti"/>
+        <a:font script="Khmr" typeface="MoolBoran"/>
+        <a:font script="Knda" typeface="Tunga"/>
+        <a:font script="Guru" typeface="Raavi"/>
+        <a:font script="Cans" typeface="Euphemia"/>
+        <a:font script="Cher" typeface="Plantagenet Cherokee"/>
+        <a:font script="Yiii" typeface="Microsoft Yi Baiti"/>
+        <a:font script="Tibt" typeface="Microsoft Himalaya"/>
+        <a:font script="Thaa" typeface="MV Boli"/>
+        <a:font script="Deva" typeface="Mangal"/>
+        <a:font script="Telu" typeface="Gautami"/>
+        <a:font script="Taml" typeface="Latha"/>
+        <a:font script="Syrc" typeface="Estrangelo Edessa"/>
+        <a:font script="Orya" typeface="Kalinga"/>
+        <a:font script="Mlym" typeface="Kartika"/>
+        <a:font script="Laoo" typeface="DokChampa"/>
+        <a:font script="Sinh" typeface="Iskoola Pota"/>
+        <a:font script="Mong" typeface="Mongolian Baiti"/>
+        <a:font script="Viet" typeface="Times New Roman"/>
+        <a:font script="Uigh" typeface="Microsoft Uighur"/>
+        <a:font script="Geor" typeface="Sylfaen"/>
+      </a:majorFont>
+      <a:minorFont>
+        <a:latin typeface="Calibri"/>
+        <a:ea typeface=""/>
+        <a:cs typeface=""/>
+        <a:font script="Jpan" typeface="ＭＳ Ｐゴシック"/>
+        <a:font script="Hang" typeface="맑은 고딕"/>
+        <a:font script="Hans" typeface="宋体"/>
+        <a:font script="Hant" typeface="新細明體"/>
+        <a:font script="Arab" typeface="Arial"/>
+        <a:font script="Hebr" typeface="Arial"/>
+        <a:font script="Thai" typeface="Cordia New"/>
+        <a:font script="Ethi" typeface="Nyala"/>
+        <a:font script="Beng" typeface="Vrinda"/>
+        <a:font script="Gujr" typeface="Shruti"/>
+        <a:font script="Khmr" typeface="DaunPenh"/>
+        <a:font script="Knda" typeface="Tunga"/>
+        <a:font script="Guru" typeface="Raavi"/>
+        <a:font script="Cans" typeface="Euphemia"/>
+        <a:font script="Cher" typeface="Plantagenet Cherokee"/>
+        <a:font script="Yiii" typeface="Microsoft Yi Baiti"/>
+        <a:font script="Tibt" typeface="Microsoft Himalaya"/>
+        <a:font script="Thaa" typeface="MV Boli"/>
+        <a:font script="Deva" typeface="Mangal"/>
+        <a:font script="Telu" typeface="Gautami"/>
+        <a:font script="Taml" typeface="Latha"/>
+        <a:font script="Syrc" typeface="Estrangelo Edessa"/>
+        <a:font script="Orya" typeface="Kalinga"/>
+        <a:font script="Mlym" typeface="Kartika"/>
+        <a:font script="Laoo" typeface="DokChampa"/>
+        <a:font script="Sinh" typeface="Iskoola Pota"/>
+        <a:font script="Mong" typeface="Mongolian Baiti"/>
+        <a:font script="Viet" typeface="Arial"/>
+        <a:font script="Uigh" typeface="Microsoft Uighur"/>
+        <a:font script="Geor" typeface="Sylfaen"/>
+      </a:minorFont>
+    </a:fontScheme>
+    <a:fmtScheme name="Office">
+      <a:fillStyleLst>
+        <a:solidFill>
+          <a:schemeClr val="phClr"/>
+        </a:solidFill>
+        <a:gradFill rotWithShape="1">
+          <a:gsLst>
+            <a:gs pos="0">
+              <a:schemeClr val="phClr">
+                <a:tint val="50000"/>
+                <a:satMod val="300000"/>
+              </a:schemeClr>
+            </a:gs>
+            <a:gs pos="35000">
+              <a:schemeClr val="phClr">
+                <a:tint val="37000"/>
+                <a:satMod val="300000"/>
+              </a:schemeClr>
+            </a:gs>
+            <a:gs pos="100000">
+              <a:schemeClr val="phClr">
+                <a:tint val="15000"/>
+                <a:satMod val="350000"/>
+              </a:schemeClr>
+            </a:gs>
+          </a:gsLst>
+          <a:lin ang="16200000" scaled="1"/>
+        </a:gradFill>
+        <a:gradFill rotWithShape="1">
+          <a:gsLst>
+            <a:gs pos="0">
+              <a:schemeClr val="phClr">
+                <a:tint val="100000"/>
+                <a:shade val="100000"/>
+                <a:satMod val="130000"/>
+              </a:schemeClr>
+            </a:gs>
+            <a:gs pos="100000">
+              <a:schemeClr val="phClr">
+                <a:tint val="50000"/>
+                <a:shade val="100000"/>
+                <a:satMod val="350000"/>
+              </a:schemeClr>
+            </a:gs>
+          </a:gsLst>
+          <a:lin ang="16200000" scaled="0"/>
+        </a:gradFill>
+      </a:fillStyleLst>
+      <a:lnStyleLst>
+        <a:ln w="9525" cap="flat" cmpd="sng" algn="ctr">
+          <a:solidFill>
+            <a:schemeClr val="phClr">
+              <a:shade val="95000"/>
+              <a:satMod val="105000"/>
+            </a:schemeClr>
+          </a:solidFill>
+          <a:prstDash val="solid"/>
+        </a:ln>
+        <a:ln w="25400" cap="flat" cmpd="sng" algn="ctr">
+          <a:solidFill>
+            <a:schemeClr val="phClr"/>
+          </a:solidFill>
+          <a:prstDash val="solid"/>
+        </a:ln>
+        <a:ln w="38100" cap="flat" cmpd="sng" algn="ctr">
+          <a:solidFill>
+            <a:schemeClr val="phClr"/>
+          </a:solidFill>
+          <a:prstDash val="solid"/>
+        </a:ln>
+      </a:lnStyleLst>
+      <a:effectStyleLst>
+        <a:effectStyle>
+          <a:effectLst>
+            <a:outerShdw blurRad="40000" dist="20000" dir="5400000" rotWithShape="0">
+              <a:srgbClr val="000000">
+                <a:alpha val="38000"/>
+              </a:srgbClr>
+            </a:outerShdw>
+          </a:effectLst>
+        </a:effectStyle>
+        <a:effectStyle>
+          <a:effectLst>
+            <a:outerShdw blurRad="40000" dist="23000" dir="5400000" rotWithShape="0">
+              <a:srgbClr val="000000">
+                <a:alpha val="35000"/>
+              </a:srgbClr>
+            </a:outerShdw>
+          </a:effectLst>
+        </a:effectStyle>
+        <a:effectStyle>
+          <a:effectLst>
+            <a:outerShdw blurRad="40000" dist="23000" dir="5400000" rotWithShape="0">
+              <a:srgbClr val="000000">
+                <a:alpha val="35000"/>
+              </a:srgbClr>
+            </a:outerShdw>
+          </a:effectLst>
+          <a:scene3d>
+            <a:camera prst="orthographicFront">
+              <a:rot lat="0" lon="0" rev="0"/>
+            </a:camera>
+            <a:lightRig rig="threePt" dir="t">
+              <a:rot lat="0" lon="0" rev="1200000"/>
+            </a:lightRig>
+          </a:scene3d>
+          <a:sp3d>
+            <a:bevelT w="63500" h="25400"/>
+          </a:sp3d>
+        </a:effectStyle>
+      </a:effectStyleLst>
+      <a:bgFillStyleLst>
+        <a:solidFill>
+          <a:schemeClr val="phClr"/>
+        </a:solidFill>
+        <a:gradFill rotWithShape="1">
+          <a:gsLst>
+            <a:gs pos="0">
+              <a:schemeClr val="phClr">
+                <a:tint val="40000"/>
+                <a:satMod val="350000"/>
+              </a:schemeClr>
+            </a:gs>
+            <a:gs pos="40000">
+              <a:schemeClr val="phClr">
+                <a:tint val="45000"/>
+                <a:shade val="99000"/>
+                <a:satMod val="350000"/>
+              </a:schemeClr>
+            </a:gs>
+            <a:gs pos="100000">
+              <a:schemeClr val="phClr">
+                <a:shade val="20000"/>
+                <a:satMod val="255000"/>
+              </a:schemeClr>
+            </a:gs>
+          </a:gsLst>
+          <a:path path="circle">
+            <a:fillToRect l="50000" t="-80000" r="50000" b="180000"/>
+          </a:path>
+        </a:gradFill>
+        <a:gradFill rotWithShape="1">
+          <a:gsLst>
+            <a:gs pos="0">
+              <a:schemeClr val="phClr">
+                <a:tint val="80000"/>
+                <a:satMod val="300000"/>
+              </a:schemeClr>
+            </a:gs>
+            <a:gs pos="100000">
+              <a:schemeClr val="phClr">
+                <a:shade val="30000"/>
+                <a:satMod val="200000"/>
+              </a:schemeClr>
+            </a:gs>
+          </a:gsLst>
+          <a:path path="circle">
+            <a:fillToRect l="50000" t="50000" r="50000" b="50000"/>
+          </a:path>
+        </a:gradFill>
+      </a:bgFillStyleLst>
+    </a:fmtScheme>
+  </a:themeElements>
+  <a:objectDefaults>
+    <a:spDef>
+      <a:spPr/>
+      <a:bodyPr/>
+      <a:lstStyle/>
+      <a:style>
+        <a:lnRef idx="1">
+          <a:schemeClr val="accent1"/>
+        </a:lnRef>
+        <a:fillRef idx="3">
+          <a:schemeClr val="accent1"/>
+        </a:fillRef>
+        <a:effectRef idx="2">
+          <a:schemeClr val="accent1"/>
+        </a:effectRef>
+        <a:fontRef idx="minor">
+          <a:schemeClr val="lt1"/>
+        </a:fontRef>
+      </a:style>
+    </a:spDef>
+    <a:lnDef>
+      <a:spPr/>
+      <a:bodyPr/>
+      <a:lstStyle/>
+      <a:style>
+        <a:lnRef idx="2">
+          <a:schemeClr val="accent1"/>
+        </a:lnRef>
+        <a:fillRef idx="0">
+          <a:schemeClr val="accent1"/>
+        </a:fillRef>
+        <a:effectRef idx="1">
+          <a:schemeClr val="accent1"/>
+        </a:effectRef>
+        <a:fontRef idx="minor">
+          <a:schemeClr val="tx1"/>
+        </a:fontRef>
+      </a:style>
+    </a:lnDef>
+  </a:objectDefaults>
+  <a:extraClrSchemeLst/>
+</a:theme>
 </file>
--- a/protected-downloads/praesentation/M12.pptx
+++ b/protected-downloads/praesentation/M12.pptx
@@ -4307,7 +4307,7 @@
                 </a:solidFill>
                 <a:latin typeface="Arial"/>
               </a:rPr>
-              <a:t>Stratege</a:t>
+              <a:t>Strategischer Partner</a:t>
             </a:r>
           </a:p>
         </p:txBody>

--- a/protected-downloads/praesentation/M12.pptx
+++ b/protected-downloads/praesentation/M12.pptx
@@ -8,7 +8,7 @@
     <p:sldId id="256" r:id="rId7"/>
     <p:sldId id="257" r:id="rId8"/>
     <p:sldId id="258" r:id="rId9"/>
-    <p:sldId id="259" r:id="rId11"/>
+    <p:sldId id="259" r:id="rId10"/>
     <p:sldId id="260" r:id="rId12"/>
     <p:sldId id="261" r:id="rId13"/>
     <p:sldId id="262" r:id="rId14"/>
@@ -16,6 +16,7 @@
     <p:sldId id="264" r:id="rId16"/>
     <p:sldId id="265" r:id="rId17"/>
     <p:sldId id="266" r:id="rId18"/>
+    <p:sldId id="267" r:id="rId19"/>
   </p:sldIdLst>
   <p:sldSz cx="12188952" cy="6858000" type="screen4x3"/>
   <p:notesSz cx="6858000" cy="9144000"/>
@@ -4528,7 +4529,7 @@
             <a:avLst/>
           </a:prstGeom>
           <a:solidFill>
-            <a:srgbClr val="EDEDF3"/>
+            <a:srgbClr val="FFFFFF"/>
           </a:solidFill>
           <a:ln>
             <a:noFill/>
@@ -4629,51 +4630,43 @@
                 </a:solidFill>
                 <a:latin typeface="JetBrains Mono"/>
               </a:rPr>
-              <a:t>M12  ·  INHALT</a:t>
-            </a:r>
-          </a:p>
-        </p:txBody>
-      </p:sp>
-      <p:sp>
-        <p:nvSpPr>
-          <p:cNvPr id="5" name="Rectangle 4"/>
-          <p:cNvSpPr/>
-          <p:nvPr/>
-        </p:nvSpPr>
-        <p:spPr>
-          <a:xfrm>
-            <a:off x="0" y="1234440"/>
-            <a:ext cx="12188952" cy="12700"/>
-          </a:xfrm>
-          <a:prstGeom prst="rect">
-            <a:avLst/>
-          </a:prstGeom>
-          <a:solidFill>
-            <a:srgbClr val="D8DFE4"/>
-          </a:solidFill>
-          <a:ln>
-            <a:noFill/>
-          </a:ln>
-        </p:spPr>
-        <p:style>
-          <a:lnRef idx="1">
-            <a:schemeClr val="accent1"/>
-          </a:lnRef>
-          <a:fillRef idx="3">
-            <a:schemeClr val="accent1"/>
-          </a:fillRef>
-          <a:effectRef idx="2">
-            <a:schemeClr val="accent1"/>
-          </a:effectRef>
-          <a:fontRef idx="minor">
-            <a:schemeClr val="lt1"/>
-          </a:fontRef>
-        </p:style>
-        <p:txBody>
-          <a:bodyPr rtlCol="0" anchor="ctr"/>
-          <a:lstStyle/>
-          <a:p>
-            <a:pPr algn="ctr"/>
+              <a:t>M12  ·  SCHAUBILD</a:t>
+            </a:r>
+          </a:p>
+        </p:txBody>
+      </p:sp>
+      <p:sp>
+        <p:nvSpPr>
+          <p:cNvPr id="5" name="TextBox 4"/>
+          <p:cNvSpPr txBox="1"/>
+          <p:nvPr/>
+        </p:nvSpPr>
+        <p:spPr>
+          <a:xfrm>
+            <a:off x="685800" y="502920"/>
+            <a:ext cx="10817352" cy="594360"/>
+          </a:xfrm>
+          <a:prstGeom prst="rect">
+            <a:avLst/>
+          </a:prstGeom>
+          <a:noFill/>
+        </p:spPr>
+        <p:txBody>
+          <a:bodyPr wrap="square">
+            <a:spAutoFit/>
+          </a:bodyPr>
+          <a:lstStyle/>
+          <a:p>
+            <a:pPr algn="l"/>
+            <a:r>
+              <a:rPr sz="2000" b="1" i="0">
+                <a:solidFill>
+                  <a:srgbClr val="1F2C56"/>
+                </a:solidFill>
+                <a:latin typeface="Source Serif 4"/>
+              </a:rPr>
+              <a:t>Veränderungskurve nach Kübler-Ross</a:t>
+            </a:r>
           </a:p>
         </p:txBody>
       </p:sp>
@@ -4685,8 +4678,8 @@
         </p:nvSpPr>
         <p:spPr>
           <a:xfrm>
-            <a:off x="685800" y="502920"/>
-            <a:ext cx="36576" cy="658368"/>
+            <a:off x="685800" y="1143000"/>
+            <a:ext cx="10817352" cy="25400"/>
           </a:xfrm>
           <a:prstGeom prst="rect">
             <a:avLst/>
@@ -4720,295 +4713,33 @@
           </a:p>
         </p:txBody>
       </p:sp>
-      <p:sp>
-        <p:nvSpPr>
-          <p:cNvPr id="7" name="TextBox 6"/>
-          <p:cNvSpPr txBox="1"/>
-          <p:nvPr/>
-        </p:nvSpPr>
-        <p:spPr>
-          <a:xfrm>
-            <a:off x="813816" y="502920"/>
-            <a:ext cx="10634472" cy="685800"/>
-          </a:xfrm>
-          <a:prstGeom prst="rect">
-            <a:avLst/>
-          </a:prstGeom>
-          <a:noFill/>
-        </p:spPr>
-        <p:txBody>
-          <a:bodyPr wrap="square">
-            <a:spAutoFit/>
-          </a:bodyPr>
-          <a:lstStyle/>
-          <a:p>
-            <a:pPr algn="l"/>
-            <a:r>
-              <a:rPr sz="2400" b="1" i="0">
-                <a:solidFill>
-                  <a:srgbClr val="1F2C56"/>
-                </a:solidFill>
-                <a:latin typeface="Source Serif 4"/>
-              </a:rPr>
-              <a:t>Praxisfall: Metallverarbeitung Wagner KG, Stuttgart</a:t>
-            </a:r>
-          </a:p>
-        </p:txBody>
-      </p:sp>
-      <p:sp>
-        <p:nvSpPr>
-          <p:cNvPr id="8" name="TextBox 7"/>
-          <p:cNvSpPr txBox="1"/>
-          <p:nvPr/>
-        </p:nvSpPr>
-        <p:spPr>
-          <a:xfrm>
-            <a:off x="685800" y="1417320"/>
-            <a:ext cx="10817352" cy="5029200"/>
-          </a:xfrm>
-          <a:prstGeom prst="rect">
-            <a:avLst/>
-          </a:prstGeom>
-          <a:noFill/>
-        </p:spPr>
-        <p:txBody>
-          <a:bodyPr wrap="square">
-            <a:spAutoFit/>
-          </a:bodyPr>
-          <a:lstStyle/>
-          <a:p>
-            <a:pPr>
-              <a:spcBef>
-                <a:spcPts val="1000"/>
-              </a:spcBef>
-              <a:spcAft>
-                <a:spcPts val="200"/>
-              </a:spcAft>
-            </a:pPr>
-            <a:r>
-              <a:rPr sz="800" b="1">
-                <a:solidFill>
-                  <a:srgbClr val="78808C"/>
-                </a:solidFill>
-                <a:latin typeface="JetBrains Mono"/>
-              </a:rPr>
-              <a:t>UNTERNEHMENSPROFIL</a:t>
-            </a:r>
-          </a:p>
-          <a:p>
-            <a:pPr>
-              <a:spcBef>
-                <a:spcPts val="1000"/>
-              </a:spcBef>
-              <a:spcAft>
-                <a:spcPts val="200"/>
-              </a:spcAft>
-            </a:pPr>
-            <a:r>
-              <a:rPr sz="800" b="1">
-                <a:solidFill>
-                  <a:srgbClr val="78808C"/>
-                </a:solidFill>
-                <a:latin typeface="JetBrains Mono"/>
-              </a:rPr>
-              <a:t>AUSGANGSSITUATION</a:t>
-            </a:r>
-          </a:p>
-          <a:p>
-            <a:pPr>
-              <a:spcBef>
-                <a:spcPts val="1000"/>
-              </a:spcBef>
-              <a:spcAft>
-                <a:spcPts val="200"/>
-              </a:spcAft>
-            </a:pPr>
-            <a:r>
-              <a:rPr sz="800" b="1">
-                <a:solidFill>
-                  <a:srgbClr val="78808C"/>
-                </a:solidFill>
-                <a:latin typeface="JetBrains Mono"/>
-              </a:rPr>
-              <a:t>DIAGNOSTISCHE AUFGABEN FÜR CLAUDIA</a:t>
-            </a:r>
-          </a:p>
-          <a:p>
-            <a:pPr>
-              <a:spcBef>
-                <a:spcPts val="400"/>
-              </a:spcBef>
-              <a:spcAft>
-                <a:spcPts val="200"/>
-              </a:spcAft>
-            </a:pPr>
-            <a:r>
-              <a:rPr sz="1300">
-                <a:solidFill>
-                  <a:srgbClr val="3D5466"/>
-                </a:solidFill>
-                <a:latin typeface="Arial"/>
-              </a:rPr>
-              <a:t>▸  Emotionaler Zustand: Ist Karl müde, oder ist das eine echte Nachfolgekrise?</a:t>
-            </a:r>
-          </a:p>
-          <a:p>
-            <a:pPr>
-              <a:spcBef>
-                <a:spcPts val="400"/>
-              </a:spcBef>
-              <a:spcAft>
-                <a:spcPts val="200"/>
-              </a:spcAft>
-            </a:pPr>
-            <a:r>
-              <a:rPr sz="1300">
-                <a:solidFill>
-                  <a:srgbClr val="3D5466"/>
-                </a:solidFill>
-                <a:latin typeface="Arial"/>
-              </a:rPr>
-              <a:t>▸  Nachfolgepotenziale: Sind die Kinder wirklich ausgeschlossen, oder ist die Kommunikation schlecht?</a:t>
-            </a:r>
-          </a:p>
-          <a:p>
-            <a:pPr>
-              <a:spcBef>
-                <a:spcPts val="400"/>
-              </a:spcBef>
-              <a:spcAft>
-                <a:spcPts val="200"/>
-              </a:spcAft>
-            </a:pPr>
-            <a:r>
-              <a:rPr sz="1300">
-                <a:solidFill>
-                  <a:srgbClr val="3D5466"/>
-                </a:solidFill>
-                <a:latin typeface="Arial"/>
-              </a:rPr>
-              <a:t>▸  Alternativen: Wären MBO (Meister Dieter als Käufer) oder strategischer Verkauf denkbar?</a:t>
-            </a:r>
-          </a:p>
-          <a:p>
-            <a:pPr>
-              <a:spcBef>
-                <a:spcPts val="400"/>
-              </a:spcBef>
-              <a:spcAft>
-                <a:spcPts val="200"/>
-              </a:spcAft>
-            </a:pPr>
-            <a:r>
-              <a:rPr sz="1300">
-                <a:solidFill>
-                  <a:srgbClr val="3D5466"/>
-                </a:solidFill>
-                <a:latin typeface="Arial"/>
-              </a:rPr>
-              <a:t>▸  Finanzielle Lage: Ist das Unternehmen stabil genug für eine Nachfolgeplanung?</a:t>
-            </a:r>
-          </a:p>
-          <a:p>
-            <a:pPr>
-              <a:spcBef>
-                <a:spcPts val="400"/>
-              </a:spcBef>
-              <a:spcAft>
-                <a:spcPts val="200"/>
-              </a:spcAft>
-            </a:pPr>
-            <a:r>
-              <a:rPr sz="1300">
-                <a:solidFill>
-                  <a:srgbClr val="3D5466"/>
-                </a:solidFill>
-                <a:latin typeface="Arial"/>
-              </a:rPr>
-              <a:t>▸  Zeithorizont: Wie dringend ist das Thema (gesundheitliche Gründe? Burnout?)?</a:t>
-            </a:r>
-          </a:p>
-          <a:p>
-            <a:pPr>
-              <a:spcBef>
-                <a:spcPts val="1000"/>
-              </a:spcBef>
-              <a:spcAft>
-                <a:spcPts val="200"/>
-              </a:spcAft>
-            </a:pPr>
-            <a:r>
-              <a:rPr sz="800" b="1">
-                <a:solidFill>
-                  <a:srgbClr val="78808C"/>
-                </a:solidFill>
-                <a:latin typeface="JetBrains Mono"/>
-              </a:rPr>
-              <a:t>BEISPIEL-GESPRÄCHSVERLAUF (SYSTEMISCHE TECHNIK)</a:t>
-            </a:r>
-          </a:p>
-          <a:p>
-            <a:pPr>
-              <a:spcBef>
-                <a:spcPts val="400"/>
-              </a:spcBef>
-              <a:spcAft>
-                <a:spcPts val="200"/>
-              </a:spcAft>
-            </a:pPr>
-            <a:r>
-              <a:rPr sz="1200">
-                <a:solidFill>
-                  <a:srgbClr val="3D5466"/>
-                </a:solidFill>
-                <a:latin typeface="Arial"/>
-              </a:rPr>
-              <a:t>Karl: [Nickt]</a:t>
-            </a:r>
-          </a:p>
-          <a:p>
-            <a:pPr>
-              <a:spcBef>
-                <a:spcPts val="400"/>
-              </a:spcBef>
-              <a:spcAft>
-                <a:spcPts val="200"/>
-              </a:spcAft>
-            </a:pPr>
-            <a:r>
-              <a:rPr sz="1200">
-                <a:solidFill>
-                  <a:srgbClr val="3D5466"/>
-                </a:solidFill>
-                <a:latin typeface="Arial"/>
-              </a:rPr>
-              <a:t>Claudia: „Wenn Sie sagen ‚ich weiß nicht, wie ich das übergeben soll' – was ist das Größte daran, das Ihnen Sorge macht?"</a:t>
-            </a:r>
-          </a:p>
-          <a:p>
-            <a:pPr>
-              <a:spcBef>
-                <a:spcPts val="400"/>
-              </a:spcBef>
-              <a:spcAft>
-                <a:spcPts val="200"/>
-              </a:spcAft>
-            </a:pPr>
-            <a:r>
-              <a:rPr sz="1200">
-                <a:solidFill>
-                  <a:srgbClr val="3D5466"/>
-                </a:solidFill>
-                <a:latin typeface="Arial"/>
-              </a:rPr>
-              <a:t>Karl: „Dass das Unternehmen in schlechte Hände kommt. Meine Mitarbeiter sind wie meine Familie. Ich kann mir nicht vorstellen, dass jemand Fremdes einfach reinkommt und alles ändert."</a:t>
-            </a:r>
-          </a:p>
-        </p:txBody>
-      </p:sp>
-      <p:sp>
-        <p:nvSpPr>
-          <p:cNvPr id="9" name="Rectangle 8"/>
+      <p:pic>
+        <p:nvPicPr>
+          <p:cNvPr id="7" name="Picture 6" descr="image.png"/>
+          <p:cNvPicPr>
+            <a:picLocks noChangeAspect="1"/>
+          </p:cNvPicPr>
+          <p:nvPr/>
+        </p:nvPicPr>
+        <p:blipFill>
+          <a:blip r:embed="rId2"/>
+          <a:stretch>
+            <a:fillRect/>
+          </a:stretch>
+        </p:blipFill>
+        <p:spPr>
+          <a:xfrm>
+            <a:off x="2303489" y="1325880"/>
+            <a:ext cx="7581973" cy="4937760"/>
+          </a:xfrm>
+          <a:prstGeom prst="rect">
+            <a:avLst/>
+          </a:prstGeom>
+        </p:spPr>
+      </p:pic>
+      <p:sp>
+        <p:nvSpPr>
+          <p:cNvPr id="8" name="Rectangle 7"/>
           <p:cNvSpPr/>
           <p:nvPr/>
         </p:nvSpPr>
@@ -5051,7 +4782,7 @@
       </p:sp>
       <p:sp>
         <p:nvSpPr>
-          <p:cNvPr id="10" name="TextBox 9"/>
+          <p:cNvPr id="9" name="TextBox 8"/>
           <p:cNvSpPr txBox="1"/>
           <p:nvPr/>
         </p:nvSpPr>
@@ -5080,6 +4811,41 @@
                 <a:latin typeface="JetBrains Mono"/>
               </a:rPr>
               <a:t>Benedikt Zoller Coaching  ·  FKB Campus  ·  M12</a:t>
+            </a:r>
+          </a:p>
+        </p:txBody>
+      </p:sp>
+      <p:sp>
+        <p:nvSpPr>
+          <p:cNvPr id="10" name="TextBox 9"/>
+          <p:cNvSpPr txBox="1"/>
+          <p:nvPr/>
+        </p:nvSpPr>
+        <p:spPr>
+          <a:xfrm>
+            <a:off x="7176211" y="6583680"/>
+            <a:ext cx="4326940" cy="256032"/>
+          </a:xfrm>
+          <a:prstGeom prst="rect">
+            <a:avLst/>
+          </a:prstGeom>
+          <a:noFill/>
+        </p:spPr>
+        <p:txBody>
+          <a:bodyPr wrap="none">
+            <a:spAutoFit/>
+          </a:bodyPr>
+          <a:lstStyle/>
+          <a:p>
+            <a:pPr algn="r"/>
+            <a:r>
+              <a:rPr sz="700">
+                <a:solidFill>
+                  <a:srgbClr val="A0B4D2"/>
+                </a:solidFill>
+                <a:latin typeface="JetBrains Mono"/>
+              </a:rPr>
+              <a:t>Schaubild</a:t>
             </a:r>
           </a:p>
         </p:txBody>
@@ -5339,6 +5105,595 @@
                 </a:solidFill>
                 <a:latin typeface="Source Serif 4"/>
               </a:rPr>
+              <a:t>Praxisfall: Metallverarbeitung Wagner KG, Stuttgart</a:t>
+            </a:r>
+          </a:p>
+        </p:txBody>
+      </p:sp>
+      <p:sp>
+        <p:nvSpPr>
+          <p:cNvPr id="8" name="TextBox 7"/>
+          <p:cNvSpPr txBox="1"/>
+          <p:nvPr/>
+        </p:nvSpPr>
+        <p:spPr>
+          <a:xfrm>
+            <a:off x="685800" y="1417320"/>
+            <a:ext cx="10817352" cy="5029200"/>
+          </a:xfrm>
+          <a:prstGeom prst="rect">
+            <a:avLst/>
+          </a:prstGeom>
+          <a:noFill/>
+        </p:spPr>
+        <p:txBody>
+          <a:bodyPr wrap="square">
+            <a:spAutoFit/>
+          </a:bodyPr>
+          <a:lstStyle/>
+          <a:p>
+            <a:pPr>
+              <a:spcBef>
+                <a:spcPts val="1000"/>
+              </a:spcBef>
+              <a:spcAft>
+                <a:spcPts val="200"/>
+              </a:spcAft>
+            </a:pPr>
+            <a:r>
+              <a:rPr sz="800" b="1">
+                <a:solidFill>
+                  <a:srgbClr val="78808C"/>
+                </a:solidFill>
+                <a:latin typeface="JetBrains Mono"/>
+              </a:rPr>
+              <a:t>UNTERNEHMENSPROFIL</a:t>
+            </a:r>
+          </a:p>
+          <a:p>
+            <a:pPr>
+              <a:spcBef>
+                <a:spcPts val="1000"/>
+              </a:spcBef>
+              <a:spcAft>
+                <a:spcPts val="200"/>
+              </a:spcAft>
+            </a:pPr>
+            <a:r>
+              <a:rPr sz="800" b="1">
+                <a:solidFill>
+                  <a:srgbClr val="78808C"/>
+                </a:solidFill>
+                <a:latin typeface="JetBrains Mono"/>
+              </a:rPr>
+              <a:t>AUSGANGSSITUATION</a:t>
+            </a:r>
+          </a:p>
+          <a:p>
+            <a:pPr>
+              <a:spcBef>
+                <a:spcPts val="1000"/>
+              </a:spcBef>
+              <a:spcAft>
+                <a:spcPts val="200"/>
+              </a:spcAft>
+            </a:pPr>
+            <a:r>
+              <a:rPr sz="800" b="1">
+                <a:solidFill>
+                  <a:srgbClr val="78808C"/>
+                </a:solidFill>
+                <a:latin typeface="JetBrains Mono"/>
+              </a:rPr>
+              <a:t>DIAGNOSTISCHE AUFGABEN FÜR CLAUDIA</a:t>
+            </a:r>
+          </a:p>
+          <a:p>
+            <a:pPr>
+              <a:spcBef>
+                <a:spcPts val="400"/>
+              </a:spcBef>
+              <a:spcAft>
+                <a:spcPts val="200"/>
+              </a:spcAft>
+            </a:pPr>
+            <a:r>
+              <a:rPr sz="1300">
+                <a:solidFill>
+                  <a:srgbClr val="3D5466"/>
+                </a:solidFill>
+                <a:latin typeface="Arial"/>
+              </a:rPr>
+              <a:t>▸  Emotionaler Zustand: Ist Karl müde, oder ist das eine echte Nachfolgekrise?</a:t>
+            </a:r>
+          </a:p>
+          <a:p>
+            <a:pPr>
+              <a:spcBef>
+                <a:spcPts val="400"/>
+              </a:spcBef>
+              <a:spcAft>
+                <a:spcPts val="200"/>
+              </a:spcAft>
+            </a:pPr>
+            <a:r>
+              <a:rPr sz="1300">
+                <a:solidFill>
+                  <a:srgbClr val="3D5466"/>
+                </a:solidFill>
+                <a:latin typeface="Arial"/>
+              </a:rPr>
+              <a:t>▸  Nachfolgepotenziale: Sind die Kinder wirklich ausgeschlossen, oder ist die Kommunikation schlecht?</a:t>
+            </a:r>
+          </a:p>
+          <a:p>
+            <a:pPr>
+              <a:spcBef>
+                <a:spcPts val="400"/>
+              </a:spcBef>
+              <a:spcAft>
+                <a:spcPts val="200"/>
+              </a:spcAft>
+            </a:pPr>
+            <a:r>
+              <a:rPr sz="1300">
+                <a:solidFill>
+                  <a:srgbClr val="3D5466"/>
+                </a:solidFill>
+                <a:latin typeface="Arial"/>
+              </a:rPr>
+              <a:t>▸  Alternativen: Wären MBO (Meister Dieter als Käufer) oder strategischer Verkauf denkbar?</a:t>
+            </a:r>
+          </a:p>
+          <a:p>
+            <a:pPr>
+              <a:spcBef>
+                <a:spcPts val="400"/>
+              </a:spcBef>
+              <a:spcAft>
+                <a:spcPts val="200"/>
+              </a:spcAft>
+            </a:pPr>
+            <a:r>
+              <a:rPr sz="1300">
+                <a:solidFill>
+                  <a:srgbClr val="3D5466"/>
+                </a:solidFill>
+                <a:latin typeface="Arial"/>
+              </a:rPr>
+              <a:t>▸  Finanzielle Lage: Ist das Unternehmen stabil genug für eine Nachfolgeplanung?</a:t>
+            </a:r>
+          </a:p>
+          <a:p>
+            <a:pPr>
+              <a:spcBef>
+                <a:spcPts val="400"/>
+              </a:spcBef>
+              <a:spcAft>
+                <a:spcPts val="200"/>
+              </a:spcAft>
+            </a:pPr>
+            <a:r>
+              <a:rPr sz="1300">
+                <a:solidFill>
+                  <a:srgbClr val="3D5466"/>
+                </a:solidFill>
+                <a:latin typeface="Arial"/>
+              </a:rPr>
+              <a:t>▸  Zeithorizont: Wie dringend ist das Thema (gesundheitliche Gründe? Burnout?)?</a:t>
+            </a:r>
+          </a:p>
+          <a:p>
+            <a:pPr>
+              <a:spcBef>
+                <a:spcPts val="1000"/>
+              </a:spcBef>
+              <a:spcAft>
+                <a:spcPts val="200"/>
+              </a:spcAft>
+            </a:pPr>
+            <a:r>
+              <a:rPr sz="800" b="1">
+                <a:solidFill>
+                  <a:srgbClr val="78808C"/>
+                </a:solidFill>
+                <a:latin typeface="JetBrains Mono"/>
+              </a:rPr>
+              <a:t>BEISPIEL-GESPRÄCHSVERLAUF (SYSTEMISCHE TECHNIK)</a:t>
+            </a:r>
+          </a:p>
+          <a:p>
+            <a:pPr>
+              <a:spcBef>
+                <a:spcPts val="400"/>
+              </a:spcBef>
+              <a:spcAft>
+                <a:spcPts val="200"/>
+              </a:spcAft>
+            </a:pPr>
+            <a:r>
+              <a:rPr sz="1200">
+                <a:solidFill>
+                  <a:srgbClr val="3D5466"/>
+                </a:solidFill>
+                <a:latin typeface="Arial"/>
+              </a:rPr>
+              <a:t>Karl: [Nickt]</a:t>
+            </a:r>
+          </a:p>
+          <a:p>
+            <a:pPr>
+              <a:spcBef>
+                <a:spcPts val="400"/>
+              </a:spcBef>
+              <a:spcAft>
+                <a:spcPts val="200"/>
+              </a:spcAft>
+            </a:pPr>
+            <a:r>
+              <a:rPr sz="1200">
+                <a:solidFill>
+                  <a:srgbClr val="3D5466"/>
+                </a:solidFill>
+                <a:latin typeface="Arial"/>
+              </a:rPr>
+              <a:t>Claudia: „Wenn Sie sagen ‚ich weiß nicht, wie ich das übergeben soll' – was ist das Größte daran, das Ihnen Sorge macht?"</a:t>
+            </a:r>
+          </a:p>
+          <a:p>
+            <a:pPr>
+              <a:spcBef>
+                <a:spcPts val="400"/>
+              </a:spcBef>
+              <a:spcAft>
+                <a:spcPts val="200"/>
+              </a:spcAft>
+            </a:pPr>
+            <a:r>
+              <a:rPr sz="1200">
+                <a:solidFill>
+                  <a:srgbClr val="3D5466"/>
+                </a:solidFill>
+                <a:latin typeface="Arial"/>
+              </a:rPr>
+              <a:t>Karl: „Dass das Unternehmen in schlechte Hände kommt. Meine Mitarbeiter sind wie meine Familie. Ich kann mir nicht vorstellen, dass jemand Fremdes einfach reinkommt und alles ändert."</a:t>
+            </a:r>
+          </a:p>
+        </p:txBody>
+      </p:sp>
+      <p:sp>
+        <p:nvSpPr>
+          <p:cNvPr id="9" name="Rectangle 8"/>
+          <p:cNvSpPr/>
+          <p:nvPr/>
+        </p:nvSpPr>
+        <p:spPr>
+          <a:xfrm>
+            <a:off x="0" y="6510528"/>
+            <a:ext cx="12188952" cy="347472"/>
+          </a:xfrm>
+          <a:prstGeom prst="rect">
+            <a:avLst/>
+          </a:prstGeom>
+          <a:solidFill>
+            <a:srgbClr val="0A1937"/>
+          </a:solidFill>
+          <a:ln>
+            <a:noFill/>
+          </a:ln>
+        </p:spPr>
+        <p:style>
+          <a:lnRef idx="1">
+            <a:schemeClr val="accent1"/>
+          </a:lnRef>
+          <a:fillRef idx="3">
+            <a:schemeClr val="accent1"/>
+          </a:fillRef>
+          <a:effectRef idx="2">
+            <a:schemeClr val="accent1"/>
+          </a:effectRef>
+          <a:fontRef idx="minor">
+            <a:schemeClr val="lt1"/>
+          </a:fontRef>
+        </p:style>
+        <p:txBody>
+          <a:bodyPr rtlCol="0" anchor="ctr"/>
+          <a:lstStyle/>
+          <a:p>
+            <a:pPr algn="ctr"/>
+          </a:p>
+        </p:txBody>
+      </p:sp>
+      <p:sp>
+        <p:nvSpPr>
+          <p:cNvPr id="10" name="TextBox 9"/>
+          <p:cNvSpPr txBox="1"/>
+          <p:nvPr/>
+        </p:nvSpPr>
+        <p:spPr>
+          <a:xfrm>
+            <a:off x="685800" y="6583680"/>
+            <a:ext cx="6490411" cy="256032"/>
+          </a:xfrm>
+          <a:prstGeom prst="rect">
+            <a:avLst/>
+          </a:prstGeom>
+          <a:noFill/>
+        </p:spPr>
+        <p:txBody>
+          <a:bodyPr wrap="none">
+            <a:spAutoFit/>
+          </a:bodyPr>
+          <a:lstStyle/>
+          <a:p>
+            <a:pPr algn="l"/>
+            <a:r>
+              <a:rPr sz="700">
+                <a:solidFill>
+                  <a:srgbClr val="A0B4D2"/>
+                </a:solidFill>
+                <a:latin typeface="JetBrains Mono"/>
+              </a:rPr>
+              <a:t>Benedikt Zoller Coaching  ·  FKB Campus  ·  M12</a:t>
+            </a:r>
+          </a:p>
+        </p:txBody>
+      </p:sp>
+    </p:spTree>
+  </p:cSld>
+  <p:clrMapOvr>
+    <a:masterClrMapping/>
+  </p:clrMapOvr>
+</p:sld>
+</file>
+
+<file path=ppt/slides/slide12.xml><?xml version="1.0" encoding="utf-8"?>
+<p:sld xmlns:a="http://schemas.openxmlformats.org/drawingml/2006/main" xmlns:p="http://schemas.openxmlformats.org/presentationml/2006/main" xmlns:r="http://schemas.openxmlformats.org/officeDocument/2006/relationships">
+  <p:cSld>
+    <p:spTree>
+      <p:nvGrpSpPr>
+        <p:cNvPr id="1" name=""/>
+        <p:cNvGrpSpPr/>
+        <p:nvPr/>
+      </p:nvGrpSpPr>
+      <p:grpSpPr/>
+      <p:sp>
+        <p:nvSpPr>
+          <p:cNvPr id="2" name="Rectangle 1"/>
+          <p:cNvSpPr/>
+          <p:nvPr/>
+        </p:nvSpPr>
+        <p:spPr>
+          <a:xfrm>
+            <a:off x="0" y="0"/>
+            <a:ext cx="12188952" cy="6858000"/>
+          </a:xfrm>
+          <a:prstGeom prst="rect">
+            <a:avLst/>
+          </a:prstGeom>
+          <a:solidFill>
+            <a:srgbClr val="EDEDF3"/>
+          </a:solidFill>
+          <a:ln>
+            <a:noFill/>
+          </a:ln>
+        </p:spPr>
+        <p:style>
+          <a:lnRef idx="1">
+            <a:schemeClr val="accent1"/>
+          </a:lnRef>
+          <a:fillRef idx="3">
+            <a:schemeClr val="accent1"/>
+          </a:fillRef>
+          <a:effectRef idx="2">
+            <a:schemeClr val="accent1"/>
+          </a:effectRef>
+          <a:fontRef idx="minor">
+            <a:schemeClr val="lt1"/>
+          </a:fontRef>
+        </p:style>
+        <p:txBody>
+          <a:bodyPr rtlCol="0" anchor="ctr"/>
+          <a:lstStyle/>
+          <a:p>
+            <a:pPr algn="ctr"/>
+          </a:p>
+        </p:txBody>
+      </p:sp>
+      <p:sp>
+        <p:nvSpPr>
+          <p:cNvPr id="3" name="Rectangle 2"/>
+          <p:cNvSpPr/>
+          <p:nvPr/>
+        </p:nvSpPr>
+        <p:spPr>
+          <a:xfrm>
+            <a:off x="0" y="0"/>
+            <a:ext cx="12188952" cy="50292"/>
+          </a:xfrm>
+          <a:prstGeom prst="rect">
+            <a:avLst/>
+          </a:prstGeom>
+          <a:solidFill>
+            <a:srgbClr val="1F2C56"/>
+          </a:solidFill>
+          <a:ln>
+            <a:noFill/>
+          </a:ln>
+        </p:spPr>
+        <p:style>
+          <a:lnRef idx="1">
+            <a:schemeClr val="accent1"/>
+          </a:lnRef>
+          <a:fillRef idx="3">
+            <a:schemeClr val="accent1"/>
+          </a:fillRef>
+          <a:effectRef idx="2">
+            <a:schemeClr val="accent1"/>
+          </a:effectRef>
+          <a:fontRef idx="minor">
+            <a:schemeClr val="lt1"/>
+          </a:fontRef>
+        </p:style>
+        <p:txBody>
+          <a:bodyPr rtlCol="0" anchor="ctr"/>
+          <a:lstStyle/>
+          <a:p>
+            <a:pPr algn="ctr"/>
+          </a:p>
+        </p:txBody>
+      </p:sp>
+      <p:sp>
+        <p:nvSpPr>
+          <p:cNvPr id="4" name="TextBox 3"/>
+          <p:cNvSpPr txBox="1"/>
+          <p:nvPr/>
+        </p:nvSpPr>
+        <p:spPr>
+          <a:xfrm>
+            <a:off x="685800" y="109728"/>
+            <a:ext cx="10817352" cy="228600"/>
+          </a:xfrm>
+          <a:prstGeom prst="rect">
+            <a:avLst/>
+          </a:prstGeom>
+          <a:noFill/>
+        </p:spPr>
+        <p:txBody>
+          <a:bodyPr wrap="none">
+            <a:spAutoFit/>
+          </a:bodyPr>
+          <a:lstStyle/>
+          <a:p>
+            <a:pPr algn="l"/>
+            <a:r>
+              <a:rPr sz="750">
+                <a:solidFill>
+                  <a:srgbClr val="78808C"/>
+                </a:solidFill>
+                <a:latin typeface="JetBrains Mono"/>
+              </a:rPr>
+              <a:t>M12  ·  INHALT</a:t>
+            </a:r>
+          </a:p>
+        </p:txBody>
+      </p:sp>
+      <p:sp>
+        <p:nvSpPr>
+          <p:cNvPr id="5" name="Rectangle 4"/>
+          <p:cNvSpPr/>
+          <p:nvPr/>
+        </p:nvSpPr>
+        <p:spPr>
+          <a:xfrm>
+            <a:off x="0" y="1234440"/>
+            <a:ext cx="12188952" cy="12700"/>
+          </a:xfrm>
+          <a:prstGeom prst="rect">
+            <a:avLst/>
+          </a:prstGeom>
+          <a:solidFill>
+            <a:srgbClr val="D8DFE4"/>
+          </a:solidFill>
+          <a:ln>
+            <a:noFill/>
+          </a:ln>
+        </p:spPr>
+        <p:style>
+          <a:lnRef idx="1">
+            <a:schemeClr val="accent1"/>
+          </a:lnRef>
+          <a:fillRef idx="3">
+            <a:schemeClr val="accent1"/>
+          </a:fillRef>
+          <a:effectRef idx="2">
+            <a:schemeClr val="accent1"/>
+          </a:effectRef>
+          <a:fontRef idx="minor">
+            <a:schemeClr val="lt1"/>
+          </a:fontRef>
+        </p:style>
+        <p:txBody>
+          <a:bodyPr rtlCol="0" anchor="ctr"/>
+          <a:lstStyle/>
+          <a:p>
+            <a:pPr algn="ctr"/>
+          </a:p>
+        </p:txBody>
+      </p:sp>
+      <p:sp>
+        <p:nvSpPr>
+          <p:cNvPr id="6" name="Rectangle 5"/>
+          <p:cNvSpPr/>
+          <p:nvPr/>
+        </p:nvSpPr>
+        <p:spPr>
+          <a:xfrm>
+            <a:off x="685800" y="502920"/>
+            <a:ext cx="36576" cy="658368"/>
+          </a:xfrm>
+          <a:prstGeom prst="rect">
+            <a:avLst/>
+          </a:prstGeom>
+          <a:solidFill>
+            <a:srgbClr val="D9C089"/>
+          </a:solidFill>
+          <a:ln>
+            <a:noFill/>
+          </a:ln>
+        </p:spPr>
+        <p:style>
+          <a:lnRef idx="1">
+            <a:schemeClr val="accent1"/>
+          </a:lnRef>
+          <a:fillRef idx="3">
+            <a:schemeClr val="accent1"/>
+          </a:fillRef>
+          <a:effectRef idx="2">
+            <a:schemeClr val="accent1"/>
+          </a:effectRef>
+          <a:fontRef idx="minor">
+            <a:schemeClr val="lt1"/>
+          </a:fontRef>
+        </p:style>
+        <p:txBody>
+          <a:bodyPr rtlCol="0" anchor="ctr"/>
+          <a:lstStyle/>
+          <a:p>
+            <a:pPr algn="ctr"/>
+          </a:p>
+        </p:txBody>
+      </p:sp>
+      <p:sp>
+        <p:nvSpPr>
+          <p:cNvPr id="7" name="TextBox 6"/>
+          <p:cNvSpPr txBox="1"/>
+          <p:nvPr/>
+        </p:nvSpPr>
+        <p:spPr>
+          <a:xfrm>
+            <a:off x="813816" y="502920"/>
+            <a:ext cx="10634472" cy="685800"/>
+          </a:xfrm>
+          <a:prstGeom prst="rect">
+            <a:avLst/>
+          </a:prstGeom>
+          <a:noFill/>
+        </p:spPr>
+        <p:txBody>
+          <a:bodyPr wrap="square">
+            <a:spAutoFit/>
+          </a:bodyPr>
+          <a:lstStyle/>
+          <a:p>
+            <a:pPr algn="l"/>
+            <a:r>
+              <a:rPr sz="2400" b="1" i="0">
+                <a:solidFill>
+                  <a:srgbClr val="1F2C56"/>
+                </a:solidFill>
+                <a:latin typeface="Source Serif 4"/>
+              </a:rPr>
               <a:t>Arbeitsblatt: Nachfolge-Erstgespräch strukturieren</a:t>
             </a:r>
           </a:p>
@@ -5807,7 +6162,7 @@
                 </a:solidFill>
                 <a:latin typeface="JetBrains Mono"/>
               </a:rPr>
-              <a:t>LERNZIELE  ·  M12</a:t>
+              <a:t>ÜBERBLICK  ·  M12</a:t>
             </a:r>
           </a:p>
         </p:txBody>
@@ -5885,7 +6240,7 @@
                 </a:solidFill>
                 <a:latin typeface="Source Serif 4"/>
               </a:rPr>
-              <a:t>Was Sie heute mitnehmen</a:t>
+              <a:t>Worum geht es heute</a:t>
             </a:r>
           </a:p>
         </p:txBody>
@@ -5898,8 +6253,8 @@
         </p:nvSpPr>
         <p:spPr>
           <a:xfrm>
-            <a:off x="685800" y="1371600"/>
-            <a:ext cx="10817352" cy="5120640"/>
+            <a:off x="685800" y="1737360"/>
+            <a:ext cx="9720072" cy="4206240"/>
           </a:xfrm>
           <a:prstGeom prst="rect">
             <a:avLst/>
@@ -5913,97 +6268,50 @@
           <a:lstStyle/>
           <a:p>
             <a:pPr>
-              <a:spcBef>
-                <a:spcPts val="800"/>
-              </a:spcBef>
               <a:spcAft>
-                <a:spcPts val="200"/>
+                <a:spcPts val="1200"/>
               </a:spcAft>
             </a:pPr>
             <a:r>
-              <a:rPr sz="1400">
+              <a:rPr sz="1700">
                 <a:solidFill>
                   <a:srgbClr val="3D5466"/>
                 </a:solidFill>
                 <a:latin typeface="Arial"/>
               </a:rPr>
-              <a:t>▸  Psychologische und strategische Dimensionen eines CEO-Dialogs analysieren und zwischen Statusgefühlen, Kontrollbedarf und echten Strategiefragen unterscheiden</a:t>
+              <a:t>Bei der Unternehmensnachfolge geht es um Lebenswerke – wer hier nur Finanzierung anbietet, verliert den Kunden an den ersten Berater, der zuhört.</a:t>
             </a:r>
           </a:p>
           <a:p>
             <a:pPr>
-              <a:spcBef>
-                <a:spcPts val="800"/>
-              </a:spcBef>
               <a:spcAft>
-                <a:spcPts val="200"/>
+                <a:spcPts val="1200"/>
               </a:spcAft>
             </a:pPr>
             <a:r>
-              <a:rPr sz="1400">
+              <a:rPr sz="1700">
                 <a:solidFill>
                   <a:srgbClr val="3D5466"/>
                 </a:solidFill>
                 <a:latin typeface="Arial"/>
               </a:rPr>
-              <a:t>▸  Systemische und zirkuläre Fragetechniken einsetzen, um latente Zukunftsängste aufzudecken und psychologische Sicherheit herzustellen</a:t>
+              <a:t>Sie lernen die Phasen des Nachfolgeprozesses und die emotionale Dynamik dahinter kennen und trainieren den CEO-Dialog in einer Simulation mit externem Coach.</a:t>
             </a:r>
           </a:p>
           <a:p>
             <a:pPr>
-              <a:spcBef>
-                <a:spcPts val="800"/>
-              </a:spcBef>
               <a:spcAft>
-                <a:spcPts val="200"/>
+                <a:spcPts val="1200"/>
               </a:spcAft>
             </a:pPr>
             <a:r>
-              <a:rPr sz="1400">
+              <a:rPr sz="1700">
                 <a:solidFill>
                   <a:srgbClr val="3D5466"/>
                 </a:solidFill>
                 <a:latin typeface="Arial"/>
               </a:rPr>
-              <a:t>▸  Nachfolgeoptionen (familienintern, MBO, strategischer Verkauf, Stiftung) anhand von Unternehmensdaten und Unternehmerpersönlichkeit evaluieren und empfehlen</a:t>
-            </a:r>
-          </a:p>
-          <a:p>
-            <a:pPr>
-              <a:spcBef>
-                <a:spcPts val="800"/>
-              </a:spcBef>
-              <a:spcAft>
-                <a:spcPts val="200"/>
-              </a:spcAft>
-            </a:pPr>
-            <a:r>
-              <a:rPr sz="1400">
-                <a:solidFill>
-                  <a:srgbClr val="3D5466"/>
-                </a:solidFill>
-                <a:latin typeface="Arial"/>
-              </a:rPr>
-              <a:t>▸  Individualisiertes Nachfolgezeitkonzept (Roadmap 3–7 Jahre) mit Finanzierungs-, Steuer- und emotionalen Meilensteinen entwickeln</a:t>
-            </a:r>
-          </a:p>
-          <a:p>
-            <a:pPr>
-              <a:spcBef>
-                <a:spcPts val="800"/>
-              </a:spcBef>
-              <a:spcAft>
-                <a:spcPts val="200"/>
-              </a:spcAft>
-            </a:pPr>
-            <a:r>
-              <a:rPr sz="1400">
-                <a:solidFill>
-                  <a:srgbClr val="3D5466"/>
-                </a:solidFill>
-                <a:latin typeface="Arial"/>
-              </a:rPr>
-              <a:t>▸  Emotionale Bereitschaft eines Unternehmers zur Übergabe beurteilen und Loslasswiderstände konstruktiv adressieren</a:t>
+              <a:t>Danach begleiten Sie Nachfolgesituationen strukturiert und binden die richtigen Verbundpartner ein.</a:t>
             </a:r>
           </a:p>
         </p:txBody>
@@ -6220,7 +6528,7 @@
                 </a:solidFill>
                 <a:latin typeface="JetBrains Mono"/>
               </a:rPr>
-              <a:t>AGENDA  ·  M12</a:t>
+              <a:t>LERNZIELE  ·  M12</a:t>
             </a:r>
           </a:p>
         </p:txBody>
@@ -6298,7 +6606,7 @@
                 </a:solidFill>
                 <a:latin typeface="Source Serif 4"/>
               </a:rPr>
-              <a:t>Agenda</a:t>
+              <a:t>Was Sie heute mitnehmen</a:t>
             </a:r>
           </a:p>
         </p:txBody>
@@ -6311,8 +6619,8 @@
         </p:nvSpPr>
         <p:spPr>
           <a:xfrm>
-            <a:off x="685800" y="1463040"/>
-            <a:ext cx="10817352" cy="4937760"/>
+            <a:off x="685800" y="1371600"/>
+            <a:ext cx="10817352" cy="5120640"/>
           </a:xfrm>
           <a:prstGeom prst="rect">
             <a:avLst/>
@@ -6334,13 +6642,13 @@
               </a:spcAft>
             </a:pPr>
             <a:r>
-              <a:rPr sz="1500">
+              <a:rPr sz="1400">
                 <a:solidFill>
                   <a:srgbClr val="3D5466"/>
                 </a:solidFill>
                 <a:latin typeface="Arial"/>
               </a:rPr>
-              <a:t>01   Theorie-Input: Das CEO-Gespräch – Mindset und Vorbereitung</a:t>
+              <a:t>▸  Psychologische und strategische Dimensionen eines CEO-Dialogs analysieren und zwischen Statusgefühlen, Kontrollbedarf und echten Strategiefragen unterscheiden</a:t>
             </a:r>
           </a:p>
           <a:p>
@@ -6353,13 +6661,13 @@
               </a:spcAft>
             </a:pPr>
             <a:r>
-              <a:rPr sz="1500">
+              <a:rPr sz="1400">
                 <a:solidFill>
                   <a:srgbClr val="3D5466"/>
                 </a:solidFill>
                 <a:latin typeface="Arial"/>
               </a:rPr>
-              <a:t>02   Theorie-Input: Fragetechniken auf Strategieebene</a:t>
+              <a:t>▸  Systemische und zirkuläre Fragetechniken einsetzen, um latente Zukunftsängste aufzudecken und psychologische Sicherheit herzustellen</a:t>
             </a:r>
           </a:p>
           <a:p>
@@ -6372,13 +6680,13 @@
               </a:spcAft>
             </a:pPr>
             <a:r>
-              <a:rPr sz="1500">
+              <a:rPr sz="1400">
                 <a:solidFill>
                   <a:srgbClr val="3D5466"/>
                 </a:solidFill>
                 <a:latin typeface="Arial"/>
               </a:rPr>
-              <a:t>03   Theorie-Input: Nachfolge-Typen und Prozess im Überblick</a:t>
+              <a:t>▸  Nachfolgeoptionen (familienintern, MBO, strategischer Verkauf, Stiftung) anhand von Unternehmensdaten und Unternehmerpersönlichkeit evaluieren und empfehlen</a:t>
             </a:r>
           </a:p>
           <a:p>
@@ -6391,13 +6699,13 @@
               </a:spcAft>
             </a:pPr>
             <a:r>
-              <a:rPr sz="1500">
+              <a:rPr sz="1400">
                 <a:solidFill>
                   <a:srgbClr val="3D5466"/>
                 </a:solidFill>
                 <a:latin typeface="Arial"/>
               </a:rPr>
-              <a:t>04   Theorie-Input: Die emotionale Dimension der Nachfolge</a:t>
+              <a:t>▸  Individualisiertes Nachfolgezeitkonzept (Roadmap 3–7 Jahre) mit Finanzierungs-, Steuer- und emotionalen Meilensteinen entwickeln</a:t>
             </a:r>
           </a:p>
           <a:p>
@@ -6410,32 +6718,13 @@
               </a:spcAft>
             </a:pPr>
             <a:r>
-              <a:rPr sz="1500">
+              <a:rPr sz="1400">
                 <a:solidFill>
                   <a:srgbClr val="3D5466"/>
                 </a:solidFill>
                 <a:latin typeface="Arial"/>
               </a:rPr>
-              <a:t>05   Praxisfall: Metallverarbeitung Wagner KG, Stuttgart</a:t>
-            </a:r>
-          </a:p>
-          <a:p>
-            <a:pPr>
-              <a:spcBef>
-                <a:spcPts val="800"/>
-              </a:spcBef>
-              <a:spcAft>
-                <a:spcPts val="200"/>
-              </a:spcAft>
-            </a:pPr>
-            <a:r>
-              <a:rPr sz="1500">
-                <a:solidFill>
-                  <a:srgbClr val="3D5466"/>
-                </a:solidFill>
-                <a:latin typeface="Arial"/>
-              </a:rPr>
-              <a:t>06   Arbeitsblatt: Nachfolge-Erstgespräch strukturieren</a:t>
+              <a:t>▸  Emotionale Bereitschaft eines Unternehmers zur Übergabe beurteilen und Loslasswiderstände konstruktiv adressieren</a:t>
             </a:r>
           </a:p>
         </p:txBody>
@@ -6652,7 +6941,7 @@
                 </a:solidFill>
                 <a:latin typeface="JetBrains Mono"/>
               </a:rPr>
-              <a:t>M12  ·  INHALT</a:t>
+              <a:t>AGENDA  ·  M12</a:t>
             </a:r>
           </a:p>
         </p:txBody>
@@ -6702,57 +6991,14 @@
       </p:sp>
       <p:sp>
         <p:nvSpPr>
-          <p:cNvPr id="6" name="Rectangle 5"/>
-          <p:cNvSpPr/>
+          <p:cNvPr id="6" name="TextBox 5"/>
+          <p:cNvSpPr txBox="1"/>
           <p:nvPr/>
         </p:nvSpPr>
         <p:spPr>
           <a:xfrm>
             <a:off x="685800" y="502920"/>
-            <a:ext cx="36576" cy="658368"/>
-          </a:xfrm>
-          <a:prstGeom prst="rect">
-            <a:avLst/>
-          </a:prstGeom>
-          <a:solidFill>
-            <a:srgbClr val="D9C089"/>
-          </a:solidFill>
-          <a:ln>
-            <a:noFill/>
-          </a:ln>
-        </p:spPr>
-        <p:style>
-          <a:lnRef idx="1">
-            <a:schemeClr val="accent1"/>
-          </a:lnRef>
-          <a:fillRef idx="3">
-            <a:schemeClr val="accent1"/>
-          </a:fillRef>
-          <a:effectRef idx="2">
-            <a:schemeClr val="accent1"/>
-          </a:effectRef>
-          <a:fontRef idx="minor">
-            <a:schemeClr val="lt1"/>
-          </a:fontRef>
-        </p:style>
-        <p:txBody>
-          <a:bodyPr rtlCol="0" anchor="ctr"/>
-          <a:lstStyle/>
-          <a:p>
-            <a:pPr algn="ctr"/>
-          </a:p>
-        </p:txBody>
-      </p:sp>
-      <p:sp>
-        <p:nvSpPr>
-          <p:cNvPr id="7" name="TextBox 6"/>
-          <p:cNvSpPr txBox="1"/>
-          <p:nvPr/>
-        </p:nvSpPr>
-        <p:spPr>
-          <a:xfrm>
-            <a:off x="813816" y="502920"/>
-            <a:ext cx="10634472" cy="685800"/>
+            <a:ext cx="10817352" cy="658368"/>
           </a:xfrm>
           <a:prstGeom prst="rect">
             <a:avLst/>
@@ -6767,27 +7013,27 @@
           <a:p>
             <a:pPr algn="l"/>
             <a:r>
-              <a:rPr sz="2400" b="1" i="0">
+              <a:rPr sz="2600" b="1" i="0">
                 <a:solidFill>
                   <a:srgbClr val="1F2C56"/>
                 </a:solidFill>
                 <a:latin typeface="Source Serif 4"/>
               </a:rPr>
-              <a:t>Theorie-Input: Das CEO-Gespräch – Mindset und Vorbereitung</a:t>
-            </a:r>
-          </a:p>
-        </p:txBody>
-      </p:sp>
-      <p:sp>
-        <p:nvSpPr>
-          <p:cNvPr id="8" name="TextBox 7"/>
+              <a:t>Agenda</a:t>
+            </a:r>
+          </a:p>
+        </p:txBody>
+      </p:sp>
+      <p:sp>
+        <p:nvSpPr>
+          <p:cNvPr id="7" name="TextBox 6"/>
           <p:cNvSpPr txBox="1"/>
           <p:nvPr/>
         </p:nvSpPr>
         <p:spPr>
           <a:xfrm>
-            <a:off x="685800" y="1417320"/>
-            <a:ext cx="10817352" cy="5029200"/>
+            <a:off x="685800" y="1463040"/>
+            <a:ext cx="10817352" cy="4937760"/>
           </a:xfrm>
           <a:prstGeom prst="rect">
             <a:avLst/>
@@ -6802,217 +7048,122 @@
           <a:p>
             <a:pPr>
               <a:spcBef>
-                <a:spcPts val="1000"/>
+                <a:spcPts val="800"/>
               </a:spcBef>
               <a:spcAft>
                 <a:spcPts val="200"/>
               </a:spcAft>
             </a:pPr>
             <a:r>
-              <a:rPr sz="800" b="1">
-                <a:solidFill>
-                  <a:srgbClr val="78808C"/>
-                </a:solidFill>
-                <a:latin typeface="JetBrains Mono"/>
-              </a:rPr>
-              <a:t>DEN ERSTEN SCHRITT GEHEN: WIE INITIIERT MAN DAS CEO-GESPRÄCH BEI EINEM BESTANDSKUNDEN?</a:t>
+              <a:rPr sz="1500">
+                <a:solidFill>
+                  <a:srgbClr val="3D5466"/>
+                </a:solidFill>
+                <a:latin typeface="Arial"/>
+              </a:rPr>
+              <a:t>01   Theorie-Input: Das CEO-Gespräch – Mindset und Vorbereitung</a:t>
             </a:r>
           </a:p>
           <a:p>
             <a:pPr>
               <a:spcBef>
-                <a:spcPts val="400"/>
+                <a:spcPts val="800"/>
               </a:spcBef>
               <a:spcAft>
                 <a:spcPts val="200"/>
               </a:spcAft>
             </a:pPr>
             <a:r>
-              <a:rPr sz="1200">
+              <a:rPr sz="1500">
                 <a:solidFill>
                   <a:srgbClr val="3D5466"/>
                 </a:solidFill>
                 <a:latin typeface="Arial"/>
               </a:rPr>
-              <a:t>Drei bewährte Einstiegs-Anlässe:</a:t>
+              <a:t>02   Theorie-Input: Fragetechniken auf Strategieebene</a:t>
             </a:r>
           </a:p>
           <a:p>
             <a:pPr>
               <a:spcBef>
-                <a:spcPts val="1000"/>
+                <a:spcPts val="800"/>
               </a:spcBef>
               <a:spcAft>
                 <a:spcPts val="200"/>
               </a:spcAft>
             </a:pPr>
             <a:r>
-              <a:rPr sz="800" b="1">
-                <a:solidFill>
-                  <a:srgbClr val="78808C"/>
-                </a:solidFill>
-                <a:latin typeface="JetBrains Mono"/>
-              </a:rPr>
-              <a:t>PSYCHOLOGISCHE SICHERHEIT ALS GESPRÄCHSGRUNDLAGE</a:t>
+              <a:rPr sz="1500">
+                <a:solidFill>
+                  <a:srgbClr val="3D5466"/>
+                </a:solidFill>
+                <a:latin typeface="Arial"/>
+              </a:rPr>
+              <a:t>03   Theorie-Input: Nachfolge-Typen und Prozess im Überblick</a:t>
             </a:r>
           </a:p>
           <a:p>
             <a:pPr>
               <a:spcBef>
-                <a:spcPts val="400"/>
+                <a:spcPts val="800"/>
               </a:spcBef>
               <a:spcAft>
                 <a:spcPts val="200"/>
               </a:spcAft>
             </a:pPr>
             <a:r>
-              <a:rPr sz="1300">
+              <a:rPr sz="1500">
                 <a:solidFill>
                   <a:srgbClr val="3D5466"/>
                 </a:solidFill>
                 <a:latin typeface="Arial"/>
               </a:rPr>
-              <a:t>▸  Gleichwertigkeit: „Ich bin nicht hier, um Sie zu prüfen oder zu belehren, sondern um gemeinsam zu schauen, was für Ihre Zukunft sinnvoll ist."</a:t>
+              <a:t>04   Theorie-Input: Die emotionale Dimension der Nachfolge</a:t>
             </a:r>
           </a:p>
           <a:p>
             <a:pPr>
               <a:spcBef>
-                <a:spcPts val="400"/>
+                <a:spcPts val="800"/>
               </a:spcBef>
               <a:spcAft>
                 <a:spcPts val="200"/>
               </a:spcAft>
             </a:pPr>
             <a:r>
-              <a:rPr sz="1300">
+              <a:rPr sz="1500">
                 <a:solidFill>
                   <a:srgbClr val="3D5466"/>
                 </a:solidFill>
                 <a:latin typeface="Arial"/>
               </a:rPr>
-              <a:t>▸  Vertraulichkeit: „Was Sie mir anvertrauen, bleibt zwischen uns."</a:t>
+              <a:t>05   Praxisfall: Metallverarbeitung Wagner KG, Stuttgart</a:t>
             </a:r>
           </a:p>
           <a:p>
             <a:pPr>
               <a:spcBef>
-                <a:spcPts val="400"/>
+                <a:spcPts val="800"/>
               </a:spcBef>
               <a:spcAft>
                 <a:spcPts val="200"/>
               </a:spcAft>
             </a:pPr>
             <a:r>
-              <a:rPr sz="1300">
+              <a:rPr sz="1500">
                 <a:solidFill>
                   <a:srgbClr val="3D5466"/>
                 </a:solidFill>
                 <a:latin typeface="Arial"/>
               </a:rPr>
-              <a:t>▸  Kompetenz: Subtile Signale, dass der FK das Nachfolge-Thema ernst nimmt und Erfahrung hat.</a:t>
-            </a:r>
-          </a:p>
-          <a:p>
-            <a:pPr>
-              <a:spcBef>
-                <a:spcPts val="1000"/>
-              </a:spcBef>
-              <a:spcAft>
-                <a:spcPts val="200"/>
-              </a:spcAft>
-            </a:pPr>
-            <a:r>
-              <a:rPr sz="800" b="1">
-                <a:solidFill>
-                  <a:srgbClr val="78808C"/>
-                </a:solidFill>
-                <a:latin typeface="JetBrains Mono"/>
-              </a:rPr>
-              <a:t>DAS BOARD-ROOM-MINDSET</a:t>
-            </a:r>
-          </a:p>
-          <a:p>
-            <a:pPr>
-              <a:spcBef>
-                <a:spcPts val="400"/>
-              </a:spcBef>
-              <a:spcAft>
-                <a:spcPts val="200"/>
-              </a:spcAft>
-            </a:pPr>
-            <a:r>
-              <a:rPr sz="1300">
-                <a:solidFill>
-                  <a:srgbClr val="3D5466"/>
-                </a:solidFill>
-                <a:latin typeface="Arial"/>
-              </a:rPr>
-              <a:t>▸  Nicht unterordnend sprechen („Ich möchte ja nicht in Ihre Geschäfte reingrätschen, aber…") → stattdessen direkt: „Das habe ich in ähnlichen Fällen anders gesehen. Darf ich dazu eine Frage stellen?"</a:t>
-            </a:r>
-          </a:p>
-          <a:p>
-            <a:pPr>
-              <a:spcBef>
-                <a:spcPts val="400"/>
-              </a:spcBef>
-              <a:spcAft>
-                <a:spcPts val="200"/>
-              </a:spcAft>
-            </a:pPr>
-            <a:r>
-              <a:rPr sz="1300">
-                <a:solidFill>
-                  <a:srgbClr val="3D5466"/>
-                </a:solidFill>
-                <a:latin typeface="Arial"/>
-              </a:rPr>
-              <a:t>▸  Eigene Expertise einbringen ohne Demut: „Nachfolgen begleite ich seit Jahren. Wir sehen dabei Muster, die nicht sofort auffallen."</a:t>
-            </a:r>
-          </a:p>
-          <a:p>
-            <a:pPr>
-              <a:spcBef>
-                <a:spcPts val="400"/>
-              </a:spcBef>
-              <a:spcAft>
-                <a:spcPts val="200"/>
-              </a:spcAft>
-            </a:pPr>
-            <a:r>
-              <a:rPr sz="1300">
-                <a:solidFill>
-                  <a:srgbClr val="3D5466"/>
-                </a:solidFill>
-                <a:latin typeface="Arial"/>
-              </a:rPr>
-              <a:t>▸  Produktiven Widerspruch anbringen, wenn nötig: „Das ergibt für mich weniger Sinn, weil … Was denken Sie dazu?"</a:t>
-            </a:r>
-          </a:p>
-          <a:p>
-            <a:pPr>
-              <a:spcBef>
-                <a:spcPts val="1000"/>
-              </a:spcBef>
-              <a:spcAft>
-                <a:spcPts val="200"/>
-              </a:spcAft>
-            </a:pPr>
-            <a:r>
-              <a:rPr sz="800" b="1">
-                <a:solidFill>
-                  <a:srgbClr val="78808C"/>
-                </a:solidFill>
-                <a:latin typeface="JetBrains Mono"/>
-              </a:rPr>
-              <a:t>VORBEREITUNGS-CHECKLISTE FÜR DEN CEO-DIALOG</a:t>
-            </a:r>
-          </a:p>
-        </p:txBody>
-      </p:sp>
-      <p:sp>
-        <p:nvSpPr>
-          <p:cNvPr id="9" name="Rectangle 8"/>
+              <a:t>06   Arbeitsblatt: Nachfolge-Erstgespräch strukturieren</a:t>
+            </a:r>
+          </a:p>
+        </p:txBody>
+      </p:sp>
+      <p:sp>
+        <p:nvSpPr>
+          <p:cNvPr id="8" name="Rectangle 7"/>
           <p:cNvSpPr/>
           <p:nvPr/>
         </p:nvSpPr>
@@ -7055,7 +7206,7 @@
       </p:sp>
       <p:sp>
         <p:nvSpPr>
-          <p:cNvPr id="10" name="TextBox 9"/>
+          <p:cNvPr id="9" name="TextBox 8"/>
           <p:cNvSpPr txBox="1"/>
           <p:nvPr/>
         </p:nvSpPr>
@@ -7343,7 +7494,7 @@
                 </a:solidFill>
                 <a:latin typeface="Source Serif 4"/>
               </a:rPr>
-              <a:t>Theorie-Input: Fragetechniken auf Strategieebene</a:t>
+              <a:t>Theorie-Input: Das CEO-Gespräch – Mindset und Vorbereitung</a:t>
             </a:r>
           </a:p>
         </p:txBody>
@@ -7385,7 +7536,7 @@
                 </a:solidFill>
                 <a:latin typeface="JetBrains Mono"/>
               </a:rPr>
-              <a:t>SYSTEMISCHE FRAGEN (JENSEITS VON SPIN)</a:t>
+              <a:t>DEN ERSTEN SCHRITT GEHEN: WIE INITIIERT MAN DAS CEO-GESPRÄCH BEI EINEM BESTANDSKUNDEN?</a:t>
             </a:r>
           </a:p>
           <a:p>
@@ -7404,7 +7555,26 @@
                 </a:solidFill>
                 <a:latin typeface="Arial"/>
               </a:rPr>
-              <a:t>Systemische Fragen machen die Vernetzung von Elementen sichtbar:</a:t>
+              <a:t>Drei bewährte Einstiegs-Anlässe:</a:t>
+            </a:r>
+          </a:p>
+          <a:p>
+            <a:pPr>
+              <a:spcBef>
+                <a:spcPts val="1000"/>
+              </a:spcBef>
+              <a:spcAft>
+                <a:spcPts val="200"/>
+              </a:spcAft>
+            </a:pPr>
+            <a:r>
+              <a:rPr sz="800" b="1">
+                <a:solidFill>
+                  <a:srgbClr val="78808C"/>
+                </a:solidFill>
+                <a:latin typeface="JetBrains Mono"/>
+              </a:rPr>
+              <a:t>PSYCHOLOGISCHE SICHERHEIT ALS GESPRÄCHSGRUNDLAGE</a:t>
             </a:r>
           </a:p>
           <a:p>
@@ -7423,7 +7593,7 @@
                 </a:solidFill>
                 <a:latin typeface="Arial"/>
               </a:rPr>
-              <a:t>▸  „Wie hängt Ihre Nachfolgeplanung mit der Situation Ihrer Kinder zusammen?"</a:t>
+              <a:t>▸  Gleichwertigkeit: „Ich bin nicht hier, um Sie zu prüfen oder zu belehren, sondern um gemeinsam zu schauen, was für Ihre Zukunft sinnvoll ist."</a:t>
             </a:r>
           </a:p>
           <a:p>
@@ -7442,7 +7612,7 @@
                 </a:solidFill>
                 <a:latin typeface="Arial"/>
               </a:rPr>
-              <a:t>▸  „Welche Rolle spielt Ihr Unternehmen in Ihrem Selbstverständnis – und was würde sich ändern, wenn Sie es übergeben?"</a:t>
+              <a:t>▸  Vertraulichkeit: „Was Sie mir anvertrauen, bleibt zwischen uns."</a:t>
             </a:r>
           </a:p>
           <a:p>
@@ -7461,7 +7631,26 @@
                 </a:solidFill>
                 <a:latin typeface="Arial"/>
               </a:rPr>
-              <a:t>▸  „Welche Stakeholder (Mitarbeiter, Familie, Kunden, Bank) haben ein Interesse an einer Nachfolge – und wo könnte es Konflikte geben?"</a:t>
+              <a:t>▸  Kompetenz: Subtile Signale, dass der FK das Nachfolge-Thema ernst nimmt und Erfahrung hat.</a:t>
+            </a:r>
+          </a:p>
+          <a:p>
+            <a:pPr>
+              <a:spcBef>
+                <a:spcPts val="1000"/>
+              </a:spcBef>
+              <a:spcAft>
+                <a:spcPts val="200"/>
+              </a:spcAft>
+            </a:pPr>
+            <a:r>
+              <a:rPr sz="800" b="1">
+                <a:solidFill>
+                  <a:srgbClr val="78808C"/>
+                </a:solidFill>
+                <a:latin typeface="JetBrains Mono"/>
+              </a:rPr>
+              <a:t>DAS BOARD-ROOM-MINDSET</a:t>
             </a:r>
           </a:p>
           <a:p>
@@ -7474,13 +7663,13 @@
               </a:spcAft>
             </a:pPr>
             <a:r>
-              <a:rPr sz="1200">
+              <a:rPr sz="1300">
                 <a:solidFill>
                   <a:srgbClr val="3D5466"/>
                 </a:solidFill>
                 <a:latin typeface="Arial"/>
               </a:rPr>
-              <a:t>Zirkuläre Fragen (Penn, 1982 ) erforschen, wie andere den Unternehmer und sein Dilemma wahrnehmen:</a:t>
+              <a:t>▸  Nicht unterordnend sprechen („Ich möchte ja nicht in Ihre Geschäfte reingrätschen, aber…") → stattdessen direkt: „Das habe ich in ähnlichen Fällen anders gesehen. Darf ich dazu eine Frage stellen?"</a:t>
             </a:r>
           </a:p>
           <a:p>
@@ -7499,7 +7688,7 @@
                 </a:solidFill>
                 <a:latin typeface="Arial"/>
               </a:rPr>
-              <a:t>▸  „Wie würde Ihr ältester Sohn die aktuelle Situation beschreiben – denken Sie?"</a:t>
+              <a:t>▸  Eigene Expertise einbringen ohne Demut: „Nachfolgen begleite ich seit Jahren. Wir sehen dabei Muster, die nicht sofort auffallen."</a:t>
             </a:r>
           </a:p>
           <a:p>
@@ -7518,45 +7707,7 @@
                 </a:solidFill>
                 <a:latin typeface="Arial"/>
               </a:rPr>
-              <a:t>▸  „Was würde Ihr engster Mitarbeiter sagen, wenn ich ihn fragen würde, ob er eine Übergabe an Ihren Sohn für sinnvoll hält?"</a:t>
-            </a:r>
-          </a:p>
-          <a:p>
-            <a:pPr>
-              <a:spcBef>
-                <a:spcPts val="400"/>
-              </a:spcBef>
-              <a:spcAft>
-                <a:spcPts val="200"/>
-              </a:spcAft>
-            </a:pPr>
-            <a:r>
-              <a:rPr sz="1300">
-                <a:solidFill>
-                  <a:srgbClr val="3D5466"/>
-                </a:solidFill>
-                <a:latin typeface="Arial"/>
-              </a:rPr>
-              <a:t>▸  „Wenn wir in fünf Jahren hier säßen und Sie hätten die Nachfolge geregelt: Wie hätte Ihr Ehepartner den Prozess erlebt?"</a:t>
-            </a:r>
-          </a:p>
-          <a:p>
-            <a:pPr>
-              <a:spcBef>
-                <a:spcPts val="400"/>
-              </a:spcBef>
-              <a:spcAft>
-                <a:spcPts val="200"/>
-              </a:spcAft>
-            </a:pPr>
-            <a:r>
-              <a:rPr sz="1200">
-                <a:solidFill>
-                  <a:srgbClr val="3D5466"/>
-                </a:solidFill>
-                <a:latin typeface="Arial"/>
-              </a:rPr>
-              <a:t>Zirkuläre Fragen decken implizite Ängste und Blockaden auf, ohne direkt zu fragen: „Haben Sie Angst vor Kontrollverlust?"</a:t>
+              <a:t>▸  Produktiven Widerspruch anbringen, wenn nötig: „Das ergibt für mich weniger Sinn, weil … Was denken Sie dazu?"</a:t>
             </a:r>
           </a:p>
           <a:p>
@@ -7575,26 +7726,7 @@
                 </a:solidFill>
                 <a:latin typeface="JetBrains Mono"/>
               </a:rPr>
-              <a:t>LÖSUNGSORIENTIERTE ZUKUNFTSFRAGEN (DE SHAZER, 1985)</a:t>
-            </a:r>
-          </a:p>
-          <a:p>
-            <a:pPr>
-              <a:spcBef>
-                <a:spcPts val="400"/>
-              </a:spcBef>
-              <a:spcAft>
-                <a:spcPts val="200"/>
-              </a:spcAft>
-            </a:pPr>
-            <a:r>
-              <a:rPr sz="1200">
-                <a:solidFill>
-                  <a:srgbClr val="3D5466"/>
-                </a:solidFill>
-                <a:latin typeface="Arial"/>
-              </a:rPr>
-              <a:t>Die lösungsorientierte Gesprächsführung hilft, den Unternehmer aus Lähmung oder Verdrängung herauszuholen:</a:t>
+              <a:t>VORBEREITUNGS-CHECKLISTE FÜR DEN CEO-DIALOG</a:t>
             </a:r>
           </a:p>
         </p:txBody>
@@ -7932,7 +8064,7 @@
                 </a:solidFill>
                 <a:latin typeface="Source Serif 4"/>
               </a:rPr>
-              <a:t>Theorie-Input: Nachfolge-Typen und Prozess im Überblick</a:t>
+              <a:t>Theorie-Input: Fragetechniken auf Strategieebene</a:t>
             </a:r>
           </a:p>
         </p:txBody>
@@ -7974,7 +8106,178 @@
                 </a:solidFill>
                 <a:latin typeface="JetBrains Mono"/>
               </a:rPr>
-              <a:t>DIE VIER HAUPTNACHFOLGEARTEN</a:t>
+              <a:t>SYSTEMISCHE FRAGEN (JENSEITS VON SPIN)</a:t>
+            </a:r>
+          </a:p>
+          <a:p>
+            <a:pPr>
+              <a:spcBef>
+                <a:spcPts val="400"/>
+              </a:spcBef>
+              <a:spcAft>
+                <a:spcPts val="200"/>
+              </a:spcAft>
+            </a:pPr>
+            <a:r>
+              <a:rPr sz="1200">
+                <a:solidFill>
+                  <a:srgbClr val="3D5466"/>
+                </a:solidFill>
+                <a:latin typeface="Arial"/>
+              </a:rPr>
+              <a:t>Systemische Fragen machen die Vernetzung von Elementen sichtbar:</a:t>
+            </a:r>
+          </a:p>
+          <a:p>
+            <a:pPr>
+              <a:spcBef>
+                <a:spcPts val="400"/>
+              </a:spcBef>
+              <a:spcAft>
+                <a:spcPts val="200"/>
+              </a:spcAft>
+            </a:pPr>
+            <a:r>
+              <a:rPr sz="1300">
+                <a:solidFill>
+                  <a:srgbClr val="3D5466"/>
+                </a:solidFill>
+                <a:latin typeface="Arial"/>
+              </a:rPr>
+              <a:t>▸  „Wie hängt Ihre Nachfolgeplanung mit der Situation Ihrer Kinder zusammen?"</a:t>
+            </a:r>
+          </a:p>
+          <a:p>
+            <a:pPr>
+              <a:spcBef>
+                <a:spcPts val="400"/>
+              </a:spcBef>
+              <a:spcAft>
+                <a:spcPts val="200"/>
+              </a:spcAft>
+            </a:pPr>
+            <a:r>
+              <a:rPr sz="1300">
+                <a:solidFill>
+                  <a:srgbClr val="3D5466"/>
+                </a:solidFill>
+                <a:latin typeface="Arial"/>
+              </a:rPr>
+              <a:t>▸  „Welche Rolle spielt Ihr Unternehmen in Ihrem Selbstverständnis – und was würde sich ändern, wenn Sie es übergeben?"</a:t>
+            </a:r>
+          </a:p>
+          <a:p>
+            <a:pPr>
+              <a:spcBef>
+                <a:spcPts val="400"/>
+              </a:spcBef>
+              <a:spcAft>
+                <a:spcPts val="200"/>
+              </a:spcAft>
+            </a:pPr>
+            <a:r>
+              <a:rPr sz="1300">
+                <a:solidFill>
+                  <a:srgbClr val="3D5466"/>
+                </a:solidFill>
+                <a:latin typeface="Arial"/>
+              </a:rPr>
+              <a:t>▸  „Welche Stakeholder (Mitarbeiter, Familie, Kunden, Bank) haben ein Interesse an einer Nachfolge – und wo könnte es Konflikte geben?"</a:t>
+            </a:r>
+          </a:p>
+          <a:p>
+            <a:pPr>
+              <a:spcBef>
+                <a:spcPts val="400"/>
+              </a:spcBef>
+              <a:spcAft>
+                <a:spcPts val="200"/>
+              </a:spcAft>
+            </a:pPr>
+            <a:r>
+              <a:rPr sz="1200">
+                <a:solidFill>
+                  <a:srgbClr val="3D5466"/>
+                </a:solidFill>
+                <a:latin typeface="Arial"/>
+              </a:rPr>
+              <a:t>Zirkuläre Fragen (Penn, 1982 ) erforschen, wie andere den Unternehmer und sein Dilemma wahrnehmen:</a:t>
+            </a:r>
+          </a:p>
+          <a:p>
+            <a:pPr>
+              <a:spcBef>
+                <a:spcPts val="400"/>
+              </a:spcBef>
+              <a:spcAft>
+                <a:spcPts val="200"/>
+              </a:spcAft>
+            </a:pPr>
+            <a:r>
+              <a:rPr sz="1300">
+                <a:solidFill>
+                  <a:srgbClr val="3D5466"/>
+                </a:solidFill>
+                <a:latin typeface="Arial"/>
+              </a:rPr>
+              <a:t>▸  „Wie würde Ihr ältester Sohn die aktuelle Situation beschreiben – denken Sie?"</a:t>
+            </a:r>
+          </a:p>
+          <a:p>
+            <a:pPr>
+              <a:spcBef>
+                <a:spcPts val="400"/>
+              </a:spcBef>
+              <a:spcAft>
+                <a:spcPts val="200"/>
+              </a:spcAft>
+            </a:pPr>
+            <a:r>
+              <a:rPr sz="1300">
+                <a:solidFill>
+                  <a:srgbClr val="3D5466"/>
+                </a:solidFill>
+                <a:latin typeface="Arial"/>
+              </a:rPr>
+              <a:t>▸  „Was würde Ihr engster Mitarbeiter sagen, wenn ich ihn fragen würde, ob er eine Übergabe an Ihren Sohn für sinnvoll hält?"</a:t>
+            </a:r>
+          </a:p>
+          <a:p>
+            <a:pPr>
+              <a:spcBef>
+                <a:spcPts val="400"/>
+              </a:spcBef>
+              <a:spcAft>
+                <a:spcPts val="200"/>
+              </a:spcAft>
+            </a:pPr>
+            <a:r>
+              <a:rPr sz="1300">
+                <a:solidFill>
+                  <a:srgbClr val="3D5466"/>
+                </a:solidFill>
+                <a:latin typeface="Arial"/>
+              </a:rPr>
+              <a:t>▸  „Wenn wir in fünf Jahren hier säßen und Sie hätten die Nachfolge geregelt: Wie hätte Ihr Ehepartner den Prozess erlebt?"</a:t>
+            </a:r>
+          </a:p>
+          <a:p>
+            <a:pPr>
+              <a:spcBef>
+                <a:spcPts val="400"/>
+              </a:spcBef>
+              <a:spcAft>
+                <a:spcPts val="200"/>
+              </a:spcAft>
+            </a:pPr>
+            <a:r>
+              <a:rPr sz="1200">
+                <a:solidFill>
+                  <a:srgbClr val="3D5466"/>
+                </a:solidFill>
+                <a:latin typeface="Arial"/>
+              </a:rPr>
+              <a:t>Zirkuläre Fragen decken implizite Ängste und Blockaden auf, ohne direkt zu fragen: „Haben Sie Angst vor Kontrollverlust?"</a:t>
             </a:r>
           </a:p>
           <a:p>
@@ -7993,7 +8296,7 @@
                 </a:solidFill>
                 <a:latin typeface="JetBrains Mono"/>
               </a:rPr>
-              <a:t>NACHFOLGEPROZESS – FÜNF PHASEN</a:t>
+              <a:t>LÖSUNGSORIENTIERTE ZUKUNFTSFRAGEN (DE SHAZER, 1985)</a:t>
             </a:r>
           </a:p>
           <a:p>
@@ -8012,178 +8315,7 @@
                 </a:solidFill>
                 <a:latin typeface="Arial"/>
               </a:rPr>
-              <a:t>Erfolgreiche Unternehmernachfolgen benötigen empirisch 3–7 Jahre Vorlaufzeit (IfM Bonn, 2016 ):</a:t>
-            </a:r>
-          </a:p>
-          <a:p>
-            <a:pPr>
-              <a:spcBef>
-                <a:spcPts val="1000"/>
-              </a:spcBef>
-              <a:spcAft>
-                <a:spcPts val="200"/>
-              </a:spcAft>
-            </a:pPr>
-            <a:r>
-              <a:rPr sz="800" b="1">
-                <a:solidFill>
-                  <a:srgbClr val="78808C"/>
-                </a:solidFill>
-                <a:latin typeface="JetBrains Mono"/>
-              </a:rPr>
-              <a:t>REGULATORISCHE ECKPUNKTE (ORIENTIERUNGSRAHMEN)</a:t>
-            </a:r>
-          </a:p>
-          <a:p>
-            <a:pPr>
-              <a:spcBef>
-                <a:spcPts val="400"/>
-              </a:spcBef>
-              <a:spcAft>
-                <a:spcPts val="200"/>
-              </a:spcAft>
-            </a:pPr>
-            <a:r>
-              <a:rPr sz="1200">
-                <a:solidFill>
-                  <a:srgbClr val="3D5466"/>
-                </a:solidFill>
-                <a:latin typeface="Arial"/>
-              </a:rPr>
-              <a:t>Der FK zeigt dem Unternehmer die wichtigsten Felder auf und verweist an Spezialisten:</a:t>
-            </a:r>
-          </a:p>
-          <a:p>
-            <a:pPr>
-              <a:spcBef>
-                <a:spcPts val="400"/>
-              </a:spcBef>
-              <a:spcAft>
-                <a:spcPts val="200"/>
-              </a:spcAft>
-            </a:pPr>
-            <a:r>
-              <a:rPr sz="1300">
-                <a:solidFill>
-                  <a:srgbClr val="3D5466"/>
-                </a:solidFill>
-                <a:latin typeface="Arial"/>
-              </a:rPr>
-              <a:t>▸  Erbschaftsteuer / Schenkungsteuer: § 13a ErbStG regelt die Begünstigungen für Betriebsvermögen bei familieninterner Übergabe (Verschonungsabschlag 85 %; Optionsverschonung 100 %; Behaltensfristen 5 bzw. 7 Jahre). Der persönliche Freibetrag nach § 16 Abs. 1 Nr. 2 ErbStG beträgt 400.000 EUR je Elternteil und je Kind – d.h. ein Kind kann im Erbfall von beiden Elternteilen zusammen bis zu 800.000 EUR steuerfrei erhalten. Wichtig: Dieser Freibetrag kann alle 10 Jahre erneut genutzt werden – eine schrittweise Schenkung über mehrere Jahre kann daher steuerlich deutlich günstiger sein als eine Einmal-Übertragung. Hinweis: Diese Orientierungsinformation ersetzt keine steuerrechtliche Beratung – stets Steuerberater einbinden.</a:t>
-            </a:r>
-          </a:p>
-          <a:p>
-            <a:pPr>
-              <a:spcBef>
-                <a:spcPts val="400"/>
-              </a:spcBef>
-              <a:spcAft>
-                <a:spcPts val="200"/>
-              </a:spcAft>
-            </a:pPr>
-            <a:r>
-              <a:rPr sz="1300">
-                <a:solidFill>
-                  <a:srgbClr val="3D5466"/>
-                </a:solidFill>
-                <a:latin typeface="Arial"/>
-              </a:rPr>
-              <a:t>▸  Gesellschaftsrechtliche Fragen (GmbH-G, HGB): Sind Gesellschafterverträge aktuell? Gibt es Vorkaufsrechte?</a:t>
-            </a:r>
-          </a:p>
-          <a:p>
-            <a:pPr>
-              <a:spcBef>
-                <a:spcPts val="600"/>
-              </a:spcBef>
-              <a:spcAft>
-                <a:spcPts val="200"/>
-              </a:spcAft>
-            </a:pPr>
-            <a:r>
-              <a:rPr sz="1200" i="1">
-                <a:solidFill>
-                  <a:srgbClr val="3D5466"/>
-                </a:solidFill>
-                <a:latin typeface="Arial"/>
-              </a:rPr>
-              <a:t>→  Praxishinweis: Der Steuerberater als Gatekeeper</a:t>
-            </a:r>
-          </a:p>
-          <a:p>
-            <a:pPr>
-              <a:spcBef>
-                <a:spcPts val="600"/>
-              </a:spcBef>
-              <a:spcAft>
-                <a:spcPts val="200"/>
-              </a:spcAft>
-            </a:pPr>
-            <a:r>
-              <a:rPr sz="1200" i="1">
-                <a:solidFill>
-                  <a:srgbClr val="3D5466"/>
-                </a:solidFill>
-                <a:latin typeface="Arial"/>
-              </a:rPr>
-              <a:t>→  Strategische Partnerschaft statt Konkurrenz:</a:t>
-            </a:r>
-          </a:p>
-          <a:p>
-            <a:pPr>
-              <a:spcBef>
-                <a:spcPts val="600"/>
-              </a:spcBef>
-              <a:spcAft>
-                <a:spcPts val="200"/>
-              </a:spcAft>
-            </a:pPr>
-            <a:r>
-              <a:rPr sz="1200" i="1">
-                <a:solidFill>
-                  <a:srgbClr val="3D5466"/>
-                </a:solidFill>
-                <a:latin typeface="Arial"/>
-              </a:rPr>
-              <a:t>→  - Gemeinsame Termine mit Steuerberater und Kunden als Stärke positionieren, nicht als Verlust von Kontrolle</a:t>
-            </a:r>
-          </a:p>
-          <a:p>
-            <a:pPr>
-              <a:spcBef>
-                <a:spcPts val="600"/>
-              </a:spcBef>
-              <a:spcAft>
-                <a:spcPts val="200"/>
-              </a:spcAft>
-            </a:pPr>
-            <a:r>
-              <a:rPr sz="1200" i="1">
-                <a:solidFill>
-                  <a:srgbClr val="3D5466"/>
-                </a:solidFill>
-                <a:latin typeface="Arial"/>
-              </a:rPr>
-              <a:t>→  - Dem Steuerberater nützliche Informationen geben (Finanzierbarkeits-Check), ohne das Mandat anzutasten</a:t>
-            </a:r>
-          </a:p>
-          <a:p>
-            <a:pPr>
-              <a:spcBef>
-                <a:spcPts val="600"/>
-              </a:spcBef>
-              <a:spcAft>
-                <a:spcPts val="200"/>
-              </a:spcAft>
-            </a:pPr>
-            <a:r>
-              <a:rPr sz="1200" i="1">
-                <a:solidFill>
-                  <a:srgbClr val="3D5466"/>
-                </a:solidFill>
-                <a:latin typeface="Arial"/>
-              </a:rPr>
-              <a:t>→  - Aufbau einer längerfristigen Beziehung: Steuerberater im Kammerbezirk kennenlernen, z.B. über IHK-Veranstaltungen oder gemeinsame Unternehmer-Foren</a:t>
+              <a:t>Die lösungsorientierte Gesprächsführung hilft, den Unternehmer aus Lähmung oder Verdrängung herauszuholen:</a:t>
             </a:r>
           </a:p>
         </p:txBody>
@@ -8299,7 +8431,7 @@
             <a:avLst/>
           </a:prstGeom>
           <a:solidFill>
-            <a:srgbClr val="FFFFFF"/>
+            <a:srgbClr val="EDEDF3"/>
           </a:solidFill>
           <a:ln>
             <a:noFill/>
@@ -8400,43 +8532,51 @@
                 </a:solidFill>
                 <a:latin typeface="JetBrains Mono"/>
               </a:rPr>
-              <a:t>M12  ·  SCHAUBILD</a:t>
-            </a:r>
-          </a:p>
-        </p:txBody>
-      </p:sp>
-      <p:sp>
-        <p:nvSpPr>
-          <p:cNvPr id="5" name="TextBox 4"/>
-          <p:cNvSpPr txBox="1"/>
-          <p:nvPr/>
-        </p:nvSpPr>
-        <p:spPr>
-          <a:xfrm>
-            <a:off x="685800" y="502920"/>
-            <a:ext cx="10817352" cy="594360"/>
-          </a:xfrm>
-          <a:prstGeom prst="rect">
-            <a:avLst/>
-          </a:prstGeom>
-          <a:noFill/>
-        </p:spPr>
-        <p:txBody>
-          <a:bodyPr wrap="square">
-            <a:spAutoFit/>
-          </a:bodyPr>
-          <a:lstStyle/>
-          <a:p>
-            <a:pPr algn="l"/>
-            <a:r>
-              <a:rPr sz="2000" b="1" i="0">
-                <a:solidFill>
-                  <a:srgbClr val="1F2C56"/>
-                </a:solidFill>
-                <a:latin typeface="Source Serif 4"/>
-              </a:rPr>
-              <a:t>Nachfolge-Phasenmodell</a:t>
-            </a:r>
+              <a:t>M12  ·  INHALT</a:t>
+            </a:r>
+          </a:p>
+        </p:txBody>
+      </p:sp>
+      <p:sp>
+        <p:nvSpPr>
+          <p:cNvPr id="5" name="Rectangle 4"/>
+          <p:cNvSpPr/>
+          <p:nvPr/>
+        </p:nvSpPr>
+        <p:spPr>
+          <a:xfrm>
+            <a:off x="0" y="1234440"/>
+            <a:ext cx="12188952" cy="12700"/>
+          </a:xfrm>
+          <a:prstGeom prst="rect">
+            <a:avLst/>
+          </a:prstGeom>
+          <a:solidFill>
+            <a:srgbClr val="D8DFE4"/>
+          </a:solidFill>
+          <a:ln>
+            <a:noFill/>
+          </a:ln>
+        </p:spPr>
+        <p:style>
+          <a:lnRef idx="1">
+            <a:schemeClr val="accent1"/>
+          </a:lnRef>
+          <a:fillRef idx="3">
+            <a:schemeClr val="accent1"/>
+          </a:fillRef>
+          <a:effectRef idx="2">
+            <a:schemeClr val="accent1"/>
+          </a:effectRef>
+          <a:fontRef idx="minor">
+            <a:schemeClr val="lt1"/>
+          </a:fontRef>
+        </p:style>
+        <p:txBody>
+          <a:bodyPr rtlCol="0" anchor="ctr"/>
+          <a:lstStyle/>
+          <a:p>
+            <a:pPr algn="ctr"/>
           </a:p>
         </p:txBody>
       </p:sp>
@@ -8448,8 +8588,8 @@
         </p:nvSpPr>
         <p:spPr>
           <a:xfrm>
-            <a:off x="685800" y="1143000"/>
-            <a:ext cx="10817352" cy="25400"/>
+            <a:off x="685800" y="502920"/>
+            <a:ext cx="36576" cy="658368"/>
           </a:xfrm>
           <a:prstGeom prst="rect">
             <a:avLst/>
@@ -8483,33 +8623,295 @@
           </a:p>
         </p:txBody>
       </p:sp>
-      <p:pic>
-        <p:nvPicPr>
-          <p:cNvPr id="7" name="Picture 6" descr="image.png"/>
-          <p:cNvPicPr>
-            <a:picLocks noChangeAspect="1"/>
-          </p:cNvPicPr>
-          <p:nvPr/>
-        </p:nvPicPr>
-        <p:blipFill>
-          <a:blip r:embed="rId2"/>
-          <a:stretch>
-            <a:fillRect/>
-          </a:stretch>
-        </p:blipFill>
-        <p:spPr>
-          <a:xfrm>
-            <a:off x="2163921" y="1325880"/>
-            <a:ext cx="7861110" cy="4937760"/>
-          </a:xfrm>
-          <a:prstGeom prst="rect">
-            <a:avLst/>
-          </a:prstGeom>
-        </p:spPr>
-      </p:pic>
-      <p:sp>
-        <p:nvSpPr>
-          <p:cNvPr id="8" name="Rectangle 7"/>
+      <p:sp>
+        <p:nvSpPr>
+          <p:cNvPr id="7" name="TextBox 6"/>
+          <p:cNvSpPr txBox="1"/>
+          <p:nvPr/>
+        </p:nvSpPr>
+        <p:spPr>
+          <a:xfrm>
+            <a:off x="813816" y="502920"/>
+            <a:ext cx="10634472" cy="685800"/>
+          </a:xfrm>
+          <a:prstGeom prst="rect">
+            <a:avLst/>
+          </a:prstGeom>
+          <a:noFill/>
+        </p:spPr>
+        <p:txBody>
+          <a:bodyPr wrap="square">
+            <a:spAutoFit/>
+          </a:bodyPr>
+          <a:lstStyle/>
+          <a:p>
+            <a:pPr algn="l"/>
+            <a:r>
+              <a:rPr sz="2400" b="1" i="0">
+                <a:solidFill>
+                  <a:srgbClr val="1F2C56"/>
+                </a:solidFill>
+                <a:latin typeface="Source Serif 4"/>
+              </a:rPr>
+              <a:t>Theorie-Input: Nachfolge-Typen und Prozess im Überblick</a:t>
+            </a:r>
+          </a:p>
+        </p:txBody>
+      </p:sp>
+      <p:sp>
+        <p:nvSpPr>
+          <p:cNvPr id="8" name="TextBox 7"/>
+          <p:cNvSpPr txBox="1"/>
+          <p:nvPr/>
+        </p:nvSpPr>
+        <p:spPr>
+          <a:xfrm>
+            <a:off x="685800" y="1417320"/>
+            <a:ext cx="10817352" cy="5029200"/>
+          </a:xfrm>
+          <a:prstGeom prst="rect">
+            <a:avLst/>
+          </a:prstGeom>
+          <a:noFill/>
+        </p:spPr>
+        <p:txBody>
+          <a:bodyPr wrap="square">
+            <a:spAutoFit/>
+          </a:bodyPr>
+          <a:lstStyle/>
+          <a:p>
+            <a:pPr>
+              <a:spcBef>
+                <a:spcPts val="1000"/>
+              </a:spcBef>
+              <a:spcAft>
+                <a:spcPts val="200"/>
+              </a:spcAft>
+            </a:pPr>
+            <a:r>
+              <a:rPr sz="800" b="1">
+                <a:solidFill>
+                  <a:srgbClr val="78808C"/>
+                </a:solidFill>
+                <a:latin typeface="JetBrains Mono"/>
+              </a:rPr>
+              <a:t>DIE VIER HAUPTNACHFOLGEARTEN</a:t>
+            </a:r>
+          </a:p>
+          <a:p>
+            <a:pPr>
+              <a:spcBef>
+                <a:spcPts val="1000"/>
+              </a:spcBef>
+              <a:spcAft>
+                <a:spcPts val="200"/>
+              </a:spcAft>
+            </a:pPr>
+            <a:r>
+              <a:rPr sz="800" b="1">
+                <a:solidFill>
+                  <a:srgbClr val="78808C"/>
+                </a:solidFill>
+                <a:latin typeface="JetBrains Mono"/>
+              </a:rPr>
+              <a:t>NACHFOLGEPROZESS – FÜNF PHASEN</a:t>
+            </a:r>
+          </a:p>
+          <a:p>
+            <a:pPr>
+              <a:spcBef>
+                <a:spcPts val="400"/>
+              </a:spcBef>
+              <a:spcAft>
+                <a:spcPts val="200"/>
+              </a:spcAft>
+            </a:pPr>
+            <a:r>
+              <a:rPr sz="1200">
+                <a:solidFill>
+                  <a:srgbClr val="3D5466"/>
+                </a:solidFill>
+                <a:latin typeface="Arial"/>
+              </a:rPr>
+              <a:t>Erfolgreiche Unternehmernachfolgen benötigen empirisch 3–7 Jahre Vorlaufzeit (IfM Bonn, 2016 ):</a:t>
+            </a:r>
+          </a:p>
+          <a:p>
+            <a:pPr>
+              <a:spcBef>
+                <a:spcPts val="1000"/>
+              </a:spcBef>
+              <a:spcAft>
+                <a:spcPts val="200"/>
+              </a:spcAft>
+            </a:pPr>
+            <a:r>
+              <a:rPr sz="800" b="1">
+                <a:solidFill>
+                  <a:srgbClr val="78808C"/>
+                </a:solidFill>
+                <a:latin typeface="JetBrains Mono"/>
+              </a:rPr>
+              <a:t>REGULATORISCHE ECKPUNKTE (ORIENTIERUNGSRAHMEN)</a:t>
+            </a:r>
+          </a:p>
+          <a:p>
+            <a:pPr>
+              <a:spcBef>
+                <a:spcPts val="400"/>
+              </a:spcBef>
+              <a:spcAft>
+                <a:spcPts val="200"/>
+              </a:spcAft>
+            </a:pPr>
+            <a:r>
+              <a:rPr sz="1200">
+                <a:solidFill>
+                  <a:srgbClr val="3D5466"/>
+                </a:solidFill>
+                <a:latin typeface="Arial"/>
+              </a:rPr>
+              <a:t>Der FK zeigt dem Unternehmer die wichtigsten Felder auf und verweist an Spezialisten:</a:t>
+            </a:r>
+          </a:p>
+          <a:p>
+            <a:pPr>
+              <a:spcBef>
+                <a:spcPts val="400"/>
+              </a:spcBef>
+              <a:spcAft>
+                <a:spcPts val="200"/>
+              </a:spcAft>
+            </a:pPr>
+            <a:r>
+              <a:rPr sz="1300">
+                <a:solidFill>
+                  <a:srgbClr val="3D5466"/>
+                </a:solidFill>
+                <a:latin typeface="Arial"/>
+              </a:rPr>
+              <a:t>▸  Erbschaftsteuer / Schenkungsteuer: § 13a ErbStG regelt die Begünstigungen für Betriebsvermögen bei familieninterner Übergabe (Verschonungsabschlag 85 %; Optionsverschonung 100 %; Behaltensfristen 5 bzw. 7 Jahre). Der persönliche Freibetrag nach § 16 Abs. 1 Nr. 2 ErbStG beträgt 400.000 EUR je Elternteil und je Kind – d.h. ein Kind kann im Erbfall von beiden Elternteilen zusammen bis zu 800.000 EUR steuerfrei erhalten. Wichtig: Dieser Freibetrag kann alle 10 Jahre erneut genutzt werden – eine schrittweise Schenkung über mehrere Jahre kann daher steuerlich deutlich günstiger sein als eine Einmal-Übertragung. Hinweis: Diese Orientierungsinformation ersetzt keine steuerrechtliche Beratung – stets Steuerberater einbinden.</a:t>
+            </a:r>
+          </a:p>
+          <a:p>
+            <a:pPr>
+              <a:spcBef>
+                <a:spcPts val="400"/>
+              </a:spcBef>
+              <a:spcAft>
+                <a:spcPts val="200"/>
+              </a:spcAft>
+            </a:pPr>
+            <a:r>
+              <a:rPr sz="1300">
+                <a:solidFill>
+                  <a:srgbClr val="3D5466"/>
+                </a:solidFill>
+                <a:latin typeface="Arial"/>
+              </a:rPr>
+              <a:t>▸  Gesellschaftsrechtliche Fragen (GmbH-G, HGB): Sind Gesellschafterverträge aktuell? Gibt es Vorkaufsrechte?</a:t>
+            </a:r>
+          </a:p>
+          <a:p>
+            <a:pPr>
+              <a:spcBef>
+                <a:spcPts val="600"/>
+              </a:spcBef>
+              <a:spcAft>
+                <a:spcPts val="200"/>
+              </a:spcAft>
+            </a:pPr>
+            <a:r>
+              <a:rPr sz="1200" i="1">
+                <a:solidFill>
+                  <a:srgbClr val="3D5466"/>
+                </a:solidFill>
+                <a:latin typeface="Arial"/>
+              </a:rPr>
+              <a:t>→  Praxishinweis: Der Steuerberater als Gatekeeper</a:t>
+            </a:r>
+          </a:p>
+          <a:p>
+            <a:pPr>
+              <a:spcBef>
+                <a:spcPts val="600"/>
+              </a:spcBef>
+              <a:spcAft>
+                <a:spcPts val="200"/>
+              </a:spcAft>
+            </a:pPr>
+            <a:r>
+              <a:rPr sz="1200" i="1">
+                <a:solidFill>
+                  <a:srgbClr val="3D5466"/>
+                </a:solidFill>
+                <a:latin typeface="Arial"/>
+              </a:rPr>
+              <a:t>→  Strategische Partnerschaft statt Konkurrenz:</a:t>
+            </a:r>
+          </a:p>
+          <a:p>
+            <a:pPr>
+              <a:spcBef>
+                <a:spcPts val="600"/>
+              </a:spcBef>
+              <a:spcAft>
+                <a:spcPts val="200"/>
+              </a:spcAft>
+            </a:pPr>
+            <a:r>
+              <a:rPr sz="1200" i="1">
+                <a:solidFill>
+                  <a:srgbClr val="3D5466"/>
+                </a:solidFill>
+                <a:latin typeface="Arial"/>
+              </a:rPr>
+              <a:t>→  - Gemeinsame Termine mit Steuerberater und Kunden als Stärke positionieren, nicht als Verlust von Kontrolle</a:t>
+            </a:r>
+          </a:p>
+          <a:p>
+            <a:pPr>
+              <a:spcBef>
+                <a:spcPts val="600"/>
+              </a:spcBef>
+              <a:spcAft>
+                <a:spcPts val="200"/>
+              </a:spcAft>
+            </a:pPr>
+            <a:r>
+              <a:rPr sz="1200" i="1">
+                <a:solidFill>
+                  <a:srgbClr val="3D5466"/>
+                </a:solidFill>
+                <a:latin typeface="Arial"/>
+              </a:rPr>
+              <a:t>→  - Dem Steuerberater nützliche Informationen geben (Finanzierbarkeits-Check), ohne das Mandat anzutasten</a:t>
+            </a:r>
+          </a:p>
+          <a:p>
+            <a:pPr>
+              <a:spcBef>
+                <a:spcPts val="600"/>
+              </a:spcBef>
+              <a:spcAft>
+                <a:spcPts val="200"/>
+              </a:spcAft>
+            </a:pPr>
+            <a:r>
+              <a:rPr sz="1200" i="1">
+                <a:solidFill>
+                  <a:srgbClr val="3D5466"/>
+                </a:solidFill>
+                <a:latin typeface="Arial"/>
+              </a:rPr>
+              <a:t>→  - Aufbau einer längerfristigen Beziehung: Steuerberater im Kammerbezirk kennenlernen, z.B. über IHK-Veranstaltungen oder gemeinsame Unternehmer-Foren</a:t>
+            </a:r>
+          </a:p>
+        </p:txBody>
+      </p:sp>
+      <p:sp>
+        <p:nvSpPr>
+          <p:cNvPr id="9" name="Rectangle 8"/>
           <p:cNvSpPr/>
           <p:nvPr/>
         </p:nvSpPr>
@@ -8552,7 +8954,7 @@
       </p:sp>
       <p:sp>
         <p:nvSpPr>
-          <p:cNvPr id="9" name="TextBox 8"/>
+          <p:cNvPr id="10" name="TextBox 9"/>
           <p:cNvSpPr txBox="1"/>
           <p:nvPr/>
         </p:nvSpPr>
@@ -8581,41 +8983,6 @@
                 <a:latin typeface="JetBrains Mono"/>
               </a:rPr>
               <a:t>Benedikt Zoller Coaching  ·  FKB Campus  ·  M12</a:t>
-            </a:r>
-          </a:p>
-        </p:txBody>
-      </p:sp>
-      <p:sp>
-        <p:nvSpPr>
-          <p:cNvPr id="10" name="TextBox 9"/>
-          <p:cNvSpPr txBox="1"/>
-          <p:nvPr/>
-        </p:nvSpPr>
-        <p:spPr>
-          <a:xfrm>
-            <a:off x="7176211" y="6583680"/>
-            <a:ext cx="4326940" cy="256032"/>
-          </a:xfrm>
-          <a:prstGeom prst="rect">
-            <a:avLst/>
-          </a:prstGeom>
-          <a:noFill/>
-        </p:spPr>
-        <p:txBody>
-          <a:bodyPr wrap="none">
-            <a:spAutoFit/>
-          </a:bodyPr>
-          <a:lstStyle/>
-          <a:p>
-            <a:pPr algn="r"/>
-            <a:r>
-              <a:rPr sz="700">
-                <a:solidFill>
-                  <a:srgbClr val="A0B4D2"/>
-                </a:solidFill>
-                <a:latin typeface="JetBrains Mono"/>
-              </a:rPr>
-              <a:t>Schaubild</a:t>
             </a:r>
           </a:p>
         </p:txBody>
@@ -8653,7 +9020,7 @@
             <a:avLst/>
           </a:prstGeom>
           <a:solidFill>
-            <a:srgbClr val="EDEDF3"/>
+            <a:srgbClr val="FFFFFF"/>
           </a:solidFill>
           <a:ln>
             <a:noFill/>
@@ -8754,51 +9121,43 @@
                 </a:solidFill>
                 <a:latin typeface="JetBrains Mono"/>
               </a:rPr>
-              <a:t>M12  ·  INHALT</a:t>
-            </a:r>
-          </a:p>
-        </p:txBody>
-      </p:sp>
-      <p:sp>
-        <p:nvSpPr>
-          <p:cNvPr id="5" name="Rectangle 4"/>
-          <p:cNvSpPr/>
-          <p:nvPr/>
-        </p:nvSpPr>
-        <p:spPr>
-          <a:xfrm>
-            <a:off x="0" y="1234440"/>
-            <a:ext cx="12188952" cy="12700"/>
-          </a:xfrm>
-          <a:prstGeom prst="rect">
-            <a:avLst/>
-          </a:prstGeom>
-          <a:solidFill>
-            <a:srgbClr val="D8DFE4"/>
-          </a:solidFill>
-          <a:ln>
-            <a:noFill/>
-          </a:ln>
-        </p:spPr>
-        <p:style>
-          <a:lnRef idx="1">
-            <a:schemeClr val="accent1"/>
-          </a:lnRef>
-          <a:fillRef idx="3">
-            <a:schemeClr val="accent1"/>
-          </a:fillRef>
-          <a:effectRef idx="2">
-            <a:schemeClr val="accent1"/>
-          </a:effectRef>
-          <a:fontRef idx="minor">
-            <a:schemeClr val="lt1"/>
-          </a:fontRef>
-        </p:style>
-        <p:txBody>
-          <a:bodyPr rtlCol="0" anchor="ctr"/>
-          <a:lstStyle/>
-          <a:p>
-            <a:pPr algn="ctr"/>
+              <a:t>M12  ·  SCHAUBILD</a:t>
+            </a:r>
+          </a:p>
+        </p:txBody>
+      </p:sp>
+      <p:sp>
+        <p:nvSpPr>
+          <p:cNvPr id="5" name="TextBox 4"/>
+          <p:cNvSpPr txBox="1"/>
+          <p:nvPr/>
+        </p:nvSpPr>
+        <p:spPr>
+          <a:xfrm>
+            <a:off x="685800" y="502920"/>
+            <a:ext cx="10817352" cy="594360"/>
+          </a:xfrm>
+          <a:prstGeom prst="rect">
+            <a:avLst/>
+          </a:prstGeom>
+          <a:noFill/>
+        </p:spPr>
+        <p:txBody>
+          <a:bodyPr wrap="square">
+            <a:spAutoFit/>
+          </a:bodyPr>
+          <a:lstStyle/>
+          <a:p>
+            <a:pPr algn="l"/>
+            <a:r>
+              <a:rPr sz="2000" b="1" i="0">
+                <a:solidFill>
+                  <a:srgbClr val="1F2C56"/>
+                </a:solidFill>
+                <a:latin typeface="Source Serif 4"/>
+              </a:rPr>
+              <a:t>Nachfolge-Phasenmodell</a:t>
+            </a:r>
           </a:p>
         </p:txBody>
       </p:sp>
@@ -8810,8 +9169,8 @@
         </p:nvSpPr>
         <p:spPr>
           <a:xfrm>
-            <a:off x="685800" y="502920"/>
-            <a:ext cx="36576" cy="658368"/>
+            <a:off x="685800" y="1143000"/>
+            <a:ext cx="10817352" cy="25400"/>
           </a:xfrm>
           <a:prstGeom prst="rect">
             <a:avLst/>
@@ -8845,295 +9204,33 @@
           </a:p>
         </p:txBody>
       </p:sp>
-      <p:sp>
-        <p:nvSpPr>
-          <p:cNvPr id="7" name="TextBox 6"/>
-          <p:cNvSpPr txBox="1"/>
-          <p:nvPr/>
-        </p:nvSpPr>
-        <p:spPr>
-          <a:xfrm>
-            <a:off x="813816" y="502920"/>
-            <a:ext cx="10634472" cy="685800"/>
-          </a:xfrm>
-          <a:prstGeom prst="rect">
-            <a:avLst/>
-          </a:prstGeom>
-          <a:noFill/>
-        </p:spPr>
-        <p:txBody>
-          <a:bodyPr wrap="square">
-            <a:spAutoFit/>
-          </a:bodyPr>
-          <a:lstStyle/>
-          <a:p>
-            <a:pPr algn="l"/>
-            <a:r>
-              <a:rPr sz="2400" b="1" i="0">
-                <a:solidFill>
-                  <a:srgbClr val="1F2C56"/>
-                </a:solidFill>
-                <a:latin typeface="Source Serif 4"/>
-              </a:rPr>
-              <a:t>Theorie-Input: Die emotionale Dimension der Nachfolge</a:t>
-            </a:r>
-          </a:p>
-        </p:txBody>
-      </p:sp>
-      <p:sp>
-        <p:nvSpPr>
-          <p:cNvPr id="8" name="TextBox 7"/>
-          <p:cNvSpPr txBox="1"/>
-          <p:nvPr/>
-        </p:nvSpPr>
-        <p:spPr>
-          <a:xfrm>
-            <a:off x="685800" y="1417320"/>
-            <a:ext cx="10817352" cy="5029200"/>
-          </a:xfrm>
-          <a:prstGeom prst="rect">
-            <a:avLst/>
-          </a:prstGeom>
-          <a:noFill/>
-        </p:spPr>
-        <p:txBody>
-          <a:bodyPr wrap="square">
-            <a:spAutoFit/>
-          </a:bodyPr>
-          <a:lstStyle/>
-          <a:p>
-            <a:pPr>
-              <a:spcBef>
-                <a:spcPts val="1000"/>
-              </a:spcBef>
-              <a:spcAft>
-                <a:spcPts val="200"/>
-              </a:spcAft>
-            </a:pPr>
-            <a:r>
-              <a:rPr sz="800" b="1">
-                <a:solidFill>
-                  <a:srgbClr val="78808C"/>
-                </a:solidFill>
-                <a:latin typeface="JetBrains Mono"/>
-              </a:rPr>
-              <a:t>KONTROLLVERLUST UND IDENTITÄTSBEDROHUNG</a:t>
-            </a:r>
-          </a:p>
-          <a:p>
-            <a:pPr>
-              <a:spcBef>
-                <a:spcPts val="400"/>
-              </a:spcBef>
-              <a:spcAft>
-                <a:spcPts val="200"/>
-              </a:spcAft>
-            </a:pPr>
-            <a:r>
-              <a:rPr sz="1200">
-                <a:solidFill>
-                  <a:srgbClr val="3D5466"/>
-                </a:solidFill>
-                <a:latin typeface="Arial"/>
-              </a:rPr>
-              <a:t>Diese existenzielle Angst wird oft verdrängt oder rationalisiert. Psychologisch handelt es sich um einen Trauerprozess (adaptiert nach Kübler-Ross, 1969 ):</a:t>
-            </a:r>
-          </a:p>
-          <a:p>
-            <a:pPr>
-              <a:spcBef>
-                <a:spcPts val="400"/>
-              </a:spcBef>
-              <a:spcAft>
-                <a:spcPts val="200"/>
-              </a:spcAft>
-            </a:pPr>
-            <a:r>
-              <a:rPr sz="1300">
-                <a:solidFill>
-                  <a:srgbClr val="3D5466"/>
-                </a:solidFill>
-                <a:latin typeface="Arial"/>
-              </a:rPr>
-              <a:t>▸  Verleugnung: „Das Thema ist noch gar nicht aktuell."</a:t>
-            </a:r>
-          </a:p>
-          <a:p>
-            <a:pPr>
-              <a:spcBef>
-                <a:spcPts val="400"/>
-              </a:spcBef>
-              <a:spcAft>
-                <a:spcPts val="200"/>
-              </a:spcAft>
-            </a:pPr>
-            <a:r>
-              <a:rPr sz="1300">
-                <a:solidFill>
-                  <a:srgbClr val="3D5466"/>
-                </a:solidFill>
-                <a:latin typeface="Arial"/>
-              </a:rPr>
-              <a:t>▸  Widerstand: „Mein Sohn ist noch nicht bereit."</a:t>
-            </a:r>
-          </a:p>
-          <a:p>
-            <a:pPr>
-              <a:spcBef>
-                <a:spcPts val="400"/>
-              </a:spcBef>
-              <a:spcAft>
-                <a:spcPts val="200"/>
-              </a:spcAft>
-            </a:pPr>
-            <a:r>
-              <a:rPr sz="1300">
-                <a:solidFill>
-                  <a:srgbClr val="3D5466"/>
-                </a:solidFill>
-                <a:latin typeface="Arial"/>
-              </a:rPr>
-              <a:t>▸  Verhandeln: „Vielleicht mache ich noch ein paar Jahre."</a:t>
-            </a:r>
-          </a:p>
-          <a:p>
-            <a:pPr>
-              <a:spcBef>
-                <a:spcPts val="400"/>
-              </a:spcBef>
-              <a:spcAft>
-                <a:spcPts val="200"/>
-              </a:spcAft>
-            </a:pPr>
-            <a:r>
-              <a:rPr sz="1300">
-                <a:solidFill>
-                  <a:srgbClr val="3D5466"/>
-                </a:solidFill>
-                <a:latin typeface="Arial"/>
-              </a:rPr>
-              <a:t>▸  Trauer: Tiefe emotionale Aufarbeitung des Loslassens.</a:t>
-            </a:r>
-          </a:p>
-          <a:p>
-            <a:pPr>
-              <a:spcBef>
-                <a:spcPts val="400"/>
-              </a:spcBef>
-              <a:spcAft>
-                <a:spcPts val="200"/>
-              </a:spcAft>
-            </a:pPr>
-            <a:r>
-              <a:rPr sz="1300">
-                <a:solidFill>
-                  <a:srgbClr val="3D5466"/>
-                </a:solidFill>
-                <a:latin typeface="Arial"/>
-              </a:rPr>
-              <a:t>▸  Akzeptanz: Umgestaltung der Identität: „Ich bin jetzt Mentor."</a:t>
-            </a:r>
-          </a:p>
-          <a:p>
-            <a:pPr>
-              <a:spcBef>
-                <a:spcPts val="400"/>
-              </a:spcBef>
-              <a:spcAft>
-                <a:spcPts val="200"/>
-              </a:spcAft>
-            </a:pPr>
-            <a:r>
-              <a:rPr sz="1200">
-                <a:solidFill>
-                  <a:srgbClr val="3D5466"/>
-                </a:solidFill>
-                <a:latin typeface="Arial"/>
-              </a:rPr>
-              <a:t>Der FK, der diesen Prozess versteht, behandelt Loslasswiderstände nicht als Irrationalität, sondern als normal und bearbeitbar.</a:t>
-            </a:r>
-          </a:p>
-          <a:p>
-            <a:pPr>
-              <a:spcBef>
-                <a:spcPts val="1000"/>
-              </a:spcBef>
-              <a:spcAft>
-                <a:spcPts val="200"/>
-              </a:spcAft>
-            </a:pPr>
-            <a:r>
-              <a:rPr sz="800" b="1">
-                <a:solidFill>
-                  <a:srgbClr val="78808C"/>
-                </a:solidFill>
-                <a:latin typeface="JetBrains Mono"/>
-              </a:rPr>
-              <a:t>DAS VERMÄCHTNIS-DILEMMA</a:t>
-            </a:r>
-          </a:p>
-          <a:p>
-            <a:pPr>
-              <a:spcBef>
-                <a:spcPts val="400"/>
-              </a:spcBef>
-              <a:spcAft>
-                <a:spcPts val="200"/>
-              </a:spcAft>
-            </a:pPr>
-            <a:r>
-              <a:rPr sz="1200">
-                <a:solidFill>
-                  <a:srgbClr val="3D5466"/>
-                </a:solidFill>
-                <a:latin typeface="Arial"/>
-              </a:rPr>
-              <a:t>Viele Unternehmer tragen zwei widersprüchliche Wünsche:</a:t>
-            </a:r>
-          </a:p>
-          <a:p>
-            <a:pPr>
-              <a:spcBef>
-                <a:spcPts val="400"/>
-              </a:spcBef>
-              <a:spcAft>
-                <a:spcPts val="200"/>
-              </a:spcAft>
-            </a:pPr>
-            <a:r>
-              <a:rPr sz="1300">
-                <a:solidFill>
-                  <a:srgbClr val="3D5466"/>
-                </a:solidFill>
-                <a:latin typeface="Arial"/>
-              </a:rPr>
-              <a:t>▸  Kontrolle bewahren: „Nur ich kann das Unternehmen richtig führen."</a:t>
-            </a:r>
-          </a:p>
-          <a:p>
-            <a:pPr>
-              <a:spcBef>
-                <a:spcPts val="400"/>
-              </a:spcBef>
-              <a:spcAft>
-                <a:spcPts val="200"/>
-              </a:spcAft>
-            </a:pPr>
-            <a:r>
-              <a:rPr sz="1300">
-                <a:solidFill>
-                  <a:srgbClr val="3D5466"/>
-                </a:solidFill>
-                <a:latin typeface="Arial"/>
-              </a:rPr>
-              <a:t>▸  Vermächtnis hinterlassen: „Mein Lebenswerk soll weiterleben und florieren."</a:t>
-            </a:r>
-          </a:p>
-        </p:txBody>
-      </p:sp>
-      <p:sp>
-        <p:nvSpPr>
-          <p:cNvPr id="9" name="Rectangle 8"/>
+      <p:pic>
+        <p:nvPicPr>
+          <p:cNvPr id="7" name="Picture 6" descr="image.png"/>
+          <p:cNvPicPr>
+            <a:picLocks noChangeAspect="1"/>
+          </p:cNvPicPr>
+          <p:nvPr/>
+        </p:nvPicPr>
+        <p:blipFill>
+          <a:blip r:embed="rId2"/>
+          <a:stretch>
+            <a:fillRect/>
+          </a:stretch>
+        </p:blipFill>
+        <p:spPr>
+          <a:xfrm>
+            <a:off x="2163921" y="1325880"/>
+            <a:ext cx="7861110" cy="4937760"/>
+          </a:xfrm>
+          <a:prstGeom prst="rect">
+            <a:avLst/>
+          </a:prstGeom>
+        </p:spPr>
+      </p:pic>
+      <p:sp>
+        <p:nvSpPr>
+          <p:cNvPr id="8" name="Rectangle 7"/>
           <p:cNvSpPr/>
           <p:nvPr/>
         </p:nvSpPr>
@@ -9176,7 +9273,7 @@
       </p:sp>
       <p:sp>
         <p:nvSpPr>
-          <p:cNvPr id="10" name="TextBox 9"/>
+          <p:cNvPr id="9" name="TextBox 8"/>
           <p:cNvSpPr txBox="1"/>
           <p:nvPr/>
         </p:nvSpPr>
@@ -9205,6 +9302,41 @@
                 <a:latin typeface="JetBrains Mono"/>
               </a:rPr>
               <a:t>Benedikt Zoller Coaching  ·  FKB Campus  ·  M12</a:t>
+            </a:r>
+          </a:p>
+        </p:txBody>
+      </p:sp>
+      <p:sp>
+        <p:nvSpPr>
+          <p:cNvPr id="10" name="TextBox 9"/>
+          <p:cNvSpPr txBox="1"/>
+          <p:nvPr/>
+        </p:nvSpPr>
+        <p:spPr>
+          <a:xfrm>
+            <a:off x="7176211" y="6583680"/>
+            <a:ext cx="4326940" cy="256032"/>
+          </a:xfrm>
+          <a:prstGeom prst="rect">
+            <a:avLst/>
+          </a:prstGeom>
+          <a:noFill/>
+        </p:spPr>
+        <p:txBody>
+          <a:bodyPr wrap="none">
+            <a:spAutoFit/>
+          </a:bodyPr>
+          <a:lstStyle/>
+          <a:p>
+            <a:pPr algn="r"/>
+            <a:r>
+              <a:rPr sz="700">
+                <a:solidFill>
+                  <a:srgbClr val="A0B4D2"/>
+                </a:solidFill>
+                <a:latin typeface="JetBrains Mono"/>
+              </a:rPr>
+              <a:t>Schaubild</a:t>
             </a:r>
           </a:p>
         </p:txBody>
@@ -9242,7 +9374,7 @@
             <a:avLst/>
           </a:prstGeom>
           <a:solidFill>
-            <a:srgbClr val="FFFFFF"/>
+            <a:srgbClr val="EDEDF3"/>
           </a:solidFill>
           <a:ln>
             <a:noFill/>
@@ -9343,43 +9475,51 @@
                 </a:solidFill>
                 <a:latin typeface="JetBrains Mono"/>
               </a:rPr>
-              <a:t>M12  ·  SCHAUBILD</a:t>
-            </a:r>
-          </a:p>
-        </p:txBody>
-      </p:sp>
-      <p:sp>
-        <p:nvSpPr>
-          <p:cNvPr id="5" name="TextBox 4"/>
-          <p:cNvSpPr txBox="1"/>
-          <p:nvPr/>
-        </p:nvSpPr>
-        <p:spPr>
-          <a:xfrm>
-            <a:off x="685800" y="502920"/>
-            <a:ext cx="10817352" cy="594360"/>
-          </a:xfrm>
-          <a:prstGeom prst="rect">
-            <a:avLst/>
-          </a:prstGeom>
-          <a:noFill/>
-        </p:spPr>
-        <p:txBody>
-          <a:bodyPr wrap="square">
-            <a:spAutoFit/>
-          </a:bodyPr>
-          <a:lstStyle/>
-          <a:p>
-            <a:pPr algn="l"/>
-            <a:r>
-              <a:rPr sz="2000" b="1" i="0">
-                <a:solidFill>
-                  <a:srgbClr val="1F2C56"/>
-                </a:solidFill>
-                <a:latin typeface="Source Serif 4"/>
-              </a:rPr>
-              <a:t>Veränderungskurve nach Kübler-Ross</a:t>
-            </a:r>
+              <a:t>M12  ·  INHALT</a:t>
+            </a:r>
+          </a:p>
+        </p:txBody>
+      </p:sp>
+      <p:sp>
+        <p:nvSpPr>
+          <p:cNvPr id="5" name="Rectangle 4"/>
+          <p:cNvSpPr/>
+          <p:nvPr/>
+        </p:nvSpPr>
+        <p:spPr>
+          <a:xfrm>
+            <a:off x="0" y="1234440"/>
+            <a:ext cx="12188952" cy="12700"/>
+          </a:xfrm>
+          <a:prstGeom prst="rect">
+            <a:avLst/>
+          </a:prstGeom>
+          <a:solidFill>
+            <a:srgbClr val="D8DFE4"/>
+          </a:solidFill>
+          <a:ln>
+            <a:noFill/>
+          </a:ln>
+        </p:spPr>
+        <p:style>
+          <a:lnRef idx="1">
+            <a:schemeClr val="accent1"/>
+          </a:lnRef>
+          <a:fillRef idx="3">
+            <a:schemeClr val="accent1"/>
+          </a:fillRef>
+          <a:effectRef idx="2">
+            <a:schemeClr val="accent1"/>
+          </a:effectRef>
+          <a:fontRef idx="minor">
+            <a:schemeClr val="lt1"/>
+          </a:fontRef>
+        </p:style>
+        <p:txBody>
+          <a:bodyPr rtlCol="0" anchor="ctr"/>
+          <a:lstStyle/>
+          <a:p>
+            <a:pPr algn="ctr"/>
           </a:p>
         </p:txBody>
       </p:sp>
@@ -9391,8 +9531,8 @@
         </p:nvSpPr>
         <p:spPr>
           <a:xfrm>
-            <a:off x="685800" y="1143000"/>
-            <a:ext cx="10817352" cy="25400"/>
+            <a:off x="685800" y="502920"/>
+            <a:ext cx="36576" cy="658368"/>
           </a:xfrm>
           <a:prstGeom prst="rect">
             <a:avLst/>
@@ -9426,33 +9566,295 @@
           </a:p>
         </p:txBody>
       </p:sp>
-      <p:pic>
-        <p:nvPicPr>
-          <p:cNvPr id="7" name="Picture 6" descr="image.png"/>
-          <p:cNvPicPr>
-            <a:picLocks noChangeAspect="1"/>
-          </p:cNvPicPr>
-          <p:nvPr/>
-        </p:nvPicPr>
-        <p:blipFill>
-          <a:blip r:embed="rId2"/>
-          <a:stretch>
-            <a:fillRect/>
-          </a:stretch>
-        </p:blipFill>
-        <p:spPr>
-          <a:xfrm>
-            <a:off x="2303489" y="1325880"/>
-            <a:ext cx="7581973" cy="4937760"/>
-          </a:xfrm>
-          <a:prstGeom prst="rect">
-            <a:avLst/>
-          </a:prstGeom>
-        </p:spPr>
-      </p:pic>
-      <p:sp>
-        <p:nvSpPr>
-          <p:cNvPr id="8" name="Rectangle 7"/>
+      <p:sp>
+        <p:nvSpPr>
+          <p:cNvPr id="7" name="TextBox 6"/>
+          <p:cNvSpPr txBox="1"/>
+          <p:nvPr/>
+        </p:nvSpPr>
+        <p:spPr>
+          <a:xfrm>
+            <a:off x="813816" y="502920"/>
+            <a:ext cx="10634472" cy="685800"/>
+          </a:xfrm>
+          <a:prstGeom prst="rect">
+            <a:avLst/>
+          </a:prstGeom>
+          <a:noFill/>
+        </p:spPr>
+        <p:txBody>
+          <a:bodyPr wrap="square">
+            <a:spAutoFit/>
+          </a:bodyPr>
+          <a:lstStyle/>
+          <a:p>
+            <a:pPr algn="l"/>
+            <a:r>
+              <a:rPr sz="2400" b="1" i="0">
+                <a:solidFill>
+                  <a:srgbClr val="1F2C56"/>
+                </a:solidFill>
+                <a:latin typeface="Source Serif 4"/>
+              </a:rPr>
+              <a:t>Theorie-Input: Die emotionale Dimension der Nachfolge</a:t>
+            </a:r>
+          </a:p>
+        </p:txBody>
+      </p:sp>
+      <p:sp>
+        <p:nvSpPr>
+          <p:cNvPr id="8" name="TextBox 7"/>
+          <p:cNvSpPr txBox="1"/>
+          <p:nvPr/>
+        </p:nvSpPr>
+        <p:spPr>
+          <a:xfrm>
+            <a:off x="685800" y="1417320"/>
+            <a:ext cx="10817352" cy="5029200"/>
+          </a:xfrm>
+          <a:prstGeom prst="rect">
+            <a:avLst/>
+          </a:prstGeom>
+          <a:noFill/>
+        </p:spPr>
+        <p:txBody>
+          <a:bodyPr wrap="square">
+            <a:spAutoFit/>
+          </a:bodyPr>
+          <a:lstStyle/>
+          <a:p>
+            <a:pPr>
+              <a:spcBef>
+                <a:spcPts val="1000"/>
+              </a:spcBef>
+              <a:spcAft>
+                <a:spcPts val="200"/>
+              </a:spcAft>
+            </a:pPr>
+            <a:r>
+              <a:rPr sz="800" b="1">
+                <a:solidFill>
+                  <a:srgbClr val="78808C"/>
+                </a:solidFill>
+                <a:latin typeface="JetBrains Mono"/>
+              </a:rPr>
+              <a:t>KONTROLLVERLUST UND IDENTITÄTSBEDROHUNG</a:t>
+            </a:r>
+          </a:p>
+          <a:p>
+            <a:pPr>
+              <a:spcBef>
+                <a:spcPts val="400"/>
+              </a:spcBef>
+              <a:spcAft>
+                <a:spcPts val="200"/>
+              </a:spcAft>
+            </a:pPr>
+            <a:r>
+              <a:rPr sz="1200">
+                <a:solidFill>
+                  <a:srgbClr val="3D5466"/>
+                </a:solidFill>
+                <a:latin typeface="Arial"/>
+              </a:rPr>
+              <a:t>Diese existenzielle Angst wird oft verdrängt oder rationalisiert. Psychologisch handelt es sich um einen Trauerprozess (adaptiert nach Kübler-Ross, 1969 ):</a:t>
+            </a:r>
+          </a:p>
+          <a:p>
+            <a:pPr>
+              <a:spcBef>
+                <a:spcPts val="400"/>
+              </a:spcBef>
+              <a:spcAft>
+                <a:spcPts val="200"/>
+              </a:spcAft>
+            </a:pPr>
+            <a:r>
+              <a:rPr sz="1300">
+                <a:solidFill>
+                  <a:srgbClr val="3D5466"/>
+                </a:solidFill>
+                <a:latin typeface="Arial"/>
+              </a:rPr>
+              <a:t>▸  Verleugnung: „Das Thema ist noch gar nicht aktuell."</a:t>
+            </a:r>
+          </a:p>
+          <a:p>
+            <a:pPr>
+              <a:spcBef>
+                <a:spcPts val="400"/>
+              </a:spcBef>
+              <a:spcAft>
+                <a:spcPts val="200"/>
+              </a:spcAft>
+            </a:pPr>
+            <a:r>
+              <a:rPr sz="1300">
+                <a:solidFill>
+                  <a:srgbClr val="3D5466"/>
+                </a:solidFill>
+                <a:latin typeface="Arial"/>
+              </a:rPr>
+              <a:t>▸  Widerstand: „Mein Sohn ist noch nicht bereit."</a:t>
+            </a:r>
+          </a:p>
+          <a:p>
+            <a:pPr>
+              <a:spcBef>
+                <a:spcPts val="400"/>
+              </a:spcBef>
+              <a:spcAft>
+                <a:spcPts val="200"/>
+              </a:spcAft>
+            </a:pPr>
+            <a:r>
+              <a:rPr sz="1300">
+                <a:solidFill>
+                  <a:srgbClr val="3D5466"/>
+                </a:solidFill>
+                <a:latin typeface="Arial"/>
+              </a:rPr>
+              <a:t>▸  Verhandeln: „Vielleicht mache ich noch ein paar Jahre."</a:t>
+            </a:r>
+          </a:p>
+          <a:p>
+            <a:pPr>
+              <a:spcBef>
+                <a:spcPts val="400"/>
+              </a:spcBef>
+              <a:spcAft>
+                <a:spcPts val="200"/>
+              </a:spcAft>
+            </a:pPr>
+            <a:r>
+              <a:rPr sz="1300">
+                <a:solidFill>
+                  <a:srgbClr val="3D5466"/>
+                </a:solidFill>
+                <a:latin typeface="Arial"/>
+              </a:rPr>
+              <a:t>▸  Trauer: Tiefe emotionale Aufarbeitung des Loslassens.</a:t>
+            </a:r>
+          </a:p>
+          <a:p>
+            <a:pPr>
+              <a:spcBef>
+                <a:spcPts val="400"/>
+              </a:spcBef>
+              <a:spcAft>
+                <a:spcPts val="200"/>
+              </a:spcAft>
+            </a:pPr>
+            <a:r>
+              <a:rPr sz="1300">
+                <a:solidFill>
+                  <a:srgbClr val="3D5466"/>
+                </a:solidFill>
+                <a:latin typeface="Arial"/>
+              </a:rPr>
+              <a:t>▸  Akzeptanz: Umgestaltung der Identität: „Ich bin jetzt Mentor."</a:t>
+            </a:r>
+          </a:p>
+          <a:p>
+            <a:pPr>
+              <a:spcBef>
+                <a:spcPts val="400"/>
+              </a:spcBef>
+              <a:spcAft>
+                <a:spcPts val="200"/>
+              </a:spcAft>
+            </a:pPr>
+            <a:r>
+              <a:rPr sz="1200">
+                <a:solidFill>
+                  <a:srgbClr val="3D5466"/>
+                </a:solidFill>
+                <a:latin typeface="Arial"/>
+              </a:rPr>
+              <a:t>Der FK, der diesen Prozess versteht, behandelt Loslasswiderstände nicht als Irrationalität, sondern als normal und bearbeitbar.</a:t>
+            </a:r>
+          </a:p>
+          <a:p>
+            <a:pPr>
+              <a:spcBef>
+                <a:spcPts val="1000"/>
+              </a:spcBef>
+              <a:spcAft>
+                <a:spcPts val="200"/>
+              </a:spcAft>
+            </a:pPr>
+            <a:r>
+              <a:rPr sz="800" b="1">
+                <a:solidFill>
+                  <a:srgbClr val="78808C"/>
+                </a:solidFill>
+                <a:latin typeface="JetBrains Mono"/>
+              </a:rPr>
+              <a:t>DAS VERMÄCHTNIS-DILEMMA</a:t>
+            </a:r>
+          </a:p>
+          <a:p>
+            <a:pPr>
+              <a:spcBef>
+                <a:spcPts val="400"/>
+              </a:spcBef>
+              <a:spcAft>
+                <a:spcPts val="200"/>
+              </a:spcAft>
+            </a:pPr>
+            <a:r>
+              <a:rPr sz="1200">
+                <a:solidFill>
+                  <a:srgbClr val="3D5466"/>
+                </a:solidFill>
+                <a:latin typeface="Arial"/>
+              </a:rPr>
+              <a:t>Viele Unternehmer tragen zwei widersprüchliche Wünsche:</a:t>
+            </a:r>
+          </a:p>
+          <a:p>
+            <a:pPr>
+              <a:spcBef>
+                <a:spcPts val="400"/>
+              </a:spcBef>
+              <a:spcAft>
+                <a:spcPts val="200"/>
+              </a:spcAft>
+            </a:pPr>
+            <a:r>
+              <a:rPr sz="1300">
+                <a:solidFill>
+                  <a:srgbClr val="3D5466"/>
+                </a:solidFill>
+                <a:latin typeface="Arial"/>
+              </a:rPr>
+              <a:t>▸  Kontrolle bewahren: „Nur ich kann das Unternehmen richtig führen."</a:t>
+            </a:r>
+          </a:p>
+          <a:p>
+            <a:pPr>
+              <a:spcBef>
+                <a:spcPts val="400"/>
+              </a:spcBef>
+              <a:spcAft>
+                <a:spcPts val="200"/>
+              </a:spcAft>
+            </a:pPr>
+            <a:r>
+              <a:rPr sz="1300">
+                <a:solidFill>
+                  <a:srgbClr val="3D5466"/>
+                </a:solidFill>
+                <a:latin typeface="Arial"/>
+              </a:rPr>
+              <a:t>▸  Vermächtnis hinterlassen: „Mein Lebenswerk soll weiterleben und florieren."</a:t>
+            </a:r>
+          </a:p>
+        </p:txBody>
+      </p:sp>
+      <p:sp>
+        <p:nvSpPr>
+          <p:cNvPr id="9" name="Rectangle 8"/>
           <p:cNvSpPr/>
           <p:nvPr/>
         </p:nvSpPr>
@@ -9495,7 +9897,7 @@
       </p:sp>
       <p:sp>
         <p:nvSpPr>
-          <p:cNvPr id="9" name="TextBox 8"/>
+          <p:cNvPr id="10" name="TextBox 9"/>
           <p:cNvSpPr txBox="1"/>
           <p:nvPr/>
         </p:nvSpPr>
@@ -9524,41 +9926,6 @@
                 <a:latin typeface="JetBrains Mono"/>
               </a:rPr>
               <a:t>Benedikt Zoller Coaching  ·  FKB Campus  ·  M12</a:t>
-            </a:r>
-          </a:p>
-        </p:txBody>
-      </p:sp>
-      <p:sp>
-        <p:nvSpPr>
-          <p:cNvPr id="10" name="TextBox 9"/>
-          <p:cNvSpPr txBox="1"/>
-          <p:nvPr/>
-        </p:nvSpPr>
-        <p:spPr>
-          <a:xfrm>
-            <a:off x="7176211" y="6583680"/>
-            <a:ext cx="4326940" cy="256032"/>
-          </a:xfrm>
-          <a:prstGeom prst="rect">
-            <a:avLst/>
-          </a:prstGeom>
-          <a:noFill/>
-        </p:spPr>
-        <p:txBody>
-          <a:bodyPr wrap="none">
-            <a:spAutoFit/>
-          </a:bodyPr>
-          <a:lstStyle/>
-          <a:p>
-            <a:pPr algn="r"/>
-            <a:r>
-              <a:rPr sz="700">
-                <a:solidFill>
-                  <a:srgbClr val="A0B4D2"/>
-                </a:solidFill>
-                <a:latin typeface="JetBrains Mono"/>
-              </a:rPr>
-              <a:t>Schaubild</a:t>
             </a:r>
           </a:p>
         </p:txBody>

--- a/protected-downloads/praesentation/M12.pptx
+++ b/protected-downloads/praesentation/M12.pptx
@@ -513,7 +513,7 @@
           <a:lstStyle/>
           <a:p>
             <a:r>
-              <a:t>Agenda-Überblick. Timing und Pausen siehe Ablaufplan im Trainerhandbuch (Sektion 3).</a:t>
+              <a:t>Agenda aus dem Ablaufplan (Sektion 3.1). Timing und Pausen siehe Trainerhandbuch.</a:t>
             </a:r>
           </a:p>
         </p:txBody>
@@ -5312,13 +5312,13 @@
               </a:spcAft>
             </a:pPr>
             <a:r>
-              <a:rPr sz="1200">
+              <a:rPr sz="1300">
                 <a:solidFill>
                   <a:srgbClr val="3D5466"/>
                 </a:solidFill>
                 <a:latin typeface="Arial"/>
               </a:rPr>
-              <a:t>Karl: [Nickt]</a:t>
+              <a:t>▸  Karl: [Nickt]</a:t>
             </a:r>
           </a:p>
           <a:p>
@@ -5331,13 +5331,13 @@
               </a:spcAft>
             </a:pPr>
             <a:r>
-              <a:rPr sz="1200">
+              <a:rPr sz="1300">
                 <a:solidFill>
                   <a:srgbClr val="3D5466"/>
                 </a:solidFill>
                 <a:latin typeface="Arial"/>
               </a:rPr>
-              <a:t>Claudia: „Wenn Sie sagen ‚ich weiß nicht, wie ich das übergeben soll' – was ist das Größte daran, das Ihnen Sorge macht?"</a:t>
+              <a:t>▸  Claudia: „Wenn Sie sagen ‚ich weiß nicht, wie ich das übergeben soll' – was ist das Größte daran, das Ihnen Sorge macht?"</a:t>
             </a:r>
           </a:p>
           <a:p>
@@ -5350,13 +5350,13 @@
               </a:spcAft>
             </a:pPr>
             <a:r>
-              <a:rPr sz="1200">
+              <a:rPr sz="1300">
                 <a:solidFill>
                   <a:srgbClr val="3D5466"/>
                 </a:solidFill>
                 <a:latin typeface="Arial"/>
               </a:rPr>
-              <a:t>Karl: „Dass das Unternehmen in schlechte Hände kommt. Meine Mitarbeiter sind wie meine Familie. Ich kann mir nicht vorstellen, dass jemand Fremdes einfach reinkommt und alles ändert."</a:t>
+              <a:t>▸  Karl: „Dass das Unternehmen in schlechte Hände kommt. Meine Mitarbeiter sind wie meine Familie. Ich kann mir nicht vorstellen, dass jemand Fremdes einfach reinkommt und alles ändert."</a:t>
             </a:r>
           </a:p>
         </p:txBody>
@@ -5920,13 +5920,13 @@
               </a:spcAft>
             </a:pPr>
             <a:r>
-              <a:rPr sz="1200">
+              <a:rPr sz="1300">
                 <a:solidFill>
                   <a:srgbClr val="3D5466"/>
                 </a:solidFill>
                 <a:latin typeface="Arial"/>
               </a:rPr>
-              <a:t>Zur Bewusstseinsbildung:</a:t>
+              <a:t>▸  Zur Bewusstseinsbildung:</a:t>
             </a:r>
           </a:p>
           <a:p>
@@ -7019,7 +7019,7 @@
                 </a:solidFill>
                 <a:latin typeface="Source Serif 4"/>
               </a:rPr>
-              <a:t>Agenda</a:t>
+              <a:t>So läuft das Modul</a:t>
             </a:r>
           </a:p>
         </p:txBody>
@@ -7048,115 +7048,418 @@
           <a:p>
             <a:pPr>
               <a:spcBef>
-                <a:spcPts val="800"/>
+                <a:spcPts val="400"/>
               </a:spcBef>
               <a:spcAft>
-                <a:spcPts val="200"/>
+                <a:spcPts val="100"/>
               </a:spcAft>
             </a:pPr>
             <a:r>
-              <a:rPr sz="1500">
+              <a:rPr sz="900">
+                <a:solidFill>
+                  <a:srgbClr val="78808C"/>
+                </a:solidFill>
+                <a:latin typeface="Consolas"/>
+              </a:rPr>
+              <a:t>08:30–09:00 </a:t>
+            </a:r>
+            <a:r>
+              <a:rPr sz="1200" b="1">
                 <a:solidFill>
                   <a:srgbClr val="3D5466"/>
                 </a:solidFill>
                 <a:latin typeface="Arial"/>
               </a:rPr>
-              <a:t>01   Theorie-Input: Das CEO-Gespräch – Mindset und Vorbereitung</a:t>
+              <a:t>  Ankommen &amp; Check-in</a:t>
+            </a:r>
+            <a:r>
+              <a:rPr sz="900">
+                <a:solidFill>
+                  <a:srgbClr val="78808C"/>
+                </a:solidFill>
+                <a:latin typeface="Arial"/>
+              </a:rPr>
+              <a:t>  ·  Plenumrunde</a:t>
             </a:r>
           </a:p>
           <a:p>
             <a:pPr>
               <a:spcBef>
-                <a:spcPts val="800"/>
+                <a:spcPts val="400"/>
               </a:spcBef>
               <a:spcAft>
-                <a:spcPts val="200"/>
+                <a:spcPts val="100"/>
               </a:spcAft>
             </a:pPr>
             <a:r>
-              <a:rPr sz="1500">
+              <a:rPr sz="900">
+                <a:solidFill>
+                  <a:srgbClr val="78808C"/>
+                </a:solidFill>
+                <a:latin typeface="Consolas"/>
+              </a:rPr>
+              <a:t>09:00–09:45 </a:t>
+            </a:r>
+            <a:r>
+              <a:rPr sz="1200" b="1">
                 <a:solidFill>
                   <a:srgbClr val="3D5466"/>
                 </a:solidFill>
                 <a:latin typeface="Arial"/>
               </a:rPr>
-              <a:t>02   Theorie-Input: Fragetechniken auf Strategieebene</a:t>
+              <a:t>  Theorie-Input: CEO-Dialog Mindset</a:t>
+            </a:r>
+            <a:r>
+              <a:rPr sz="900">
+                <a:solidFill>
+                  <a:srgbClr val="78808C"/>
+                </a:solidFill>
+                <a:latin typeface="Arial"/>
+              </a:rPr>
+              <a:t>  ·  Kurzinput + Diskussion</a:t>
             </a:r>
           </a:p>
           <a:p>
             <a:pPr>
               <a:spcBef>
-                <a:spcPts val="800"/>
+                <a:spcPts val="400"/>
               </a:spcBef>
               <a:spcAft>
-                <a:spcPts val="200"/>
+                <a:spcPts val="100"/>
               </a:spcAft>
             </a:pPr>
             <a:r>
-              <a:rPr sz="1500">
+              <a:rPr sz="900">
+                <a:solidFill>
+                  <a:srgbClr val="78808C"/>
+                </a:solidFill>
+                <a:latin typeface="Consolas"/>
+              </a:rPr>
+              <a:t>09:45–10:30 </a:t>
+            </a:r>
+            <a:r>
+              <a:rPr sz="1200" b="1">
                 <a:solidFill>
                   <a:srgbClr val="3D5466"/>
                 </a:solidFill>
                 <a:latin typeface="Arial"/>
               </a:rPr>
-              <a:t>03   Theorie-Input: Nachfolge-Typen und Prozess im Überblick</a:t>
+              <a:t>  Theorie-Input: Systemische Fragetechniken</a:t>
+            </a:r>
+            <a:r>
+              <a:rPr sz="900">
+                <a:solidFill>
+                  <a:srgbClr val="78808C"/>
+                </a:solidFill>
+                <a:latin typeface="Arial"/>
+              </a:rPr>
+              <a:t>  ·  Kurzinput + Übung</a:t>
             </a:r>
           </a:p>
           <a:p>
             <a:pPr>
               <a:spcBef>
-                <a:spcPts val="800"/>
+                <a:spcPts val="400"/>
               </a:spcBef>
               <a:spcAft>
-                <a:spcPts val="200"/>
+                <a:spcPts val="100"/>
               </a:spcAft>
             </a:pPr>
             <a:r>
-              <a:rPr sz="1500">
+              <a:rPr sz="900">
+                <a:solidFill>
+                  <a:srgbClr val="78808C"/>
+                </a:solidFill>
+                <a:latin typeface="Consolas"/>
+              </a:rPr>
+              <a:t>10:30–10:45 </a:t>
+            </a:r>
+            <a:r>
+              <a:rPr sz="1200" b="1">
                 <a:solidFill>
                   <a:srgbClr val="3D5466"/>
                 </a:solidFill>
                 <a:latin typeface="Arial"/>
               </a:rPr>
-              <a:t>04   Theorie-Input: Die emotionale Dimension der Nachfolge</a:t>
+              <a:t>  Pause</a:t>
             </a:r>
           </a:p>
           <a:p>
             <a:pPr>
               <a:spcBef>
-                <a:spcPts val="800"/>
+                <a:spcPts val="400"/>
               </a:spcBef>
               <a:spcAft>
-                <a:spcPts val="200"/>
+                <a:spcPts val="100"/>
               </a:spcAft>
             </a:pPr>
             <a:r>
-              <a:rPr sz="1500">
+              <a:rPr sz="900">
+                <a:solidFill>
+                  <a:srgbClr val="78808C"/>
+                </a:solidFill>
+                <a:latin typeface="Consolas"/>
+              </a:rPr>
+              <a:t>10:45–12:00 </a:t>
+            </a:r>
+            <a:r>
+              <a:rPr sz="1200" b="1">
                 <a:solidFill>
                   <a:srgbClr val="3D5466"/>
                 </a:solidFill>
                 <a:latin typeface="Arial"/>
               </a:rPr>
-              <a:t>05   Praxisfall: Metallverarbeitung Wagner KG, Stuttgart</a:t>
+              <a:t>  Fallstudie Wagner KG: Analyse</a:t>
+            </a:r>
+            <a:r>
+              <a:rPr sz="900">
+                <a:solidFill>
+                  <a:srgbClr val="78808C"/>
+                </a:solidFill>
+                <a:latin typeface="Arial"/>
+              </a:rPr>
+              <a:t>  ·  Kleingruppen (4×2)</a:t>
             </a:r>
           </a:p>
           <a:p>
             <a:pPr>
               <a:spcBef>
-                <a:spcPts val="800"/>
+                <a:spcPts val="400"/>
               </a:spcBef>
               <a:spcAft>
-                <a:spcPts val="200"/>
+                <a:spcPts val="100"/>
               </a:spcAft>
             </a:pPr>
             <a:r>
-              <a:rPr sz="1500">
+              <a:rPr sz="900">
+                <a:solidFill>
+                  <a:srgbClr val="78808C"/>
+                </a:solidFill>
+                <a:latin typeface="Consolas"/>
+              </a:rPr>
+              <a:t>12:00–13:00 </a:t>
+            </a:r>
+            <a:r>
+              <a:rPr sz="1200" b="1">
                 <a:solidFill>
                   <a:srgbClr val="3D5466"/>
                 </a:solidFill>
                 <a:latin typeface="Arial"/>
               </a:rPr>
-              <a:t>06   Arbeitsblatt: Nachfolge-Erstgespräch strukturieren</a:t>
+              <a:t>  Mittagspause</a:t>
+            </a:r>
+          </a:p>
+          <a:p>
+            <a:pPr>
+              <a:spcBef>
+                <a:spcPts val="400"/>
+              </a:spcBef>
+              <a:spcAft>
+                <a:spcPts val="100"/>
+              </a:spcAft>
+            </a:pPr>
+            <a:r>
+              <a:rPr sz="900">
+                <a:solidFill>
+                  <a:srgbClr val="78808C"/>
+                </a:solidFill>
+                <a:latin typeface="Consolas"/>
+              </a:rPr>
+              <a:t>13:00–13:30 </a:t>
+            </a:r>
+            <a:r>
+              <a:rPr sz="1200" b="1">
+                <a:solidFill>
+                  <a:srgbClr val="3D5466"/>
+                </a:solidFill>
+                <a:latin typeface="Arial"/>
+              </a:rPr>
+              <a:t>  Systemische Fragetechniken in der Praxis</a:t>
+            </a:r>
+            <a:r>
+              <a:rPr sz="900">
+                <a:solidFill>
+                  <a:srgbClr val="78808C"/>
+                </a:solidFill>
+                <a:latin typeface="Arial"/>
+              </a:rPr>
+              <a:t>  ·  Live-Demo durch externen Coach (Fallback: Trainer/Video, s. 3.2)</a:t>
+            </a:r>
+          </a:p>
+          <a:p>
+            <a:pPr>
+              <a:spcBef>
+                <a:spcPts val="400"/>
+              </a:spcBef>
+              <a:spcAft>
+                <a:spcPts val="100"/>
+              </a:spcAft>
+            </a:pPr>
+            <a:r>
+              <a:rPr sz="900">
+                <a:solidFill>
+                  <a:srgbClr val="78808C"/>
+                </a:solidFill>
+                <a:latin typeface="Consolas"/>
+              </a:rPr>
+              <a:t>13:30–15:00 </a:t>
+            </a:r>
+            <a:r>
+              <a:rPr sz="1200" b="1">
+                <a:solidFill>
+                  <a:srgbClr val="3D5466"/>
+                </a:solidFill>
+                <a:latin typeface="Arial"/>
+              </a:rPr>
+              <a:t>  Simulation CEO-Dialog I: Erstkontakt</a:t>
+            </a:r>
+            <a:r>
+              <a:rPr sz="900">
+                <a:solidFill>
+                  <a:srgbClr val="78808C"/>
+                </a:solidFill>
+                <a:latin typeface="Arial"/>
+              </a:rPr>
+              <a:t>  ·  Kleingruppen à 4 TN (Rotation)</a:t>
+            </a:r>
+          </a:p>
+          <a:p>
+            <a:pPr>
+              <a:spcBef>
+                <a:spcPts val="400"/>
+              </a:spcBef>
+              <a:spcAft>
+                <a:spcPts val="100"/>
+              </a:spcAft>
+            </a:pPr>
+            <a:r>
+              <a:rPr sz="900">
+                <a:solidFill>
+                  <a:srgbClr val="78808C"/>
+                </a:solidFill>
+                <a:latin typeface="Consolas"/>
+              </a:rPr>
+              <a:t>15:00–15:15 </a:t>
+            </a:r>
+            <a:r>
+              <a:rPr sz="1200" b="1">
+                <a:solidFill>
+                  <a:srgbClr val="3D5466"/>
+                </a:solidFill>
+                <a:latin typeface="Arial"/>
+              </a:rPr>
+              <a:t>  Pause</a:t>
+            </a:r>
+          </a:p>
+          <a:p>
+            <a:pPr>
+              <a:spcBef>
+                <a:spcPts val="400"/>
+              </a:spcBef>
+              <a:spcAft>
+                <a:spcPts val="100"/>
+              </a:spcAft>
+            </a:pPr>
+            <a:r>
+              <a:rPr sz="900">
+                <a:solidFill>
+                  <a:srgbClr val="78808C"/>
+                </a:solidFill>
+                <a:latin typeface="Consolas"/>
+              </a:rPr>
+              <a:t>15:15–16:30 </a:t>
+            </a:r>
+            <a:r>
+              <a:rPr sz="1200" b="1">
+                <a:solidFill>
+                  <a:srgbClr val="3D5466"/>
+                </a:solidFill>
+                <a:latin typeface="Arial"/>
+              </a:rPr>
+              <a:t>  Simulation CEO-Dialog II: Nachfolge-Vertiefung</a:t>
+            </a:r>
+            <a:r>
+              <a:rPr sz="900">
+                <a:solidFill>
+                  <a:srgbClr val="78808C"/>
+                </a:solidFill>
+                <a:latin typeface="Arial"/>
+              </a:rPr>
+              <a:t>  ·  Kleingruppen à 4 TN (Rotation)</a:t>
+            </a:r>
+          </a:p>
+          <a:p>
+            <a:pPr>
+              <a:spcBef>
+                <a:spcPts val="400"/>
+              </a:spcBef>
+              <a:spcAft>
+                <a:spcPts val="100"/>
+              </a:spcAft>
+            </a:pPr>
+            <a:r>
+              <a:rPr sz="900">
+                <a:solidFill>
+                  <a:srgbClr val="78808C"/>
+                </a:solidFill>
+                <a:latin typeface="Consolas"/>
+              </a:rPr>
+              <a:t>16:30–17:00 </a:t>
+            </a:r>
+            <a:r>
+              <a:rPr sz="1200" b="1">
+                <a:solidFill>
+                  <a:srgbClr val="3D5466"/>
+                </a:solidFill>
+                <a:latin typeface="Arial"/>
+              </a:rPr>
+              <a:t>  Plenumreflexion &amp; Transferplanung</a:t>
+            </a:r>
+            <a:r>
+              <a:rPr sz="900">
+                <a:solidFill>
+                  <a:srgbClr val="78808C"/>
+                </a:solidFill>
+                <a:latin typeface="Arial"/>
+              </a:rPr>
+              <a:t>  ·  Plenum</a:t>
+            </a:r>
+          </a:p>
+          <a:p>
+            <a:pPr>
+              <a:spcBef>
+                <a:spcPts val="400"/>
+              </a:spcBef>
+              <a:spcAft>
+                <a:spcPts val="100"/>
+              </a:spcAft>
+            </a:pPr>
+            <a:r>
+              <a:rPr sz="900">
+                <a:solidFill>
+                  <a:srgbClr val="78808C"/>
+                </a:solidFill>
+                <a:latin typeface="Consolas"/>
+              </a:rPr>
+              <a:t>17:00–17:30 </a:t>
+            </a:r>
+            <a:r>
+              <a:rPr sz="1200" b="1">
+                <a:solidFill>
+                  <a:srgbClr val="3D5466"/>
+                </a:solidFill>
+                <a:latin typeface="Arial"/>
+              </a:rPr>
+              <a:t>  Abschluss: Nachfolge-Roadmap skizzieren</a:t>
+            </a:r>
+            <a:r>
+              <a:rPr sz="900">
+                <a:solidFill>
+                  <a:srgbClr val="78808C"/>
+                </a:solidFill>
+                <a:latin typeface="Arial"/>
+              </a:rPr>
+              <a:t>  ·  Einzelarbeit</a:t>
             </a:r>
           </a:p>
         </p:txBody>
@@ -7549,13 +7852,13 @@
               </a:spcAft>
             </a:pPr>
             <a:r>
-              <a:rPr sz="1200">
+              <a:rPr sz="1300">
                 <a:solidFill>
                   <a:srgbClr val="3D5466"/>
                 </a:solidFill>
                 <a:latin typeface="Arial"/>
               </a:rPr>
-              <a:t>Drei bewährte Einstiegs-Anlässe:</a:t>
+              <a:t>▸  Drei bewährte Einstiegs-Anlässe:</a:t>
             </a:r>
           </a:p>
           <a:p>
@@ -8119,13 +8422,13 @@
               </a:spcAft>
             </a:pPr>
             <a:r>
-              <a:rPr sz="1200">
+              <a:rPr sz="1300">
                 <a:solidFill>
                   <a:srgbClr val="3D5466"/>
                 </a:solidFill>
                 <a:latin typeface="Arial"/>
               </a:rPr>
-              <a:t>Systemische Fragen machen die Vernetzung von Elementen sichtbar:</a:t>
+              <a:t>▸  Systemische Fragen machen die Vernetzung von Elementen sichtbar:</a:t>
             </a:r>
           </a:p>
           <a:p>
@@ -8195,13 +8498,13 @@
               </a:spcAft>
             </a:pPr>
             <a:r>
-              <a:rPr sz="1200">
+              <a:rPr sz="1300">
                 <a:solidFill>
                   <a:srgbClr val="3D5466"/>
                 </a:solidFill>
                 <a:latin typeface="Arial"/>
               </a:rPr>
-              <a:t>Zirkuläre Fragen (Penn, 1982 ) erforschen, wie andere den Unternehmer und sein Dilemma wahrnehmen:</a:t>
+              <a:t>▸  Zirkuläre Fragen (Penn, 1982 ) erforschen, wie andere den Unternehmer und sein Dilemma wahrnehmen:</a:t>
             </a:r>
           </a:p>
           <a:p>
@@ -8271,13 +8574,13 @@
               </a:spcAft>
             </a:pPr>
             <a:r>
-              <a:rPr sz="1200">
+              <a:rPr sz="1300">
                 <a:solidFill>
                   <a:srgbClr val="3D5466"/>
                 </a:solidFill>
                 <a:latin typeface="Arial"/>
               </a:rPr>
-              <a:t>Zirkuläre Fragen decken implizite Ängste und Blockaden auf, ohne direkt zu fragen: „Haben Sie Angst vor Kontrollverlust?"</a:t>
+              <a:t>▸  Zirkuläre Fragen decken implizite Ängste und Blockaden auf, ohne direkt zu fragen: „Haben Sie Angst vor Kontrollverlust?"</a:t>
             </a:r>
           </a:p>
           <a:p>
@@ -8309,13 +8612,13 @@
               </a:spcAft>
             </a:pPr>
             <a:r>
-              <a:rPr sz="1200">
+              <a:rPr sz="1300">
                 <a:solidFill>
                   <a:srgbClr val="3D5466"/>
                 </a:solidFill>
                 <a:latin typeface="Arial"/>
               </a:rPr>
-              <a:t>Die lösungsorientierte Gesprächsführung hilft, den Unternehmer aus Lähmung oder Verdrängung herauszuholen:</a:t>
+              <a:t>▸  Die lösungsorientierte Gesprächsführung hilft, den Unternehmer aus Lähmung oder Verdrängung herauszuholen:</a:t>
             </a:r>
           </a:p>
         </p:txBody>
@@ -8727,13 +9030,13 @@
               </a:spcAft>
             </a:pPr>
             <a:r>
-              <a:rPr sz="1200">
+              <a:rPr sz="1300">
                 <a:solidFill>
                   <a:srgbClr val="3D5466"/>
                 </a:solidFill>
                 <a:latin typeface="Arial"/>
               </a:rPr>
-              <a:t>Erfolgreiche Unternehmernachfolgen benötigen empirisch 3–7 Jahre Vorlaufzeit (IfM Bonn, 2016 ):</a:t>
+              <a:t>▸  Erfolgreiche Unternehmernachfolgen benötigen empirisch 3–7 Jahre Vorlaufzeit (IfM Bonn, 2016 ):</a:t>
             </a:r>
           </a:p>
           <a:p>
@@ -8765,13 +9068,13 @@
               </a:spcAft>
             </a:pPr>
             <a:r>
-              <a:rPr sz="1200">
+              <a:rPr sz="1300">
                 <a:solidFill>
                   <a:srgbClr val="3D5466"/>
                 </a:solidFill>
                 <a:latin typeface="Arial"/>
               </a:rPr>
-              <a:t>Der FK zeigt dem Unternehmer die wichtigsten Felder auf und verweist an Spezialisten:</a:t>
+              <a:t>▸  Der FK zeigt dem Unternehmer die wichtigsten Felder auf und verweist an Spezialisten:</a:t>
             </a:r>
           </a:p>
           <a:p>
@@ -9651,13 +9954,13 @@
               </a:spcAft>
             </a:pPr>
             <a:r>
-              <a:rPr sz="1200">
+              <a:rPr sz="1300">
                 <a:solidFill>
                   <a:srgbClr val="3D5466"/>
                 </a:solidFill>
                 <a:latin typeface="Arial"/>
               </a:rPr>
-              <a:t>Diese existenzielle Angst wird oft verdrängt oder rationalisiert. Psychologisch handelt es sich um einen Trauerprozess (adaptiert nach Kübler-Ross, 1969 ):</a:t>
+              <a:t>▸  Diese existenzielle Angst wird oft verdrängt oder rationalisiert. Psychologisch handelt es sich um einen Trauerprozess (adaptiert nach Kübler-Ross, 1969 ):</a:t>
             </a:r>
           </a:p>
           <a:p>
@@ -9765,13 +10068,13 @@
               </a:spcAft>
             </a:pPr>
             <a:r>
-              <a:rPr sz="1200">
+              <a:rPr sz="1300">
                 <a:solidFill>
                   <a:srgbClr val="3D5466"/>
                 </a:solidFill>
                 <a:latin typeface="Arial"/>
               </a:rPr>
-              <a:t>Der FK, der diesen Prozess versteht, behandelt Loslasswiderstände nicht als Irrationalität, sondern als normal und bearbeitbar.</a:t>
+              <a:t>▸  Der FK, der diesen Prozess versteht, behandelt Loslasswiderstände nicht als Irrationalität, sondern als normal und bearbeitbar.</a:t>
             </a:r>
           </a:p>
           <a:p>
@@ -9803,13 +10106,13 @@
               </a:spcAft>
             </a:pPr>
             <a:r>
-              <a:rPr sz="1200">
+              <a:rPr sz="1300">
                 <a:solidFill>
                   <a:srgbClr val="3D5466"/>
                 </a:solidFill>
                 <a:latin typeface="Arial"/>
               </a:rPr>
-              <a:t>Viele Unternehmer tragen zwei widersprüchliche Wünsche:</a:t>
+              <a:t>▸  Viele Unternehmer tragen zwei widersprüchliche Wünsche:</a:t>
             </a:r>
           </a:p>
           <a:p>

--- a/protected-downloads/praesentation/M12.pptx
+++ b/protected-downloads/praesentation/M12.pptx
@@ -4456,7 +4456,7 @@
                 </a:solidFill>
                 <a:latin typeface="JetBrains Mono"/>
               </a:rPr>
-              <a:t>Benedikt Zoller Coaching  ·  FKB Campus  ·  2026</a:t>
+              <a:t>FKB Campus  ·  2026</a:t>
             </a:r>
           </a:p>
         </p:txBody>
@@ -4810,7 +4810,7 @@
                 </a:solidFill>
                 <a:latin typeface="JetBrains Mono"/>
               </a:rPr>
-              <a:t>Benedikt Zoller Coaching  ·  FKB Campus  ·  M12</a:t>
+              <a:t>FKB Campus  ·  M12</a:t>
             </a:r>
           </a:p>
         </p:txBody>
@@ -5434,7 +5434,7 @@
                 </a:solidFill>
                 <a:latin typeface="JetBrains Mono"/>
               </a:rPr>
-              <a:t>Benedikt Zoller Coaching  ·  FKB Campus  ·  M12</a:t>
+              <a:t>FKB Campus  ·  M12</a:t>
             </a:r>
           </a:p>
         </p:txBody>
@@ -6023,7 +6023,7 @@
                 </a:solidFill>
                 <a:latin typeface="JetBrains Mono"/>
               </a:rPr>
-              <a:t>Benedikt Zoller Coaching  ·  FKB Campus  ·  M12</a:t>
+              <a:t>FKB Campus  ·  M12</a:t>
             </a:r>
           </a:p>
         </p:txBody>
@@ -6389,7 +6389,7 @@
                 </a:solidFill>
                 <a:latin typeface="JetBrains Mono"/>
               </a:rPr>
-              <a:t>Benedikt Zoller Coaching  ·  FKB Campus  ·  M12</a:t>
+              <a:t>FKB Campus  ·  M12</a:t>
             </a:r>
           </a:p>
         </p:txBody>
@@ -6802,7 +6802,7 @@
                 </a:solidFill>
                 <a:latin typeface="JetBrains Mono"/>
               </a:rPr>
-              <a:t>Benedikt Zoller Coaching  ·  FKB Campus  ·  M12</a:t>
+              <a:t>FKB Campus  ·  M12</a:t>
             </a:r>
           </a:p>
         </p:txBody>
@@ -7537,7 +7537,7 @@
                 </a:solidFill>
                 <a:latin typeface="JetBrains Mono"/>
               </a:rPr>
-              <a:t>Benedikt Zoller Coaching  ·  FKB Campus  ·  M12</a:t>
+              <a:t>FKB Campus  ·  M12</a:t>
             </a:r>
           </a:p>
         </p:txBody>
@@ -8107,7 +8107,7 @@
                 </a:solidFill>
                 <a:latin typeface="JetBrains Mono"/>
               </a:rPr>
-              <a:t>Benedikt Zoller Coaching  ·  FKB Campus  ·  M12</a:t>
+              <a:t>FKB Campus  ·  M12</a:t>
             </a:r>
           </a:p>
         </p:txBody>
@@ -8696,7 +8696,7 @@
                 </a:solidFill>
                 <a:latin typeface="JetBrains Mono"/>
               </a:rPr>
-              <a:t>Benedikt Zoller Coaching  ·  FKB Campus  ·  M12</a:t>
+              <a:t>FKB Campus  ·  M12</a:t>
             </a:r>
           </a:p>
         </p:txBody>
@@ -9285,7 +9285,7 @@
                 </a:solidFill>
                 <a:latin typeface="JetBrains Mono"/>
               </a:rPr>
-              <a:t>Benedikt Zoller Coaching  ·  FKB Campus  ·  M12</a:t>
+              <a:t>FKB Campus  ·  M12</a:t>
             </a:r>
           </a:p>
         </p:txBody>
@@ -9604,7 +9604,7 @@
                 </a:solidFill>
                 <a:latin typeface="JetBrains Mono"/>
               </a:rPr>
-              <a:t>Benedikt Zoller Coaching  ·  FKB Campus  ·  M12</a:t>
+              <a:t>FKB Campus  ·  M12</a:t>
             </a:r>
           </a:p>
         </p:txBody>
@@ -10228,7 +10228,7 @@
                 </a:solidFill>
                 <a:latin typeface="JetBrains Mono"/>
               </a:rPr>
-              <a:t>Benedikt Zoller Coaching  ·  FKB Campus  ·  M12</a:t>
+              <a:t>FKB Campus  ·  M12</a:t>
             </a:r>
           </a:p>
         </p:txBody>

--- a/protected-downloads/praesentation/M12.pptx
+++ b/protected-downloads/praesentation/M12.pptx
@@ -583,7 +583,7 @@
           <a:lstStyle/>
           <a:p>
             <a:r>
-              <a:t>Moderation (HB Sec 3): Kern des Inputs: Warum CEO-Dialoge scheitern – und was strukturell anders ist. Fokus: McClelland &amp; Burnham (Q-154) zu Machtmotivation, Edmondson (Q-148) zu psychologischer Sicherheit. Visualisierung: „Gesprächsarchitektur eines CEO-Dialogs" auf Flipchart (3 Ebenen: Einstieg → Vertiefung → Commitment). Trainer-Hinweis: Kein akademischer Vortrag – jede Theorie an einem eigenen Erlebnis verankern. „Ich hatte mal einen Kunden, der nach 15 Jahren zum ersten Mal über sein Unternehmen gesprochen hat – weil ich eine andere Frage gestellt habe." Persönliche Glaubwürdigkeit ist die Eintrittskarte zur Stufe-4-Kompetenzentwicklung.</a:t>
+              <a:t>Moderation (HB Sec 3): Kern des Inputs: Warum CEO-Dialoge scheitern – und was strukturell anders ist. Fokus: McClelland &amp; Burnham (Q-154) zu Machtmotivation, Edmondson (Q-148) zu psychologischer Sicherheit. Visualisierung: „Gesprächsarchitektur eines CEO-Dialogs" auf Flipchart (3 Ebenen: Einstieg → Vertiefung → Commitment). Trainer-Hinweis: Kein akademischer Vortrag – jede Theorie an einem eigenen Erlebnis verankern. „Ich hatte mal einen Kunden, der nach 15 Jahren zum ersten Mal über sein Unternehmen gesprochen hat – weil ich eine andere Frage gestellt habe." Persönliche Glaubwürdigkeit ist die Eintrittskarte zur Stufe-4-Kompetenzentwicklung. Trainer-Hinweis Formulierungs-Kontraste: Das Board-Room-Mindset bleibt sonst abstrakt – machen Sie es an Sprache fest. Flipchart in zwei Spalten teilen: links „Dienstleister-Sprache" / rechts „Augenhöhe-Sprache" (Kontraste aus Sec 4.1 nutzen). Lassen Sie die TN zuerst ihre eigenen Einstiegsformulierungen für ein CEO-Gespräch nennen („Was sagen Sie, wenn Sie aktuell in ein CEO-Gespräch einsteigen?"), sammeln Sie diese in der linken Spalte und entwickeln Sie das Reframing rechts gemeinsam. Dauer: ca. 5 Minuten Extra-Interaktion – der Schritt von Prinzip zu Praxis, den der Vortrag allein nicht leistet.</a:t>
             </a:r>
           </a:p>
         </p:txBody>
@@ -653,7 +653,7 @@
           <a:lstStyle/>
           <a:p>
             <a:r>
-              <a:t>Moderation (HB Sec 3): Einführung der drei Kernwerkzeuge: 1. Wunderfrage (de Shazer, 1985 ): Angenommen, über Nacht wäre das Problem gelöst – was wäre morgen anders? 2. Zirkuläre Frage (Penn, 1982 ; Tomm, 1987 ): Was würde Ihr Steuerberater sagen, wenn ich ihn fragen würde, was Ihr größtes Hindernis ist? 3. Hypothetische Frage: Wenn Sie wüssten, dass Ihr Unternehmen in 5 Jahren verkauft wird – was würden Sie heute anders machen? Übung im Plenum: Jeder TN formuliert eine zirkuläre Frage für seinen wichtigsten Nachfolge-Kunden. Kurze Partnerdiskussion (5 min), dann zwei Beispiele im Plenum vorstellen.</a:t>
+              <a:t>Moderation (HB Sec 3): Einführung der drei Kernwerkzeuge: 1. Wunderfrage (de Shazer, 1985 ): Angenommen, über Nacht wäre das Problem gelöst – was wäre morgen anders? 2. Zirkuläre Frage (Penn, 1982 ; Tomm, 1987 ): Was würde Ihr Steuerberater sagen, wenn ich ihn fragen würde, was Ihr größtes Hindernis ist? 3. Hypothetische Frage: Wenn Sie wüssten, dass Ihr Unternehmen in 5 Jahren verkauft wird – was würden Sie heute anders machen? Übung im Plenum (pragmatisch, ohne Typ-Zwang): Jeder TN formuliert „eine Frage, die eine andere Perspektive ins Gespräch bringt – aus der Sicht einer Person, die nicht im Raum ist." Muss keine zirkuläre Frage im Lehrbuch-Sinne sein – Hauptsache, der TN verlässt die Ich-Perspektive des Unternehmers. Kurze Partnerdiskussion (5 min), dann zwei Beispiele im Plenum vorstellen. Wichtig: Nicht die korrekte Kategorie bewerten, sondern die Wirkung der Frage. Die Drei-Typen-Taxonomie ist eine Lernhilfe, kein Anwendungsraster (siehe Kasten in Sec 4.2).</a:t>
             </a:r>
           </a:p>
         </p:txBody>
@@ -6667,7 +6667,7 @@
                 </a:solidFill>
                 <a:latin typeface="Arial"/>
               </a:rPr>
-              <a:t>▸  Systemische und zirkuläre Fragetechniken einsetzen, um latente Zukunftsängste aufzudecken und psychologische Sicherheit herzustellen</a:t>
+              <a:t>▸  Die psychologische Gesprächsdynamik im CEO-Dialog analysieren und das Fragemuster nach systemischen und zirkulären Techniken strukturieren, um latente Zukunftsängste aufzudecken</a:t>
             </a:r>
           </a:p>
           <a:p>

--- a/protected-downloads/praesentation/M12.pptx
+++ b/protected-downloads/praesentation/M12.pptx
@@ -4378,7 +4378,7 @@
                 </a:solidFill>
                 <a:latin typeface="Arial"/>
               </a:rPr>
-              <a:t>v0.3</a:t>
+              <a:t>v1.0</a:t>
             </a:r>
           </a:p>
         </p:txBody>

--- a/protected-downloads/praesentation/M12.pptx
+++ b/protected-downloads/praesentation/M12.pptx
@@ -5694,7 +5694,7 @@
                 </a:solidFill>
                 <a:latin typeface="Source Serif 4"/>
               </a:rPr>
-              <a:t>Arbeitsblatt: Nachfolge-Erstgespräch strukturieren</a:t>
+              <a:t>AB-1: Nachfolge-Erstgespräch strukturieren</a:t>
             </a:r>
           </a:p>
         </p:txBody>

--- a/protected-downloads/praesentation/M12.pptx
+++ b/protected-downloads/praesentation/M12.pptx
@@ -4053,7 +4053,7 @@
                 <a:solidFill>
                   <a:srgbClr val="C8D2E6"/>
                 </a:solidFill>
-                <a:latin typeface="JetBrains Mono"/>
+                <a:latin typeface="Consolas"/>
               </a:rPr>
               <a:t>FKB CAMPUS  ·  FIRMENKUNDENAKADEMIE  ·  M12</a:t>
             </a:r>
@@ -4088,7 +4088,7 @@
                 <a:solidFill>
                   <a:srgbClr val="FFFFFF"/>
                 </a:solidFill>
-                <a:latin typeface="Source Serif 4"/>
+                <a:latin typeface="Arial"/>
               </a:rPr>
               <a:t>CEO-Dialog &amp; Nachfolge</a:t>
             </a:r>
@@ -4123,7 +4123,7 @@
                 <a:solidFill>
                   <a:srgbClr val="BECDE6"/>
                 </a:solidFill>
-                <a:latin typeface="Source Serif 4"/>
+                <a:latin typeface="Arial"/>
               </a:rPr>
               <a:t>Auf Augenhöhe mit dem Unternehmer – Nachfolge begleiten und gestalten</a:t>
             </a:r>
@@ -4201,7 +4201,7 @@
                 <a:solidFill>
                   <a:srgbClr val="A0B4D2"/>
                 </a:solidFill>
-                <a:latin typeface="JetBrains Mono"/>
+                <a:latin typeface="Consolas"/>
               </a:rPr>
               <a:t>KOMPETENZFELD</a:t>
             </a:r>
@@ -4271,7 +4271,7 @@
                 <a:solidFill>
                   <a:srgbClr val="A0B4D2"/>
                 </a:solidFill>
-                <a:latin typeface="JetBrains Mono"/>
+                <a:latin typeface="Consolas"/>
               </a:rPr>
               <a:t>KOMPETENZSTUFE</a:t>
             </a:r>
@@ -4341,7 +4341,7 @@
                 <a:solidFill>
                   <a:srgbClr val="A0B4D2"/>
                 </a:solidFill>
-                <a:latin typeface="JetBrains Mono"/>
+                <a:latin typeface="Consolas"/>
               </a:rPr>
               <a:t>VERSION</a:t>
             </a:r>
@@ -4454,7 +4454,7 @@
                 <a:solidFill>
                   <a:srgbClr val="96A5BE"/>
                 </a:solidFill>
-                <a:latin typeface="JetBrains Mono"/>
+                <a:latin typeface="Consolas"/>
               </a:rPr>
               <a:t>FKB Campus  ·  2026</a:t>
             </a:r>
@@ -4489,7 +4489,7 @@
                 <a:solidFill>
                   <a:srgbClr val="96A5BE"/>
                 </a:solidFill>
-                <a:latin typeface="JetBrains Mono"/>
+                <a:latin typeface="Consolas"/>
               </a:rPr>
               <a:t>Trainer-Präsentation</a:t>
             </a:r>
@@ -4628,7 +4628,7 @@
                 <a:solidFill>
                   <a:srgbClr val="78808C"/>
                 </a:solidFill>
-                <a:latin typeface="JetBrains Mono"/>
+                <a:latin typeface="Consolas"/>
               </a:rPr>
               <a:t>M12  ·  SCHAUBILD</a:t>
             </a:r>
@@ -4663,7 +4663,7 @@
                 <a:solidFill>
                   <a:srgbClr val="1F2C56"/>
                 </a:solidFill>
-                <a:latin typeface="Source Serif 4"/>
+                <a:latin typeface="Arial"/>
               </a:rPr>
               <a:t>Veränderungskurve nach Kübler-Ross</a:t>
             </a:r>
@@ -4808,7 +4808,7 @@
                 <a:solidFill>
                   <a:srgbClr val="A0B4D2"/>
                 </a:solidFill>
-                <a:latin typeface="JetBrains Mono"/>
+                <a:latin typeface="Consolas"/>
               </a:rPr>
               <a:t>FKB Campus  ·  M12</a:t>
             </a:r>
@@ -4843,7 +4843,7 @@
                 <a:solidFill>
                   <a:srgbClr val="A0B4D2"/>
                 </a:solidFill>
-                <a:latin typeface="JetBrains Mono"/>
+                <a:latin typeface="Consolas"/>
               </a:rPr>
               <a:t>Schaubild</a:t>
             </a:r>
@@ -4982,7 +4982,7 @@
                 <a:solidFill>
                   <a:srgbClr val="78808C"/>
                 </a:solidFill>
-                <a:latin typeface="JetBrains Mono"/>
+                <a:latin typeface="Consolas"/>
               </a:rPr>
               <a:t>M12  ·  INHALT</a:t>
             </a:r>
@@ -5103,7 +5103,7 @@
                 <a:solidFill>
                   <a:srgbClr val="1F2C56"/>
                 </a:solidFill>
-                <a:latin typeface="Source Serif 4"/>
+                <a:latin typeface="Arial"/>
               </a:rPr>
               <a:t>Praxisfall: Metallverarbeitung Wagner KG, Stuttgart</a:t>
             </a:r>
@@ -5119,7 +5119,7 @@
         <p:spPr>
           <a:xfrm>
             <a:off x="685800" y="1417320"/>
-            <a:ext cx="10817352" cy="5029200"/>
+            <a:ext cx="10817352" cy="4892040"/>
           </a:xfrm>
           <a:prstGeom prst="rect">
             <a:avLst/>
@@ -5145,9 +5145,104 @@
                 <a:solidFill>
                   <a:srgbClr val="78808C"/>
                 </a:solidFill>
-                <a:latin typeface="JetBrains Mono"/>
-              </a:rPr>
-              <a:t>UNTERNEHMENSPROFIL</a:t>
+                <a:latin typeface="Consolas"/>
+              </a:rPr>
+              <a:t>DIAGNOSTISCHE AUFGABEN FÜR CLAUDIA</a:t>
+            </a:r>
+          </a:p>
+          <a:p>
+            <a:pPr marL="190500" indent="-190500">
+              <a:spcBef>
+                <a:spcPts val="400"/>
+              </a:spcBef>
+              <a:spcAft>
+                <a:spcPts val="200"/>
+              </a:spcAft>
+            </a:pPr>
+            <a:r>
+              <a:rPr sz="1300">
+                <a:solidFill>
+                  <a:srgbClr val="3D5466"/>
+                </a:solidFill>
+                <a:latin typeface="Arial"/>
+              </a:rPr>
+              <a:t>▸  Emotionaler Zustand: Ist Karl müde, oder ist das eine echte Nachfolgekrise?</a:t>
+            </a:r>
+          </a:p>
+          <a:p>
+            <a:pPr marL="190500" indent="-190500">
+              <a:spcBef>
+                <a:spcPts val="400"/>
+              </a:spcBef>
+              <a:spcAft>
+                <a:spcPts val="200"/>
+              </a:spcAft>
+            </a:pPr>
+            <a:r>
+              <a:rPr sz="1300">
+                <a:solidFill>
+                  <a:srgbClr val="3D5466"/>
+                </a:solidFill>
+                <a:latin typeface="Arial"/>
+              </a:rPr>
+              <a:t>▸  Nachfolgepotenziale: Sind die Kinder wirklich ausgeschlossen, oder ist die Kommunikation schlecht?</a:t>
+            </a:r>
+          </a:p>
+          <a:p>
+            <a:pPr marL="190500" indent="-190500">
+              <a:spcBef>
+                <a:spcPts val="400"/>
+              </a:spcBef>
+              <a:spcAft>
+                <a:spcPts val="200"/>
+              </a:spcAft>
+            </a:pPr>
+            <a:r>
+              <a:rPr sz="1300">
+                <a:solidFill>
+                  <a:srgbClr val="3D5466"/>
+                </a:solidFill>
+                <a:latin typeface="Arial"/>
+              </a:rPr>
+              <a:t>▸  Alternativen: Wären MBO (Meister Dieter als Käufer) oder strategischer Verkauf denkbar?</a:t>
+            </a:r>
+          </a:p>
+          <a:p>
+            <a:pPr marL="190500" indent="-190500">
+              <a:spcBef>
+                <a:spcPts val="400"/>
+              </a:spcBef>
+              <a:spcAft>
+                <a:spcPts val="200"/>
+              </a:spcAft>
+            </a:pPr>
+            <a:r>
+              <a:rPr sz="1300">
+                <a:solidFill>
+                  <a:srgbClr val="3D5466"/>
+                </a:solidFill>
+                <a:latin typeface="Arial"/>
+              </a:rPr>
+              <a:t>▸  Finanzielle Lage: Ist das Unternehmen stabil genug für eine Nachfolgeplanung?</a:t>
+            </a:r>
+          </a:p>
+          <a:p>
+            <a:pPr marL="190500" indent="-190500">
+              <a:spcBef>
+                <a:spcPts val="400"/>
+              </a:spcBef>
+              <a:spcAft>
+                <a:spcPts val="200"/>
+              </a:spcAft>
+            </a:pPr>
+            <a:r>
+              <a:rPr sz="1300">
+                <a:solidFill>
+                  <a:srgbClr val="3D5466"/>
+                </a:solidFill>
+                <a:latin typeface="Arial"/>
+              </a:rPr>
+              <a:t>▸  Zeithorizont: Wie dringend ist das Thema (gesundheitliche Gründe? Burnout?)?</a:t>
             </a:r>
           </a:p>
           <a:p>
@@ -5164,32 +5259,13 @@
                 <a:solidFill>
                   <a:srgbClr val="78808C"/>
                 </a:solidFill>
-                <a:latin typeface="JetBrains Mono"/>
-              </a:rPr>
-              <a:t>AUSGANGSSITUATION</a:t>
-            </a:r>
-          </a:p>
-          <a:p>
-            <a:pPr>
-              <a:spcBef>
-                <a:spcPts val="1000"/>
-              </a:spcBef>
-              <a:spcAft>
-                <a:spcPts val="200"/>
-              </a:spcAft>
-            </a:pPr>
-            <a:r>
-              <a:rPr sz="800" b="1">
-                <a:solidFill>
-                  <a:srgbClr val="78808C"/>
-                </a:solidFill>
-                <a:latin typeface="JetBrains Mono"/>
-              </a:rPr>
-              <a:t>DIAGNOSTISCHE AUFGABEN FÜR CLAUDIA</a:t>
-            </a:r>
-          </a:p>
-          <a:p>
-            <a:pPr>
+                <a:latin typeface="Consolas"/>
+              </a:rPr>
+              <a:t>BEISPIEL-GESPRÄCHSVERLAUF (SYSTEMISCHE TECHNIK)</a:t>
+            </a:r>
+          </a:p>
+          <a:p>
+            <a:pPr marL="190500" indent="-190500">
               <a:spcBef>
                 <a:spcPts val="400"/>
               </a:spcBef>
@@ -5204,11 +5280,11 @@
                 </a:solidFill>
                 <a:latin typeface="Arial"/>
               </a:rPr>
-              <a:t>▸  Emotionaler Zustand: Ist Karl müde, oder ist das eine echte Nachfolgekrise?</a:t>
-            </a:r>
-          </a:p>
-          <a:p>
-            <a:pPr>
+              <a:t>▸  Karl: [Nickt]</a:t>
+            </a:r>
+          </a:p>
+          <a:p>
+            <a:pPr marL="190500" indent="-190500">
               <a:spcBef>
                 <a:spcPts val="400"/>
               </a:spcBef>
@@ -5223,11 +5299,11 @@
                 </a:solidFill>
                 <a:latin typeface="Arial"/>
               </a:rPr>
-              <a:t>▸  Nachfolgepotenziale: Sind die Kinder wirklich ausgeschlossen, oder ist die Kommunikation schlecht?</a:t>
-            </a:r>
-          </a:p>
-          <a:p>
-            <a:pPr>
+              <a:t>▸  Claudia: „Wenn Sie sagen ‚ich weiß nicht, wie ich das übergeben soll' – was ist das Größte daran, das Ihnen Sorge macht?"</a:t>
+            </a:r>
+          </a:p>
+          <a:p>
+            <a:pPr marL="190500" indent="-190500">
               <a:spcBef>
                 <a:spcPts val="400"/>
               </a:spcBef>
@@ -5242,120 +5318,6 @@
                 </a:solidFill>
                 <a:latin typeface="Arial"/>
               </a:rPr>
-              <a:t>▸  Alternativen: Wären MBO (Meister Dieter als Käufer) oder strategischer Verkauf denkbar?</a:t>
-            </a:r>
-          </a:p>
-          <a:p>
-            <a:pPr>
-              <a:spcBef>
-                <a:spcPts val="400"/>
-              </a:spcBef>
-              <a:spcAft>
-                <a:spcPts val="200"/>
-              </a:spcAft>
-            </a:pPr>
-            <a:r>
-              <a:rPr sz="1300">
-                <a:solidFill>
-                  <a:srgbClr val="3D5466"/>
-                </a:solidFill>
-                <a:latin typeface="Arial"/>
-              </a:rPr>
-              <a:t>▸  Finanzielle Lage: Ist das Unternehmen stabil genug für eine Nachfolgeplanung?</a:t>
-            </a:r>
-          </a:p>
-          <a:p>
-            <a:pPr>
-              <a:spcBef>
-                <a:spcPts val="400"/>
-              </a:spcBef>
-              <a:spcAft>
-                <a:spcPts val="200"/>
-              </a:spcAft>
-            </a:pPr>
-            <a:r>
-              <a:rPr sz="1300">
-                <a:solidFill>
-                  <a:srgbClr val="3D5466"/>
-                </a:solidFill>
-                <a:latin typeface="Arial"/>
-              </a:rPr>
-              <a:t>▸  Zeithorizont: Wie dringend ist das Thema (gesundheitliche Gründe? Burnout?)?</a:t>
-            </a:r>
-          </a:p>
-          <a:p>
-            <a:pPr>
-              <a:spcBef>
-                <a:spcPts val="1000"/>
-              </a:spcBef>
-              <a:spcAft>
-                <a:spcPts val="200"/>
-              </a:spcAft>
-            </a:pPr>
-            <a:r>
-              <a:rPr sz="800" b="1">
-                <a:solidFill>
-                  <a:srgbClr val="78808C"/>
-                </a:solidFill>
-                <a:latin typeface="JetBrains Mono"/>
-              </a:rPr>
-              <a:t>BEISPIEL-GESPRÄCHSVERLAUF (SYSTEMISCHE TECHNIK)</a:t>
-            </a:r>
-          </a:p>
-          <a:p>
-            <a:pPr>
-              <a:spcBef>
-                <a:spcPts val="400"/>
-              </a:spcBef>
-              <a:spcAft>
-                <a:spcPts val="200"/>
-              </a:spcAft>
-            </a:pPr>
-            <a:r>
-              <a:rPr sz="1300">
-                <a:solidFill>
-                  <a:srgbClr val="3D5466"/>
-                </a:solidFill>
-                <a:latin typeface="Arial"/>
-              </a:rPr>
-              <a:t>▸  Karl: [Nickt]</a:t>
-            </a:r>
-          </a:p>
-          <a:p>
-            <a:pPr>
-              <a:spcBef>
-                <a:spcPts val="400"/>
-              </a:spcBef>
-              <a:spcAft>
-                <a:spcPts val="200"/>
-              </a:spcAft>
-            </a:pPr>
-            <a:r>
-              <a:rPr sz="1300">
-                <a:solidFill>
-                  <a:srgbClr val="3D5466"/>
-                </a:solidFill>
-                <a:latin typeface="Arial"/>
-              </a:rPr>
-              <a:t>▸  Claudia: „Wenn Sie sagen ‚ich weiß nicht, wie ich das übergeben soll' – was ist das Größte daran, das Ihnen Sorge macht?"</a:t>
-            </a:r>
-          </a:p>
-          <a:p>
-            <a:pPr>
-              <a:spcBef>
-                <a:spcPts val="400"/>
-              </a:spcBef>
-              <a:spcAft>
-                <a:spcPts val="200"/>
-              </a:spcAft>
-            </a:pPr>
-            <a:r>
-              <a:rPr sz="1300">
-                <a:solidFill>
-                  <a:srgbClr val="3D5466"/>
-                </a:solidFill>
-                <a:latin typeface="Arial"/>
-              </a:rPr>
               <a:t>▸  Karl: „Dass das Unternehmen in schlechte Hände kommt. Meine Mitarbeiter sind wie meine Familie. Ich kann mir nicht vorstellen, dass jemand Fremdes einfach reinkommt und alles ändert."</a:t>
             </a:r>
           </a:p>
@@ -5432,7 +5394,7 @@
                 <a:solidFill>
                   <a:srgbClr val="A0B4D2"/>
                 </a:solidFill>
-                <a:latin typeface="JetBrains Mono"/>
+                <a:latin typeface="Consolas"/>
               </a:rPr>
               <a:t>FKB Campus  ·  M12</a:t>
             </a:r>
@@ -5571,7 +5533,7 @@
                 <a:solidFill>
                   <a:srgbClr val="78808C"/>
                 </a:solidFill>
-                <a:latin typeface="JetBrains Mono"/>
+                <a:latin typeface="Consolas"/>
               </a:rPr>
               <a:t>M12  ·  INHALT</a:t>
             </a:r>
@@ -5692,7 +5654,7 @@
                 <a:solidFill>
                   <a:srgbClr val="1F2C56"/>
                 </a:solidFill>
-                <a:latin typeface="Source Serif 4"/>
+                <a:latin typeface="Arial"/>
               </a:rPr>
               <a:t>AB-1: Nachfolge-Erstgespräch strukturieren</a:t>
             </a:r>
@@ -5708,7 +5670,7 @@
         <p:spPr>
           <a:xfrm>
             <a:off x="685800" y="1417320"/>
-            <a:ext cx="10817352" cy="5029200"/>
+            <a:ext cx="10817352" cy="4892040"/>
           </a:xfrm>
           <a:prstGeom prst="rect">
             <a:avLst/>
@@ -5734,13 +5696,13 @@
                 <a:solidFill>
                   <a:srgbClr val="78808C"/>
                 </a:solidFill>
-                <a:latin typeface="JetBrains Mono"/>
+                <a:latin typeface="Consolas"/>
               </a:rPr>
               <a:t>VORBEREITUNG (VOR DEM GESPRÄCH)</a:t>
             </a:r>
           </a:p>
           <a:p>
-            <a:pPr>
+            <a:pPr marL="190500" indent="-190500">
               <a:spcBef>
                 <a:spcPts val="400"/>
               </a:spcBef>
@@ -5759,7 +5721,7 @@
             </a:r>
           </a:p>
           <a:p>
-            <a:pPr>
+            <a:pPr marL="190500" indent="-190500">
               <a:spcBef>
                 <a:spcPts val="400"/>
               </a:spcBef>
@@ -5778,7 +5740,7 @@
             </a:r>
           </a:p>
           <a:p>
-            <a:pPr>
+            <a:pPr marL="190500" indent="-190500">
               <a:spcBef>
                 <a:spcPts val="400"/>
               </a:spcBef>
@@ -5797,7 +5759,7 @@
             </a:r>
           </a:p>
           <a:p>
-            <a:pPr>
+            <a:pPr marL="190500" indent="-190500">
               <a:spcBef>
                 <a:spcPts val="400"/>
               </a:spcBef>
@@ -5829,13 +5791,13 @@
                 <a:solidFill>
                   <a:srgbClr val="78808C"/>
                 </a:solidFill>
-                <a:latin typeface="JetBrains Mono"/>
+                <a:latin typeface="Consolas"/>
               </a:rPr>
               <a:t>ERÖFFNUNGSPHASE (5 MIN)</a:t>
             </a:r>
           </a:p>
           <a:p>
-            <a:pPr>
+            <a:pPr marL="190500" indent="-190500">
               <a:spcBef>
                 <a:spcPts val="400"/>
               </a:spcBef>
@@ -5854,7 +5816,7 @@
             </a:r>
           </a:p>
           <a:p>
-            <a:pPr>
+            <a:pPr marL="190500" indent="-190500">
               <a:spcBef>
                 <a:spcPts val="400"/>
               </a:spcBef>
@@ -5873,7 +5835,7 @@
             </a:r>
           </a:p>
           <a:p>
-            <a:pPr>
+            <a:pPr marL="190500" indent="-190500">
               <a:spcBef>
                 <a:spcPts val="400"/>
               </a:spcBef>
@@ -5905,13 +5867,13 @@
                 <a:solidFill>
                   <a:srgbClr val="78808C"/>
                 </a:solidFill>
-                <a:latin typeface="JetBrains Mono"/>
+                <a:latin typeface="Consolas"/>
               </a:rPr>
               <a:t>DIAGNOSTISCHE PHASE (20–30 MIN)</a:t>
             </a:r>
           </a:p>
           <a:p>
-            <a:pPr>
+            <a:pPr marL="190500" indent="-190500">
               <a:spcBef>
                 <a:spcPts val="400"/>
               </a:spcBef>
@@ -5930,7 +5892,7 @@
             </a:r>
           </a:p>
           <a:p>
-            <a:pPr>
+            <a:pPr marL="190500" indent="-190500">
               <a:spcBef>
                 <a:spcPts val="400"/>
               </a:spcBef>
@@ -6021,7 +5983,7 @@
                 <a:solidFill>
                   <a:srgbClr val="A0B4D2"/>
                 </a:solidFill>
-                <a:latin typeface="JetBrains Mono"/>
+                <a:latin typeface="Consolas"/>
               </a:rPr>
               <a:t>FKB Campus  ·  M12</a:t>
             </a:r>
@@ -6160,7 +6122,7 @@
                 <a:solidFill>
                   <a:srgbClr val="78808C"/>
                 </a:solidFill>
-                <a:latin typeface="JetBrains Mono"/>
+                <a:latin typeface="Consolas"/>
               </a:rPr>
               <a:t>ÜBERBLICK  ·  M12</a:t>
             </a:r>
@@ -6238,7 +6200,7 @@
                 <a:solidFill>
                   <a:srgbClr val="1F2C56"/>
                 </a:solidFill>
-                <a:latin typeface="Source Serif 4"/>
+                <a:latin typeface="Arial"/>
               </a:rPr>
               <a:t>Worum geht es heute</a:t>
             </a:r>
@@ -6387,7 +6349,7 @@
                 <a:solidFill>
                   <a:srgbClr val="A0B4D2"/>
                 </a:solidFill>
-                <a:latin typeface="JetBrains Mono"/>
+                <a:latin typeface="Consolas"/>
               </a:rPr>
               <a:t>FKB Campus  ·  M12</a:t>
             </a:r>
@@ -6526,7 +6488,7 @@
                 <a:solidFill>
                   <a:srgbClr val="78808C"/>
                 </a:solidFill>
-                <a:latin typeface="JetBrains Mono"/>
+                <a:latin typeface="Consolas"/>
               </a:rPr>
               <a:t>LERNZIELE  ·  M12</a:t>
             </a:r>
@@ -6604,7 +6566,7 @@
                 <a:solidFill>
                   <a:srgbClr val="1F2C56"/>
                 </a:solidFill>
-                <a:latin typeface="Source Serif 4"/>
+                <a:latin typeface="Arial"/>
               </a:rPr>
               <a:t>Was Sie heute mitnehmen</a:t>
             </a:r>
@@ -6800,7 +6762,7 @@
                 <a:solidFill>
                   <a:srgbClr val="A0B4D2"/>
                 </a:solidFill>
-                <a:latin typeface="JetBrains Mono"/>
+                <a:latin typeface="Consolas"/>
               </a:rPr>
               <a:t>FKB Campus  ·  M12</a:t>
             </a:r>
@@ -6939,7 +6901,7 @@
                 <a:solidFill>
                   <a:srgbClr val="78808C"/>
                 </a:solidFill>
-                <a:latin typeface="JetBrains Mono"/>
+                <a:latin typeface="Consolas"/>
               </a:rPr>
               <a:t>AGENDA  ·  M12</a:t>
             </a:r>
@@ -7017,7 +6979,7 @@
                 <a:solidFill>
                   <a:srgbClr val="1F2C56"/>
                 </a:solidFill>
-                <a:latin typeface="Source Serif 4"/>
+                <a:latin typeface="Arial"/>
               </a:rPr>
               <a:t>So läuft das Modul</a:t>
             </a:r>
@@ -7535,7 +7497,7 @@
                 <a:solidFill>
                   <a:srgbClr val="A0B4D2"/>
                 </a:solidFill>
-                <a:latin typeface="JetBrains Mono"/>
+                <a:latin typeface="Consolas"/>
               </a:rPr>
               <a:t>FKB Campus  ·  M12</a:t>
             </a:r>
@@ -7674,7 +7636,7 @@
                 <a:solidFill>
                   <a:srgbClr val="78808C"/>
                 </a:solidFill>
-                <a:latin typeface="JetBrains Mono"/>
+                <a:latin typeface="Consolas"/>
               </a:rPr>
               <a:t>M12  ·  INHALT</a:t>
             </a:r>
@@ -7795,7 +7757,7 @@
                 <a:solidFill>
                   <a:srgbClr val="1F2C56"/>
                 </a:solidFill>
-                <a:latin typeface="Source Serif 4"/>
+                <a:latin typeface="Arial"/>
               </a:rPr>
               <a:t>Theorie-Input: Das CEO-Gespräch – Mindset und Vorbereitung</a:t>
             </a:r>
@@ -7811,7 +7773,7 @@
         <p:spPr>
           <a:xfrm>
             <a:off x="685800" y="1417320"/>
-            <a:ext cx="10817352" cy="5029200"/>
+            <a:ext cx="10817352" cy="4892040"/>
           </a:xfrm>
           <a:prstGeom prst="rect">
             <a:avLst/>
@@ -7837,13 +7799,13 @@
                 <a:solidFill>
                   <a:srgbClr val="78808C"/>
                 </a:solidFill>
-                <a:latin typeface="JetBrains Mono"/>
+                <a:latin typeface="Consolas"/>
               </a:rPr>
               <a:t>DEN ERSTEN SCHRITT GEHEN: WIE INITIIERT MAN DAS CEO-GESPRÄCH BEI EINEM BESTANDSKUNDEN?</a:t>
             </a:r>
           </a:p>
           <a:p>
-            <a:pPr>
+            <a:pPr marL="190500" indent="-190500">
               <a:spcBef>
                 <a:spcPts val="400"/>
               </a:spcBef>
@@ -7875,13 +7837,13 @@
                 <a:solidFill>
                   <a:srgbClr val="78808C"/>
                 </a:solidFill>
-                <a:latin typeface="JetBrains Mono"/>
+                <a:latin typeface="Consolas"/>
               </a:rPr>
               <a:t>PSYCHOLOGISCHE SICHERHEIT ALS GESPRÄCHSGRUNDLAGE</a:t>
             </a:r>
           </a:p>
           <a:p>
-            <a:pPr>
+            <a:pPr marL="190500" indent="-190500">
               <a:spcBef>
                 <a:spcPts val="400"/>
               </a:spcBef>
@@ -7900,7 +7862,7 @@
             </a:r>
           </a:p>
           <a:p>
-            <a:pPr>
+            <a:pPr marL="190500" indent="-190500">
               <a:spcBef>
                 <a:spcPts val="400"/>
               </a:spcBef>
@@ -7919,7 +7881,7 @@
             </a:r>
           </a:p>
           <a:p>
-            <a:pPr>
+            <a:pPr marL="190500" indent="-190500">
               <a:spcBef>
                 <a:spcPts val="400"/>
               </a:spcBef>
@@ -7951,13 +7913,13 @@
                 <a:solidFill>
                   <a:srgbClr val="78808C"/>
                 </a:solidFill>
-                <a:latin typeface="JetBrains Mono"/>
+                <a:latin typeface="Consolas"/>
               </a:rPr>
               <a:t>DAS BOARD-ROOM-MINDSET</a:t>
             </a:r>
           </a:p>
           <a:p>
-            <a:pPr>
+            <a:pPr marL="190500" indent="-190500">
               <a:spcBef>
                 <a:spcPts val="400"/>
               </a:spcBef>
@@ -7976,7 +7938,7 @@
             </a:r>
           </a:p>
           <a:p>
-            <a:pPr>
+            <a:pPr marL="190500" indent="-190500">
               <a:spcBef>
                 <a:spcPts val="400"/>
               </a:spcBef>
@@ -7995,7 +7957,7 @@
             </a:r>
           </a:p>
           <a:p>
-            <a:pPr>
+            <a:pPr marL="190500" indent="-190500">
               <a:spcBef>
                 <a:spcPts val="400"/>
               </a:spcBef>
@@ -8013,25 +7975,6 @@
               <a:t>▸  Produktiven Widerspruch anbringen, wenn nötig: „Das ergibt für mich weniger Sinn, weil … Was denken Sie dazu?"</a:t>
             </a:r>
           </a:p>
-          <a:p>
-            <a:pPr>
-              <a:spcBef>
-                <a:spcPts val="1000"/>
-              </a:spcBef>
-              <a:spcAft>
-                <a:spcPts val="200"/>
-              </a:spcAft>
-            </a:pPr>
-            <a:r>
-              <a:rPr sz="800" b="1">
-                <a:solidFill>
-                  <a:srgbClr val="78808C"/>
-                </a:solidFill>
-                <a:latin typeface="JetBrains Mono"/>
-              </a:rPr>
-              <a:t>VORBEREITUNGS-CHECKLISTE FÜR DEN CEO-DIALOG</a:t>
-            </a:r>
-          </a:p>
         </p:txBody>
       </p:sp>
       <p:sp>
@@ -8105,7 +8048,7 @@
                 <a:solidFill>
                   <a:srgbClr val="A0B4D2"/>
                 </a:solidFill>
-                <a:latin typeface="JetBrains Mono"/>
+                <a:latin typeface="Consolas"/>
               </a:rPr>
               <a:t>FKB Campus  ·  M12</a:t>
             </a:r>
@@ -8244,7 +8187,7 @@
                 <a:solidFill>
                   <a:srgbClr val="78808C"/>
                 </a:solidFill>
-                <a:latin typeface="JetBrains Mono"/>
+                <a:latin typeface="Consolas"/>
               </a:rPr>
               <a:t>M12  ·  INHALT</a:t>
             </a:r>
@@ -8365,7 +8308,7 @@
                 <a:solidFill>
                   <a:srgbClr val="1F2C56"/>
                 </a:solidFill>
-                <a:latin typeface="Source Serif 4"/>
+                <a:latin typeface="Arial"/>
               </a:rPr>
               <a:t>Theorie-Input: Fragetechniken auf Strategieebene</a:t>
             </a:r>
@@ -8381,7 +8324,7 @@
         <p:spPr>
           <a:xfrm>
             <a:off x="685800" y="1417320"/>
-            <a:ext cx="10817352" cy="5029200"/>
+            <a:ext cx="10817352" cy="4892040"/>
           </a:xfrm>
           <a:prstGeom prst="rect">
             <a:avLst/>
@@ -8407,13 +8350,13 @@
                 <a:solidFill>
                   <a:srgbClr val="78808C"/>
                 </a:solidFill>
-                <a:latin typeface="JetBrains Mono"/>
+                <a:latin typeface="Consolas"/>
               </a:rPr>
               <a:t>SYSTEMISCHE FRAGEN (JENSEITS VON SPIN)</a:t>
             </a:r>
           </a:p>
           <a:p>
-            <a:pPr>
+            <a:pPr marL="190500" indent="-190500">
               <a:spcBef>
                 <a:spcPts val="400"/>
               </a:spcBef>
@@ -8432,7 +8375,7 @@
             </a:r>
           </a:p>
           <a:p>
-            <a:pPr>
+            <a:pPr marL="190500" indent="-190500">
               <a:spcBef>
                 <a:spcPts val="400"/>
               </a:spcBef>
@@ -8451,7 +8394,7 @@
             </a:r>
           </a:p>
           <a:p>
-            <a:pPr>
+            <a:pPr marL="190500" indent="-190500">
               <a:spcBef>
                 <a:spcPts val="400"/>
               </a:spcBef>
@@ -8470,7 +8413,7 @@
             </a:r>
           </a:p>
           <a:p>
-            <a:pPr>
+            <a:pPr marL="190500" indent="-190500">
               <a:spcBef>
                 <a:spcPts val="400"/>
               </a:spcBef>
@@ -8489,7 +8432,7 @@
             </a:r>
           </a:p>
           <a:p>
-            <a:pPr>
+            <a:pPr marL="190500" indent="-190500">
               <a:spcBef>
                 <a:spcPts val="400"/>
               </a:spcBef>
@@ -8508,7 +8451,7 @@
             </a:r>
           </a:p>
           <a:p>
-            <a:pPr>
+            <a:pPr marL="190500" indent="-190500">
               <a:spcBef>
                 <a:spcPts val="400"/>
               </a:spcBef>
@@ -8527,7 +8470,7 @@
             </a:r>
           </a:p>
           <a:p>
-            <a:pPr>
+            <a:pPr marL="190500" indent="-190500">
               <a:spcBef>
                 <a:spcPts val="400"/>
               </a:spcBef>
@@ -8546,7 +8489,7 @@
             </a:r>
           </a:p>
           <a:p>
-            <a:pPr>
+            <a:pPr marL="190500" indent="-190500">
               <a:spcBef>
                 <a:spcPts val="400"/>
               </a:spcBef>
@@ -8565,7 +8508,7 @@
             </a:r>
           </a:p>
           <a:p>
-            <a:pPr>
+            <a:pPr marL="190500" indent="-190500">
               <a:spcBef>
                 <a:spcPts val="400"/>
               </a:spcBef>
@@ -8597,13 +8540,13 @@
                 <a:solidFill>
                   <a:srgbClr val="78808C"/>
                 </a:solidFill>
-                <a:latin typeface="JetBrains Mono"/>
+                <a:latin typeface="Consolas"/>
               </a:rPr>
               <a:t>LÖSUNGSORIENTIERTE ZUKUNFTSFRAGEN (DE SHAZER, 1985)</a:t>
             </a:r>
           </a:p>
           <a:p>
-            <a:pPr>
+            <a:pPr marL="190500" indent="-190500">
               <a:spcBef>
                 <a:spcPts val="400"/>
               </a:spcBef>
@@ -8694,7 +8637,7 @@
                 <a:solidFill>
                   <a:srgbClr val="A0B4D2"/>
                 </a:solidFill>
-                <a:latin typeface="JetBrains Mono"/>
+                <a:latin typeface="Consolas"/>
               </a:rPr>
               <a:t>FKB Campus  ·  M12</a:t>
             </a:r>
@@ -8833,7 +8776,7 @@
                 <a:solidFill>
                   <a:srgbClr val="78808C"/>
                 </a:solidFill>
-                <a:latin typeface="JetBrains Mono"/>
+                <a:latin typeface="Consolas"/>
               </a:rPr>
               <a:t>M12  ·  INHALT</a:t>
             </a:r>
@@ -8954,7 +8897,7 @@
                 <a:solidFill>
                   <a:srgbClr val="1F2C56"/>
                 </a:solidFill>
-                <a:latin typeface="Source Serif 4"/>
+                <a:latin typeface="Arial"/>
               </a:rPr>
               <a:t>Theorie-Input: Nachfolge-Typen und Prozess im Überblick</a:t>
             </a:r>
@@ -8970,7 +8913,7 @@
         <p:spPr>
           <a:xfrm>
             <a:off x="685800" y="1417320"/>
-            <a:ext cx="10817352" cy="5029200"/>
+            <a:ext cx="10817352" cy="4892040"/>
           </a:xfrm>
           <a:prstGeom prst="rect">
             <a:avLst/>
@@ -8996,9 +8939,28 @@
                 <a:solidFill>
                   <a:srgbClr val="78808C"/>
                 </a:solidFill>
-                <a:latin typeface="JetBrains Mono"/>
-              </a:rPr>
-              <a:t>DIE VIER HAUPTNACHFOLGEARTEN</a:t>
+                <a:latin typeface="Consolas"/>
+              </a:rPr>
+              <a:t>NACHFOLGEPROZESS – FÜNF PHASEN</a:t>
+            </a:r>
+          </a:p>
+          <a:p>
+            <a:pPr marL="190500" indent="-190500">
+              <a:spcBef>
+                <a:spcPts val="400"/>
+              </a:spcBef>
+              <a:spcAft>
+                <a:spcPts val="200"/>
+              </a:spcAft>
+            </a:pPr>
+            <a:r>
+              <a:rPr sz="1300">
+                <a:solidFill>
+                  <a:srgbClr val="3D5466"/>
+                </a:solidFill>
+                <a:latin typeface="Arial"/>
+              </a:rPr>
+              <a:t>▸  Erfolgreiche Unternehmernachfolgen benötigen empirisch 3–7 Jahre Vorlaufzeit (IfM Bonn, 2016 ):</a:t>
             </a:r>
           </a:p>
           <a:p>
@@ -9015,13 +8977,13 @@
                 <a:solidFill>
                   <a:srgbClr val="78808C"/>
                 </a:solidFill>
-                <a:latin typeface="JetBrains Mono"/>
-              </a:rPr>
-              <a:t>NACHFOLGEPROZESS – FÜNF PHASEN</a:t>
-            </a:r>
-          </a:p>
-          <a:p>
-            <a:pPr>
+                <a:latin typeface="Consolas"/>
+              </a:rPr>
+              <a:t>REGULATORISCHE ECKPUNKTE (ORIENTIERUNGSRAHMEN)</a:t>
+            </a:r>
+          </a:p>
+          <a:p>
+            <a:pPr marL="190500" indent="-190500">
               <a:spcBef>
                 <a:spcPts val="400"/>
               </a:spcBef>
@@ -9036,30 +8998,11 @@
                 </a:solidFill>
                 <a:latin typeface="Arial"/>
               </a:rPr>
-              <a:t>▸  Erfolgreiche Unternehmernachfolgen benötigen empirisch 3–7 Jahre Vorlaufzeit (IfM Bonn, 2016 ):</a:t>
-            </a:r>
-          </a:p>
-          <a:p>
-            <a:pPr>
-              <a:spcBef>
-                <a:spcPts val="1000"/>
-              </a:spcBef>
-              <a:spcAft>
-                <a:spcPts val="200"/>
-              </a:spcAft>
-            </a:pPr>
-            <a:r>
-              <a:rPr sz="800" b="1">
-                <a:solidFill>
-                  <a:srgbClr val="78808C"/>
-                </a:solidFill>
-                <a:latin typeface="JetBrains Mono"/>
-              </a:rPr>
-              <a:t>REGULATORISCHE ECKPUNKTE (ORIENTIERUNGSRAHMEN)</a:t>
-            </a:r>
-          </a:p>
-          <a:p>
-            <a:pPr>
+              <a:t>▸  Der FK zeigt dem Unternehmer die wichtigsten Felder auf und verweist an Spezialisten:</a:t>
+            </a:r>
+          </a:p>
+          <a:p>
+            <a:pPr marL="190500" indent="-190500">
               <a:spcBef>
                 <a:spcPts val="400"/>
               </a:spcBef>
@@ -9074,11 +9017,11 @@
                 </a:solidFill>
                 <a:latin typeface="Arial"/>
               </a:rPr>
-              <a:t>▸  Der FK zeigt dem Unternehmer die wichtigsten Felder auf und verweist an Spezialisten:</a:t>
-            </a:r>
-          </a:p>
-          <a:p>
-            <a:pPr>
+              <a:t>▸  Erbschaftsteuer / Schenkungsteuer: § 13a ErbStG regelt die Begünstigungen für Betriebsvermögen bei familieninterner Übergabe (Verschonungsabschlag 85 %; Optionsverschonung 100 %; Behaltensfristen 5 bzw. 7 Jahre). Der persönliche Freibetrag nach § 16 Abs. 1 Nr. 2 ErbStG beträgt 400.000 EUR je Elternteil und je Kind – d.h. ein Kind kann im Erbfall von beiden Elternteilen zusammen bis zu 800.000 EUR steuerfrei erhalten. Wichtig: Dieser Freibetrag kann alle 10 Jahre erneut genutzt werden – eine schrittweise Schenkung über mehrere Jahre kann daher steuerlich deutlich günstiger sein als eine Einmal-Übertragung. Hinweis: Diese Orientierungsinformation ersetzt keine steuerrechtliche Beratung – stets Steuerberater einbinden.</a:t>
+            </a:r>
+          </a:p>
+          <a:p>
+            <a:pPr marL="190500" indent="-190500">
               <a:spcBef>
                 <a:spcPts val="400"/>
               </a:spcBef>
@@ -9093,30 +9036,11 @@
                 </a:solidFill>
                 <a:latin typeface="Arial"/>
               </a:rPr>
-              <a:t>▸  Erbschaftsteuer / Schenkungsteuer: § 13a ErbStG regelt die Begünstigungen für Betriebsvermögen bei familieninterner Übergabe (Verschonungsabschlag 85 %; Optionsverschonung 100 %; Behaltensfristen 5 bzw. 7 Jahre). Der persönliche Freibetrag nach § 16 Abs. 1 Nr. 2 ErbStG beträgt 400.000 EUR je Elternteil und je Kind – d.h. ein Kind kann im Erbfall von beiden Elternteilen zusammen bis zu 800.000 EUR steuerfrei erhalten. Wichtig: Dieser Freibetrag kann alle 10 Jahre erneut genutzt werden – eine schrittweise Schenkung über mehrere Jahre kann daher steuerlich deutlich günstiger sein als eine Einmal-Übertragung. Hinweis: Diese Orientierungsinformation ersetzt keine steuerrechtliche Beratung – stets Steuerberater einbinden.</a:t>
-            </a:r>
-          </a:p>
-          <a:p>
-            <a:pPr>
-              <a:spcBef>
-                <a:spcPts val="400"/>
-              </a:spcBef>
-              <a:spcAft>
-                <a:spcPts val="200"/>
-              </a:spcAft>
-            </a:pPr>
-            <a:r>
-              <a:rPr sz="1300">
-                <a:solidFill>
-                  <a:srgbClr val="3D5466"/>
-                </a:solidFill>
-                <a:latin typeface="Arial"/>
-              </a:rPr>
               <a:t>▸  Gesellschaftsrechtliche Fragen (GmbH-G, HGB): Sind Gesellschafterverträge aktuell? Gibt es Vorkaufsrechte?</a:t>
             </a:r>
           </a:p>
           <a:p>
-            <a:pPr>
+            <a:pPr marL="177800" indent="-177800">
               <a:spcBef>
                 <a:spcPts val="600"/>
               </a:spcBef>
@@ -9135,7 +9059,7 @@
             </a:r>
           </a:p>
           <a:p>
-            <a:pPr>
+            <a:pPr marL="177800" indent="-177800">
               <a:spcBef>
                 <a:spcPts val="600"/>
               </a:spcBef>
@@ -9154,7 +9078,7 @@
             </a:r>
           </a:p>
           <a:p>
-            <a:pPr>
+            <a:pPr marL="177800" indent="-177800">
               <a:spcBef>
                 <a:spcPts val="600"/>
               </a:spcBef>
@@ -9173,7 +9097,7 @@
             </a:r>
           </a:p>
           <a:p>
-            <a:pPr>
+            <a:pPr marL="177800" indent="-177800">
               <a:spcBef>
                 <a:spcPts val="600"/>
               </a:spcBef>
@@ -9192,7 +9116,7 @@
             </a:r>
           </a:p>
           <a:p>
-            <a:pPr>
+            <a:pPr marL="177800" indent="-177800">
               <a:spcBef>
                 <a:spcPts val="600"/>
               </a:spcBef>
@@ -9283,7 +9207,7 @@
                 <a:solidFill>
                   <a:srgbClr val="A0B4D2"/>
                 </a:solidFill>
-                <a:latin typeface="JetBrains Mono"/>
+                <a:latin typeface="Consolas"/>
               </a:rPr>
               <a:t>FKB Campus  ·  M12</a:t>
             </a:r>
@@ -9422,7 +9346,7 @@
                 <a:solidFill>
                   <a:srgbClr val="78808C"/>
                 </a:solidFill>
-                <a:latin typeface="JetBrains Mono"/>
+                <a:latin typeface="Consolas"/>
               </a:rPr>
               <a:t>M12  ·  SCHAUBILD</a:t>
             </a:r>
@@ -9457,7 +9381,7 @@
                 <a:solidFill>
                   <a:srgbClr val="1F2C56"/>
                 </a:solidFill>
-                <a:latin typeface="Source Serif 4"/>
+                <a:latin typeface="Arial"/>
               </a:rPr>
               <a:t>Nachfolge-Phasenmodell</a:t>
             </a:r>
@@ -9602,7 +9526,7 @@
                 <a:solidFill>
                   <a:srgbClr val="A0B4D2"/>
                 </a:solidFill>
-                <a:latin typeface="JetBrains Mono"/>
+                <a:latin typeface="Consolas"/>
               </a:rPr>
               <a:t>FKB Campus  ·  M12</a:t>
             </a:r>
@@ -9637,7 +9561,7 @@
                 <a:solidFill>
                   <a:srgbClr val="A0B4D2"/>
                 </a:solidFill>
-                <a:latin typeface="JetBrains Mono"/>
+                <a:latin typeface="Consolas"/>
               </a:rPr>
               <a:t>Schaubild</a:t>
             </a:r>
@@ -9776,7 +9700,7 @@
                 <a:solidFill>
                   <a:srgbClr val="78808C"/>
                 </a:solidFill>
-                <a:latin typeface="JetBrains Mono"/>
+                <a:latin typeface="Consolas"/>
               </a:rPr>
               <a:t>M12  ·  INHALT</a:t>
             </a:r>
@@ -9897,7 +9821,7 @@
                 <a:solidFill>
                   <a:srgbClr val="1F2C56"/>
                 </a:solidFill>
-                <a:latin typeface="Source Serif 4"/>
+                <a:latin typeface="Arial"/>
               </a:rPr>
               <a:t>Theorie-Input: Die emotionale Dimension der Nachfolge</a:t>
             </a:r>
@@ -9913,7 +9837,7 @@
         <p:spPr>
           <a:xfrm>
             <a:off x="685800" y="1417320"/>
-            <a:ext cx="10817352" cy="5029200"/>
+            <a:ext cx="10817352" cy="4892040"/>
           </a:xfrm>
           <a:prstGeom prst="rect">
             <a:avLst/>
@@ -9939,13 +9863,13 @@
                 <a:solidFill>
                   <a:srgbClr val="78808C"/>
                 </a:solidFill>
-                <a:latin typeface="JetBrains Mono"/>
+                <a:latin typeface="Consolas"/>
               </a:rPr>
               <a:t>KONTROLLVERLUST UND IDENTITÄTSBEDROHUNG</a:t>
             </a:r>
           </a:p>
           <a:p>
-            <a:pPr>
+            <a:pPr marL="190500" indent="-190500">
               <a:spcBef>
                 <a:spcPts val="400"/>
               </a:spcBef>
@@ -9964,7 +9888,7 @@
             </a:r>
           </a:p>
           <a:p>
-            <a:pPr>
+            <a:pPr marL="190500" indent="-190500">
               <a:spcBef>
                 <a:spcPts val="400"/>
               </a:spcBef>
@@ -9983,7 +9907,7 @@
             </a:r>
           </a:p>
           <a:p>
-            <a:pPr>
+            <a:pPr marL="190500" indent="-190500">
               <a:spcBef>
                 <a:spcPts val="400"/>
               </a:spcBef>
@@ -10002,7 +9926,7 @@
             </a:r>
           </a:p>
           <a:p>
-            <a:pPr>
+            <a:pPr marL="190500" indent="-190500">
               <a:spcBef>
                 <a:spcPts val="400"/>
               </a:spcBef>
@@ -10021,7 +9945,7 @@
             </a:r>
           </a:p>
           <a:p>
-            <a:pPr>
+            <a:pPr marL="190500" indent="-190500">
               <a:spcBef>
                 <a:spcPts val="400"/>
               </a:spcBef>
@@ -10040,7 +9964,7 @@
             </a:r>
           </a:p>
           <a:p>
-            <a:pPr>
+            <a:pPr marL="190500" indent="-190500">
               <a:spcBef>
                 <a:spcPts val="400"/>
               </a:spcBef>
@@ -10059,7 +9983,7 @@
             </a:r>
           </a:p>
           <a:p>
-            <a:pPr>
+            <a:pPr marL="190500" indent="-190500">
               <a:spcBef>
                 <a:spcPts val="400"/>
               </a:spcBef>
@@ -10091,13 +10015,13 @@
                 <a:solidFill>
                   <a:srgbClr val="78808C"/>
                 </a:solidFill>
-                <a:latin typeface="JetBrains Mono"/>
+                <a:latin typeface="Consolas"/>
               </a:rPr>
               <a:t>DAS VERMÄCHTNIS-DILEMMA</a:t>
             </a:r>
           </a:p>
           <a:p>
-            <a:pPr>
+            <a:pPr marL="190500" indent="-190500">
               <a:spcBef>
                 <a:spcPts val="400"/>
               </a:spcBef>
@@ -10116,7 +10040,7 @@
             </a:r>
           </a:p>
           <a:p>
-            <a:pPr>
+            <a:pPr marL="190500" indent="-190500">
               <a:spcBef>
                 <a:spcPts val="400"/>
               </a:spcBef>
@@ -10135,7 +10059,7 @@
             </a:r>
           </a:p>
           <a:p>
-            <a:pPr>
+            <a:pPr marL="190500" indent="-190500">
               <a:spcBef>
                 <a:spcPts val="400"/>
               </a:spcBef>
@@ -10226,7 +10150,7 @@
                 <a:solidFill>
                   <a:srgbClr val="A0B4D2"/>
                 </a:solidFill>
-                <a:latin typeface="JetBrains Mono"/>
+                <a:latin typeface="Consolas"/>
               </a:rPr>
               <a:t>FKB Campus  ·  M12</a:t>
             </a:r>

--- a/protected-downloads/praesentation/M12.pptx
+++ b/protected-downloads/praesentation/M12.pptx
@@ -17,6 +17,17 @@
     <p:sldId id="265" r:id="rId17"/>
     <p:sldId id="266" r:id="rId18"/>
     <p:sldId id="267" r:id="rId19"/>
+    <p:sldId id="268" r:id="rId20"/>
+    <p:sldId id="269" r:id="rId21"/>
+    <p:sldId id="270" r:id="rId22"/>
+    <p:sldId id="271" r:id="rId23"/>
+    <p:sldId id="272" r:id="rId24"/>
+    <p:sldId id="273" r:id="rId25"/>
+    <p:sldId id="274" r:id="rId26"/>
+    <p:sldId id="275" r:id="rId27"/>
+    <p:sldId id="276" r:id="rId28"/>
+    <p:sldId id="277" r:id="rId29"/>
+    <p:sldId id="278" r:id="rId30"/>
   </p:sldIdLst>
   <p:sldSz cx="12188952" cy="6858000" type="screen4x3"/>
   <p:notesSz cx="6858000" cy="9144000"/>
@@ -538,6 +549,216 @@
 </p:notes>
 </file>
 
+<file path=ppt/notesSlides/notesSlide10.xml><?xml version="1.0" encoding="utf-8"?>
+<p:notes xmlns:a="http://schemas.openxmlformats.org/drawingml/2006/main" xmlns:p="http://schemas.openxmlformats.org/presentationml/2006/main" xmlns:r="http://schemas.openxmlformats.org/officeDocument/2006/relationships">
+  <p:cSld>
+    <p:spTree>
+      <p:nvGrpSpPr>
+        <p:cNvPr id="1" name=""/>
+        <p:cNvGrpSpPr/>
+        <p:nvPr/>
+      </p:nvGrpSpPr>
+      <p:grpSpPr>
+        <a:xfrm>
+          <a:off x="0" y="0"/>
+          <a:ext cx="0" cy="0"/>
+          <a:chOff x="0" y="0"/>
+          <a:chExt cx="0" cy="0"/>
+        </a:xfrm>
+      </p:grpSpPr>
+      <p:sp>
+        <p:nvSpPr>
+          <p:cNvPr id="2" name="Slide Image Placeholder 1"/>
+          <p:cNvSpPr>
+            <a:spLocks noGrp="1"/>
+          </p:cNvSpPr>
+          <p:nvPr>
+            <p:ph type="sldImg" idx="2"/>
+          </p:nvPr>
+        </p:nvSpPr>
+        <p:spPr/>
+      </p:sp>
+      <p:sp>
+        <p:nvSpPr>
+          <p:cNvPr id="3" name="Notes Placeholder 2"/>
+          <p:cNvSpPr>
+            <a:spLocks noGrp="1"/>
+          </p:cNvSpPr>
+          <p:nvPr>
+            <p:ph type="body" idx="3" sz="quarter"/>
+          </p:nvPr>
+        </p:nvSpPr>
+        <p:spPr/>
+        <p:txBody>
+          <a:bodyPr/>
+          <a:lstStyle/>
+          <a:p>
+            <a:r>
+              <a:t>Plenumreflexion: Muster benennen. Dann Einzelarbeit: erste Nachfolge-Roadmap für einen realen Kunden.</a:t>
+            </a:r>
+          </a:p>
+        </p:txBody>
+      </p:sp>
+      <p:sp>
+        <p:nvSpPr>
+          <p:cNvPr id="4" name="Slide Number Placeholder 3"/>
+          <p:cNvSpPr>
+            <a:spLocks noGrp="1"/>
+          </p:cNvSpPr>
+          <p:nvPr>
+            <p:ph type="sldNum" idx="5" sz="quarter"/>
+          </p:nvPr>
+        </p:nvSpPr>
+        <p:spPr/>
+      </p:sp>
+    </p:spTree>
+  </p:cSld>
+  <p:clrMapOvr>
+    <a:masterClrMapping/>
+  </p:clrMapOvr>
+</p:notes>
+</file>
+
+<file path=ppt/notesSlides/notesSlide11.xml><?xml version="1.0" encoding="utf-8"?>
+<p:notes xmlns:a="http://schemas.openxmlformats.org/drawingml/2006/main" xmlns:p="http://schemas.openxmlformats.org/presentationml/2006/main" xmlns:r="http://schemas.openxmlformats.org/officeDocument/2006/relationships">
+  <p:cSld>
+    <p:spTree>
+      <p:nvGrpSpPr>
+        <p:cNvPr id="1" name=""/>
+        <p:cNvGrpSpPr/>
+        <p:nvPr/>
+      </p:nvGrpSpPr>
+      <p:grpSpPr>
+        <a:xfrm>
+          <a:off x="0" y="0"/>
+          <a:ext cx="0" cy="0"/>
+          <a:chOff x="0" y="0"/>
+          <a:chExt cx="0" cy="0"/>
+        </a:xfrm>
+      </p:grpSpPr>
+      <p:sp>
+        <p:nvSpPr>
+          <p:cNvPr id="2" name="Slide Image Placeholder 1"/>
+          <p:cNvSpPr>
+            <a:spLocks noGrp="1"/>
+          </p:cNvSpPr>
+          <p:nvPr>
+            <p:ph type="sldImg" idx="2"/>
+          </p:nvPr>
+        </p:nvSpPr>
+        <p:spPr/>
+      </p:sp>
+      <p:sp>
+        <p:nvSpPr>
+          <p:cNvPr id="3" name="Notes Placeholder 2"/>
+          <p:cNvSpPr>
+            <a:spLocks noGrp="1"/>
+          </p:cNvSpPr>
+          <p:nvPr>
+            <p:ph type="body" idx="3" sz="quarter"/>
+          </p:nvPr>
+        </p:nvSpPr>
+        <p:spPr/>
+        <p:txBody>
+          <a:bodyPr/>
+          <a:lstStyle/>
+          <a:p>
+            <a:r>
+              <a:t>Überleitung zur Transferplanung.</a:t>
+            </a:r>
+          </a:p>
+        </p:txBody>
+      </p:sp>
+      <p:sp>
+        <p:nvSpPr>
+          <p:cNvPr id="4" name="Slide Number Placeholder 3"/>
+          <p:cNvSpPr>
+            <a:spLocks noGrp="1"/>
+          </p:cNvSpPr>
+          <p:nvPr>
+            <p:ph type="sldNum" idx="5" sz="quarter"/>
+          </p:nvPr>
+        </p:nvSpPr>
+        <p:spPr/>
+      </p:sp>
+    </p:spTree>
+  </p:cSld>
+  <p:clrMapOvr>
+    <a:masterClrMapping/>
+  </p:clrMapOvr>
+</p:notes>
+</file>
+
+<file path=ppt/notesSlides/notesSlide12.xml><?xml version="1.0" encoding="utf-8"?>
+<p:notes xmlns:a="http://schemas.openxmlformats.org/drawingml/2006/main" xmlns:p="http://schemas.openxmlformats.org/presentationml/2006/main" xmlns:r="http://schemas.openxmlformats.org/officeDocument/2006/relationships">
+  <p:cSld>
+    <p:spTree>
+      <p:nvGrpSpPr>
+        <p:cNvPr id="1" name=""/>
+        <p:cNvGrpSpPr/>
+        <p:nvPr/>
+      </p:nvGrpSpPr>
+      <p:grpSpPr>
+        <a:xfrm>
+          <a:off x="0" y="0"/>
+          <a:ext cx="0" cy="0"/>
+          <a:chOff x="0" y="0"/>
+          <a:chExt cx="0" cy="0"/>
+        </a:xfrm>
+      </p:grpSpPr>
+      <p:sp>
+        <p:nvSpPr>
+          <p:cNvPr id="2" name="Slide Image Placeholder 1"/>
+          <p:cNvSpPr>
+            <a:spLocks noGrp="1"/>
+          </p:cNvSpPr>
+          <p:nvPr>
+            <p:ph type="sldImg" idx="2"/>
+          </p:nvPr>
+        </p:nvSpPr>
+        <p:spPr/>
+      </p:sp>
+      <p:sp>
+        <p:nvSpPr>
+          <p:cNvPr id="3" name="Notes Placeholder 2"/>
+          <p:cNvSpPr>
+            <a:spLocks noGrp="1"/>
+          </p:cNvSpPr>
+          <p:nvPr>
+            <p:ph type="body" idx="3" sz="quarter"/>
+          </p:nvPr>
+        </p:nvSpPr>
+        <p:spPr/>
+        <p:txBody>
+          <a:bodyPr/>
+          <a:lstStyle/>
+          <a:p>
+            <a:r>
+              <a:t>Selbstcheck als Transferanker; die Roadmap-Skizze ist der erste konkrete Schritt.</a:t>
+            </a:r>
+          </a:p>
+        </p:txBody>
+      </p:sp>
+      <p:sp>
+        <p:nvSpPr>
+          <p:cNvPr id="4" name="Slide Number Placeholder 3"/>
+          <p:cNvSpPr>
+            <a:spLocks noGrp="1"/>
+          </p:cNvSpPr>
+          <p:nvPr>
+            <p:ph type="sldNum" idx="5" sz="quarter"/>
+          </p:nvPr>
+        </p:nvSpPr>
+        <p:spPr/>
+      </p:sp>
+    </p:spTree>
+  </p:cSld>
+  <p:clrMapOvr>
+    <a:masterClrMapping/>
+  </p:clrMapOvr>
+</p:notes>
+</file>
+
 <file path=ppt/notesSlides/notesSlide2.xml><?xml version="1.0" encoding="utf-8"?>
 <p:notes xmlns:a="http://schemas.openxmlformats.org/drawingml/2006/main" xmlns:p="http://schemas.openxmlformats.org/presentationml/2006/main" xmlns:r="http://schemas.openxmlformats.org/officeDocument/2006/relationships">
   <p:cSld>
@@ -583,7 +804,7 @@
           <a:lstStyle/>
           <a:p>
             <a:r>
-              <a:t>Moderation (HB Sec 3): Kern des Inputs: Warum CEO-Dialoge scheitern – und was strukturell anders ist. Fokus: McClelland &amp; Burnham (Q-154) zu Machtmotivation, Edmondson (Q-148) zu psychologischer Sicherheit. Visualisierung: „Gesprächsarchitektur eines CEO-Dialogs" auf Flipchart (3 Ebenen: Einstieg → Vertiefung → Commitment). Trainer-Hinweis: Kein akademischer Vortrag – jede Theorie an einem eigenen Erlebnis verankern. „Ich hatte mal einen Kunden, der nach 15 Jahren zum ersten Mal über sein Unternehmen gesprochen hat – weil ich eine andere Frage gestellt habe." Persönliche Glaubwürdigkeit ist die Eintrittskarte zur Stufe-4-Kompetenzentwicklung. Trainer-Hinweis Formulierungs-Kontraste: Das Board-Room-Mindset bleibt sonst abstrakt – machen Sie es an Sprache fest. Flipchart in zwei Spalten teilen: links „Dienstleister-Sprache" / rechts „Augenhöhe-Sprache" (Kontraste aus Sec 4.1 nutzen). Lassen Sie die TN zuerst ihre eigenen Einstiegsformulierungen für ein CEO-Gespräch nennen („Was sagen Sie, wenn Sie aktuell in ein CEO-Gespräch einsteigen?"), sammeln Sie diese in der linken Spalte und entwickeln Sie das Reframing rechts gemeinsam. Dauer: ca. 5 Minuten Extra-Interaktion – der Schritt von Prinzip zu Praxis, den der Vortrag allein nicht leistet.</a:t>
+              <a:t>Check-in: Erwartungen abholen. Eröffnungsfrage: „Denken Sie an einen Kunden, bei dem Nachfolge ein Thema ist, den Sie aber noch nie darauf angesprochen haben. Was hat Sie abgehalten?"</a:t>
             </a:r>
           </a:p>
         </p:txBody>
@@ -653,7 +874,12 @@
           <a:lstStyle/>
           <a:p>
             <a:r>
-              <a:t>Moderation (HB Sec 3): Einführung der drei Kernwerkzeuge: 1. Wunderfrage (de Shazer, 1985 ): Angenommen, über Nacht wäre das Problem gelöst – was wäre morgen anders? 2. Zirkuläre Frage (Penn, 1982 ; Tomm, 1987 ): Was würde Ihr Steuerberater sagen, wenn ich ihn fragen würde, was Ihr größtes Hindernis ist? 3. Hypothetische Frage: Wenn Sie wüssten, dass Ihr Unternehmen in 5 Jahren verkauft wird – was würden Sie heute anders machen? Übung im Plenum (pragmatisch, ohne Typ-Zwang): Jeder TN formuliert „eine Frage, die eine andere Perspektive ins Gespräch bringt – aus der Sicht einer Person, die nicht im Raum ist." Muss keine zirkuläre Frage im Lehrbuch-Sinne sein – Hauptsache, der TN verlässt die Ich-Perspektive des Unternehmers. Kurze Partnerdiskussion (5 min), dann zwei Beispiele im Plenum vorstellen. Wichtig: Nicht die korrekte Kategorie bewerten, sondern die Wirkung der Frage. Die Drei-Typen-Taxonomie ist eine Lernhilfe, kein Anwendungsraster (siehe Kasten in Sec 4.2).</a:t>
+              <a:t>Der Rollenwechsel vom Produktanbieter zum Gesprächspartner ist der Kern des Moduls.</a:t>
+            </a:r>
+          </a:p>
+          <a:p>
+            <a:r>
+              <a:t>Moderation (HB Sec 3): Kern des Inputs: Warum CEO-Dialoge scheitern – und was strukturell anders ist. Fokus: McClelland &amp; Burnham (Q-154) zu Machtmotivation, Edmondson (Q-148) zu psychologischer Sicherheit. Visualisierung: „Gesprächsarchitektur eines CEO-Dialogs" auf Flipchart (3 Ebenen: Einstieg → Vertiefung → Commitment). Trainer-Hinweis: Kein akademischer Vortrag – jede Theorie an einem eigenen Erlebnis verankern. „Ich hatte mal einen Kunden, der nach 15 Jahren zum ersten Mal über sein Unternehmen gesprochen hat – weil ich eine andere Frage gestellt habe." Persönliche Glaubwürdigkeit ist die Eintrittskarte zur Stufe-4-Kompetenzentwicklung. Trainer-Hinweis Formulierungs-Kontraste: Das Board-Room-Mindset bleibt sonst abstrakt – machen Sie es an Sprache fest. Flipchart in zwei Spalten teilen: links „Dienstleister-Sprache" / rechts „Augenhöhe-Sprache" (Kontraste aus Sec 4.1 nutzen). Lassen Sie die TN zuerst ihre eigenen Einstiegsformulierungen für ein CEO-Gespräch nennen („Was sagen Sie, wenn Sie aktuell in ein CEO-Gespräch einsteigen?"), sammeln Sie diese in der linken Spalte und entwickeln Sie das Reframing rechts gemeinsam. Dauer: ca. 5 Minuten Extra-Interaktion – der Schritt von Prinzip zu Praxis, den der Vortrag allein nicht leistet.</a:t>
             </a:r>
           </a:p>
         </p:txBody>
@@ -723,7 +949,7 @@
           <a:lstStyle/>
           <a:p>
             <a:r>
-              <a:t>Siehe Trainerhandbuch (Sektion 3) für Moderationshinweise, Timing und erwartete Teilnehmerreaktionen.</a:t>
+              <a:t>Übung: jede/r formuliert „eine Frage aus der Sicht einer Person, die nicht im Raum ist". Nicht die Kategorie bewerten, sondern die Wirkung. Die Drei-Typen-Taxonomie ist Lernhilfe, kein Anwendungsraster.</a:t>
             </a:r>
           </a:p>
         </p:txBody>
@@ -793,7 +1019,7 @@
           <a:lstStyle/>
           <a:p>
             <a:r>
-              <a:t>Siehe Trainerhandbuch (Sektion 3) für Moderationshinweise, Timing und erwartete Teilnehmerreaktionen.</a:t>
+              <a:t>Das Phasenmodell als Landkarte des Prozesses nutzen.</a:t>
             </a:r>
           </a:p>
         </p:txBody>
@@ -863,7 +1089,7 @@
           <a:lstStyle/>
           <a:p>
             <a:r>
-              <a:t>Moderation (HB Sec 3): 4 Kleingruppen à 2 Personen analysieren denselben Fall mit unterschiedlichen Fragestellungen (Aufgabenverteilung auf Analysekarten). Jede Gruppe präsentiert 5 Minuten, dann Plenumsdiskussion zu den divergierenden Empfehlungen. Trainer-Hinweis: Divergierende Gruppenempfehlungen sind erwünscht und lehrreich. Der Trainer moderiert die Debatte, gibt keine „richtige" Antwort vor – stattdessen: „Was würden Sie dem Unternehmer tatsächlich sagen? Und warum?" Der Mut zur eigenen Einschätzung ist ein Kennzeichen von Stufe 4.</a:t>
+              <a:t>Kübler-Ross auf den Unternehmer übertragen: Wo im Prozess steht er emotional – und was heißt das für das Gespräch?</a:t>
             </a:r>
           </a:p>
         </p:txBody>
@@ -933,7 +1159,152 @@
           <a:lstStyle/>
           <a:p>
             <a:r>
-              <a:t>Siehe Trainerhandbuch (Sektion 3) für Moderationshinweise, Timing und erwartete Teilnehmerreaktionen.</a:t>
+              <a:t>Kleingruppen (4×2). Fokus auf die Bewertung der Optionen, nicht auf die vollständige Finanzierungsstruktur (das ist Realprozess mit Teamleiter und Verbund).</a:t>
+            </a:r>
+          </a:p>
+          <a:p>
+            <a:r>
+              <a:t>Moderation (HB Sec 3): 4 Kleingruppen à 2 Personen analysieren denselben Fall mit unterschiedlichen Fragestellungen (Aufgabenverteilung auf Analysekarten). Jede Gruppe präsentiert 5 Minuten, dann Plenumsdiskussion zu den divergierenden Empfehlungen. Trainer-Hinweis: Divergierende Gruppenempfehlungen sind erwünscht und lehrreich. Der Trainer moderiert die Debatte, gibt keine „richtige" Antwort vor – stattdessen: „Was würden Sie dem Unternehmer tatsächlich sagen? Und warum?" Der Mut zur eigenen Einschätzung ist ein Kennzeichen von Stufe 4.</a:t>
+            </a:r>
+          </a:p>
+        </p:txBody>
+      </p:sp>
+      <p:sp>
+        <p:nvSpPr>
+          <p:cNvPr id="4" name="Slide Number Placeholder 3"/>
+          <p:cNvSpPr>
+            <a:spLocks noGrp="1"/>
+          </p:cNvSpPr>
+          <p:nvPr>
+            <p:ph type="sldNum" idx="5" sz="quarter"/>
+          </p:nvPr>
+        </p:nvSpPr>
+        <p:spPr/>
+      </p:sp>
+    </p:spTree>
+  </p:cSld>
+  <p:clrMapOvr>
+    <a:masterClrMapping/>
+  </p:clrMapOvr>
+</p:notes>
+</file>
+
+<file path=ppt/notesSlides/notesSlide8.xml><?xml version="1.0" encoding="utf-8"?>
+<p:notes xmlns:a="http://schemas.openxmlformats.org/drawingml/2006/main" xmlns:p="http://schemas.openxmlformats.org/presentationml/2006/main" xmlns:r="http://schemas.openxmlformats.org/officeDocument/2006/relationships">
+  <p:cSld>
+    <p:spTree>
+      <p:nvGrpSpPr>
+        <p:cNvPr id="1" name=""/>
+        <p:cNvGrpSpPr/>
+        <p:nvPr/>
+      </p:nvGrpSpPr>
+      <p:grpSpPr>
+        <a:xfrm>
+          <a:off x="0" y="0"/>
+          <a:ext cx="0" cy="0"/>
+          <a:chOff x="0" y="0"/>
+          <a:chExt cx="0" cy="0"/>
+        </a:xfrm>
+      </p:grpSpPr>
+      <p:sp>
+        <p:nvSpPr>
+          <p:cNvPr id="2" name="Slide Image Placeholder 1"/>
+          <p:cNvSpPr>
+            <a:spLocks noGrp="1"/>
+          </p:cNvSpPr>
+          <p:nvPr>
+            <p:ph type="sldImg" idx="2"/>
+          </p:nvPr>
+        </p:nvSpPr>
+        <p:spPr/>
+      </p:sp>
+      <p:sp>
+        <p:nvSpPr>
+          <p:cNvPr id="3" name="Notes Placeholder 2"/>
+          <p:cNvSpPr>
+            <a:spLocks noGrp="1"/>
+          </p:cNvSpPr>
+          <p:nvPr>
+            <p:ph type="body" idx="3" sz="quarter"/>
+          </p:nvPr>
+        </p:nvSpPr>
+        <p:spPr/>
+        <p:txBody>
+          <a:bodyPr/>
+          <a:lstStyle/>
+          <a:p>
+            <a:r>
+              <a:t>Beobachtung und Analyse zuerst, dann selbst üben. Rotation, damit jede/r die Beraterrolle übernimmt.</a:t>
+            </a:r>
+          </a:p>
+        </p:txBody>
+      </p:sp>
+      <p:sp>
+        <p:nvSpPr>
+          <p:cNvPr id="4" name="Slide Number Placeholder 3"/>
+          <p:cNvSpPr>
+            <a:spLocks noGrp="1"/>
+          </p:cNvSpPr>
+          <p:nvPr>
+            <p:ph type="sldNum" idx="5" sz="quarter"/>
+          </p:nvPr>
+        </p:nvSpPr>
+        <p:spPr/>
+      </p:sp>
+    </p:spTree>
+  </p:cSld>
+  <p:clrMapOvr>
+    <a:masterClrMapping/>
+  </p:clrMapOvr>
+</p:notes>
+</file>
+
+<file path=ppt/notesSlides/notesSlide9.xml><?xml version="1.0" encoding="utf-8"?>
+<p:notes xmlns:a="http://schemas.openxmlformats.org/drawingml/2006/main" xmlns:p="http://schemas.openxmlformats.org/presentationml/2006/main" xmlns:r="http://schemas.openxmlformats.org/officeDocument/2006/relationships">
+  <p:cSld>
+    <p:spTree>
+      <p:nvGrpSpPr>
+        <p:cNvPr id="1" name=""/>
+        <p:cNvGrpSpPr/>
+        <p:nvPr/>
+      </p:nvGrpSpPr>
+      <p:grpSpPr>
+        <a:xfrm>
+          <a:off x="0" y="0"/>
+          <a:ext cx="0" cy="0"/>
+          <a:chOff x="0" y="0"/>
+          <a:chExt cx="0" cy="0"/>
+        </a:xfrm>
+      </p:grpSpPr>
+      <p:sp>
+        <p:nvSpPr>
+          <p:cNvPr id="2" name="Slide Image Placeholder 1"/>
+          <p:cNvSpPr>
+            <a:spLocks noGrp="1"/>
+          </p:cNvSpPr>
+          <p:nvPr>
+            <p:ph type="sldImg" idx="2"/>
+          </p:nvPr>
+        </p:nvSpPr>
+        <p:spPr/>
+      </p:sp>
+      <p:sp>
+        <p:nvSpPr>
+          <p:cNvPr id="3" name="Notes Placeholder 2"/>
+          <p:cNvSpPr>
+            <a:spLocks noGrp="1"/>
+          </p:cNvSpPr>
+          <p:nvPr>
+            <p:ph type="body" idx="3" sz="quarter"/>
+          </p:nvPr>
+        </p:nvSpPr>
+        <p:spPr/>
+        <p:txBody>
+          <a:bodyPr/>
+          <a:lstStyle/>
+          <a:p>
+            <a:r>
+              <a:t>Debriefing nach jeder Runde: Welche Frage hat den Raum geöffnet? Wo wurde zu früh zur Lösung gewechselt?</a:t>
             </a:r>
           </a:p>
         </p:txBody>
@@ -4529,7 +4900,7 @@
             <a:avLst/>
           </a:prstGeom>
           <a:solidFill>
-            <a:srgbClr val="FFFFFF"/>
+            <a:srgbClr val="EDEDF3"/>
           </a:solidFill>
           <a:ln>
             <a:noFill/>
@@ -4630,43 +5001,51 @@
                 </a:solidFill>
                 <a:latin typeface="Consolas"/>
               </a:rPr>
-              <a:t>M12  ·  SCHAUBILD</a:t>
-            </a:r>
-          </a:p>
-        </p:txBody>
-      </p:sp>
-      <p:sp>
-        <p:nvSpPr>
-          <p:cNvPr id="5" name="TextBox 4"/>
-          <p:cNvSpPr txBox="1"/>
-          <p:nvPr/>
-        </p:nvSpPr>
-        <p:spPr>
-          <a:xfrm>
-            <a:off x="685800" y="502920"/>
-            <a:ext cx="10817352" cy="594360"/>
-          </a:xfrm>
-          <a:prstGeom prst="rect">
-            <a:avLst/>
-          </a:prstGeom>
-          <a:noFill/>
-        </p:spPr>
-        <p:txBody>
-          <a:bodyPr wrap="square">
-            <a:spAutoFit/>
-          </a:bodyPr>
-          <a:lstStyle/>
-          <a:p>
-            <a:pPr algn="l"/>
-            <a:r>
-              <a:rPr sz="2000" b="1" i="0">
-                <a:solidFill>
-                  <a:srgbClr val="1F2C56"/>
-                </a:solidFill>
-                <a:latin typeface="Arial"/>
-              </a:rPr>
-              <a:t>Veränderungskurve nach Kübler-Ross</a:t>
-            </a:r>
+              <a:t>M12  ·  INHALT</a:t>
+            </a:r>
+          </a:p>
+        </p:txBody>
+      </p:sp>
+      <p:sp>
+        <p:nvSpPr>
+          <p:cNvPr id="5" name="Rectangle 4"/>
+          <p:cNvSpPr/>
+          <p:nvPr/>
+        </p:nvSpPr>
+        <p:spPr>
+          <a:xfrm>
+            <a:off x="0" y="1234440"/>
+            <a:ext cx="12188952" cy="12700"/>
+          </a:xfrm>
+          <a:prstGeom prst="rect">
+            <a:avLst/>
+          </a:prstGeom>
+          <a:solidFill>
+            <a:srgbClr val="D8DFE4"/>
+          </a:solidFill>
+          <a:ln>
+            <a:noFill/>
+          </a:ln>
+        </p:spPr>
+        <p:style>
+          <a:lnRef idx="1">
+            <a:schemeClr val="accent1"/>
+          </a:lnRef>
+          <a:fillRef idx="3">
+            <a:schemeClr val="accent1"/>
+          </a:fillRef>
+          <a:effectRef idx="2">
+            <a:schemeClr val="accent1"/>
+          </a:effectRef>
+          <a:fontRef idx="minor">
+            <a:schemeClr val="lt1"/>
+          </a:fontRef>
+        </p:style>
+        <p:txBody>
+          <a:bodyPr rtlCol="0" anchor="ctr"/>
+          <a:lstStyle/>
+          <a:p>
+            <a:pPr algn="ctr"/>
           </a:p>
         </p:txBody>
       </p:sp>
@@ -4678,8 +5057,8 @@
         </p:nvSpPr>
         <p:spPr>
           <a:xfrm>
-            <a:off x="685800" y="1143000"/>
-            <a:ext cx="10817352" cy="25400"/>
+            <a:off x="685800" y="502920"/>
+            <a:ext cx="36576" cy="658368"/>
           </a:xfrm>
           <a:prstGeom prst="rect">
             <a:avLst/>
@@ -4713,33 +5092,124 @@
           </a:p>
         </p:txBody>
       </p:sp>
-      <p:pic>
-        <p:nvPicPr>
-          <p:cNvPr id="7" name="Picture 6" descr="image.png"/>
-          <p:cNvPicPr>
-            <a:picLocks noChangeAspect="1"/>
-          </p:cNvPicPr>
-          <p:nvPr/>
-        </p:nvPicPr>
-        <p:blipFill>
-          <a:blip r:embed="rId2"/>
-          <a:stretch>
-            <a:fillRect/>
-          </a:stretch>
-        </p:blipFill>
-        <p:spPr>
-          <a:xfrm>
-            <a:off x="2303489" y="1325880"/>
-            <a:ext cx="7581973" cy="4937760"/>
-          </a:xfrm>
-          <a:prstGeom prst="rect">
-            <a:avLst/>
-          </a:prstGeom>
-        </p:spPr>
-      </p:pic>
-      <p:sp>
-        <p:nvSpPr>
-          <p:cNvPr id="8" name="Rectangle 7"/>
+      <p:sp>
+        <p:nvSpPr>
+          <p:cNvPr id="7" name="TextBox 6"/>
+          <p:cNvSpPr txBox="1"/>
+          <p:nvPr/>
+        </p:nvSpPr>
+        <p:spPr>
+          <a:xfrm>
+            <a:off x="813816" y="502920"/>
+            <a:ext cx="10634472" cy="685800"/>
+          </a:xfrm>
+          <a:prstGeom prst="rect">
+            <a:avLst/>
+          </a:prstGeom>
+          <a:noFill/>
+        </p:spPr>
+        <p:txBody>
+          <a:bodyPr wrap="square">
+            <a:spAutoFit/>
+          </a:bodyPr>
+          <a:lstStyle/>
+          <a:p>
+            <a:pPr algn="l"/>
+            <a:r>
+              <a:rPr sz="2400" b="1" i="0">
+                <a:solidFill>
+                  <a:srgbClr val="1F2C56"/>
+                </a:solidFill>
+                <a:latin typeface="Arial"/>
+              </a:rPr>
+              <a:t>Nachfolge-Typen und Prozess im Überblick</a:t>
+            </a:r>
+          </a:p>
+        </p:txBody>
+      </p:sp>
+      <p:sp>
+        <p:nvSpPr>
+          <p:cNvPr id="8" name="TextBox 7"/>
+          <p:cNvSpPr txBox="1"/>
+          <p:nvPr/>
+        </p:nvSpPr>
+        <p:spPr>
+          <a:xfrm>
+            <a:off x="685800" y="1417320"/>
+            <a:ext cx="10817352" cy="4892040"/>
+          </a:xfrm>
+          <a:prstGeom prst="rect">
+            <a:avLst/>
+          </a:prstGeom>
+          <a:noFill/>
+        </p:spPr>
+        <p:txBody>
+          <a:bodyPr wrap="square" anchor="ctr">
+            <a:spAutoFit/>
+          </a:bodyPr>
+          <a:lstStyle/>
+          <a:p>
+            <a:pPr marL="177800" indent="-177800">
+              <a:spcBef>
+                <a:spcPts val="600"/>
+              </a:spcBef>
+              <a:spcAft>
+                <a:spcPts val="200"/>
+              </a:spcAft>
+            </a:pPr>
+            <a:r>
+              <a:rPr sz="1200" i="1">
+                <a:solidFill>
+                  <a:srgbClr val="3D5466"/>
+                </a:solidFill>
+                <a:latin typeface="Arial"/>
+              </a:rPr>
+              <a:t>→  Nachfolge ist kein Zeitpunkt, sondern ein Prozess über Jahre – mit sachlichen und emotionalen Phasen.</a:t>
+            </a:r>
+          </a:p>
+          <a:p>
+            <a:pPr marL="190500" indent="-190500">
+              <a:spcBef>
+                <a:spcPts val="400"/>
+              </a:spcBef>
+              <a:spcAft>
+                <a:spcPts val="200"/>
+              </a:spcAft>
+            </a:pPr>
+            <a:r>
+              <a:rPr sz="1300">
+                <a:solidFill>
+                  <a:srgbClr val="3D5466"/>
+                </a:solidFill>
+                <a:latin typeface="Arial"/>
+              </a:rPr>
+              <a:t>▸  Typen: Familieninterne Nachfolge, MBO/MBI, externer Verkauf, Stiftung.</a:t>
+            </a:r>
+          </a:p>
+          <a:p>
+            <a:pPr marL="190500" indent="-190500">
+              <a:spcBef>
+                <a:spcPts val="400"/>
+              </a:spcBef>
+              <a:spcAft>
+                <a:spcPts val="200"/>
+              </a:spcAft>
+            </a:pPr>
+            <a:r>
+              <a:rPr sz="1300">
+                <a:solidFill>
+                  <a:srgbClr val="3D5466"/>
+                </a:solidFill>
+                <a:latin typeface="Arial"/>
+              </a:rPr>
+              <a:t>▸  Jede Phase hat eigene Beratungsanlässe und Verbundpartner (DZ BANK, Steuerberater, Notar).</a:t>
+            </a:r>
+          </a:p>
+        </p:txBody>
+      </p:sp>
+      <p:sp>
+        <p:nvSpPr>
+          <p:cNvPr id="9" name="Rectangle 8"/>
           <p:cNvSpPr/>
           <p:nvPr/>
         </p:nvSpPr>
@@ -4782,7 +5252,7 @@
       </p:sp>
       <p:sp>
         <p:nvSpPr>
-          <p:cNvPr id="9" name="TextBox 8"/>
+          <p:cNvPr id="10" name="TextBox 9"/>
           <p:cNvSpPr txBox="1"/>
           <p:nvPr/>
         </p:nvSpPr>
@@ -4811,41 +5281,6 @@
                 <a:latin typeface="Consolas"/>
               </a:rPr>
               <a:t>FKB Campus  ·  M12</a:t>
-            </a:r>
-          </a:p>
-        </p:txBody>
-      </p:sp>
-      <p:sp>
-        <p:nvSpPr>
-          <p:cNvPr id="10" name="TextBox 9"/>
-          <p:cNvSpPr txBox="1"/>
-          <p:nvPr/>
-        </p:nvSpPr>
-        <p:spPr>
-          <a:xfrm>
-            <a:off x="7176211" y="6583680"/>
-            <a:ext cx="4326940" cy="256032"/>
-          </a:xfrm>
-          <a:prstGeom prst="rect">
-            <a:avLst/>
-          </a:prstGeom>
-          <a:noFill/>
-        </p:spPr>
-        <p:txBody>
-          <a:bodyPr wrap="none">
-            <a:spAutoFit/>
-          </a:bodyPr>
-          <a:lstStyle/>
-          <a:p>
-            <a:pPr algn="r"/>
-            <a:r>
-              <a:rPr sz="700">
-                <a:solidFill>
-                  <a:srgbClr val="A0B4D2"/>
-                </a:solidFill>
-                <a:latin typeface="Consolas"/>
-              </a:rPr>
-              <a:t>Schaubild</a:t>
             </a:r>
           </a:p>
         </p:txBody>
@@ -4883,7 +5318,7 @@
             <a:avLst/>
           </a:prstGeom>
           <a:solidFill>
-            <a:srgbClr val="EDEDF3"/>
+            <a:srgbClr val="FFFFFF"/>
           </a:solidFill>
           <a:ln>
             <a:noFill/>
@@ -4984,51 +5419,43 @@
                 </a:solidFill>
                 <a:latin typeface="Consolas"/>
               </a:rPr>
-              <a:t>M12  ·  INHALT</a:t>
-            </a:r>
-          </a:p>
-        </p:txBody>
-      </p:sp>
-      <p:sp>
-        <p:nvSpPr>
-          <p:cNvPr id="5" name="Rectangle 4"/>
-          <p:cNvSpPr/>
-          <p:nvPr/>
-        </p:nvSpPr>
-        <p:spPr>
-          <a:xfrm>
-            <a:off x="0" y="1234440"/>
-            <a:ext cx="12188952" cy="12700"/>
-          </a:xfrm>
-          <a:prstGeom prst="rect">
-            <a:avLst/>
-          </a:prstGeom>
-          <a:solidFill>
-            <a:srgbClr val="D8DFE4"/>
-          </a:solidFill>
-          <a:ln>
-            <a:noFill/>
-          </a:ln>
-        </p:spPr>
-        <p:style>
-          <a:lnRef idx="1">
-            <a:schemeClr val="accent1"/>
-          </a:lnRef>
-          <a:fillRef idx="3">
-            <a:schemeClr val="accent1"/>
-          </a:fillRef>
-          <a:effectRef idx="2">
-            <a:schemeClr val="accent1"/>
-          </a:effectRef>
-          <a:fontRef idx="minor">
-            <a:schemeClr val="lt1"/>
-          </a:fontRef>
-        </p:style>
-        <p:txBody>
-          <a:bodyPr rtlCol="0" anchor="ctr"/>
-          <a:lstStyle/>
-          <a:p>
-            <a:pPr algn="ctr"/>
+              <a:t>M12  ·  SCHAUBILD</a:t>
+            </a:r>
+          </a:p>
+        </p:txBody>
+      </p:sp>
+      <p:sp>
+        <p:nvSpPr>
+          <p:cNvPr id="5" name="TextBox 4"/>
+          <p:cNvSpPr txBox="1"/>
+          <p:nvPr/>
+        </p:nvSpPr>
+        <p:spPr>
+          <a:xfrm>
+            <a:off x="685800" y="502920"/>
+            <a:ext cx="10817352" cy="594360"/>
+          </a:xfrm>
+          <a:prstGeom prst="rect">
+            <a:avLst/>
+          </a:prstGeom>
+          <a:noFill/>
+        </p:spPr>
+        <p:txBody>
+          <a:bodyPr wrap="square">
+            <a:spAutoFit/>
+          </a:bodyPr>
+          <a:lstStyle/>
+          <a:p>
+            <a:pPr algn="l"/>
+            <a:r>
+              <a:rPr sz="2000" b="1" i="0">
+                <a:solidFill>
+                  <a:srgbClr val="1F2C56"/>
+                </a:solidFill>
+                <a:latin typeface="Arial"/>
+              </a:rPr>
+              <a:t>Nachfolge-Phasenmodell</a:t>
+            </a:r>
           </a:p>
         </p:txBody>
       </p:sp>
@@ -5040,8 +5467,8 @@
         </p:nvSpPr>
         <p:spPr>
           <a:xfrm>
-            <a:off x="685800" y="502920"/>
-            <a:ext cx="36576" cy="658368"/>
+            <a:off x="685800" y="1143000"/>
+            <a:ext cx="10817352" cy="25400"/>
           </a:xfrm>
           <a:prstGeom prst="rect">
             <a:avLst/>
@@ -5075,257 +5502,33 @@
           </a:p>
         </p:txBody>
       </p:sp>
-      <p:sp>
-        <p:nvSpPr>
-          <p:cNvPr id="7" name="TextBox 6"/>
-          <p:cNvSpPr txBox="1"/>
-          <p:nvPr/>
-        </p:nvSpPr>
-        <p:spPr>
-          <a:xfrm>
-            <a:off x="813816" y="502920"/>
-            <a:ext cx="10634472" cy="685800"/>
-          </a:xfrm>
-          <a:prstGeom prst="rect">
-            <a:avLst/>
-          </a:prstGeom>
-          <a:noFill/>
-        </p:spPr>
-        <p:txBody>
-          <a:bodyPr wrap="square">
-            <a:spAutoFit/>
-          </a:bodyPr>
-          <a:lstStyle/>
-          <a:p>
-            <a:pPr algn="l"/>
-            <a:r>
-              <a:rPr sz="2400" b="1" i="0">
-                <a:solidFill>
-                  <a:srgbClr val="1F2C56"/>
-                </a:solidFill>
-                <a:latin typeface="Arial"/>
-              </a:rPr>
-              <a:t>Praxisfall: Metallverarbeitung Wagner KG, Stuttgart</a:t>
-            </a:r>
-          </a:p>
-        </p:txBody>
-      </p:sp>
-      <p:sp>
-        <p:nvSpPr>
-          <p:cNvPr id="8" name="TextBox 7"/>
-          <p:cNvSpPr txBox="1"/>
-          <p:nvPr/>
-        </p:nvSpPr>
-        <p:spPr>
-          <a:xfrm>
-            <a:off x="685800" y="1417320"/>
-            <a:ext cx="10817352" cy="4892040"/>
-          </a:xfrm>
-          <a:prstGeom prst="rect">
-            <a:avLst/>
-          </a:prstGeom>
-          <a:noFill/>
-        </p:spPr>
-        <p:txBody>
-          <a:bodyPr wrap="square">
-            <a:spAutoFit/>
-          </a:bodyPr>
-          <a:lstStyle/>
-          <a:p>
-            <a:pPr>
-              <a:spcBef>
-                <a:spcPts val="1000"/>
-              </a:spcBef>
-              <a:spcAft>
-                <a:spcPts val="200"/>
-              </a:spcAft>
-            </a:pPr>
-            <a:r>
-              <a:rPr sz="800" b="1">
-                <a:solidFill>
-                  <a:srgbClr val="78808C"/>
-                </a:solidFill>
-                <a:latin typeface="Consolas"/>
-              </a:rPr>
-              <a:t>DIAGNOSTISCHE AUFGABEN FÜR CLAUDIA</a:t>
-            </a:r>
-          </a:p>
-          <a:p>
-            <a:pPr marL="190500" indent="-190500">
-              <a:spcBef>
-                <a:spcPts val="400"/>
-              </a:spcBef>
-              <a:spcAft>
-                <a:spcPts val="200"/>
-              </a:spcAft>
-            </a:pPr>
-            <a:r>
-              <a:rPr sz="1300">
-                <a:solidFill>
-                  <a:srgbClr val="3D5466"/>
-                </a:solidFill>
-                <a:latin typeface="Arial"/>
-              </a:rPr>
-              <a:t>▸  Emotionaler Zustand: Ist Karl müde, oder ist das eine echte Nachfolgekrise?</a:t>
-            </a:r>
-          </a:p>
-          <a:p>
-            <a:pPr marL="190500" indent="-190500">
-              <a:spcBef>
-                <a:spcPts val="400"/>
-              </a:spcBef>
-              <a:spcAft>
-                <a:spcPts val="200"/>
-              </a:spcAft>
-            </a:pPr>
-            <a:r>
-              <a:rPr sz="1300">
-                <a:solidFill>
-                  <a:srgbClr val="3D5466"/>
-                </a:solidFill>
-                <a:latin typeface="Arial"/>
-              </a:rPr>
-              <a:t>▸  Nachfolgepotenziale: Sind die Kinder wirklich ausgeschlossen, oder ist die Kommunikation schlecht?</a:t>
-            </a:r>
-          </a:p>
-          <a:p>
-            <a:pPr marL="190500" indent="-190500">
-              <a:spcBef>
-                <a:spcPts val="400"/>
-              </a:spcBef>
-              <a:spcAft>
-                <a:spcPts val="200"/>
-              </a:spcAft>
-            </a:pPr>
-            <a:r>
-              <a:rPr sz="1300">
-                <a:solidFill>
-                  <a:srgbClr val="3D5466"/>
-                </a:solidFill>
-                <a:latin typeface="Arial"/>
-              </a:rPr>
-              <a:t>▸  Alternativen: Wären MBO (Meister Dieter als Käufer) oder strategischer Verkauf denkbar?</a:t>
-            </a:r>
-          </a:p>
-          <a:p>
-            <a:pPr marL="190500" indent="-190500">
-              <a:spcBef>
-                <a:spcPts val="400"/>
-              </a:spcBef>
-              <a:spcAft>
-                <a:spcPts val="200"/>
-              </a:spcAft>
-            </a:pPr>
-            <a:r>
-              <a:rPr sz="1300">
-                <a:solidFill>
-                  <a:srgbClr val="3D5466"/>
-                </a:solidFill>
-                <a:latin typeface="Arial"/>
-              </a:rPr>
-              <a:t>▸  Finanzielle Lage: Ist das Unternehmen stabil genug für eine Nachfolgeplanung?</a:t>
-            </a:r>
-          </a:p>
-          <a:p>
-            <a:pPr marL="190500" indent="-190500">
-              <a:spcBef>
-                <a:spcPts val="400"/>
-              </a:spcBef>
-              <a:spcAft>
-                <a:spcPts val="200"/>
-              </a:spcAft>
-            </a:pPr>
-            <a:r>
-              <a:rPr sz="1300">
-                <a:solidFill>
-                  <a:srgbClr val="3D5466"/>
-                </a:solidFill>
-                <a:latin typeface="Arial"/>
-              </a:rPr>
-              <a:t>▸  Zeithorizont: Wie dringend ist das Thema (gesundheitliche Gründe? Burnout?)?</a:t>
-            </a:r>
-          </a:p>
-          <a:p>
-            <a:pPr>
-              <a:spcBef>
-                <a:spcPts val="1000"/>
-              </a:spcBef>
-              <a:spcAft>
-                <a:spcPts val="200"/>
-              </a:spcAft>
-            </a:pPr>
-            <a:r>
-              <a:rPr sz="800" b="1">
-                <a:solidFill>
-                  <a:srgbClr val="78808C"/>
-                </a:solidFill>
-                <a:latin typeface="Consolas"/>
-              </a:rPr>
-              <a:t>BEISPIEL-GESPRÄCHSVERLAUF (SYSTEMISCHE TECHNIK)</a:t>
-            </a:r>
-          </a:p>
-          <a:p>
-            <a:pPr marL="190500" indent="-190500">
-              <a:spcBef>
-                <a:spcPts val="400"/>
-              </a:spcBef>
-              <a:spcAft>
-                <a:spcPts val="200"/>
-              </a:spcAft>
-            </a:pPr>
-            <a:r>
-              <a:rPr sz="1300">
-                <a:solidFill>
-                  <a:srgbClr val="3D5466"/>
-                </a:solidFill>
-                <a:latin typeface="Arial"/>
-              </a:rPr>
-              <a:t>▸  Karl: [Nickt]</a:t>
-            </a:r>
-          </a:p>
-          <a:p>
-            <a:pPr marL="190500" indent="-190500">
-              <a:spcBef>
-                <a:spcPts val="400"/>
-              </a:spcBef>
-              <a:spcAft>
-                <a:spcPts val="200"/>
-              </a:spcAft>
-            </a:pPr>
-            <a:r>
-              <a:rPr sz="1300">
-                <a:solidFill>
-                  <a:srgbClr val="3D5466"/>
-                </a:solidFill>
-                <a:latin typeface="Arial"/>
-              </a:rPr>
-              <a:t>▸  Claudia: „Wenn Sie sagen ‚ich weiß nicht, wie ich das übergeben soll' – was ist das Größte daran, das Ihnen Sorge macht?"</a:t>
-            </a:r>
-          </a:p>
-          <a:p>
-            <a:pPr marL="190500" indent="-190500">
-              <a:spcBef>
-                <a:spcPts val="400"/>
-              </a:spcBef>
-              <a:spcAft>
-                <a:spcPts val="200"/>
-              </a:spcAft>
-            </a:pPr>
-            <a:r>
-              <a:rPr sz="1300">
-                <a:solidFill>
-                  <a:srgbClr val="3D5466"/>
-                </a:solidFill>
-                <a:latin typeface="Arial"/>
-              </a:rPr>
-              <a:t>▸  Karl: „Dass das Unternehmen in schlechte Hände kommt. Meine Mitarbeiter sind wie meine Familie. Ich kann mir nicht vorstellen, dass jemand Fremdes einfach reinkommt und alles ändert."</a:t>
-            </a:r>
-          </a:p>
-        </p:txBody>
-      </p:sp>
-      <p:sp>
-        <p:nvSpPr>
-          <p:cNvPr id="9" name="Rectangle 8"/>
+      <p:pic>
+        <p:nvPicPr>
+          <p:cNvPr id="7" name="Picture 6" descr="image.png"/>
+          <p:cNvPicPr>
+            <a:picLocks noChangeAspect="1"/>
+          </p:cNvPicPr>
+          <p:nvPr/>
+        </p:nvPicPr>
+        <p:blipFill>
+          <a:blip r:embed="rId2"/>
+          <a:stretch>
+            <a:fillRect/>
+          </a:stretch>
+        </p:blipFill>
+        <p:spPr>
+          <a:xfrm>
+            <a:off x="2163921" y="1325880"/>
+            <a:ext cx="7861110" cy="4937760"/>
+          </a:xfrm>
+          <a:prstGeom prst="rect">
+            <a:avLst/>
+          </a:prstGeom>
+        </p:spPr>
+      </p:pic>
+      <p:sp>
+        <p:nvSpPr>
+          <p:cNvPr id="8" name="Rectangle 7"/>
           <p:cNvSpPr/>
           <p:nvPr/>
         </p:nvSpPr>
@@ -5368,7 +5571,7 @@
       </p:sp>
       <p:sp>
         <p:nvSpPr>
-          <p:cNvPr id="10" name="TextBox 9"/>
+          <p:cNvPr id="9" name="TextBox 8"/>
           <p:cNvSpPr txBox="1"/>
           <p:nvPr/>
         </p:nvSpPr>
@@ -5397,6 +5600,41 @@
                 <a:latin typeface="Consolas"/>
               </a:rPr>
               <a:t>FKB Campus  ·  M12</a:t>
+            </a:r>
+          </a:p>
+        </p:txBody>
+      </p:sp>
+      <p:sp>
+        <p:nvSpPr>
+          <p:cNvPr id="10" name="TextBox 9"/>
+          <p:cNvSpPr txBox="1"/>
+          <p:nvPr/>
+        </p:nvSpPr>
+        <p:spPr>
+          <a:xfrm>
+            <a:off x="7176211" y="6583680"/>
+            <a:ext cx="4326940" cy="256032"/>
+          </a:xfrm>
+          <a:prstGeom prst="rect">
+            <a:avLst/>
+          </a:prstGeom>
+          <a:noFill/>
+        </p:spPr>
+        <p:txBody>
+          <a:bodyPr wrap="none">
+            <a:spAutoFit/>
+          </a:bodyPr>
+          <a:lstStyle/>
+          <a:p>
+            <a:pPr algn="r"/>
+            <a:r>
+              <a:rPr sz="700">
+                <a:solidFill>
+                  <a:srgbClr val="A0B4D2"/>
+                </a:solidFill>
+                <a:latin typeface="Consolas"/>
+              </a:rPr>
+              <a:t>Schaubild</a:t>
             </a:r>
           </a:p>
         </p:txBody>
@@ -5656,7 +5894,7 @@
                 </a:solidFill>
                 <a:latin typeface="Arial"/>
               </a:rPr>
-              <a:t>AB-1: Nachfolge-Erstgespräch strukturieren</a:t>
+              <a:t>Die emotionale Dimension der Nachfolge</a:t>
             </a:r>
           </a:p>
         </p:txBody>
@@ -5678,7 +5916,1763 @@
           <a:noFill/>
         </p:spPr>
         <p:txBody>
+          <a:bodyPr wrap="square" anchor="ctr">
+            <a:spAutoFit/>
+          </a:bodyPr>
+          <a:lstStyle/>
+          <a:p>
+            <a:pPr marL="177800" indent="-177800">
+              <a:spcBef>
+                <a:spcPts val="600"/>
+              </a:spcBef>
+              <a:spcAft>
+                <a:spcPts val="200"/>
+              </a:spcAft>
+            </a:pPr>
+            <a:r>
+              <a:rPr sz="1200" i="1">
+                <a:solidFill>
+                  <a:srgbClr val="3D5466"/>
+                </a:solidFill>
+                <a:latin typeface="Arial"/>
+              </a:rPr>
+              <a:t>→  Loslassen ist ein Trauerprozess – wer das ignoriert, verliert den Unternehmer, bevor die Zahlen überhaupt zur Sprache kommen.</a:t>
+            </a:r>
+          </a:p>
+          <a:p>
+            <a:pPr marL="190500" indent="-190500">
+              <a:spcBef>
+                <a:spcPts val="400"/>
+              </a:spcBef>
+              <a:spcAft>
+                <a:spcPts val="200"/>
+              </a:spcAft>
+            </a:pPr>
+            <a:r>
+              <a:rPr sz="1300">
+                <a:solidFill>
+                  <a:srgbClr val="3D5466"/>
+                </a:solidFill>
+                <a:latin typeface="Arial"/>
+              </a:rPr>
+              <a:t>▸  Die Veränderungskurve (Kübler-Ross) beschreibt die Phasen von Verleugnung bis Akzeptanz.</a:t>
+            </a:r>
+          </a:p>
+          <a:p>
+            <a:pPr marL="190500" indent="-190500">
+              <a:spcBef>
+                <a:spcPts val="400"/>
+              </a:spcBef>
+              <a:spcAft>
+                <a:spcPts val="200"/>
+              </a:spcAft>
+            </a:pPr>
+            <a:r>
+              <a:rPr sz="1300">
+                <a:solidFill>
+                  <a:srgbClr val="3D5466"/>
+                </a:solidFill>
+                <a:latin typeface="Arial"/>
+              </a:rPr>
+              <a:t>▸  Loslassenwiderstände sind normal – sie werden adressiert, nicht wegargumentiert.</a:t>
+            </a:r>
+          </a:p>
+        </p:txBody>
+      </p:sp>
+      <p:sp>
+        <p:nvSpPr>
+          <p:cNvPr id="9" name="Rectangle 8"/>
+          <p:cNvSpPr/>
+          <p:nvPr/>
+        </p:nvSpPr>
+        <p:spPr>
+          <a:xfrm>
+            <a:off x="0" y="6510528"/>
+            <a:ext cx="12188952" cy="347472"/>
+          </a:xfrm>
+          <a:prstGeom prst="rect">
+            <a:avLst/>
+          </a:prstGeom>
+          <a:solidFill>
+            <a:srgbClr val="0A1937"/>
+          </a:solidFill>
+          <a:ln>
+            <a:noFill/>
+          </a:ln>
+        </p:spPr>
+        <p:style>
+          <a:lnRef idx="1">
+            <a:schemeClr val="accent1"/>
+          </a:lnRef>
+          <a:fillRef idx="3">
+            <a:schemeClr val="accent1"/>
+          </a:fillRef>
+          <a:effectRef idx="2">
+            <a:schemeClr val="accent1"/>
+          </a:effectRef>
+          <a:fontRef idx="minor">
+            <a:schemeClr val="lt1"/>
+          </a:fontRef>
+        </p:style>
+        <p:txBody>
+          <a:bodyPr rtlCol="0" anchor="ctr"/>
+          <a:lstStyle/>
+          <a:p>
+            <a:pPr algn="ctr"/>
+          </a:p>
+        </p:txBody>
+      </p:sp>
+      <p:sp>
+        <p:nvSpPr>
+          <p:cNvPr id="10" name="TextBox 9"/>
+          <p:cNvSpPr txBox="1"/>
+          <p:nvPr/>
+        </p:nvSpPr>
+        <p:spPr>
+          <a:xfrm>
+            <a:off x="685800" y="6583680"/>
+            <a:ext cx="6490411" cy="256032"/>
+          </a:xfrm>
+          <a:prstGeom prst="rect">
+            <a:avLst/>
+          </a:prstGeom>
+          <a:noFill/>
+        </p:spPr>
+        <p:txBody>
+          <a:bodyPr wrap="none">
+            <a:spAutoFit/>
+          </a:bodyPr>
+          <a:lstStyle/>
+          <a:p>
+            <a:pPr algn="l"/>
+            <a:r>
+              <a:rPr sz="700">
+                <a:solidFill>
+                  <a:srgbClr val="A0B4D2"/>
+                </a:solidFill>
+                <a:latin typeface="Consolas"/>
+              </a:rPr>
+              <a:t>FKB Campus  ·  M12</a:t>
+            </a:r>
+          </a:p>
+        </p:txBody>
+      </p:sp>
+    </p:spTree>
+  </p:cSld>
+  <p:clrMapOvr>
+    <a:masterClrMapping/>
+  </p:clrMapOvr>
+</p:sld>
+</file>
+
+<file path=ppt/slides/slide13.xml><?xml version="1.0" encoding="utf-8"?>
+<p:sld xmlns:a="http://schemas.openxmlformats.org/drawingml/2006/main" xmlns:p="http://schemas.openxmlformats.org/presentationml/2006/main" xmlns:r="http://schemas.openxmlformats.org/officeDocument/2006/relationships">
+  <p:cSld>
+    <p:spTree>
+      <p:nvGrpSpPr>
+        <p:cNvPr id="1" name=""/>
+        <p:cNvGrpSpPr/>
+        <p:nvPr/>
+      </p:nvGrpSpPr>
+      <p:grpSpPr/>
+      <p:sp>
+        <p:nvSpPr>
+          <p:cNvPr id="2" name="Rectangle 1"/>
+          <p:cNvSpPr/>
+          <p:nvPr/>
+        </p:nvSpPr>
+        <p:spPr>
+          <a:xfrm>
+            <a:off x="0" y="0"/>
+            <a:ext cx="12188952" cy="6858000"/>
+          </a:xfrm>
+          <a:prstGeom prst="rect">
+            <a:avLst/>
+          </a:prstGeom>
+          <a:solidFill>
+            <a:srgbClr val="FFFFFF"/>
+          </a:solidFill>
+          <a:ln>
+            <a:noFill/>
+          </a:ln>
+        </p:spPr>
+        <p:style>
+          <a:lnRef idx="1">
+            <a:schemeClr val="accent1"/>
+          </a:lnRef>
+          <a:fillRef idx="3">
+            <a:schemeClr val="accent1"/>
+          </a:fillRef>
+          <a:effectRef idx="2">
+            <a:schemeClr val="accent1"/>
+          </a:effectRef>
+          <a:fontRef idx="minor">
+            <a:schemeClr val="lt1"/>
+          </a:fontRef>
+        </p:style>
+        <p:txBody>
+          <a:bodyPr rtlCol="0" anchor="ctr"/>
+          <a:lstStyle/>
+          <a:p>
+            <a:pPr algn="ctr"/>
+          </a:p>
+        </p:txBody>
+      </p:sp>
+      <p:sp>
+        <p:nvSpPr>
+          <p:cNvPr id="3" name="Rectangle 2"/>
+          <p:cNvSpPr/>
+          <p:nvPr/>
+        </p:nvSpPr>
+        <p:spPr>
+          <a:xfrm>
+            <a:off x="0" y="0"/>
+            <a:ext cx="12188952" cy="50292"/>
+          </a:xfrm>
+          <a:prstGeom prst="rect">
+            <a:avLst/>
+          </a:prstGeom>
+          <a:solidFill>
+            <a:srgbClr val="1F2C56"/>
+          </a:solidFill>
+          <a:ln>
+            <a:noFill/>
+          </a:ln>
+        </p:spPr>
+        <p:style>
+          <a:lnRef idx="1">
+            <a:schemeClr val="accent1"/>
+          </a:lnRef>
+          <a:fillRef idx="3">
+            <a:schemeClr val="accent1"/>
+          </a:fillRef>
+          <a:effectRef idx="2">
+            <a:schemeClr val="accent1"/>
+          </a:effectRef>
+          <a:fontRef idx="minor">
+            <a:schemeClr val="lt1"/>
+          </a:fontRef>
+        </p:style>
+        <p:txBody>
+          <a:bodyPr rtlCol="0" anchor="ctr"/>
+          <a:lstStyle/>
+          <a:p>
+            <a:pPr algn="ctr"/>
+          </a:p>
+        </p:txBody>
+      </p:sp>
+      <p:sp>
+        <p:nvSpPr>
+          <p:cNvPr id="4" name="TextBox 3"/>
+          <p:cNvSpPr txBox="1"/>
+          <p:nvPr/>
+        </p:nvSpPr>
+        <p:spPr>
+          <a:xfrm>
+            <a:off x="685800" y="109728"/>
+            <a:ext cx="10817352" cy="228600"/>
+          </a:xfrm>
+          <a:prstGeom prst="rect">
+            <a:avLst/>
+          </a:prstGeom>
+          <a:noFill/>
+        </p:spPr>
+        <p:txBody>
+          <a:bodyPr wrap="none">
+            <a:spAutoFit/>
+          </a:bodyPr>
+          <a:lstStyle/>
+          <a:p>
+            <a:pPr algn="l"/>
+            <a:r>
+              <a:rPr sz="750">
+                <a:solidFill>
+                  <a:srgbClr val="78808C"/>
+                </a:solidFill>
+                <a:latin typeface="Consolas"/>
+              </a:rPr>
+              <a:t>M12  ·  SCHAUBILD</a:t>
+            </a:r>
+          </a:p>
+        </p:txBody>
+      </p:sp>
+      <p:sp>
+        <p:nvSpPr>
+          <p:cNvPr id="5" name="TextBox 4"/>
+          <p:cNvSpPr txBox="1"/>
+          <p:nvPr/>
+        </p:nvSpPr>
+        <p:spPr>
+          <a:xfrm>
+            <a:off x="685800" y="502920"/>
+            <a:ext cx="10817352" cy="594360"/>
+          </a:xfrm>
+          <a:prstGeom prst="rect">
+            <a:avLst/>
+          </a:prstGeom>
+          <a:noFill/>
+        </p:spPr>
+        <p:txBody>
           <a:bodyPr wrap="square">
+            <a:spAutoFit/>
+          </a:bodyPr>
+          <a:lstStyle/>
+          <a:p>
+            <a:pPr algn="l"/>
+            <a:r>
+              <a:rPr sz="2000" b="1" i="0">
+                <a:solidFill>
+                  <a:srgbClr val="1F2C56"/>
+                </a:solidFill>
+                <a:latin typeface="Arial"/>
+              </a:rPr>
+              <a:t>Veränderungskurve nach Kübler-Ross</a:t>
+            </a:r>
+          </a:p>
+        </p:txBody>
+      </p:sp>
+      <p:sp>
+        <p:nvSpPr>
+          <p:cNvPr id="6" name="Rectangle 5"/>
+          <p:cNvSpPr/>
+          <p:nvPr/>
+        </p:nvSpPr>
+        <p:spPr>
+          <a:xfrm>
+            <a:off x="685800" y="1143000"/>
+            <a:ext cx="10817352" cy="25400"/>
+          </a:xfrm>
+          <a:prstGeom prst="rect">
+            <a:avLst/>
+          </a:prstGeom>
+          <a:solidFill>
+            <a:srgbClr val="D9C089"/>
+          </a:solidFill>
+          <a:ln>
+            <a:noFill/>
+          </a:ln>
+        </p:spPr>
+        <p:style>
+          <a:lnRef idx="1">
+            <a:schemeClr val="accent1"/>
+          </a:lnRef>
+          <a:fillRef idx="3">
+            <a:schemeClr val="accent1"/>
+          </a:fillRef>
+          <a:effectRef idx="2">
+            <a:schemeClr val="accent1"/>
+          </a:effectRef>
+          <a:fontRef idx="minor">
+            <a:schemeClr val="lt1"/>
+          </a:fontRef>
+        </p:style>
+        <p:txBody>
+          <a:bodyPr rtlCol="0" anchor="ctr"/>
+          <a:lstStyle/>
+          <a:p>
+            <a:pPr algn="ctr"/>
+          </a:p>
+        </p:txBody>
+      </p:sp>
+      <p:pic>
+        <p:nvPicPr>
+          <p:cNvPr id="7" name="Picture 6" descr="image.png"/>
+          <p:cNvPicPr>
+            <a:picLocks noChangeAspect="1"/>
+          </p:cNvPicPr>
+          <p:nvPr/>
+        </p:nvPicPr>
+        <p:blipFill>
+          <a:blip r:embed="rId2"/>
+          <a:stretch>
+            <a:fillRect/>
+          </a:stretch>
+        </p:blipFill>
+        <p:spPr>
+          <a:xfrm>
+            <a:off x="2303489" y="1325880"/>
+            <a:ext cx="7581973" cy="4937760"/>
+          </a:xfrm>
+          <a:prstGeom prst="rect">
+            <a:avLst/>
+          </a:prstGeom>
+        </p:spPr>
+      </p:pic>
+      <p:sp>
+        <p:nvSpPr>
+          <p:cNvPr id="8" name="Rectangle 7"/>
+          <p:cNvSpPr/>
+          <p:nvPr/>
+        </p:nvSpPr>
+        <p:spPr>
+          <a:xfrm>
+            <a:off x="0" y="6510528"/>
+            <a:ext cx="12188952" cy="347472"/>
+          </a:xfrm>
+          <a:prstGeom prst="rect">
+            <a:avLst/>
+          </a:prstGeom>
+          <a:solidFill>
+            <a:srgbClr val="0A1937"/>
+          </a:solidFill>
+          <a:ln>
+            <a:noFill/>
+          </a:ln>
+        </p:spPr>
+        <p:style>
+          <a:lnRef idx="1">
+            <a:schemeClr val="accent1"/>
+          </a:lnRef>
+          <a:fillRef idx="3">
+            <a:schemeClr val="accent1"/>
+          </a:fillRef>
+          <a:effectRef idx="2">
+            <a:schemeClr val="accent1"/>
+          </a:effectRef>
+          <a:fontRef idx="minor">
+            <a:schemeClr val="lt1"/>
+          </a:fontRef>
+        </p:style>
+        <p:txBody>
+          <a:bodyPr rtlCol="0" anchor="ctr"/>
+          <a:lstStyle/>
+          <a:p>
+            <a:pPr algn="ctr"/>
+          </a:p>
+        </p:txBody>
+      </p:sp>
+      <p:sp>
+        <p:nvSpPr>
+          <p:cNvPr id="9" name="TextBox 8"/>
+          <p:cNvSpPr txBox="1"/>
+          <p:nvPr/>
+        </p:nvSpPr>
+        <p:spPr>
+          <a:xfrm>
+            <a:off x="685800" y="6583680"/>
+            <a:ext cx="6490411" cy="256032"/>
+          </a:xfrm>
+          <a:prstGeom prst="rect">
+            <a:avLst/>
+          </a:prstGeom>
+          <a:noFill/>
+        </p:spPr>
+        <p:txBody>
+          <a:bodyPr wrap="none">
+            <a:spAutoFit/>
+          </a:bodyPr>
+          <a:lstStyle/>
+          <a:p>
+            <a:pPr algn="l"/>
+            <a:r>
+              <a:rPr sz="700">
+                <a:solidFill>
+                  <a:srgbClr val="A0B4D2"/>
+                </a:solidFill>
+                <a:latin typeface="Consolas"/>
+              </a:rPr>
+              <a:t>FKB Campus  ·  M12</a:t>
+            </a:r>
+          </a:p>
+        </p:txBody>
+      </p:sp>
+      <p:sp>
+        <p:nvSpPr>
+          <p:cNvPr id="10" name="TextBox 9"/>
+          <p:cNvSpPr txBox="1"/>
+          <p:nvPr/>
+        </p:nvSpPr>
+        <p:spPr>
+          <a:xfrm>
+            <a:off x="7176211" y="6583680"/>
+            <a:ext cx="4326940" cy="256032"/>
+          </a:xfrm>
+          <a:prstGeom prst="rect">
+            <a:avLst/>
+          </a:prstGeom>
+          <a:noFill/>
+        </p:spPr>
+        <p:txBody>
+          <a:bodyPr wrap="none">
+            <a:spAutoFit/>
+          </a:bodyPr>
+          <a:lstStyle/>
+          <a:p>
+            <a:pPr algn="r"/>
+            <a:r>
+              <a:rPr sz="700">
+                <a:solidFill>
+                  <a:srgbClr val="A0B4D2"/>
+                </a:solidFill>
+                <a:latin typeface="Consolas"/>
+              </a:rPr>
+              <a:t>Schaubild</a:t>
+            </a:r>
+          </a:p>
+        </p:txBody>
+      </p:sp>
+    </p:spTree>
+  </p:cSld>
+  <p:clrMapOvr>
+    <a:masterClrMapping/>
+  </p:clrMapOvr>
+</p:sld>
+</file>
+
+<file path=ppt/slides/slide14.xml><?xml version="1.0" encoding="utf-8"?>
+<p:sld xmlns:a="http://schemas.openxmlformats.org/drawingml/2006/main" xmlns:p="http://schemas.openxmlformats.org/presentationml/2006/main" xmlns:r="http://schemas.openxmlformats.org/officeDocument/2006/relationships">
+  <p:cSld>
+    <p:spTree>
+      <p:nvGrpSpPr>
+        <p:cNvPr id="1" name=""/>
+        <p:cNvGrpSpPr/>
+        <p:nvPr/>
+      </p:nvGrpSpPr>
+      <p:grpSpPr/>
+      <p:sp>
+        <p:nvSpPr>
+          <p:cNvPr id="2" name="Rectangle 1"/>
+          <p:cNvSpPr/>
+          <p:nvPr/>
+        </p:nvSpPr>
+        <p:spPr>
+          <a:xfrm>
+            <a:off x="0" y="0"/>
+            <a:ext cx="12188952" cy="6858000"/>
+          </a:xfrm>
+          <a:prstGeom prst="rect">
+            <a:avLst/>
+          </a:prstGeom>
+          <a:solidFill>
+            <a:srgbClr val="1F2C56"/>
+          </a:solidFill>
+          <a:ln>
+            <a:noFill/>
+          </a:ln>
+        </p:spPr>
+        <p:style>
+          <a:lnRef idx="1">
+            <a:schemeClr val="accent1"/>
+          </a:lnRef>
+          <a:fillRef idx="3">
+            <a:schemeClr val="accent1"/>
+          </a:fillRef>
+          <a:effectRef idx="2">
+            <a:schemeClr val="accent1"/>
+          </a:effectRef>
+          <a:fontRef idx="minor">
+            <a:schemeClr val="lt1"/>
+          </a:fontRef>
+        </p:style>
+        <p:txBody>
+          <a:bodyPr rtlCol="0" anchor="ctr"/>
+          <a:lstStyle/>
+          <a:p>
+            <a:pPr algn="ctr"/>
+          </a:p>
+        </p:txBody>
+      </p:sp>
+      <p:sp>
+        <p:nvSpPr>
+          <p:cNvPr id="3" name="TextBox 2"/>
+          <p:cNvSpPr txBox="1"/>
+          <p:nvPr/>
+        </p:nvSpPr>
+        <p:spPr>
+          <a:xfrm>
+            <a:off x="685800" y="2377440"/>
+            <a:ext cx="10817352" cy="365760"/>
+          </a:xfrm>
+          <a:prstGeom prst="rect">
+            <a:avLst/>
+          </a:prstGeom>
+          <a:noFill/>
+        </p:spPr>
+        <p:txBody>
+          <a:bodyPr wrap="none">
+            <a:spAutoFit/>
+          </a:bodyPr>
+          <a:lstStyle/>
+          <a:p>
+            <a:pPr algn="l"/>
+            <a:r>
+              <a:rPr sz="1200">
+                <a:solidFill>
+                  <a:srgbClr val="D9C089"/>
+                </a:solidFill>
+                <a:latin typeface="Consolas"/>
+              </a:rPr>
+              <a:t>10:45–12:00</a:t>
+            </a:r>
+          </a:p>
+        </p:txBody>
+      </p:sp>
+      <p:sp>
+        <p:nvSpPr>
+          <p:cNvPr id="4" name="Rectangle 3"/>
+          <p:cNvSpPr/>
+          <p:nvPr/>
+        </p:nvSpPr>
+        <p:spPr>
+          <a:xfrm>
+            <a:off x="685800" y="2788920"/>
+            <a:ext cx="548640" cy="38100"/>
+          </a:xfrm>
+          <a:prstGeom prst="rect">
+            <a:avLst/>
+          </a:prstGeom>
+          <a:solidFill>
+            <a:srgbClr val="D9C089"/>
+          </a:solidFill>
+          <a:ln>
+            <a:noFill/>
+          </a:ln>
+        </p:spPr>
+        <p:style>
+          <a:lnRef idx="1">
+            <a:schemeClr val="accent1"/>
+          </a:lnRef>
+          <a:fillRef idx="3">
+            <a:schemeClr val="accent1"/>
+          </a:fillRef>
+          <a:effectRef idx="2">
+            <a:schemeClr val="accent1"/>
+          </a:effectRef>
+          <a:fontRef idx="minor">
+            <a:schemeClr val="lt1"/>
+          </a:fontRef>
+        </p:style>
+        <p:txBody>
+          <a:bodyPr rtlCol="0" anchor="ctr"/>
+          <a:lstStyle/>
+          <a:p>
+            <a:pPr algn="ctr"/>
+          </a:p>
+        </p:txBody>
+      </p:sp>
+      <p:sp>
+        <p:nvSpPr>
+          <p:cNvPr id="5" name="TextBox 4"/>
+          <p:cNvSpPr txBox="1"/>
+          <p:nvPr/>
+        </p:nvSpPr>
+        <p:spPr>
+          <a:xfrm>
+            <a:off x="685800" y="3017520"/>
+            <a:ext cx="10817352" cy="1463040"/>
+          </a:xfrm>
+          <a:prstGeom prst="rect">
+            <a:avLst/>
+          </a:prstGeom>
+          <a:noFill/>
+        </p:spPr>
+        <p:txBody>
+          <a:bodyPr wrap="square">
+            <a:spAutoFit/>
+          </a:bodyPr>
+          <a:lstStyle/>
+          <a:p>
+            <a:pPr algn="l"/>
+            <a:r>
+              <a:rPr sz="4000" b="1" i="0">
+                <a:solidFill>
+                  <a:srgbClr val="FFFFFF"/>
+                </a:solidFill>
+                <a:latin typeface="Arial"/>
+              </a:rPr>
+              <a:t>Fallstudie Wagner KG</a:t>
+            </a:r>
+          </a:p>
+        </p:txBody>
+      </p:sp>
+      <p:sp>
+        <p:nvSpPr>
+          <p:cNvPr id="6" name="TextBox 5"/>
+          <p:cNvSpPr txBox="1"/>
+          <p:nvPr/>
+        </p:nvSpPr>
+        <p:spPr>
+          <a:xfrm>
+            <a:off x="685800" y="4480560"/>
+            <a:ext cx="8653881" cy="1280160"/>
+          </a:xfrm>
+          <a:prstGeom prst="rect">
+            <a:avLst/>
+          </a:prstGeom>
+          <a:noFill/>
+        </p:spPr>
+        <p:txBody>
+          <a:bodyPr wrap="square">
+            <a:spAutoFit/>
+          </a:bodyPr>
+          <a:lstStyle/>
+          <a:p>
+            <a:pPr algn="l"/>
+            <a:r>
+              <a:rPr sz="1600" b="0" i="0">
+                <a:solidFill>
+                  <a:srgbClr val="C8D2E6"/>
+                </a:solidFill>
+                <a:latin typeface="Arial"/>
+              </a:rPr>
+              <a:t>Nachfolgeoptionen analysieren und bewerten.</a:t>
+            </a:r>
+          </a:p>
+        </p:txBody>
+      </p:sp>
+      <p:sp>
+        <p:nvSpPr>
+          <p:cNvPr id="7" name="TextBox 6"/>
+          <p:cNvSpPr txBox="1"/>
+          <p:nvPr/>
+        </p:nvSpPr>
+        <p:spPr>
+          <a:xfrm>
+            <a:off x="685800" y="6355080"/>
+            <a:ext cx="10817352" cy="274320"/>
+          </a:xfrm>
+          <a:prstGeom prst="rect">
+            <a:avLst/>
+          </a:prstGeom>
+          <a:noFill/>
+        </p:spPr>
+        <p:txBody>
+          <a:bodyPr wrap="none">
+            <a:spAutoFit/>
+          </a:bodyPr>
+          <a:lstStyle/>
+          <a:p>
+            <a:pPr algn="l"/>
+            <a:r>
+              <a:rPr sz="700">
+                <a:solidFill>
+                  <a:srgbClr val="8CA0C3"/>
+                </a:solidFill>
+                <a:latin typeface="Consolas"/>
+              </a:rPr>
+              <a:t>FKB Campus  ·  M12</a:t>
+            </a:r>
+          </a:p>
+        </p:txBody>
+      </p:sp>
+    </p:spTree>
+  </p:cSld>
+  <p:clrMapOvr>
+    <a:masterClrMapping/>
+  </p:clrMapOvr>
+</p:sld>
+</file>
+
+<file path=ppt/slides/slide15.xml><?xml version="1.0" encoding="utf-8"?>
+<p:sld xmlns:a="http://schemas.openxmlformats.org/drawingml/2006/main" xmlns:p="http://schemas.openxmlformats.org/presentationml/2006/main" xmlns:r="http://schemas.openxmlformats.org/officeDocument/2006/relationships">
+  <p:cSld>
+    <p:spTree>
+      <p:nvGrpSpPr>
+        <p:cNvPr id="1" name=""/>
+        <p:cNvGrpSpPr/>
+        <p:nvPr/>
+      </p:nvGrpSpPr>
+      <p:grpSpPr/>
+      <p:sp>
+        <p:nvSpPr>
+          <p:cNvPr id="2" name="Rectangle 1"/>
+          <p:cNvSpPr/>
+          <p:nvPr/>
+        </p:nvSpPr>
+        <p:spPr>
+          <a:xfrm>
+            <a:off x="0" y="0"/>
+            <a:ext cx="12188952" cy="6858000"/>
+          </a:xfrm>
+          <a:prstGeom prst="rect">
+            <a:avLst/>
+          </a:prstGeom>
+          <a:solidFill>
+            <a:srgbClr val="EDEDF3"/>
+          </a:solidFill>
+          <a:ln>
+            <a:noFill/>
+          </a:ln>
+        </p:spPr>
+        <p:style>
+          <a:lnRef idx="1">
+            <a:schemeClr val="accent1"/>
+          </a:lnRef>
+          <a:fillRef idx="3">
+            <a:schemeClr val="accent1"/>
+          </a:fillRef>
+          <a:effectRef idx="2">
+            <a:schemeClr val="accent1"/>
+          </a:effectRef>
+          <a:fontRef idx="minor">
+            <a:schemeClr val="lt1"/>
+          </a:fontRef>
+        </p:style>
+        <p:txBody>
+          <a:bodyPr rtlCol="0" anchor="ctr"/>
+          <a:lstStyle/>
+          <a:p>
+            <a:pPr algn="ctr"/>
+          </a:p>
+        </p:txBody>
+      </p:sp>
+      <p:sp>
+        <p:nvSpPr>
+          <p:cNvPr id="3" name="Rectangle 2"/>
+          <p:cNvSpPr/>
+          <p:nvPr/>
+        </p:nvSpPr>
+        <p:spPr>
+          <a:xfrm>
+            <a:off x="0" y="0"/>
+            <a:ext cx="12188952" cy="50292"/>
+          </a:xfrm>
+          <a:prstGeom prst="rect">
+            <a:avLst/>
+          </a:prstGeom>
+          <a:solidFill>
+            <a:srgbClr val="1F2C56"/>
+          </a:solidFill>
+          <a:ln>
+            <a:noFill/>
+          </a:ln>
+        </p:spPr>
+        <p:style>
+          <a:lnRef idx="1">
+            <a:schemeClr val="accent1"/>
+          </a:lnRef>
+          <a:fillRef idx="3">
+            <a:schemeClr val="accent1"/>
+          </a:fillRef>
+          <a:effectRef idx="2">
+            <a:schemeClr val="accent1"/>
+          </a:effectRef>
+          <a:fontRef idx="minor">
+            <a:schemeClr val="lt1"/>
+          </a:fontRef>
+        </p:style>
+        <p:txBody>
+          <a:bodyPr rtlCol="0" anchor="ctr"/>
+          <a:lstStyle/>
+          <a:p>
+            <a:pPr algn="ctr"/>
+          </a:p>
+        </p:txBody>
+      </p:sp>
+      <p:sp>
+        <p:nvSpPr>
+          <p:cNvPr id="4" name="TextBox 3"/>
+          <p:cNvSpPr txBox="1"/>
+          <p:nvPr/>
+        </p:nvSpPr>
+        <p:spPr>
+          <a:xfrm>
+            <a:off x="685800" y="109728"/>
+            <a:ext cx="10817352" cy="228600"/>
+          </a:xfrm>
+          <a:prstGeom prst="rect">
+            <a:avLst/>
+          </a:prstGeom>
+          <a:noFill/>
+        </p:spPr>
+        <p:txBody>
+          <a:bodyPr wrap="none">
+            <a:spAutoFit/>
+          </a:bodyPr>
+          <a:lstStyle/>
+          <a:p>
+            <a:pPr algn="l"/>
+            <a:r>
+              <a:rPr sz="750">
+                <a:solidFill>
+                  <a:srgbClr val="78808C"/>
+                </a:solidFill>
+                <a:latin typeface="Consolas"/>
+              </a:rPr>
+              <a:t>M12  ·  ARBEITSBLATT</a:t>
+            </a:r>
+          </a:p>
+        </p:txBody>
+      </p:sp>
+      <p:sp>
+        <p:nvSpPr>
+          <p:cNvPr id="5" name="Rectangle 4"/>
+          <p:cNvSpPr/>
+          <p:nvPr/>
+        </p:nvSpPr>
+        <p:spPr>
+          <a:xfrm>
+            <a:off x="0" y="1234440"/>
+            <a:ext cx="12188952" cy="12700"/>
+          </a:xfrm>
+          <a:prstGeom prst="rect">
+            <a:avLst/>
+          </a:prstGeom>
+          <a:solidFill>
+            <a:srgbClr val="D8DFE4"/>
+          </a:solidFill>
+          <a:ln>
+            <a:noFill/>
+          </a:ln>
+        </p:spPr>
+        <p:style>
+          <a:lnRef idx="1">
+            <a:schemeClr val="accent1"/>
+          </a:lnRef>
+          <a:fillRef idx="3">
+            <a:schemeClr val="accent1"/>
+          </a:fillRef>
+          <a:effectRef idx="2">
+            <a:schemeClr val="accent1"/>
+          </a:effectRef>
+          <a:fontRef idx="minor">
+            <a:schemeClr val="lt1"/>
+          </a:fontRef>
+        </p:style>
+        <p:txBody>
+          <a:bodyPr rtlCol="0" anchor="ctr"/>
+          <a:lstStyle/>
+          <a:p>
+            <a:pPr algn="ctr"/>
+          </a:p>
+        </p:txBody>
+      </p:sp>
+      <p:sp>
+        <p:nvSpPr>
+          <p:cNvPr id="6" name="Rectangle 5"/>
+          <p:cNvSpPr/>
+          <p:nvPr/>
+        </p:nvSpPr>
+        <p:spPr>
+          <a:xfrm>
+            <a:off x="685800" y="502920"/>
+            <a:ext cx="36576" cy="658368"/>
+          </a:xfrm>
+          <a:prstGeom prst="rect">
+            <a:avLst/>
+          </a:prstGeom>
+          <a:solidFill>
+            <a:srgbClr val="D9C089"/>
+          </a:solidFill>
+          <a:ln>
+            <a:noFill/>
+          </a:ln>
+        </p:spPr>
+        <p:style>
+          <a:lnRef idx="1">
+            <a:schemeClr val="accent1"/>
+          </a:lnRef>
+          <a:fillRef idx="3">
+            <a:schemeClr val="accent1"/>
+          </a:fillRef>
+          <a:effectRef idx="2">
+            <a:schemeClr val="accent1"/>
+          </a:effectRef>
+          <a:fontRef idx="minor">
+            <a:schemeClr val="lt1"/>
+          </a:fontRef>
+        </p:style>
+        <p:txBody>
+          <a:bodyPr rtlCol="0" anchor="ctr"/>
+          <a:lstStyle/>
+          <a:p>
+            <a:pPr algn="ctr"/>
+          </a:p>
+        </p:txBody>
+      </p:sp>
+      <p:sp>
+        <p:nvSpPr>
+          <p:cNvPr id="7" name="TextBox 6"/>
+          <p:cNvSpPr txBox="1"/>
+          <p:nvPr/>
+        </p:nvSpPr>
+        <p:spPr>
+          <a:xfrm>
+            <a:off x="813816" y="502920"/>
+            <a:ext cx="10634472" cy="685800"/>
+          </a:xfrm>
+          <a:prstGeom prst="rect">
+            <a:avLst/>
+          </a:prstGeom>
+          <a:noFill/>
+        </p:spPr>
+        <p:txBody>
+          <a:bodyPr wrap="square">
+            <a:spAutoFit/>
+          </a:bodyPr>
+          <a:lstStyle/>
+          <a:p>
+            <a:pPr algn="l"/>
+            <a:r>
+              <a:rPr sz="2400" b="1" i="0">
+                <a:solidFill>
+                  <a:srgbClr val="1F2C56"/>
+                </a:solidFill>
+                <a:latin typeface="Arial"/>
+              </a:rPr>
+              <a:t>Praxisfall Wagner KG: Nachfolge bearbeiten</a:t>
+            </a:r>
+          </a:p>
+        </p:txBody>
+      </p:sp>
+      <p:sp>
+        <p:nvSpPr>
+          <p:cNvPr id="8" name="TextBox 7"/>
+          <p:cNvSpPr txBox="1"/>
+          <p:nvPr/>
+        </p:nvSpPr>
+        <p:spPr>
+          <a:xfrm>
+            <a:off x="685800" y="1554480"/>
+            <a:ext cx="10817352" cy="3840480"/>
+          </a:xfrm>
+          <a:prstGeom prst="rect">
+            <a:avLst/>
+          </a:prstGeom>
+          <a:noFill/>
+        </p:spPr>
+        <p:txBody>
+          <a:bodyPr wrap="square">
+            <a:spAutoFit/>
+          </a:bodyPr>
+          <a:lstStyle/>
+          <a:p>
+            <a:pPr marL="190500" indent="-190500">
+              <a:spcBef>
+                <a:spcPts val="400"/>
+              </a:spcBef>
+              <a:spcAft>
+                <a:spcPts val="200"/>
+              </a:spcAft>
+            </a:pPr>
+            <a:r>
+              <a:rPr sz="1400">
+                <a:solidFill>
+                  <a:srgbClr val="3D5466"/>
+                </a:solidFill>
+                <a:latin typeface="Arial"/>
+              </a:rPr>
+              <a:t>▸  Analysieren Sie die Nachfolgeoptionen der Metallverarbeitung Wagner KG (AB-1).</a:t>
+            </a:r>
+          </a:p>
+          <a:p>
+            <a:pPr marL="190500" indent="-190500">
+              <a:spcBef>
+                <a:spcPts val="400"/>
+              </a:spcBef>
+              <a:spcAft>
+                <a:spcPts val="200"/>
+              </a:spcAft>
+            </a:pPr>
+            <a:r>
+              <a:rPr sz="1400">
+                <a:solidFill>
+                  <a:srgbClr val="3D5466"/>
+                </a:solidFill>
+                <a:latin typeface="Arial"/>
+              </a:rPr>
+              <a:t>▸  Bewerten Sie je Option: familieninterne Lösung, MBO, externer Verkauf.</a:t>
+            </a:r>
+          </a:p>
+          <a:p>
+            <a:pPr marL="190500" indent="-190500">
+              <a:spcBef>
+                <a:spcPts val="400"/>
+              </a:spcBef>
+              <a:spcAft>
+                <a:spcPts val="200"/>
+              </a:spcAft>
+            </a:pPr>
+            <a:r>
+              <a:rPr sz="1400">
+                <a:solidFill>
+                  <a:srgbClr val="3D5466"/>
+                </a:solidFill>
+                <a:latin typeface="Arial"/>
+              </a:rPr>
+              <a:t>▸  Strukturieren Sie das Nachfolge-Erstgespräch mit dem Inhaber.</a:t>
+            </a:r>
+          </a:p>
+        </p:txBody>
+      </p:sp>
+      <p:sp>
+        <p:nvSpPr>
+          <p:cNvPr id="9" name="Rectangle 8"/>
+          <p:cNvSpPr/>
+          <p:nvPr/>
+        </p:nvSpPr>
+        <p:spPr>
+          <a:xfrm>
+            <a:off x="685800" y="5486400"/>
+            <a:ext cx="10817352" cy="640080"/>
+          </a:xfrm>
+          <a:prstGeom prst="rect">
+            <a:avLst/>
+          </a:prstGeom>
+          <a:solidFill>
+            <a:srgbClr val="1F2C56"/>
+          </a:solidFill>
+          <a:ln>
+            <a:noFill/>
+          </a:ln>
+        </p:spPr>
+        <p:style>
+          <a:lnRef idx="1">
+            <a:schemeClr val="accent1"/>
+          </a:lnRef>
+          <a:fillRef idx="3">
+            <a:schemeClr val="accent1"/>
+          </a:fillRef>
+          <a:effectRef idx="2">
+            <a:schemeClr val="accent1"/>
+          </a:effectRef>
+          <a:fontRef idx="minor">
+            <a:schemeClr val="lt1"/>
+          </a:fontRef>
+        </p:style>
+        <p:txBody>
+          <a:bodyPr rtlCol="0" anchor="ctr"/>
+          <a:lstStyle/>
+          <a:p>
+            <a:pPr algn="ctr"/>
+          </a:p>
+        </p:txBody>
+      </p:sp>
+      <p:sp>
+        <p:nvSpPr>
+          <p:cNvPr id="10" name="TextBox 9"/>
+          <p:cNvSpPr txBox="1"/>
+          <p:nvPr/>
+        </p:nvSpPr>
+        <p:spPr>
+          <a:xfrm>
+            <a:off x="868680" y="5596128"/>
+            <a:ext cx="10451592" cy="457200"/>
+          </a:xfrm>
+          <a:prstGeom prst="rect">
+            <a:avLst/>
+          </a:prstGeom>
+          <a:noFill/>
+        </p:spPr>
+        <p:txBody>
+          <a:bodyPr wrap="square">
+            <a:spAutoFit/>
+          </a:bodyPr>
+          <a:lstStyle/>
+          <a:p>
+            <a:pPr algn="l"/>
+            <a:r>
+              <a:rPr sz="1300" b="1" i="0">
+                <a:solidFill>
+                  <a:srgbClr val="FFFFFF"/>
+                </a:solidFill>
+                <a:latin typeface="Arial"/>
+              </a:rPr>
+              <a:t>→  Bearbeitung im Teilnehmer-Workbook (Arbeitsblatt mit Ausfüllfeldern)</a:t>
+            </a:r>
+          </a:p>
+        </p:txBody>
+      </p:sp>
+      <p:sp>
+        <p:nvSpPr>
+          <p:cNvPr id="11" name="Rectangle 10"/>
+          <p:cNvSpPr/>
+          <p:nvPr/>
+        </p:nvSpPr>
+        <p:spPr>
+          <a:xfrm>
+            <a:off x="0" y="6510528"/>
+            <a:ext cx="12188952" cy="347472"/>
+          </a:xfrm>
+          <a:prstGeom prst="rect">
+            <a:avLst/>
+          </a:prstGeom>
+          <a:solidFill>
+            <a:srgbClr val="0A1937"/>
+          </a:solidFill>
+          <a:ln>
+            <a:noFill/>
+          </a:ln>
+        </p:spPr>
+        <p:style>
+          <a:lnRef idx="1">
+            <a:schemeClr val="accent1"/>
+          </a:lnRef>
+          <a:fillRef idx="3">
+            <a:schemeClr val="accent1"/>
+          </a:fillRef>
+          <a:effectRef idx="2">
+            <a:schemeClr val="accent1"/>
+          </a:effectRef>
+          <a:fontRef idx="minor">
+            <a:schemeClr val="lt1"/>
+          </a:fontRef>
+        </p:style>
+        <p:txBody>
+          <a:bodyPr rtlCol="0" anchor="ctr"/>
+          <a:lstStyle/>
+          <a:p>
+            <a:pPr algn="ctr"/>
+          </a:p>
+        </p:txBody>
+      </p:sp>
+      <p:sp>
+        <p:nvSpPr>
+          <p:cNvPr id="12" name="TextBox 11"/>
+          <p:cNvSpPr txBox="1"/>
+          <p:nvPr/>
+        </p:nvSpPr>
+        <p:spPr>
+          <a:xfrm>
+            <a:off x="685800" y="6583680"/>
+            <a:ext cx="6490411" cy="256032"/>
+          </a:xfrm>
+          <a:prstGeom prst="rect">
+            <a:avLst/>
+          </a:prstGeom>
+          <a:noFill/>
+        </p:spPr>
+        <p:txBody>
+          <a:bodyPr wrap="none">
+            <a:spAutoFit/>
+          </a:bodyPr>
+          <a:lstStyle/>
+          <a:p>
+            <a:pPr algn="l"/>
+            <a:r>
+              <a:rPr sz="700">
+                <a:solidFill>
+                  <a:srgbClr val="A0B4D2"/>
+                </a:solidFill>
+                <a:latin typeface="Consolas"/>
+              </a:rPr>
+              <a:t>FKB Campus  ·  M12</a:t>
+            </a:r>
+          </a:p>
+        </p:txBody>
+      </p:sp>
+    </p:spTree>
+  </p:cSld>
+  <p:clrMapOvr>
+    <a:masterClrMapping/>
+  </p:clrMapOvr>
+</p:sld>
+</file>
+
+<file path=ppt/slides/slide16.xml><?xml version="1.0" encoding="utf-8"?>
+<p:sld xmlns:a="http://schemas.openxmlformats.org/drawingml/2006/main" xmlns:p="http://schemas.openxmlformats.org/presentationml/2006/main" xmlns:r="http://schemas.openxmlformats.org/officeDocument/2006/relationships">
+  <p:cSld>
+    <p:spTree>
+      <p:nvGrpSpPr>
+        <p:cNvPr id="1" name=""/>
+        <p:cNvGrpSpPr/>
+        <p:nvPr/>
+      </p:nvGrpSpPr>
+      <p:grpSpPr/>
+      <p:sp>
+        <p:nvSpPr>
+          <p:cNvPr id="2" name="Rectangle 1"/>
+          <p:cNvSpPr/>
+          <p:nvPr/>
+        </p:nvSpPr>
+        <p:spPr>
+          <a:xfrm>
+            <a:off x="0" y="0"/>
+            <a:ext cx="12188952" cy="6858000"/>
+          </a:xfrm>
+          <a:prstGeom prst="rect">
+            <a:avLst/>
+          </a:prstGeom>
+          <a:solidFill>
+            <a:srgbClr val="1F2C56"/>
+          </a:solidFill>
+          <a:ln>
+            <a:noFill/>
+          </a:ln>
+        </p:spPr>
+        <p:style>
+          <a:lnRef idx="1">
+            <a:schemeClr val="accent1"/>
+          </a:lnRef>
+          <a:fillRef idx="3">
+            <a:schemeClr val="accent1"/>
+          </a:fillRef>
+          <a:effectRef idx="2">
+            <a:schemeClr val="accent1"/>
+          </a:effectRef>
+          <a:fontRef idx="minor">
+            <a:schemeClr val="lt1"/>
+          </a:fontRef>
+        </p:style>
+        <p:txBody>
+          <a:bodyPr rtlCol="0" anchor="ctr"/>
+          <a:lstStyle/>
+          <a:p>
+            <a:pPr algn="ctr"/>
+          </a:p>
+        </p:txBody>
+      </p:sp>
+      <p:sp>
+        <p:nvSpPr>
+          <p:cNvPr id="3" name="TextBox 2"/>
+          <p:cNvSpPr txBox="1"/>
+          <p:nvPr/>
+        </p:nvSpPr>
+        <p:spPr>
+          <a:xfrm>
+            <a:off x="685800" y="2377440"/>
+            <a:ext cx="10817352" cy="365760"/>
+          </a:xfrm>
+          <a:prstGeom prst="rect">
+            <a:avLst/>
+          </a:prstGeom>
+          <a:noFill/>
+        </p:spPr>
+        <p:txBody>
+          <a:bodyPr wrap="none">
+            <a:spAutoFit/>
+          </a:bodyPr>
+          <a:lstStyle/>
+          <a:p>
+            <a:pPr algn="l"/>
+            <a:r>
+              <a:rPr sz="1200">
+                <a:solidFill>
+                  <a:srgbClr val="D9C089"/>
+                </a:solidFill>
+                <a:latin typeface="Consolas"/>
+              </a:rPr>
+              <a:t>13:30–15:00</a:t>
+            </a:r>
+          </a:p>
+        </p:txBody>
+      </p:sp>
+      <p:sp>
+        <p:nvSpPr>
+          <p:cNvPr id="4" name="Rectangle 3"/>
+          <p:cNvSpPr/>
+          <p:nvPr/>
+        </p:nvSpPr>
+        <p:spPr>
+          <a:xfrm>
+            <a:off x="685800" y="2788920"/>
+            <a:ext cx="548640" cy="38100"/>
+          </a:xfrm>
+          <a:prstGeom prst="rect">
+            <a:avLst/>
+          </a:prstGeom>
+          <a:solidFill>
+            <a:srgbClr val="D9C089"/>
+          </a:solidFill>
+          <a:ln>
+            <a:noFill/>
+          </a:ln>
+        </p:spPr>
+        <p:style>
+          <a:lnRef idx="1">
+            <a:schemeClr val="accent1"/>
+          </a:lnRef>
+          <a:fillRef idx="3">
+            <a:schemeClr val="accent1"/>
+          </a:fillRef>
+          <a:effectRef idx="2">
+            <a:schemeClr val="accent1"/>
+          </a:effectRef>
+          <a:fontRef idx="minor">
+            <a:schemeClr val="lt1"/>
+          </a:fontRef>
+        </p:style>
+        <p:txBody>
+          <a:bodyPr rtlCol="0" anchor="ctr"/>
+          <a:lstStyle/>
+          <a:p>
+            <a:pPr algn="ctr"/>
+          </a:p>
+        </p:txBody>
+      </p:sp>
+      <p:sp>
+        <p:nvSpPr>
+          <p:cNvPr id="5" name="TextBox 4"/>
+          <p:cNvSpPr txBox="1"/>
+          <p:nvPr/>
+        </p:nvSpPr>
+        <p:spPr>
+          <a:xfrm>
+            <a:off x="685800" y="3017520"/>
+            <a:ext cx="10817352" cy="1463040"/>
+          </a:xfrm>
+          <a:prstGeom prst="rect">
+            <a:avLst/>
+          </a:prstGeom>
+          <a:noFill/>
+        </p:spPr>
+        <p:txBody>
+          <a:bodyPr wrap="square">
+            <a:spAutoFit/>
+          </a:bodyPr>
+          <a:lstStyle/>
+          <a:p>
+            <a:pPr algn="l"/>
+            <a:r>
+              <a:rPr sz="4000" b="1" i="0">
+                <a:solidFill>
+                  <a:srgbClr val="FFFFFF"/>
+                </a:solidFill>
+                <a:latin typeface="Arial"/>
+              </a:rPr>
+              <a:t>Simulation CEO-Dialog I: Erstkontakt</a:t>
+            </a:r>
+          </a:p>
+        </p:txBody>
+      </p:sp>
+      <p:sp>
+        <p:nvSpPr>
+          <p:cNvPr id="6" name="TextBox 5"/>
+          <p:cNvSpPr txBox="1"/>
+          <p:nvPr/>
+        </p:nvSpPr>
+        <p:spPr>
+          <a:xfrm>
+            <a:off x="685800" y="4480560"/>
+            <a:ext cx="8653881" cy="1280160"/>
+          </a:xfrm>
+          <a:prstGeom prst="rect">
+            <a:avLst/>
+          </a:prstGeom>
+          <a:noFill/>
+        </p:spPr>
+        <p:txBody>
+          <a:bodyPr wrap="square">
+            <a:spAutoFit/>
+          </a:bodyPr>
+          <a:lstStyle/>
+          <a:p>
+            <a:pPr algn="l"/>
+            <a:r>
+              <a:rPr sz="1600" b="0" i="0">
+                <a:solidFill>
+                  <a:srgbClr val="C8D2E6"/>
+                </a:solidFill>
+                <a:latin typeface="Arial"/>
+              </a:rPr>
+              <a:t>Ein Gespräch eröffnen und psychologische Sicherheit herstellen.</a:t>
+            </a:r>
+          </a:p>
+        </p:txBody>
+      </p:sp>
+      <p:sp>
+        <p:nvSpPr>
+          <p:cNvPr id="7" name="TextBox 6"/>
+          <p:cNvSpPr txBox="1"/>
+          <p:nvPr/>
+        </p:nvSpPr>
+        <p:spPr>
+          <a:xfrm>
+            <a:off x="685800" y="6355080"/>
+            <a:ext cx="10817352" cy="274320"/>
+          </a:xfrm>
+          <a:prstGeom prst="rect">
+            <a:avLst/>
+          </a:prstGeom>
+          <a:noFill/>
+        </p:spPr>
+        <p:txBody>
+          <a:bodyPr wrap="none">
+            <a:spAutoFit/>
+          </a:bodyPr>
+          <a:lstStyle/>
+          <a:p>
+            <a:pPr algn="l"/>
+            <a:r>
+              <a:rPr sz="700">
+                <a:solidFill>
+                  <a:srgbClr val="8CA0C3"/>
+                </a:solidFill>
+                <a:latin typeface="Consolas"/>
+              </a:rPr>
+              <a:t>FKB Campus  ·  M12</a:t>
+            </a:r>
+          </a:p>
+        </p:txBody>
+      </p:sp>
+    </p:spTree>
+  </p:cSld>
+  <p:clrMapOvr>
+    <a:masterClrMapping/>
+  </p:clrMapOvr>
+</p:sld>
+</file>
+
+<file path=ppt/slides/slide17.xml><?xml version="1.0" encoding="utf-8"?>
+<p:sld xmlns:a="http://schemas.openxmlformats.org/drawingml/2006/main" xmlns:p="http://schemas.openxmlformats.org/presentationml/2006/main" xmlns:r="http://schemas.openxmlformats.org/officeDocument/2006/relationships">
+  <p:cSld>
+    <p:spTree>
+      <p:nvGrpSpPr>
+        <p:cNvPr id="1" name=""/>
+        <p:cNvGrpSpPr/>
+        <p:nvPr/>
+      </p:nvGrpSpPr>
+      <p:grpSpPr/>
+      <p:sp>
+        <p:nvSpPr>
+          <p:cNvPr id="2" name="Rectangle 1"/>
+          <p:cNvSpPr/>
+          <p:nvPr/>
+        </p:nvSpPr>
+        <p:spPr>
+          <a:xfrm>
+            <a:off x="0" y="0"/>
+            <a:ext cx="12188952" cy="6858000"/>
+          </a:xfrm>
+          <a:prstGeom prst="rect">
+            <a:avLst/>
+          </a:prstGeom>
+          <a:solidFill>
+            <a:srgbClr val="EDEDF3"/>
+          </a:solidFill>
+          <a:ln>
+            <a:noFill/>
+          </a:ln>
+        </p:spPr>
+        <p:style>
+          <a:lnRef idx="1">
+            <a:schemeClr val="accent1"/>
+          </a:lnRef>
+          <a:fillRef idx="3">
+            <a:schemeClr val="accent1"/>
+          </a:fillRef>
+          <a:effectRef idx="2">
+            <a:schemeClr val="accent1"/>
+          </a:effectRef>
+          <a:fontRef idx="minor">
+            <a:schemeClr val="lt1"/>
+          </a:fontRef>
+        </p:style>
+        <p:txBody>
+          <a:bodyPr rtlCol="0" anchor="ctr"/>
+          <a:lstStyle/>
+          <a:p>
+            <a:pPr algn="ctr"/>
+          </a:p>
+        </p:txBody>
+      </p:sp>
+      <p:sp>
+        <p:nvSpPr>
+          <p:cNvPr id="3" name="Rectangle 2"/>
+          <p:cNvSpPr/>
+          <p:nvPr/>
+        </p:nvSpPr>
+        <p:spPr>
+          <a:xfrm>
+            <a:off x="0" y="0"/>
+            <a:ext cx="12188952" cy="50292"/>
+          </a:xfrm>
+          <a:prstGeom prst="rect">
+            <a:avLst/>
+          </a:prstGeom>
+          <a:solidFill>
+            <a:srgbClr val="1F2C56"/>
+          </a:solidFill>
+          <a:ln>
+            <a:noFill/>
+          </a:ln>
+        </p:spPr>
+        <p:style>
+          <a:lnRef idx="1">
+            <a:schemeClr val="accent1"/>
+          </a:lnRef>
+          <a:fillRef idx="3">
+            <a:schemeClr val="accent1"/>
+          </a:fillRef>
+          <a:effectRef idx="2">
+            <a:schemeClr val="accent1"/>
+          </a:effectRef>
+          <a:fontRef idx="minor">
+            <a:schemeClr val="lt1"/>
+          </a:fontRef>
+        </p:style>
+        <p:txBody>
+          <a:bodyPr rtlCol="0" anchor="ctr"/>
+          <a:lstStyle/>
+          <a:p>
+            <a:pPr algn="ctr"/>
+          </a:p>
+        </p:txBody>
+      </p:sp>
+      <p:sp>
+        <p:nvSpPr>
+          <p:cNvPr id="4" name="TextBox 3"/>
+          <p:cNvSpPr txBox="1"/>
+          <p:nvPr/>
+        </p:nvSpPr>
+        <p:spPr>
+          <a:xfrm>
+            <a:off x="685800" y="109728"/>
+            <a:ext cx="10817352" cy="228600"/>
+          </a:xfrm>
+          <a:prstGeom prst="rect">
+            <a:avLst/>
+          </a:prstGeom>
+          <a:noFill/>
+        </p:spPr>
+        <p:txBody>
+          <a:bodyPr wrap="none">
+            <a:spAutoFit/>
+          </a:bodyPr>
+          <a:lstStyle/>
+          <a:p>
+            <a:pPr algn="l"/>
+            <a:r>
+              <a:rPr sz="750">
+                <a:solidFill>
+                  <a:srgbClr val="78808C"/>
+                </a:solidFill>
+                <a:latin typeface="Consolas"/>
+              </a:rPr>
+              <a:t>M12  ·  INHALT</a:t>
+            </a:r>
+          </a:p>
+        </p:txBody>
+      </p:sp>
+      <p:sp>
+        <p:nvSpPr>
+          <p:cNvPr id="5" name="Rectangle 4"/>
+          <p:cNvSpPr/>
+          <p:nvPr/>
+        </p:nvSpPr>
+        <p:spPr>
+          <a:xfrm>
+            <a:off x="0" y="1234440"/>
+            <a:ext cx="12188952" cy="12700"/>
+          </a:xfrm>
+          <a:prstGeom prst="rect">
+            <a:avLst/>
+          </a:prstGeom>
+          <a:solidFill>
+            <a:srgbClr val="D8DFE4"/>
+          </a:solidFill>
+          <a:ln>
+            <a:noFill/>
+          </a:ln>
+        </p:spPr>
+        <p:style>
+          <a:lnRef idx="1">
+            <a:schemeClr val="accent1"/>
+          </a:lnRef>
+          <a:fillRef idx="3">
+            <a:schemeClr val="accent1"/>
+          </a:fillRef>
+          <a:effectRef idx="2">
+            <a:schemeClr val="accent1"/>
+          </a:effectRef>
+          <a:fontRef idx="minor">
+            <a:schemeClr val="lt1"/>
+          </a:fontRef>
+        </p:style>
+        <p:txBody>
+          <a:bodyPr rtlCol="0" anchor="ctr"/>
+          <a:lstStyle/>
+          <a:p>
+            <a:pPr algn="ctr"/>
+          </a:p>
+        </p:txBody>
+      </p:sp>
+      <p:sp>
+        <p:nvSpPr>
+          <p:cNvPr id="6" name="Rectangle 5"/>
+          <p:cNvSpPr/>
+          <p:nvPr/>
+        </p:nvSpPr>
+        <p:spPr>
+          <a:xfrm>
+            <a:off x="685800" y="502920"/>
+            <a:ext cx="36576" cy="658368"/>
+          </a:xfrm>
+          <a:prstGeom prst="rect">
+            <a:avLst/>
+          </a:prstGeom>
+          <a:solidFill>
+            <a:srgbClr val="D9C089"/>
+          </a:solidFill>
+          <a:ln>
+            <a:noFill/>
+          </a:ln>
+        </p:spPr>
+        <p:style>
+          <a:lnRef idx="1">
+            <a:schemeClr val="accent1"/>
+          </a:lnRef>
+          <a:fillRef idx="3">
+            <a:schemeClr val="accent1"/>
+          </a:fillRef>
+          <a:effectRef idx="2">
+            <a:schemeClr val="accent1"/>
+          </a:effectRef>
+          <a:fontRef idx="minor">
+            <a:schemeClr val="lt1"/>
+          </a:fontRef>
+        </p:style>
+        <p:txBody>
+          <a:bodyPr rtlCol="0" anchor="ctr"/>
+          <a:lstStyle/>
+          <a:p>
+            <a:pPr algn="ctr"/>
+          </a:p>
+        </p:txBody>
+      </p:sp>
+      <p:sp>
+        <p:nvSpPr>
+          <p:cNvPr id="7" name="TextBox 6"/>
+          <p:cNvSpPr txBox="1"/>
+          <p:nvPr/>
+        </p:nvSpPr>
+        <p:spPr>
+          <a:xfrm>
+            <a:off x="813816" y="502920"/>
+            <a:ext cx="10634472" cy="685800"/>
+          </a:xfrm>
+          <a:prstGeom prst="rect">
+            <a:avLst/>
+          </a:prstGeom>
+          <a:noFill/>
+        </p:spPr>
+        <p:txBody>
+          <a:bodyPr wrap="square">
+            <a:spAutoFit/>
+          </a:bodyPr>
+          <a:lstStyle/>
+          <a:p>
+            <a:pPr algn="l"/>
+            <a:r>
+              <a:rPr sz="2400" b="1" i="0">
+                <a:solidFill>
+                  <a:srgbClr val="1F2C56"/>
+                </a:solidFill>
+                <a:latin typeface="Arial"/>
+              </a:rPr>
+              <a:t>Erstkontakt: den Raum öffnen</a:t>
+            </a:r>
+          </a:p>
+        </p:txBody>
+      </p:sp>
+      <p:sp>
+        <p:nvSpPr>
+          <p:cNvPr id="8" name="TextBox 7"/>
+          <p:cNvSpPr txBox="1"/>
+          <p:nvPr/>
+        </p:nvSpPr>
+        <p:spPr>
+          <a:xfrm>
+            <a:off x="685800" y="1417320"/>
+            <a:ext cx="10817352" cy="4892040"/>
+          </a:xfrm>
+          <a:prstGeom prst="rect">
+            <a:avLst/>
+          </a:prstGeom>
+          <a:noFill/>
+        </p:spPr>
+        <p:txBody>
+          <a:bodyPr wrap="square" anchor="ctr">
             <a:spAutoFit/>
           </a:bodyPr>
           <a:lstStyle/>
@@ -5698,7 +7692,7 @@
                 </a:solidFill>
                 <a:latin typeface="Consolas"/>
               </a:rPr>
-              <a:t>VORBEREITUNG (VOR DEM GESPRÄCH)</a:t>
+              <a:t>SO LÄUFT ES</a:t>
             </a:r>
           </a:p>
           <a:p>
@@ -5717,7 +7711,26 @@
                 </a:solidFill>
                 <a:latin typeface="Arial"/>
               </a:rPr>
-              <a:t>▸  ☐ Unternehmensdaten zusammentragen (Umsatz, Gewinn, Mitarbeiter, Branche)</a:t>
+              <a:t>▸  Kleingruppen à 4 TN (Rotation); Live-Demo eines Gesprächsausschnitts als Beobachtungsanker.</a:t>
+            </a:r>
+          </a:p>
+          <a:p>
+            <a:pPr>
+              <a:spcBef>
+                <a:spcPts val="1000"/>
+              </a:spcBef>
+              <a:spcAft>
+                <a:spcPts val="200"/>
+              </a:spcAft>
+            </a:pPr>
+            <a:r>
+              <a:rPr sz="800" b="1">
+                <a:solidFill>
+                  <a:srgbClr val="78808C"/>
+                </a:solidFill>
+                <a:latin typeface="Consolas"/>
+              </a:rPr>
+              <a:t>WORAUF ES ANKOMMT</a:t>
             </a:r>
           </a:p>
           <a:p>
@@ -5736,7 +7749,7 @@
                 </a:solidFill>
                 <a:latin typeface="Arial"/>
               </a:rPr>
-              <a:t>▸  ☐ Familie erkunden: Wer sind potenzielle Nachfolger? Alter, Ausbildung, Interesse?</a:t>
+              <a:t>▸  Das Gespräch eröffnen, ohne Produkt; Sicherheit herstellen, bevor das Thema Nachfolge fällt.</a:t>
             </a:r>
           </a:p>
           <a:p>
@@ -5755,7 +7768,631 @@
                 </a:solidFill>
                 <a:latin typeface="Arial"/>
               </a:rPr>
-              <a:t>▸  ☐ Frühere FK-Notizen lesen: Hat der Unternehmer schon mal Nachfolge erwähnt?</a:t>
+              <a:t>▸  Zuhören und spiegeln statt argumentieren – die erste systemische Frage platzieren.</a:t>
+            </a:r>
+          </a:p>
+        </p:txBody>
+      </p:sp>
+      <p:sp>
+        <p:nvSpPr>
+          <p:cNvPr id="9" name="Rectangle 8"/>
+          <p:cNvSpPr/>
+          <p:nvPr/>
+        </p:nvSpPr>
+        <p:spPr>
+          <a:xfrm>
+            <a:off x="0" y="6510528"/>
+            <a:ext cx="12188952" cy="347472"/>
+          </a:xfrm>
+          <a:prstGeom prst="rect">
+            <a:avLst/>
+          </a:prstGeom>
+          <a:solidFill>
+            <a:srgbClr val="0A1937"/>
+          </a:solidFill>
+          <a:ln>
+            <a:noFill/>
+          </a:ln>
+        </p:spPr>
+        <p:style>
+          <a:lnRef idx="1">
+            <a:schemeClr val="accent1"/>
+          </a:lnRef>
+          <a:fillRef idx="3">
+            <a:schemeClr val="accent1"/>
+          </a:fillRef>
+          <a:effectRef idx="2">
+            <a:schemeClr val="accent1"/>
+          </a:effectRef>
+          <a:fontRef idx="minor">
+            <a:schemeClr val="lt1"/>
+          </a:fontRef>
+        </p:style>
+        <p:txBody>
+          <a:bodyPr rtlCol="0" anchor="ctr"/>
+          <a:lstStyle/>
+          <a:p>
+            <a:pPr algn="ctr"/>
+          </a:p>
+        </p:txBody>
+      </p:sp>
+      <p:sp>
+        <p:nvSpPr>
+          <p:cNvPr id="10" name="TextBox 9"/>
+          <p:cNvSpPr txBox="1"/>
+          <p:nvPr/>
+        </p:nvSpPr>
+        <p:spPr>
+          <a:xfrm>
+            <a:off x="685800" y="6583680"/>
+            <a:ext cx="6490411" cy="256032"/>
+          </a:xfrm>
+          <a:prstGeom prst="rect">
+            <a:avLst/>
+          </a:prstGeom>
+          <a:noFill/>
+        </p:spPr>
+        <p:txBody>
+          <a:bodyPr wrap="none">
+            <a:spAutoFit/>
+          </a:bodyPr>
+          <a:lstStyle/>
+          <a:p>
+            <a:pPr algn="l"/>
+            <a:r>
+              <a:rPr sz="700">
+                <a:solidFill>
+                  <a:srgbClr val="A0B4D2"/>
+                </a:solidFill>
+                <a:latin typeface="Consolas"/>
+              </a:rPr>
+              <a:t>FKB Campus  ·  M12</a:t>
+            </a:r>
+          </a:p>
+        </p:txBody>
+      </p:sp>
+    </p:spTree>
+  </p:cSld>
+  <p:clrMapOvr>
+    <a:masterClrMapping/>
+  </p:clrMapOvr>
+</p:sld>
+</file>
+
+<file path=ppt/slides/slide18.xml><?xml version="1.0" encoding="utf-8"?>
+<p:sld xmlns:a="http://schemas.openxmlformats.org/drawingml/2006/main" xmlns:p="http://schemas.openxmlformats.org/presentationml/2006/main" xmlns:r="http://schemas.openxmlformats.org/officeDocument/2006/relationships">
+  <p:cSld>
+    <p:spTree>
+      <p:nvGrpSpPr>
+        <p:cNvPr id="1" name=""/>
+        <p:cNvGrpSpPr/>
+        <p:nvPr/>
+      </p:nvGrpSpPr>
+      <p:grpSpPr/>
+      <p:sp>
+        <p:nvSpPr>
+          <p:cNvPr id="2" name="Rectangle 1"/>
+          <p:cNvSpPr/>
+          <p:nvPr/>
+        </p:nvSpPr>
+        <p:spPr>
+          <a:xfrm>
+            <a:off x="0" y="0"/>
+            <a:ext cx="12188952" cy="6858000"/>
+          </a:xfrm>
+          <a:prstGeom prst="rect">
+            <a:avLst/>
+          </a:prstGeom>
+          <a:solidFill>
+            <a:srgbClr val="1F2C56"/>
+          </a:solidFill>
+          <a:ln>
+            <a:noFill/>
+          </a:ln>
+        </p:spPr>
+        <p:style>
+          <a:lnRef idx="1">
+            <a:schemeClr val="accent1"/>
+          </a:lnRef>
+          <a:fillRef idx="3">
+            <a:schemeClr val="accent1"/>
+          </a:fillRef>
+          <a:effectRef idx="2">
+            <a:schemeClr val="accent1"/>
+          </a:effectRef>
+          <a:fontRef idx="minor">
+            <a:schemeClr val="lt1"/>
+          </a:fontRef>
+        </p:style>
+        <p:txBody>
+          <a:bodyPr rtlCol="0" anchor="ctr"/>
+          <a:lstStyle/>
+          <a:p>
+            <a:pPr algn="ctr"/>
+          </a:p>
+        </p:txBody>
+      </p:sp>
+      <p:sp>
+        <p:nvSpPr>
+          <p:cNvPr id="3" name="TextBox 2"/>
+          <p:cNvSpPr txBox="1"/>
+          <p:nvPr/>
+        </p:nvSpPr>
+        <p:spPr>
+          <a:xfrm>
+            <a:off x="685800" y="2377440"/>
+            <a:ext cx="10817352" cy="365760"/>
+          </a:xfrm>
+          <a:prstGeom prst="rect">
+            <a:avLst/>
+          </a:prstGeom>
+          <a:noFill/>
+        </p:spPr>
+        <p:txBody>
+          <a:bodyPr wrap="none">
+            <a:spAutoFit/>
+          </a:bodyPr>
+          <a:lstStyle/>
+          <a:p>
+            <a:pPr algn="l"/>
+            <a:r>
+              <a:rPr sz="1200">
+                <a:solidFill>
+                  <a:srgbClr val="D9C089"/>
+                </a:solidFill>
+                <a:latin typeface="Consolas"/>
+              </a:rPr>
+              <a:t>15:15–16:30</a:t>
+            </a:r>
+          </a:p>
+        </p:txBody>
+      </p:sp>
+      <p:sp>
+        <p:nvSpPr>
+          <p:cNvPr id="4" name="Rectangle 3"/>
+          <p:cNvSpPr/>
+          <p:nvPr/>
+        </p:nvSpPr>
+        <p:spPr>
+          <a:xfrm>
+            <a:off x="685800" y="2788920"/>
+            <a:ext cx="548640" cy="38100"/>
+          </a:xfrm>
+          <a:prstGeom prst="rect">
+            <a:avLst/>
+          </a:prstGeom>
+          <a:solidFill>
+            <a:srgbClr val="D9C089"/>
+          </a:solidFill>
+          <a:ln>
+            <a:noFill/>
+          </a:ln>
+        </p:spPr>
+        <p:style>
+          <a:lnRef idx="1">
+            <a:schemeClr val="accent1"/>
+          </a:lnRef>
+          <a:fillRef idx="3">
+            <a:schemeClr val="accent1"/>
+          </a:fillRef>
+          <a:effectRef idx="2">
+            <a:schemeClr val="accent1"/>
+          </a:effectRef>
+          <a:fontRef idx="minor">
+            <a:schemeClr val="lt1"/>
+          </a:fontRef>
+        </p:style>
+        <p:txBody>
+          <a:bodyPr rtlCol="0" anchor="ctr"/>
+          <a:lstStyle/>
+          <a:p>
+            <a:pPr algn="ctr"/>
+          </a:p>
+        </p:txBody>
+      </p:sp>
+      <p:sp>
+        <p:nvSpPr>
+          <p:cNvPr id="5" name="TextBox 4"/>
+          <p:cNvSpPr txBox="1"/>
+          <p:nvPr/>
+        </p:nvSpPr>
+        <p:spPr>
+          <a:xfrm>
+            <a:off x="685800" y="3017520"/>
+            <a:ext cx="10817352" cy="1463040"/>
+          </a:xfrm>
+          <a:prstGeom prst="rect">
+            <a:avLst/>
+          </a:prstGeom>
+          <a:noFill/>
+        </p:spPr>
+        <p:txBody>
+          <a:bodyPr wrap="square">
+            <a:spAutoFit/>
+          </a:bodyPr>
+          <a:lstStyle/>
+          <a:p>
+            <a:pPr algn="l"/>
+            <a:r>
+              <a:rPr sz="4000" b="1" i="0">
+                <a:solidFill>
+                  <a:srgbClr val="FFFFFF"/>
+                </a:solidFill>
+                <a:latin typeface="Arial"/>
+              </a:rPr>
+              <a:t>Simulation CEO-Dialog II: Nachfolge-Vertiefung</a:t>
+            </a:r>
+          </a:p>
+        </p:txBody>
+      </p:sp>
+      <p:sp>
+        <p:nvSpPr>
+          <p:cNvPr id="6" name="TextBox 5"/>
+          <p:cNvSpPr txBox="1"/>
+          <p:nvPr/>
+        </p:nvSpPr>
+        <p:spPr>
+          <a:xfrm>
+            <a:off x="685800" y="4480560"/>
+            <a:ext cx="8653881" cy="1280160"/>
+          </a:xfrm>
+          <a:prstGeom prst="rect">
+            <a:avLst/>
+          </a:prstGeom>
+          <a:noFill/>
+        </p:spPr>
+        <p:txBody>
+          <a:bodyPr wrap="square">
+            <a:spAutoFit/>
+          </a:bodyPr>
+          <a:lstStyle/>
+          <a:p>
+            <a:pPr algn="l"/>
+            <a:r>
+              <a:rPr sz="1600" b="0" i="0">
+                <a:solidFill>
+                  <a:srgbClr val="C8D2E6"/>
+                </a:solidFill>
+                <a:latin typeface="Arial"/>
+              </a:rPr>
+              <a:t>Mit systemischen Fragen die Loslassenwiderstände adressieren.</a:t>
+            </a:r>
+          </a:p>
+        </p:txBody>
+      </p:sp>
+      <p:sp>
+        <p:nvSpPr>
+          <p:cNvPr id="7" name="TextBox 6"/>
+          <p:cNvSpPr txBox="1"/>
+          <p:nvPr/>
+        </p:nvSpPr>
+        <p:spPr>
+          <a:xfrm>
+            <a:off x="685800" y="6355080"/>
+            <a:ext cx="10817352" cy="274320"/>
+          </a:xfrm>
+          <a:prstGeom prst="rect">
+            <a:avLst/>
+          </a:prstGeom>
+          <a:noFill/>
+        </p:spPr>
+        <p:txBody>
+          <a:bodyPr wrap="none">
+            <a:spAutoFit/>
+          </a:bodyPr>
+          <a:lstStyle/>
+          <a:p>
+            <a:pPr algn="l"/>
+            <a:r>
+              <a:rPr sz="700">
+                <a:solidFill>
+                  <a:srgbClr val="8CA0C3"/>
+                </a:solidFill>
+                <a:latin typeface="Consolas"/>
+              </a:rPr>
+              <a:t>FKB Campus  ·  M12</a:t>
+            </a:r>
+          </a:p>
+        </p:txBody>
+      </p:sp>
+    </p:spTree>
+  </p:cSld>
+  <p:clrMapOvr>
+    <a:masterClrMapping/>
+  </p:clrMapOvr>
+</p:sld>
+</file>
+
+<file path=ppt/slides/slide19.xml><?xml version="1.0" encoding="utf-8"?>
+<p:sld xmlns:a="http://schemas.openxmlformats.org/drawingml/2006/main" xmlns:p="http://schemas.openxmlformats.org/presentationml/2006/main" xmlns:r="http://schemas.openxmlformats.org/officeDocument/2006/relationships">
+  <p:cSld>
+    <p:spTree>
+      <p:nvGrpSpPr>
+        <p:cNvPr id="1" name=""/>
+        <p:cNvGrpSpPr/>
+        <p:nvPr/>
+      </p:nvGrpSpPr>
+      <p:grpSpPr/>
+      <p:sp>
+        <p:nvSpPr>
+          <p:cNvPr id="2" name="Rectangle 1"/>
+          <p:cNvSpPr/>
+          <p:nvPr/>
+        </p:nvSpPr>
+        <p:spPr>
+          <a:xfrm>
+            <a:off x="0" y="0"/>
+            <a:ext cx="12188952" cy="6858000"/>
+          </a:xfrm>
+          <a:prstGeom prst="rect">
+            <a:avLst/>
+          </a:prstGeom>
+          <a:solidFill>
+            <a:srgbClr val="EDEDF3"/>
+          </a:solidFill>
+          <a:ln>
+            <a:noFill/>
+          </a:ln>
+        </p:spPr>
+        <p:style>
+          <a:lnRef idx="1">
+            <a:schemeClr val="accent1"/>
+          </a:lnRef>
+          <a:fillRef idx="3">
+            <a:schemeClr val="accent1"/>
+          </a:fillRef>
+          <a:effectRef idx="2">
+            <a:schemeClr val="accent1"/>
+          </a:effectRef>
+          <a:fontRef idx="minor">
+            <a:schemeClr val="lt1"/>
+          </a:fontRef>
+        </p:style>
+        <p:txBody>
+          <a:bodyPr rtlCol="0" anchor="ctr"/>
+          <a:lstStyle/>
+          <a:p>
+            <a:pPr algn="ctr"/>
+          </a:p>
+        </p:txBody>
+      </p:sp>
+      <p:sp>
+        <p:nvSpPr>
+          <p:cNvPr id="3" name="Rectangle 2"/>
+          <p:cNvSpPr/>
+          <p:nvPr/>
+        </p:nvSpPr>
+        <p:spPr>
+          <a:xfrm>
+            <a:off x="0" y="0"/>
+            <a:ext cx="12188952" cy="50292"/>
+          </a:xfrm>
+          <a:prstGeom prst="rect">
+            <a:avLst/>
+          </a:prstGeom>
+          <a:solidFill>
+            <a:srgbClr val="1F2C56"/>
+          </a:solidFill>
+          <a:ln>
+            <a:noFill/>
+          </a:ln>
+        </p:spPr>
+        <p:style>
+          <a:lnRef idx="1">
+            <a:schemeClr val="accent1"/>
+          </a:lnRef>
+          <a:fillRef idx="3">
+            <a:schemeClr val="accent1"/>
+          </a:fillRef>
+          <a:effectRef idx="2">
+            <a:schemeClr val="accent1"/>
+          </a:effectRef>
+          <a:fontRef idx="minor">
+            <a:schemeClr val="lt1"/>
+          </a:fontRef>
+        </p:style>
+        <p:txBody>
+          <a:bodyPr rtlCol="0" anchor="ctr"/>
+          <a:lstStyle/>
+          <a:p>
+            <a:pPr algn="ctr"/>
+          </a:p>
+        </p:txBody>
+      </p:sp>
+      <p:sp>
+        <p:nvSpPr>
+          <p:cNvPr id="4" name="TextBox 3"/>
+          <p:cNvSpPr txBox="1"/>
+          <p:nvPr/>
+        </p:nvSpPr>
+        <p:spPr>
+          <a:xfrm>
+            <a:off x="685800" y="109728"/>
+            <a:ext cx="10817352" cy="228600"/>
+          </a:xfrm>
+          <a:prstGeom prst="rect">
+            <a:avLst/>
+          </a:prstGeom>
+          <a:noFill/>
+        </p:spPr>
+        <p:txBody>
+          <a:bodyPr wrap="none">
+            <a:spAutoFit/>
+          </a:bodyPr>
+          <a:lstStyle/>
+          <a:p>
+            <a:pPr algn="l"/>
+            <a:r>
+              <a:rPr sz="750">
+                <a:solidFill>
+                  <a:srgbClr val="78808C"/>
+                </a:solidFill>
+                <a:latin typeface="Consolas"/>
+              </a:rPr>
+              <a:t>M12  ·  INHALT</a:t>
+            </a:r>
+          </a:p>
+        </p:txBody>
+      </p:sp>
+      <p:sp>
+        <p:nvSpPr>
+          <p:cNvPr id="5" name="Rectangle 4"/>
+          <p:cNvSpPr/>
+          <p:nvPr/>
+        </p:nvSpPr>
+        <p:spPr>
+          <a:xfrm>
+            <a:off x="0" y="1234440"/>
+            <a:ext cx="12188952" cy="12700"/>
+          </a:xfrm>
+          <a:prstGeom prst="rect">
+            <a:avLst/>
+          </a:prstGeom>
+          <a:solidFill>
+            <a:srgbClr val="D8DFE4"/>
+          </a:solidFill>
+          <a:ln>
+            <a:noFill/>
+          </a:ln>
+        </p:spPr>
+        <p:style>
+          <a:lnRef idx="1">
+            <a:schemeClr val="accent1"/>
+          </a:lnRef>
+          <a:fillRef idx="3">
+            <a:schemeClr val="accent1"/>
+          </a:fillRef>
+          <a:effectRef idx="2">
+            <a:schemeClr val="accent1"/>
+          </a:effectRef>
+          <a:fontRef idx="minor">
+            <a:schemeClr val="lt1"/>
+          </a:fontRef>
+        </p:style>
+        <p:txBody>
+          <a:bodyPr rtlCol="0" anchor="ctr"/>
+          <a:lstStyle/>
+          <a:p>
+            <a:pPr algn="ctr"/>
+          </a:p>
+        </p:txBody>
+      </p:sp>
+      <p:sp>
+        <p:nvSpPr>
+          <p:cNvPr id="6" name="Rectangle 5"/>
+          <p:cNvSpPr/>
+          <p:nvPr/>
+        </p:nvSpPr>
+        <p:spPr>
+          <a:xfrm>
+            <a:off x="685800" y="502920"/>
+            <a:ext cx="36576" cy="658368"/>
+          </a:xfrm>
+          <a:prstGeom prst="rect">
+            <a:avLst/>
+          </a:prstGeom>
+          <a:solidFill>
+            <a:srgbClr val="D9C089"/>
+          </a:solidFill>
+          <a:ln>
+            <a:noFill/>
+          </a:ln>
+        </p:spPr>
+        <p:style>
+          <a:lnRef idx="1">
+            <a:schemeClr val="accent1"/>
+          </a:lnRef>
+          <a:fillRef idx="3">
+            <a:schemeClr val="accent1"/>
+          </a:fillRef>
+          <a:effectRef idx="2">
+            <a:schemeClr val="accent1"/>
+          </a:effectRef>
+          <a:fontRef idx="minor">
+            <a:schemeClr val="lt1"/>
+          </a:fontRef>
+        </p:style>
+        <p:txBody>
+          <a:bodyPr rtlCol="0" anchor="ctr"/>
+          <a:lstStyle/>
+          <a:p>
+            <a:pPr algn="ctr"/>
+          </a:p>
+        </p:txBody>
+      </p:sp>
+      <p:sp>
+        <p:nvSpPr>
+          <p:cNvPr id="7" name="TextBox 6"/>
+          <p:cNvSpPr txBox="1"/>
+          <p:nvPr/>
+        </p:nvSpPr>
+        <p:spPr>
+          <a:xfrm>
+            <a:off x="813816" y="502920"/>
+            <a:ext cx="10634472" cy="685800"/>
+          </a:xfrm>
+          <a:prstGeom prst="rect">
+            <a:avLst/>
+          </a:prstGeom>
+          <a:noFill/>
+        </p:spPr>
+        <p:txBody>
+          <a:bodyPr wrap="square">
+            <a:spAutoFit/>
+          </a:bodyPr>
+          <a:lstStyle/>
+          <a:p>
+            <a:pPr algn="l"/>
+            <a:r>
+              <a:rPr sz="2400" b="1" i="0">
+                <a:solidFill>
+                  <a:srgbClr val="1F2C56"/>
+                </a:solidFill>
+                <a:latin typeface="Arial"/>
+              </a:rPr>
+              <a:t>Vertiefung: das existenzielle Thema führen</a:t>
+            </a:r>
+          </a:p>
+        </p:txBody>
+      </p:sp>
+      <p:sp>
+        <p:nvSpPr>
+          <p:cNvPr id="8" name="TextBox 7"/>
+          <p:cNvSpPr txBox="1"/>
+          <p:nvPr/>
+        </p:nvSpPr>
+        <p:spPr>
+          <a:xfrm>
+            <a:off x="685800" y="1417320"/>
+            <a:ext cx="10817352" cy="4892040"/>
+          </a:xfrm>
+          <a:prstGeom prst="rect">
+            <a:avLst/>
+          </a:prstGeom>
+          <a:noFill/>
+        </p:spPr>
+        <p:txBody>
+          <a:bodyPr wrap="square" anchor="ctr">
+            <a:spAutoFit/>
+          </a:bodyPr>
+          <a:lstStyle/>
+          <a:p>
+            <a:pPr marL="177800" indent="-177800">
+              <a:spcBef>
+                <a:spcPts val="600"/>
+              </a:spcBef>
+              <a:spcAft>
+                <a:spcPts val="200"/>
+              </a:spcAft>
+            </a:pPr>
+            <a:r>
+              <a:rPr sz="1200" i="1">
+                <a:solidFill>
+                  <a:srgbClr val="3D5466"/>
+                </a:solidFill>
+                <a:latin typeface="Arial"/>
+              </a:rPr>
+              <a:t>→  Zirkuläre Fragen decken implizite Ängste auf, ohne direkt zu fragen „Haben Sie Angst vor Kontrollverlust?".</a:t>
             </a:r>
           </a:p>
           <a:p>
@@ -5774,26 +8411,7 @@
                 </a:solidFill>
                 <a:latin typeface="Arial"/>
               </a:rPr>
-              <a:t>▸  ☐ Emotional-Register einschätzen: Wirkt er bereit – oder verdrängt er das Thema?</a:t>
-            </a:r>
-          </a:p>
-          <a:p>
-            <a:pPr>
-              <a:spcBef>
-                <a:spcPts val="1000"/>
-              </a:spcBef>
-              <a:spcAft>
-                <a:spcPts val="200"/>
-              </a:spcAft>
-            </a:pPr>
-            <a:r>
-              <a:rPr sz="800" b="1">
-                <a:solidFill>
-                  <a:srgbClr val="78808C"/>
-                </a:solidFill>
-                <a:latin typeface="Consolas"/>
-              </a:rPr>
-              <a:t>ERÖFFNUNGSPHASE (5 MIN)</a:t>
+              <a:t>▸  Die systemischen Fragekarten (Wunderfrage, zirkulär, hypothetisch) im Gespräch einsetzen.</a:t>
             </a:r>
           </a:p>
           <a:p>
@@ -5812,102 +8430,7 @@
                 </a:solidFill>
                 <a:latin typeface="Arial"/>
               </a:rPr>
-              <a:t>▸  ☐ Psychologische Sicherheit signalisieren: „Was Sie mir erzählen, bleibt vertraulich."</a:t>
-            </a:r>
-          </a:p>
-          <a:p>
-            <a:pPr marL="190500" indent="-190500">
-              <a:spcBef>
-                <a:spcPts val="400"/>
-              </a:spcBef>
-              <a:spcAft>
-                <a:spcPts val="200"/>
-              </a:spcAft>
-            </a:pPr>
-            <a:r>
-              <a:rPr sz="1300">
-                <a:solidFill>
-                  <a:srgbClr val="3D5466"/>
-                </a:solidFill>
-                <a:latin typeface="Arial"/>
-              </a:rPr>
-              <a:t>▸  ☐ Gleichwertigkeit klarstellen: „Ich bin nicht als Prüfer hier, sondern als Begleiter."</a:t>
-            </a:r>
-          </a:p>
-          <a:p>
-            <a:pPr marL="190500" indent="-190500">
-              <a:spcBef>
-                <a:spcPts val="400"/>
-              </a:spcBef>
-              <a:spcAft>
-                <a:spcPts val="200"/>
-              </a:spcAft>
-            </a:pPr>
-            <a:r>
-              <a:rPr sz="1300">
-                <a:solidFill>
-                  <a:srgbClr val="3D5466"/>
-                </a:solidFill>
-                <a:latin typeface="Arial"/>
-              </a:rPr>
-              <a:t>▸  ☐ Agenda transparent machen: „Ich möchte heute verstehen, wie es für Sie um die Nachfolge steht – ohne Druck."</a:t>
-            </a:r>
-          </a:p>
-          <a:p>
-            <a:pPr>
-              <a:spcBef>
-                <a:spcPts val="1000"/>
-              </a:spcBef>
-              <a:spcAft>
-                <a:spcPts val="200"/>
-              </a:spcAft>
-            </a:pPr>
-            <a:r>
-              <a:rPr sz="800" b="1">
-                <a:solidFill>
-                  <a:srgbClr val="78808C"/>
-                </a:solidFill>
-                <a:latin typeface="Consolas"/>
-              </a:rPr>
-              <a:t>DIAGNOSTISCHE PHASE (20–30 MIN)</a:t>
-            </a:r>
-          </a:p>
-          <a:p>
-            <a:pPr marL="190500" indent="-190500">
-              <a:spcBef>
-                <a:spcPts val="400"/>
-              </a:spcBef>
-              <a:spcAft>
-                <a:spcPts val="200"/>
-              </a:spcAft>
-            </a:pPr>
-            <a:r>
-              <a:rPr sz="1300">
-                <a:solidFill>
-                  <a:srgbClr val="3D5466"/>
-                </a:solidFill>
-                <a:latin typeface="Arial"/>
-              </a:rPr>
-              <a:t>▸  Zur Bewusstseinsbildung:</a:t>
-            </a:r>
-          </a:p>
-          <a:p>
-            <a:pPr marL="190500" indent="-190500">
-              <a:spcBef>
-                <a:spcPts val="400"/>
-              </a:spcBef>
-              <a:spcAft>
-                <a:spcPts val="200"/>
-              </a:spcAft>
-            </a:pPr>
-            <a:r>
-              <a:rPr sz="1300">
-                <a:solidFill>
-                  <a:srgbClr val="3D5466"/>
-                </a:solidFill>
-                <a:latin typeface="Arial"/>
-              </a:rPr>
-              <a:t>▸  ☐ „Wie lange beschäftigt Sie das Nachfolge-Thema schon?"</a:t>
+              <a:t>▸  Loslassenwiderstände benennen und halten – nicht auflösen wollen.</a:t>
             </a:r>
           </a:p>
         </p:txBody>
@@ -6364,6 +8887,1485 @@
 </p:sld>
 </file>
 
+<file path=ppt/slides/slide20.xml><?xml version="1.0" encoding="utf-8"?>
+<p:sld xmlns:a="http://schemas.openxmlformats.org/drawingml/2006/main" xmlns:p="http://schemas.openxmlformats.org/presentationml/2006/main" xmlns:r="http://schemas.openxmlformats.org/officeDocument/2006/relationships">
+  <p:cSld>
+    <p:spTree>
+      <p:nvGrpSpPr>
+        <p:cNvPr id="1" name=""/>
+        <p:cNvGrpSpPr/>
+        <p:nvPr/>
+      </p:nvGrpSpPr>
+      <p:grpSpPr/>
+      <p:sp>
+        <p:nvSpPr>
+          <p:cNvPr id="2" name="Rectangle 1"/>
+          <p:cNvSpPr/>
+          <p:nvPr/>
+        </p:nvSpPr>
+        <p:spPr>
+          <a:xfrm>
+            <a:off x="0" y="0"/>
+            <a:ext cx="12188952" cy="6858000"/>
+          </a:xfrm>
+          <a:prstGeom prst="rect">
+            <a:avLst/>
+          </a:prstGeom>
+          <a:solidFill>
+            <a:srgbClr val="1F2C56"/>
+          </a:solidFill>
+          <a:ln>
+            <a:noFill/>
+          </a:ln>
+        </p:spPr>
+        <p:style>
+          <a:lnRef idx="1">
+            <a:schemeClr val="accent1"/>
+          </a:lnRef>
+          <a:fillRef idx="3">
+            <a:schemeClr val="accent1"/>
+          </a:fillRef>
+          <a:effectRef idx="2">
+            <a:schemeClr val="accent1"/>
+          </a:effectRef>
+          <a:fontRef idx="minor">
+            <a:schemeClr val="lt1"/>
+          </a:fontRef>
+        </p:style>
+        <p:txBody>
+          <a:bodyPr rtlCol="0" anchor="ctr"/>
+          <a:lstStyle/>
+          <a:p>
+            <a:pPr algn="ctr"/>
+          </a:p>
+        </p:txBody>
+      </p:sp>
+      <p:sp>
+        <p:nvSpPr>
+          <p:cNvPr id="3" name="TextBox 2"/>
+          <p:cNvSpPr txBox="1"/>
+          <p:nvPr/>
+        </p:nvSpPr>
+        <p:spPr>
+          <a:xfrm>
+            <a:off x="685800" y="2377440"/>
+            <a:ext cx="10817352" cy="365760"/>
+          </a:xfrm>
+          <a:prstGeom prst="rect">
+            <a:avLst/>
+          </a:prstGeom>
+          <a:noFill/>
+        </p:spPr>
+        <p:txBody>
+          <a:bodyPr wrap="none">
+            <a:spAutoFit/>
+          </a:bodyPr>
+          <a:lstStyle/>
+          <a:p>
+            <a:pPr algn="l"/>
+            <a:r>
+              <a:rPr sz="1200">
+                <a:solidFill>
+                  <a:srgbClr val="D9C089"/>
+                </a:solidFill>
+                <a:latin typeface="Consolas"/>
+              </a:rPr>
+              <a:t>16:30–17:30</a:t>
+            </a:r>
+          </a:p>
+        </p:txBody>
+      </p:sp>
+      <p:sp>
+        <p:nvSpPr>
+          <p:cNvPr id="4" name="Rectangle 3"/>
+          <p:cNvSpPr/>
+          <p:nvPr/>
+        </p:nvSpPr>
+        <p:spPr>
+          <a:xfrm>
+            <a:off x="685800" y="2788920"/>
+            <a:ext cx="548640" cy="38100"/>
+          </a:xfrm>
+          <a:prstGeom prst="rect">
+            <a:avLst/>
+          </a:prstGeom>
+          <a:solidFill>
+            <a:srgbClr val="D9C089"/>
+          </a:solidFill>
+          <a:ln>
+            <a:noFill/>
+          </a:ln>
+        </p:spPr>
+        <p:style>
+          <a:lnRef idx="1">
+            <a:schemeClr val="accent1"/>
+          </a:lnRef>
+          <a:fillRef idx="3">
+            <a:schemeClr val="accent1"/>
+          </a:fillRef>
+          <a:effectRef idx="2">
+            <a:schemeClr val="accent1"/>
+          </a:effectRef>
+          <a:fontRef idx="minor">
+            <a:schemeClr val="lt1"/>
+          </a:fontRef>
+        </p:style>
+        <p:txBody>
+          <a:bodyPr rtlCol="0" anchor="ctr"/>
+          <a:lstStyle/>
+          <a:p>
+            <a:pPr algn="ctr"/>
+          </a:p>
+        </p:txBody>
+      </p:sp>
+      <p:sp>
+        <p:nvSpPr>
+          <p:cNvPr id="5" name="TextBox 4"/>
+          <p:cNvSpPr txBox="1"/>
+          <p:nvPr/>
+        </p:nvSpPr>
+        <p:spPr>
+          <a:xfrm>
+            <a:off x="685800" y="3017520"/>
+            <a:ext cx="10817352" cy="1463040"/>
+          </a:xfrm>
+          <a:prstGeom prst="rect">
+            <a:avLst/>
+          </a:prstGeom>
+          <a:noFill/>
+        </p:spPr>
+        <p:txBody>
+          <a:bodyPr wrap="square">
+            <a:spAutoFit/>
+          </a:bodyPr>
+          <a:lstStyle/>
+          <a:p>
+            <a:pPr algn="l"/>
+            <a:r>
+              <a:rPr sz="4000" b="1" i="0">
+                <a:solidFill>
+                  <a:srgbClr val="FFFFFF"/>
+                </a:solidFill>
+                <a:latin typeface="Arial"/>
+              </a:rPr>
+              <a:t>Reflexion &amp; Roadmap</a:t>
+            </a:r>
+          </a:p>
+        </p:txBody>
+      </p:sp>
+      <p:sp>
+        <p:nvSpPr>
+          <p:cNvPr id="6" name="TextBox 5"/>
+          <p:cNvSpPr txBox="1"/>
+          <p:nvPr/>
+        </p:nvSpPr>
+        <p:spPr>
+          <a:xfrm>
+            <a:off x="685800" y="4480560"/>
+            <a:ext cx="8653881" cy="1280160"/>
+          </a:xfrm>
+          <a:prstGeom prst="rect">
+            <a:avLst/>
+          </a:prstGeom>
+          <a:noFill/>
+        </p:spPr>
+        <p:txBody>
+          <a:bodyPr wrap="square">
+            <a:spAutoFit/>
+          </a:bodyPr>
+          <a:lstStyle/>
+          <a:p>
+            <a:pPr algn="l"/>
+            <a:r>
+              <a:rPr sz="1600" b="0" i="0">
+                <a:solidFill>
+                  <a:srgbClr val="C8D2E6"/>
+                </a:solidFill>
+                <a:latin typeface="Arial"/>
+              </a:rPr>
+              <a:t>Muster benennen und die ersten Schritte für einen echten Kunden skizzieren.</a:t>
+            </a:r>
+          </a:p>
+        </p:txBody>
+      </p:sp>
+      <p:sp>
+        <p:nvSpPr>
+          <p:cNvPr id="7" name="TextBox 6"/>
+          <p:cNvSpPr txBox="1"/>
+          <p:nvPr/>
+        </p:nvSpPr>
+        <p:spPr>
+          <a:xfrm>
+            <a:off x="685800" y="6355080"/>
+            <a:ext cx="10817352" cy="274320"/>
+          </a:xfrm>
+          <a:prstGeom prst="rect">
+            <a:avLst/>
+          </a:prstGeom>
+          <a:noFill/>
+        </p:spPr>
+        <p:txBody>
+          <a:bodyPr wrap="none">
+            <a:spAutoFit/>
+          </a:bodyPr>
+          <a:lstStyle/>
+          <a:p>
+            <a:pPr algn="l"/>
+            <a:r>
+              <a:rPr sz="700">
+                <a:solidFill>
+                  <a:srgbClr val="8CA0C3"/>
+                </a:solidFill>
+                <a:latin typeface="Consolas"/>
+              </a:rPr>
+              <a:t>FKB Campus  ·  M12</a:t>
+            </a:r>
+          </a:p>
+        </p:txBody>
+      </p:sp>
+    </p:spTree>
+  </p:cSld>
+  <p:clrMapOvr>
+    <a:masterClrMapping/>
+  </p:clrMapOvr>
+</p:sld>
+</file>
+
+<file path=ppt/slides/slide21.xml><?xml version="1.0" encoding="utf-8"?>
+<p:sld xmlns:a="http://schemas.openxmlformats.org/drawingml/2006/main" xmlns:p="http://schemas.openxmlformats.org/presentationml/2006/main" xmlns:r="http://schemas.openxmlformats.org/officeDocument/2006/relationships">
+  <p:cSld>
+    <p:spTree>
+      <p:nvGrpSpPr>
+        <p:cNvPr id="1" name=""/>
+        <p:cNvGrpSpPr/>
+        <p:nvPr/>
+      </p:nvGrpSpPr>
+      <p:grpSpPr/>
+      <p:sp>
+        <p:nvSpPr>
+          <p:cNvPr id="2" name="Rectangle 1"/>
+          <p:cNvSpPr/>
+          <p:nvPr/>
+        </p:nvSpPr>
+        <p:spPr>
+          <a:xfrm>
+            <a:off x="0" y="0"/>
+            <a:ext cx="12188952" cy="6858000"/>
+          </a:xfrm>
+          <a:prstGeom prst="rect">
+            <a:avLst/>
+          </a:prstGeom>
+          <a:solidFill>
+            <a:srgbClr val="EDEDF3"/>
+          </a:solidFill>
+          <a:ln>
+            <a:noFill/>
+          </a:ln>
+        </p:spPr>
+        <p:style>
+          <a:lnRef idx="1">
+            <a:schemeClr val="accent1"/>
+          </a:lnRef>
+          <a:fillRef idx="3">
+            <a:schemeClr val="accent1"/>
+          </a:fillRef>
+          <a:effectRef idx="2">
+            <a:schemeClr val="accent1"/>
+          </a:effectRef>
+          <a:fontRef idx="minor">
+            <a:schemeClr val="lt1"/>
+          </a:fontRef>
+        </p:style>
+        <p:txBody>
+          <a:bodyPr rtlCol="0" anchor="ctr"/>
+          <a:lstStyle/>
+          <a:p>
+            <a:pPr algn="ctr"/>
+          </a:p>
+        </p:txBody>
+      </p:sp>
+      <p:sp>
+        <p:nvSpPr>
+          <p:cNvPr id="3" name="Rectangle 2"/>
+          <p:cNvSpPr/>
+          <p:nvPr/>
+        </p:nvSpPr>
+        <p:spPr>
+          <a:xfrm>
+            <a:off x="0" y="0"/>
+            <a:ext cx="12188952" cy="50292"/>
+          </a:xfrm>
+          <a:prstGeom prst="rect">
+            <a:avLst/>
+          </a:prstGeom>
+          <a:solidFill>
+            <a:srgbClr val="1F2C56"/>
+          </a:solidFill>
+          <a:ln>
+            <a:noFill/>
+          </a:ln>
+        </p:spPr>
+        <p:style>
+          <a:lnRef idx="1">
+            <a:schemeClr val="accent1"/>
+          </a:lnRef>
+          <a:fillRef idx="3">
+            <a:schemeClr val="accent1"/>
+          </a:fillRef>
+          <a:effectRef idx="2">
+            <a:schemeClr val="accent1"/>
+          </a:effectRef>
+          <a:fontRef idx="minor">
+            <a:schemeClr val="lt1"/>
+          </a:fontRef>
+        </p:style>
+        <p:txBody>
+          <a:bodyPr rtlCol="0" anchor="ctr"/>
+          <a:lstStyle/>
+          <a:p>
+            <a:pPr algn="ctr"/>
+          </a:p>
+        </p:txBody>
+      </p:sp>
+      <p:sp>
+        <p:nvSpPr>
+          <p:cNvPr id="4" name="TextBox 3"/>
+          <p:cNvSpPr txBox="1"/>
+          <p:nvPr/>
+        </p:nvSpPr>
+        <p:spPr>
+          <a:xfrm>
+            <a:off x="685800" y="109728"/>
+            <a:ext cx="10817352" cy="228600"/>
+          </a:xfrm>
+          <a:prstGeom prst="rect">
+            <a:avLst/>
+          </a:prstGeom>
+          <a:noFill/>
+        </p:spPr>
+        <p:txBody>
+          <a:bodyPr wrap="none">
+            <a:spAutoFit/>
+          </a:bodyPr>
+          <a:lstStyle/>
+          <a:p>
+            <a:pPr algn="l"/>
+            <a:r>
+              <a:rPr sz="750">
+                <a:solidFill>
+                  <a:srgbClr val="78808C"/>
+                </a:solidFill>
+                <a:latin typeface="Consolas"/>
+              </a:rPr>
+              <a:t>M12  ·  INHALT</a:t>
+            </a:r>
+          </a:p>
+        </p:txBody>
+      </p:sp>
+      <p:sp>
+        <p:nvSpPr>
+          <p:cNvPr id="5" name="Rectangle 4"/>
+          <p:cNvSpPr/>
+          <p:nvPr/>
+        </p:nvSpPr>
+        <p:spPr>
+          <a:xfrm>
+            <a:off x="0" y="1234440"/>
+            <a:ext cx="12188952" cy="12700"/>
+          </a:xfrm>
+          <a:prstGeom prst="rect">
+            <a:avLst/>
+          </a:prstGeom>
+          <a:solidFill>
+            <a:srgbClr val="D8DFE4"/>
+          </a:solidFill>
+          <a:ln>
+            <a:noFill/>
+          </a:ln>
+        </p:spPr>
+        <p:style>
+          <a:lnRef idx="1">
+            <a:schemeClr val="accent1"/>
+          </a:lnRef>
+          <a:fillRef idx="3">
+            <a:schemeClr val="accent1"/>
+          </a:fillRef>
+          <a:effectRef idx="2">
+            <a:schemeClr val="accent1"/>
+          </a:effectRef>
+          <a:fontRef idx="minor">
+            <a:schemeClr val="lt1"/>
+          </a:fontRef>
+        </p:style>
+        <p:txBody>
+          <a:bodyPr rtlCol="0" anchor="ctr"/>
+          <a:lstStyle/>
+          <a:p>
+            <a:pPr algn="ctr"/>
+          </a:p>
+        </p:txBody>
+      </p:sp>
+      <p:sp>
+        <p:nvSpPr>
+          <p:cNvPr id="6" name="Rectangle 5"/>
+          <p:cNvSpPr/>
+          <p:nvPr/>
+        </p:nvSpPr>
+        <p:spPr>
+          <a:xfrm>
+            <a:off x="685800" y="502920"/>
+            <a:ext cx="36576" cy="658368"/>
+          </a:xfrm>
+          <a:prstGeom prst="rect">
+            <a:avLst/>
+          </a:prstGeom>
+          <a:solidFill>
+            <a:srgbClr val="D9C089"/>
+          </a:solidFill>
+          <a:ln>
+            <a:noFill/>
+          </a:ln>
+        </p:spPr>
+        <p:style>
+          <a:lnRef idx="1">
+            <a:schemeClr val="accent1"/>
+          </a:lnRef>
+          <a:fillRef idx="3">
+            <a:schemeClr val="accent1"/>
+          </a:fillRef>
+          <a:effectRef idx="2">
+            <a:schemeClr val="accent1"/>
+          </a:effectRef>
+          <a:fontRef idx="minor">
+            <a:schemeClr val="lt1"/>
+          </a:fontRef>
+        </p:style>
+        <p:txBody>
+          <a:bodyPr rtlCol="0" anchor="ctr"/>
+          <a:lstStyle/>
+          <a:p>
+            <a:pPr algn="ctr"/>
+          </a:p>
+        </p:txBody>
+      </p:sp>
+      <p:sp>
+        <p:nvSpPr>
+          <p:cNvPr id="7" name="TextBox 6"/>
+          <p:cNvSpPr txBox="1"/>
+          <p:nvPr/>
+        </p:nvSpPr>
+        <p:spPr>
+          <a:xfrm>
+            <a:off x="813816" y="502920"/>
+            <a:ext cx="10634472" cy="685800"/>
+          </a:xfrm>
+          <a:prstGeom prst="rect">
+            <a:avLst/>
+          </a:prstGeom>
+          <a:noFill/>
+        </p:spPr>
+        <p:txBody>
+          <a:bodyPr wrap="square">
+            <a:spAutoFit/>
+          </a:bodyPr>
+          <a:lstStyle/>
+          <a:p>
+            <a:pPr algn="l"/>
+            <a:r>
+              <a:rPr sz="2400" b="1" i="0">
+                <a:solidFill>
+                  <a:srgbClr val="1F2C56"/>
+                </a:solidFill>
+                <a:latin typeface="Arial"/>
+              </a:rPr>
+              <a:t>Handlungsempfehlung für den Alltag</a:t>
+            </a:r>
+          </a:p>
+        </p:txBody>
+      </p:sp>
+      <p:sp>
+        <p:nvSpPr>
+          <p:cNvPr id="8" name="TextBox 7"/>
+          <p:cNvSpPr txBox="1"/>
+          <p:nvPr/>
+        </p:nvSpPr>
+        <p:spPr>
+          <a:xfrm>
+            <a:off x="685800" y="1417320"/>
+            <a:ext cx="10817352" cy="4892040"/>
+          </a:xfrm>
+          <a:prstGeom prst="rect">
+            <a:avLst/>
+          </a:prstGeom>
+          <a:noFill/>
+        </p:spPr>
+        <p:txBody>
+          <a:bodyPr wrap="square" anchor="ctr">
+            <a:spAutoFit/>
+          </a:bodyPr>
+          <a:lstStyle/>
+          <a:p>
+            <a:pPr marL="177800" indent="-177800">
+              <a:spcBef>
+                <a:spcPts val="600"/>
+              </a:spcBef>
+              <a:spcAft>
+                <a:spcPts val="200"/>
+              </a:spcAft>
+            </a:pPr>
+            <a:r>
+              <a:rPr sz="1200" i="1">
+                <a:solidFill>
+                  <a:srgbClr val="3D5466"/>
+                </a:solidFill>
+                <a:latin typeface="Arial"/>
+              </a:rPr>
+              <a:t>→  Wenn Sie bei einem Kunden Nachfolge vermuten, aber Scheu haben — dann mit einer offenen, nicht wertenden Frage eröffnen statt mit einem Produkt.</a:t>
+            </a:r>
+          </a:p>
+          <a:p>
+            <a:pPr marL="177800" indent="-177800">
+              <a:spcBef>
+                <a:spcPts val="600"/>
+              </a:spcBef>
+              <a:spcAft>
+                <a:spcPts val="200"/>
+              </a:spcAft>
+            </a:pPr>
+            <a:r>
+              <a:rPr sz="1200" i="1">
+                <a:solidFill>
+                  <a:srgbClr val="3D5466"/>
+                </a:solidFill>
+                <a:latin typeface="Arial"/>
+              </a:rPr>
+              <a:t>→  Wenn ein Unternehmer Widerstand gegen das Loslassen zeigt — dann den Widerstand benennen und halten, nicht wegargumentieren.</a:t>
+            </a:r>
+          </a:p>
+          <a:p>
+            <a:pPr marL="177800" indent="-177800">
+              <a:spcBef>
+                <a:spcPts val="600"/>
+              </a:spcBef>
+              <a:spcAft>
+                <a:spcPts val="200"/>
+              </a:spcAft>
+            </a:pPr>
+            <a:r>
+              <a:rPr sz="1200" i="1">
+                <a:solidFill>
+                  <a:srgbClr val="3D5466"/>
+                </a:solidFill>
+                <a:latin typeface="Arial"/>
+              </a:rPr>
+              <a:t>→  Wenn eine Nachfolgeoption reift — dann früh Verbundpartner (DZ BANK, Steuerberater, Notar) einbinden und eine Roadmap skizzieren.</a:t>
+            </a:r>
+          </a:p>
+        </p:txBody>
+      </p:sp>
+      <p:sp>
+        <p:nvSpPr>
+          <p:cNvPr id="9" name="Rectangle 8"/>
+          <p:cNvSpPr/>
+          <p:nvPr/>
+        </p:nvSpPr>
+        <p:spPr>
+          <a:xfrm>
+            <a:off x="0" y="6510528"/>
+            <a:ext cx="12188952" cy="347472"/>
+          </a:xfrm>
+          <a:prstGeom prst="rect">
+            <a:avLst/>
+          </a:prstGeom>
+          <a:solidFill>
+            <a:srgbClr val="0A1937"/>
+          </a:solidFill>
+          <a:ln>
+            <a:noFill/>
+          </a:ln>
+        </p:spPr>
+        <p:style>
+          <a:lnRef idx="1">
+            <a:schemeClr val="accent1"/>
+          </a:lnRef>
+          <a:fillRef idx="3">
+            <a:schemeClr val="accent1"/>
+          </a:fillRef>
+          <a:effectRef idx="2">
+            <a:schemeClr val="accent1"/>
+          </a:effectRef>
+          <a:fontRef idx="minor">
+            <a:schemeClr val="lt1"/>
+          </a:fontRef>
+        </p:style>
+        <p:txBody>
+          <a:bodyPr rtlCol="0" anchor="ctr"/>
+          <a:lstStyle/>
+          <a:p>
+            <a:pPr algn="ctr"/>
+          </a:p>
+        </p:txBody>
+      </p:sp>
+      <p:sp>
+        <p:nvSpPr>
+          <p:cNvPr id="10" name="TextBox 9"/>
+          <p:cNvSpPr txBox="1"/>
+          <p:nvPr/>
+        </p:nvSpPr>
+        <p:spPr>
+          <a:xfrm>
+            <a:off x="685800" y="6583680"/>
+            <a:ext cx="6490411" cy="256032"/>
+          </a:xfrm>
+          <a:prstGeom prst="rect">
+            <a:avLst/>
+          </a:prstGeom>
+          <a:noFill/>
+        </p:spPr>
+        <p:txBody>
+          <a:bodyPr wrap="none">
+            <a:spAutoFit/>
+          </a:bodyPr>
+          <a:lstStyle/>
+          <a:p>
+            <a:pPr algn="l"/>
+            <a:r>
+              <a:rPr sz="700">
+                <a:solidFill>
+                  <a:srgbClr val="A0B4D2"/>
+                </a:solidFill>
+                <a:latin typeface="Consolas"/>
+              </a:rPr>
+              <a:t>FKB Campus  ·  M12</a:t>
+            </a:r>
+          </a:p>
+        </p:txBody>
+      </p:sp>
+    </p:spTree>
+  </p:cSld>
+  <p:clrMapOvr>
+    <a:masterClrMapping/>
+  </p:clrMapOvr>
+</p:sld>
+</file>
+
+<file path=ppt/slides/slide22.xml><?xml version="1.0" encoding="utf-8"?>
+<p:sld xmlns:a="http://schemas.openxmlformats.org/drawingml/2006/main" xmlns:p="http://schemas.openxmlformats.org/presentationml/2006/main" xmlns:r="http://schemas.openxmlformats.org/officeDocument/2006/relationships">
+  <p:cSld>
+    <p:spTree>
+      <p:nvGrpSpPr>
+        <p:cNvPr id="1" name=""/>
+        <p:cNvGrpSpPr/>
+        <p:nvPr/>
+      </p:nvGrpSpPr>
+      <p:grpSpPr/>
+      <p:sp>
+        <p:nvSpPr>
+          <p:cNvPr id="2" name="Rectangle 1"/>
+          <p:cNvSpPr/>
+          <p:nvPr/>
+        </p:nvSpPr>
+        <p:spPr>
+          <a:xfrm>
+            <a:off x="0" y="0"/>
+            <a:ext cx="12188952" cy="6858000"/>
+          </a:xfrm>
+          <a:prstGeom prst="rect">
+            <a:avLst/>
+          </a:prstGeom>
+          <a:solidFill>
+            <a:srgbClr val="EDEDF3"/>
+          </a:solidFill>
+          <a:ln>
+            <a:noFill/>
+          </a:ln>
+        </p:spPr>
+        <p:style>
+          <a:lnRef idx="1">
+            <a:schemeClr val="accent1"/>
+          </a:lnRef>
+          <a:fillRef idx="3">
+            <a:schemeClr val="accent1"/>
+          </a:fillRef>
+          <a:effectRef idx="2">
+            <a:schemeClr val="accent1"/>
+          </a:effectRef>
+          <a:fontRef idx="minor">
+            <a:schemeClr val="lt1"/>
+          </a:fontRef>
+        </p:style>
+        <p:txBody>
+          <a:bodyPr rtlCol="0" anchor="ctr"/>
+          <a:lstStyle/>
+          <a:p>
+            <a:pPr algn="ctr"/>
+          </a:p>
+        </p:txBody>
+      </p:sp>
+      <p:sp>
+        <p:nvSpPr>
+          <p:cNvPr id="3" name="Rectangle 2"/>
+          <p:cNvSpPr/>
+          <p:nvPr/>
+        </p:nvSpPr>
+        <p:spPr>
+          <a:xfrm>
+            <a:off x="0" y="0"/>
+            <a:ext cx="12188952" cy="50292"/>
+          </a:xfrm>
+          <a:prstGeom prst="rect">
+            <a:avLst/>
+          </a:prstGeom>
+          <a:solidFill>
+            <a:srgbClr val="1F2C56"/>
+          </a:solidFill>
+          <a:ln>
+            <a:noFill/>
+          </a:ln>
+        </p:spPr>
+        <p:style>
+          <a:lnRef idx="1">
+            <a:schemeClr val="accent1"/>
+          </a:lnRef>
+          <a:fillRef idx="3">
+            <a:schemeClr val="accent1"/>
+          </a:fillRef>
+          <a:effectRef idx="2">
+            <a:schemeClr val="accent1"/>
+          </a:effectRef>
+          <a:fontRef idx="minor">
+            <a:schemeClr val="lt1"/>
+          </a:fontRef>
+        </p:style>
+        <p:txBody>
+          <a:bodyPr rtlCol="0" anchor="ctr"/>
+          <a:lstStyle/>
+          <a:p>
+            <a:pPr algn="ctr"/>
+          </a:p>
+        </p:txBody>
+      </p:sp>
+      <p:sp>
+        <p:nvSpPr>
+          <p:cNvPr id="4" name="TextBox 3"/>
+          <p:cNvSpPr txBox="1"/>
+          <p:nvPr/>
+        </p:nvSpPr>
+        <p:spPr>
+          <a:xfrm>
+            <a:off x="685800" y="109728"/>
+            <a:ext cx="10817352" cy="228600"/>
+          </a:xfrm>
+          <a:prstGeom prst="rect">
+            <a:avLst/>
+          </a:prstGeom>
+          <a:noFill/>
+        </p:spPr>
+        <p:txBody>
+          <a:bodyPr wrap="none">
+            <a:spAutoFit/>
+          </a:bodyPr>
+          <a:lstStyle/>
+          <a:p>
+            <a:pPr algn="l"/>
+            <a:r>
+              <a:rPr sz="750">
+                <a:solidFill>
+                  <a:srgbClr val="78808C"/>
+                </a:solidFill>
+                <a:latin typeface="Consolas"/>
+              </a:rPr>
+              <a:t>M12  ·  INHALT</a:t>
+            </a:r>
+          </a:p>
+        </p:txBody>
+      </p:sp>
+      <p:sp>
+        <p:nvSpPr>
+          <p:cNvPr id="5" name="Rectangle 4"/>
+          <p:cNvSpPr/>
+          <p:nvPr/>
+        </p:nvSpPr>
+        <p:spPr>
+          <a:xfrm>
+            <a:off x="0" y="1234440"/>
+            <a:ext cx="12188952" cy="12700"/>
+          </a:xfrm>
+          <a:prstGeom prst="rect">
+            <a:avLst/>
+          </a:prstGeom>
+          <a:solidFill>
+            <a:srgbClr val="D8DFE4"/>
+          </a:solidFill>
+          <a:ln>
+            <a:noFill/>
+          </a:ln>
+        </p:spPr>
+        <p:style>
+          <a:lnRef idx="1">
+            <a:schemeClr val="accent1"/>
+          </a:lnRef>
+          <a:fillRef idx="3">
+            <a:schemeClr val="accent1"/>
+          </a:fillRef>
+          <a:effectRef idx="2">
+            <a:schemeClr val="accent1"/>
+          </a:effectRef>
+          <a:fontRef idx="minor">
+            <a:schemeClr val="lt1"/>
+          </a:fontRef>
+        </p:style>
+        <p:txBody>
+          <a:bodyPr rtlCol="0" anchor="ctr"/>
+          <a:lstStyle/>
+          <a:p>
+            <a:pPr algn="ctr"/>
+          </a:p>
+        </p:txBody>
+      </p:sp>
+      <p:sp>
+        <p:nvSpPr>
+          <p:cNvPr id="6" name="Rectangle 5"/>
+          <p:cNvSpPr/>
+          <p:nvPr/>
+        </p:nvSpPr>
+        <p:spPr>
+          <a:xfrm>
+            <a:off x="685800" y="502920"/>
+            <a:ext cx="36576" cy="658368"/>
+          </a:xfrm>
+          <a:prstGeom prst="rect">
+            <a:avLst/>
+          </a:prstGeom>
+          <a:solidFill>
+            <a:srgbClr val="D9C089"/>
+          </a:solidFill>
+          <a:ln>
+            <a:noFill/>
+          </a:ln>
+        </p:spPr>
+        <p:style>
+          <a:lnRef idx="1">
+            <a:schemeClr val="accent1"/>
+          </a:lnRef>
+          <a:fillRef idx="3">
+            <a:schemeClr val="accent1"/>
+          </a:fillRef>
+          <a:effectRef idx="2">
+            <a:schemeClr val="accent1"/>
+          </a:effectRef>
+          <a:fontRef idx="minor">
+            <a:schemeClr val="lt1"/>
+          </a:fontRef>
+        </p:style>
+        <p:txBody>
+          <a:bodyPr rtlCol="0" anchor="ctr"/>
+          <a:lstStyle/>
+          <a:p>
+            <a:pPr algn="ctr"/>
+          </a:p>
+        </p:txBody>
+      </p:sp>
+      <p:sp>
+        <p:nvSpPr>
+          <p:cNvPr id="7" name="TextBox 6"/>
+          <p:cNvSpPr txBox="1"/>
+          <p:nvPr/>
+        </p:nvSpPr>
+        <p:spPr>
+          <a:xfrm>
+            <a:off x="813816" y="502920"/>
+            <a:ext cx="10634472" cy="685800"/>
+          </a:xfrm>
+          <a:prstGeom prst="rect">
+            <a:avLst/>
+          </a:prstGeom>
+          <a:noFill/>
+        </p:spPr>
+        <p:txBody>
+          <a:bodyPr wrap="square">
+            <a:spAutoFit/>
+          </a:bodyPr>
+          <a:lstStyle/>
+          <a:p>
+            <a:pPr algn="l"/>
+            <a:r>
+              <a:rPr sz="2400" b="1" i="0">
+                <a:solidFill>
+                  <a:srgbClr val="1F2C56"/>
+                </a:solidFill>
+                <a:latin typeface="Arial"/>
+              </a:rPr>
+              <a:t>Prinzip dieses Moduls</a:t>
+            </a:r>
+          </a:p>
+        </p:txBody>
+      </p:sp>
+      <p:sp>
+        <p:nvSpPr>
+          <p:cNvPr id="8" name="TextBox 7"/>
+          <p:cNvSpPr txBox="1"/>
+          <p:nvPr/>
+        </p:nvSpPr>
+        <p:spPr>
+          <a:xfrm>
+            <a:off x="685800" y="1417320"/>
+            <a:ext cx="10817352" cy="4892040"/>
+          </a:xfrm>
+          <a:prstGeom prst="rect">
+            <a:avLst/>
+          </a:prstGeom>
+          <a:noFill/>
+        </p:spPr>
+        <p:txBody>
+          <a:bodyPr wrap="square" anchor="ctr">
+            <a:spAutoFit/>
+          </a:bodyPr>
+          <a:lstStyle/>
+          <a:p>
+            <a:pPr marL="177800" indent="-177800">
+              <a:spcBef>
+                <a:spcPts val="600"/>
+              </a:spcBef>
+              <a:spcAft>
+                <a:spcPts val="200"/>
+              </a:spcAft>
+            </a:pPr>
+            <a:r>
+              <a:rPr sz="1200" i="1">
+                <a:solidFill>
+                  <a:srgbClr val="3D5466"/>
+                </a:solidFill>
+                <a:latin typeface="Arial"/>
+              </a:rPr>
+              <a:t>→  Auf Augenhöhe fragt man – man argumentiert nicht.</a:t>
+            </a:r>
+          </a:p>
+          <a:p>
+            <a:pPr marL="190500" indent="-190500">
+              <a:spcBef>
+                <a:spcPts val="400"/>
+              </a:spcBef>
+              <a:spcAft>
+                <a:spcPts val="200"/>
+              </a:spcAft>
+            </a:pPr>
+            <a:r>
+              <a:rPr sz="1300">
+                <a:solidFill>
+                  <a:srgbClr val="3D5466"/>
+                </a:solidFill>
+                <a:latin typeface="Arial"/>
+              </a:rPr>
+              <a:t>▸  Im CEO-Dialog öffnen zirkuläre Fragen und echte Neugier einen Raum, den kein Produktpitch je erreicht.</a:t>
+            </a:r>
+          </a:p>
+        </p:txBody>
+      </p:sp>
+      <p:sp>
+        <p:nvSpPr>
+          <p:cNvPr id="9" name="Rectangle 8"/>
+          <p:cNvSpPr/>
+          <p:nvPr/>
+        </p:nvSpPr>
+        <p:spPr>
+          <a:xfrm>
+            <a:off x="0" y="6510528"/>
+            <a:ext cx="12188952" cy="347472"/>
+          </a:xfrm>
+          <a:prstGeom prst="rect">
+            <a:avLst/>
+          </a:prstGeom>
+          <a:solidFill>
+            <a:srgbClr val="0A1937"/>
+          </a:solidFill>
+          <a:ln>
+            <a:noFill/>
+          </a:ln>
+        </p:spPr>
+        <p:style>
+          <a:lnRef idx="1">
+            <a:schemeClr val="accent1"/>
+          </a:lnRef>
+          <a:fillRef idx="3">
+            <a:schemeClr val="accent1"/>
+          </a:fillRef>
+          <a:effectRef idx="2">
+            <a:schemeClr val="accent1"/>
+          </a:effectRef>
+          <a:fontRef idx="minor">
+            <a:schemeClr val="lt1"/>
+          </a:fontRef>
+        </p:style>
+        <p:txBody>
+          <a:bodyPr rtlCol="0" anchor="ctr"/>
+          <a:lstStyle/>
+          <a:p>
+            <a:pPr algn="ctr"/>
+          </a:p>
+        </p:txBody>
+      </p:sp>
+      <p:sp>
+        <p:nvSpPr>
+          <p:cNvPr id="10" name="TextBox 9"/>
+          <p:cNvSpPr txBox="1"/>
+          <p:nvPr/>
+        </p:nvSpPr>
+        <p:spPr>
+          <a:xfrm>
+            <a:off x="685800" y="6583680"/>
+            <a:ext cx="6490411" cy="256032"/>
+          </a:xfrm>
+          <a:prstGeom prst="rect">
+            <a:avLst/>
+          </a:prstGeom>
+          <a:noFill/>
+        </p:spPr>
+        <p:txBody>
+          <a:bodyPr wrap="none">
+            <a:spAutoFit/>
+          </a:bodyPr>
+          <a:lstStyle/>
+          <a:p>
+            <a:pPr algn="l"/>
+            <a:r>
+              <a:rPr sz="700">
+                <a:solidFill>
+                  <a:srgbClr val="A0B4D2"/>
+                </a:solidFill>
+                <a:latin typeface="Consolas"/>
+              </a:rPr>
+              <a:t>FKB Campus  ·  M12</a:t>
+            </a:r>
+          </a:p>
+        </p:txBody>
+      </p:sp>
+    </p:spTree>
+  </p:cSld>
+  <p:clrMapOvr>
+    <a:masterClrMapping/>
+  </p:clrMapOvr>
+</p:sld>
+</file>
+
+<file path=ppt/slides/slide23.xml><?xml version="1.0" encoding="utf-8"?>
+<p:sld xmlns:a="http://schemas.openxmlformats.org/drawingml/2006/main" xmlns:p="http://schemas.openxmlformats.org/presentationml/2006/main" xmlns:r="http://schemas.openxmlformats.org/officeDocument/2006/relationships">
+  <p:cSld>
+    <p:spTree>
+      <p:nvGrpSpPr>
+        <p:cNvPr id="1" name=""/>
+        <p:cNvGrpSpPr/>
+        <p:nvPr/>
+      </p:nvGrpSpPr>
+      <p:grpSpPr/>
+      <p:sp>
+        <p:nvSpPr>
+          <p:cNvPr id="2" name="Rectangle 1"/>
+          <p:cNvSpPr/>
+          <p:nvPr/>
+        </p:nvSpPr>
+        <p:spPr>
+          <a:xfrm>
+            <a:off x="0" y="0"/>
+            <a:ext cx="12188952" cy="6858000"/>
+          </a:xfrm>
+          <a:prstGeom prst="rect">
+            <a:avLst/>
+          </a:prstGeom>
+          <a:solidFill>
+            <a:srgbClr val="EDEDF3"/>
+          </a:solidFill>
+          <a:ln>
+            <a:noFill/>
+          </a:ln>
+        </p:spPr>
+        <p:style>
+          <a:lnRef idx="1">
+            <a:schemeClr val="accent1"/>
+          </a:lnRef>
+          <a:fillRef idx="3">
+            <a:schemeClr val="accent1"/>
+          </a:fillRef>
+          <a:effectRef idx="2">
+            <a:schemeClr val="accent1"/>
+          </a:effectRef>
+          <a:fontRef idx="minor">
+            <a:schemeClr val="lt1"/>
+          </a:fontRef>
+        </p:style>
+        <p:txBody>
+          <a:bodyPr rtlCol="0" anchor="ctr"/>
+          <a:lstStyle/>
+          <a:p>
+            <a:pPr algn="ctr"/>
+          </a:p>
+        </p:txBody>
+      </p:sp>
+      <p:sp>
+        <p:nvSpPr>
+          <p:cNvPr id="3" name="Rectangle 2"/>
+          <p:cNvSpPr/>
+          <p:nvPr/>
+        </p:nvSpPr>
+        <p:spPr>
+          <a:xfrm>
+            <a:off x="0" y="0"/>
+            <a:ext cx="12188952" cy="50292"/>
+          </a:xfrm>
+          <a:prstGeom prst="rect">
+            <a:avLst/>
+          </a:prstGeom>
+          <a:solidFill>
+            <a:srgbClr val="1F2C56"/>
+          </a:solidFill>
+          <a:ln>
+            <a:noFill/>
+          </a:ln>
+        </p:spPr>
+        <p:style>
+          <a:lnRef idx="1">
+            <a:schemeClr val="accent1"/>
+          </a:lnRef>
+          <a:fillRef idx="3">
+            <a:schemeClr val="accent1"/>
+          </a:fillRef>
+          <a:effectRef idx="2">
+            <a:schemeClr val="accent1"/>
+          </a:effectRef>
+          <a:fontRef idx="minor">
+            <a:schemeClr val="lt1"/>
+          </a:fontRef>
+        </p:style>
+        <p:txBody>
+          <a:bodyPr rtlCol="0" anchor="ctr"/>
+          <a:lstStyle/>
+          <a:p>
+            <a:pPr algn="ctr"/>
+          </a:p>
+        </p:txBody>
+      </p:sp>
+      <p:sp>
+        <p:nvSpPr>
+          <p:cNvPr id="4" name="TextBox 3"/>
+          <p:cNvSpPr txBox="1"/>
+          <p:nvPr/>
+        </p:nvSpPr>
+        <p:spPr>
+          <a:xfrm>
+            <a:off x="685800" y="109728"/>
+            <a:ext cx="10817352" cy="228600"/>
+          </a:xfrm>
+          <a:prstGeom prst="rect">
+            <a:avLst/>
+          </a:prstGeom>
+          <a:noFill/>
+        </p:spPr>
+        <p:txBody>
+          <a:bodyPr wrap="none">
+            <a:spAutoFit/>
+          </a:bodyPr>
+          <a:lstStyle/>
+          <a:p>
+            <a:pPr algn="l"/>
+            <a:r>
+              <a:rPr sz="750">
+                <a:solidFill>
+                  <a:srgbClr val="78808C"/>
+                </a:solidFill>
+                <a:latin typeface="Consolas"/>
+              </a:rPr>
+              <a:t>M12  ·  INHALT</a:t>
+            </a:r>
+          </a:p>
+        </p:txBody>
+      </p:sp>
+      <p:sp>
+        <p:nvSpPr>
+          <p:cNvPr id="5" name="Rectangle 4"/>
+          <p:cNvSpPr/>
+          <p:nvPr/>
+        </p:nvSpPr>
+        <p:spPr>
+          <a:xfrm>
+            <a:off x="0" y="1234440"/>
+            <a:ext cx="12188952" cy="12700"/>
+          </a:xfrm>
+          <a:prstGeom prst="rect">
+            <a:avLst/>
+          </a:prstGeom>
+          <a:solidFill>
+            <a:srgbClr val="D8DFE4"/>
+          </a:solidFill>
+          <a:ln>
+            <a:noFill/>
+          </a:ln>
+        </p:spPr>
+        <p:style>
+          <a:lnRef idx="1">
+            <a:schemeClr val="accent1"/>
+          </a:lnRef>
+          <a:fillRef idx="3">
+            <a:schemeClr val="accent1"/>
+          </a:fillRef>
+          <a:effectRef idx="2">
+            <a:schemeClr val="accent1"/>
+          </a:effectRef>
+          <a:fontRef idx="minor">
+            <a:schemeClr val="lt1"/>
+          </a:fontRef>
+        </p:style>
+        <p:txBody>
+          <a:bodyPr rtlCol="0" anchor="ctr"/>
+          <a:lstStyle/>
+          <a:p>
+            <a:pPr algn="ctr"/>
+          </a:p>
+        </p:txBody>
+      </p:sp>
+      <p:sp>
+        <p:nvSpPr>
+          <p:cNvPr id="6" name="Rectangle 5"/>
+          <p:cNvSpPr/>
+          <p:nvPr/>
+        </p:nvSpPr>
+        <p:spPr>
+          <a:xfrm>
+            <a:off x="685800" y="502920"/>
+            <a:ext cx="36576" cy="658368"/>
+          </a:xfrm>
+          <a:prstGeom prst="rect">
+            <a:avLst/>
+          </a:prstGeom>
+          <a:solidFill>
+            <a:srgbClr val="D9C089"/>
+          </a:solidFill>
+          <a:ln>
+            <a:noFill/>
+          </a:ln>
+        </p:spPr>
+        <p:style>
+          <a:lnRef idx="1">
+            <a:schemeClr val="accent1"/>
+          </a:lnRef>
+          <a:fillRef idx="3">
+            <a:schemeClr val="accent1"/>
+          </a:fillRef>
+          <a:effectRef idx="2">
+            <a:schemeClr val="accent1"/>
+          </a:effectRef>
+          <a:fontRef idx="minor">
+            <a:schemeClr val="lt1"/>
+          </a:fontRef>
+        </p:style>
+        <p:txBody>
+          <a:bodyPr rtlCol="0" anchor="ctr"/>
+          <a:lstStyle/>
+          <a:p>
+            <a:pPr algn="ctr"/>
+          </a:p>
+        </p:txBody>
+      </p:sp>
+      <p:sp>
+        <p:nvSpPr>
+          <p:cNvPr id="7" name="TextBox 6"/>
+          <p:cNvSpPr txBox="1"/>
+          <p:nvPr/>
+        </p:nvSpPr>
+        <p:spPr>
+          <a:xfrm>
+            <a:off x="813816" y="502920"/>
+            <a:ext cx="10634472" cy="685800"/>
+          </a:xfrm>
+          <a:prstGeom prst="rect">
+            <a:avLst/>
+          </a:prstGeom>
+          <a:noFill/>
+        </p:spPr>
+        <p:txBody>
+          <a:bodyPr wrap="square">
+            <a:spAutoFit/>
+          </a:bodyPr>
+          <a:lstStyle/>
+          <a:p>
+            <a:pPr algn="l"/>
+            <a:r>
+              <a:rPr sz="2400" b="1" i="0">
+                <a:solidFill>
+                  <a:srgbClr val="1F2C56"/>
+                </a:solidFill>
+                <a:latin typeface="Arial"/>
+              </a:rPr>
+              <a:t>Reflexion und Selbstcheck</a:t>
+            </a:r>
+          </a:p>
+        </p:txBody>
+      </p:sp>
+      <p:sp>
+        <p:nvSpPr>
+          <p:cNvPr id="8" name="TextBox 7"/>
+          <p:cNvSpPr txBox="1"/>
+          <p:nvPr/>
+        </p:nvSpPr>
+        <p:spPr>
+          <a:xfrm>
+            <a:off x="685800" y="1417320"/>
+            <a:ext cx="10817352" cy="4892040"/>
+          </a:xfrm>
+          <a:prstGeom prst="rect">
+            <a:avLst/>
+          </a:prstGeom>
+          <a:noFill/>
+        </p:spPr>
+        <p:txBody>
+          <a:bodyPr wrap="square" anchor="ctr">
+            <a:spAutoFit/>
+          </a:bodyPr>
+          <a:lstStyle/>
+          <a:p>
+            <a:pPr marL="190500" indent="-190500">
+              <a:spcBef>
+                <a:spcPts val="400"/>
+              </a:spcBef>
+              <a:spcAft>
+                <a:spcPts val="200"/>
+              </a:spcAft>
+            </a:pPr>
+            <a:r>
+              <a:rPr sz="1300">
+                <a:solidFill>
+                  <a:srgbClr val="3D5466"/>
+                </a:solidFill>
+                <a:latin typeface="Arial"/>
+              </a:rPr>
+              <a:t>▸  Bei welchem Kunden wissen Sie, dass Nachfolge ein Thema ist – und was hält Sie vom Ansprechen ab?</a:t>
+            </a:r>
+          </a:p>
+          <a:p>
+            <a:pPr marL="190500" indent="-190500">
+              <a:spcBef>
+                <a:spcPts val="400"/>
+              </a:spcBef>
+              <a:spcAft>
+                <a:spcPts val="200"/>
+              </a:spcAft>
+            </a:pPr>
+            <a:r>
+              <a:rPr sz="1300">
+                <a:solidFill>
+                  <a:srgbClr val="3D5466"/>
+                </a:solidFill>
+                <a:latin typeface="Arial"/>
+              </a:rPr>
+              <a:t>▸  Welche systemische Frage nehmen Sie als Erstes in Ihr nächstes Strategiegespräch mit?</a:t>
+            </a:r>
+          </a:p>
+          <a:p>
+            <a:pPr marL="190500" indent="-190500">
+              <a:spcBef>
+                <a:spcPts val="400"/>
+              </a:spcBef>
+              <a:spcAft>
+                <a:spcPts val="200"/>
+              </a:spcAft>
+            </a:pPr>
+            <a:r>
+              <a:rPr sz="1300">
+                <a:solidFill>
+                  <a:srgbClr val="3D5466"/>
+                </a:solidFill>
+                <a:latin typeface="Arial"/>
+              </a:rPr>
+              <a:t>▸  Woran erkennen Sie, dass Sie vom Argumentieren ins Fragen gewechselt sind?</a:t>
+            </a:r>
+          </a:p>
+        </p:txBody>
+      </p:sp>
+      <p:sp>
+        <p:nvSpPr>
+          <p:cNvPr id="9" name="Rectangle 8"/>
+          <p:cNvSpPr/>
+          <p:nvPr/>
+        </p:nvSpPr>
+        <p:spPr>
+          <a:xfrm>
+            <a:off x="0" y="6510528"/>
+            <a:ext cx="12188952" cy="347472"/>
+          </a:xfrm>
+          <a:prstGeom prst="rect">
+            <a:avLst/>
+          </a:prstGeom>
+          <a:solidFill>
+            <a:srgbClr val="0A1937"/>
+          </a:solidFill>
+          <a:ln>
+            <a:noFill/>
+          </a:ln>
+        </p:spPr>
+        <p:style>
+          <a:lnRef idx="1">
+            <a:schemeClr val="accent1"/>
+          </a:lnRef>
+          <a:fillRef idx="3">
+            <a:schemeClr val="accent1"/>
+          </a:fillRef>
+          <a:effectRef idx="2">
+            <a:schemeClr val="accent1"/>
+          </a:effectRef>
+          <a:fontRef idx="minor">
+            <a:schemeClr val="lt1"/>
+          </a:fontRef>
+        </p:style>
+        <p:txBody>
+          <a:bodyPr rtlCol="0" anchor="ctr"/>
+          <a:lstStyle/>
+          <a:p>
+            <a:pPr algn="ctr"/>
+          </a:p>
+        </p:txBody>
+      </p:sp>
+      <p:sp>
+        <p:nvSpPr>
+          <p:cNvPr id="10" name="TextBox 9"/>
+          <p:cNvSpPr txBox="1"/>
+          <p:nvPr/>
+        </p:nvSpPr>
+        <p:spPr>
+          <a:xfrm>
+            <a:off x="685800" y="6583680"/>
+            <a:ext cx="6490411" cy="256032"/>
+          </a:xfrm>
+          <a:prstGeom prst="rect">
+            <a:avLst/>
+          </a:prstGeom>
+          <a:noFill/>
+        </p:spPr>
+        <p:txBody>
+          <a:bodyPr wrap="none">
+            <a:spAutoFit/>
+          </a:bodyPr>
+          <a:lstStyle/>
+          <a:p>
+            <a:pPr algn="l"/>
+            <a:r>
+              <a:rPr sz="700">
+                <a:solidFill>
+                  <a:srgbClr val="A0B4D2"/>
+                </a:solidFill>
+                <a:latin typeface="Consolas"/>
+              </a:rPr>
+              <a:t>FKB Campus  ·  M12</a:t>
+            </a:r>
+          </a:p>
+        </p:txBody>
+      </p:sp>
+    </p:spTree>
+  </p:cSld>
+  <p:clrMapOvr>
+    <a:masterClrMapping/>
+  </p:clrMapOvr>
+</p:sld>
+</file>
+
 <file path=ppt/slides/slide3.xml><?xml version="1.0" encoding="utf-8"?>
 <p:sld xmlns:a="http://schemas.openxmlformats.org/drawingml/2006/main" xmlns:p="http://schemas.openxmlformats.org/presentationml/2006/main" xmlns:r="http://schemas.openxmlformats.org/officeDocument/2006/relationships">
   <p:cSld>
@@ -7537,7 +11539,7 @@
             <a:avLst/>
           </a:prstGeom>
           <a:solidFill>
-            <a:srgbClr val="EDEDF3"/>
+            <a:srgbClr val="1F2C56"/>
           </a:solidFill>
           <a:ln>
             <a:noFill/>
@@ -7567,57 +11569,14 @@
       </p:sp>
       <p:sp>
         <p:nvSpPr>
-          <p:cNvPr id="3" name="Rectangle 2"/>
-          <p:cNvSpPr/>
-          <p:nvPr/>
-        </p:nvSpPr>
-        <p:spPr>
-          <a:xfrm>
-            <a:off x="0" y="0"/>
-            <a:ext cx="12188952" cy="50292"/>
-          </a:xfrm>
-          <a:prstGeom prst="rect">
-            <a:avLst/>
-          </a:prstGeom>
-          <a:solidFill>
-            <a:srgbClr val="1F2C56"/>
-          </a:solidFill>
-          <a:ln>
-            <a:noFill/>
-          </a:ln>
-        </p:spPr>
-        <p:style>
-          <a:lnRef idx="1">
-            <a:schemeClr val="accent1"/>
-          </a:lnRef>
-          <a:fillRef idx="3">
-            <a:schemeClr val="accent1"/>
-          </a:fillRef>
-          <a:effectRef idx="2">
-            <a:schemeClr val="accent1"/>
-          </a:effectRef>
-          <a:fontRef idx="minor">
-            <a:schemeClr val="lt1"/>
-          </a:fontRef>
-        </p:style>
-        <p:txBody>
-          <a:bodyPr rtlCol="0" anchor="ctr"/>
-          <a:lstStyle/>
-          <a:p>
-            <a:pPr algn="ctr"/>
-          </a:p>
-        </p:txBody>
-      </p:sp>
-      <p:sp>
-        <p:nvSpPr>
-          <p:cNvPr id="4" name="TextBox 3"/>
+          <p:cNvPr id="3" name="TextBox 2"/>
           <p:cNvSpPr txBox="1"/>
           <p:nvPr/>
         </p:nvSpPr>
         <p:spPr>
           <a:xfrm>
-            <a:off x="685800" y="109728"/>
-            <a:ext cx="10817352" cy="228600"/>
+            <a:off x="685800" y="2377440"/>
+            <a:ext cx="10817352" cy="365760"/>
           </a:xfrm>
           <a:prstGeom prst="rect">
             <a:avLst/>
@@ -7632,70 +11591,27 @@
           <a:p>
             <a:pPr algn="l"/>
             <a:r>
-              <a:rPr sz="750">
-                <a:solidFill>
-                  <a:srgbClr val="78808C"/>
+              <a:rPr sz="1200">
+                <a:solidFill>
+                  <a:srgbClr val="D9C089"/>
                 </a:solidFill>
                 <a:latin typeface="Consolas"/>
               </a:rPr>
-              <a:t>M12  ·  INHALT</a:t>
-            </a:r>
-          </a:p>
-        </p:txBody>
-      </p:sp>
-      <p:sp>
-        <p:nvSpPr>
-          <p:cNvPr id="5" name="Rectangle 4"/>
+              <a:t>09:00–09:45</a:t>
+            </a:r>
+          </a:p>
+        </p:txBody>
+      </p:sp>
+      <p:sp>
+        <p:nvSpPr>
+          <p:cNvPr id="4" name="Rectangle 3"/>
           <p:cNvSpPr/>
           <p:nvPr/>
         </p:nvSpPr>
         <p:spPr>
           <a:xfrm>
-            <a:off x="0" y="1234440"/>
-            <a:ext cx="12188952" cy="12700"/>
-          </a:xfrm>
-          <a:prstGeom prst="rect">
-            <a:avLst/>
-          </a:prstGeom>
-          <a:solidFill>
-            <a:srgbClr val="D8DFE4"/>
-          </a:solidFill>
-          <a:ln>
-            <a:noFill/>
-          </a:ln>
-        </p:spPr>
-        <p:style>
-          <a:lnRef idx="1">
-            <a:schemeClr val="accent1"/>
-          </a:lnRef>
-          <a:fillRef idx="3">
-            <a:schemeClr val="accent1"/>
-          </a:fillRef>
-          <a:effectRef idx="2">
-            <a:schemeClr val="accent1"/>
-          </a:effectRef>
-          <a:fontRef idx="minor">
-            <a:schemeClr val="lt1"/>
-          </a:fontRef>
-        </p:style>
-        <p:txBody>
-          <a:bodyPr rtlCol="0" anchor="ctr"/>
-          <a:lstStyle/>
-          <a:p>
-            <a:pPr algn="ctr"/>
-          </a:p>
-        </p:txBody>
-      </p:sp>
-      <p:sp>
-        <p:nvSpPr>
-          <p:cNvPr id="6" name="Rectangle 5"/>
-          <p:cNvSpPr/>
-          <p:nvPr/>
-        </p:nvSpPr>
-        <p:spPr>
-          <a:xfrm>
-            <a:off x="685800" y="502920"/>
-            <a:ext cx="36576" cy="658368"/>
+            <a:off x="685800" y="2788920"/>
+            <a:ext cx="548640" cy="38100"/>
           </a:xfrm>
           <a:prstGeom prst="rect">
             <a:avLst/>
@@ -7731,14 +11647,14 @@
       </p:sp>
       <p:sp>
         <p:nvSpPr>
-          <p:cNvPr id="7" name="TextBox 6"/>
+          <p:cNvPr id="5" name="TextBox 4"/>
           <p:cNvSpPr txBox="1"/>
           <p:nvPr/>
         </p:nvSpPr>
         <p:spPr>
           <a:xfrm>
-            <a:off x="813816" y="502920"/>
-            <a:ext cx="10634472" cy="685800"/>
+            <a:off x="685800" y="3017520"/>
+            <a:ext cx="10817352" cy="1463040"/>
           </a:xfrm>
           <a:prstGeom prst="rect">
             <a:avLst/>
@@ -7753,27 +11669,27 @@
           <a:p>
             <a:pPr algn="l"/>
             <a:r>
-              <a:rPr sz="2400" b="1" i="0">
-                <a:solidFill>
-                  <a:srgbClr val="1F2C56"/>
+              <a:rPr sz="4000" b="1" i="0">
+                <a:solidFill>
+                  <a:srgbClr val="FFFFFF"/>
                 </a:solidFill>
                 <a:latin typeface="Arial"/>
               </a:rPr>
-              <a:t>Theorie-Input: Das CEO-Gespräch – Mindset und Vorbereitung</a:t>
-            </a:r>
-          </a:p>
-        </p:txBody>
-      </p:sp>
-      <p:sp>
-        <p:nvSpPr>
-          <p:cNvPr id="8" name="TextBox 7"/>
+              <a:t>CEO-Dialog: Mindset</a:t>
+            </a:r>
+          </a:p>
+        </p:txBody>
+      </p:sp>
+      <p:sp>
+        <p:nvSpPr>
+          <p:cNvPr id="6" name="TextBox 5"/>
           <p:cNvSpPr txBox="1"/>
           <p:nvPr/>
         </p:nvSpPr>
         <p:spPr>
           <a:xfrm>
-            <a:off x="685800" y="1417320"/>
-            <a:ext cx="10817352" cy="4892040"/>
+            <a:off x="685800" y="4480560"/>
+            <a:ext cx="8653881" cy="1280160"/>
           </a:xfrm>
           <a:prstGeom prst="rect">
             <a:avLst/>
@@ -7786,250 +11702,29 @@
           </a:bodyPr>
           <a:lstStyle/>
           <a:p>
-            <a:pPr>
-              <a:spcBef>
-                <a:spcPts val="1000"/>
-              </a:spcBef>
-              <a:spcAft>
-                <a:spcPts val="200"/>
-              </a:spcAft>
-            </a:pPr>
-            <a:r>
-              <a:rPr sz="800" b="1">
-                <a:solidFill>
-                  <a:srgbClr val="78808C"/>
-                </a:solidFill>
-                <a:latin typeface="Consolas"/>
-              </a:rPr>
-              <a:t>DEN ERSTEN SCHRITT GEHEN: WIE INITIIERT MAN DAS CEO-GESPRÄCH BEI EINEM BESTANDSKUNDEN?</a:t>
-            </a:r>
-          </a:p>
-          <a:p>
-            <a:pPr marL="190500" indent="-190500">
-              <a:spcBef>
-                <a:spcPts val="400"/>
-              </a:spcBef>
-              <a:spcAft>
-                <a:spcPts val="200"/>
-              </a:spcAft>
-            </a:pPr>
-            <a:r>
-              <a:rPr sz="1300">
-                <a:solidFill>
-                  <a:srgbClr val="3D5466"/>
+            <a:pPr algn="l"/>
+            <a:r>
+              <a:rPr sz="1600" b="0" i="0">
+                <a:solidFill>
+                  <a:srgbClr val="C8D2E6"/>
                 </a:solidFill>
                 <a:latin typeface="Arial"/>
               </a:rPr>
-              <a:t>▸  Drei bewährte Einstiegs-Anlässe:</a:t>
-            </a:r>
-          </a:p>
-          <a:p>
-            <a:pPr>
-              <a:spcBef>
-                <a:spcPts val="1000"/>
-              </a:spcBef>
-              <a:spcAft>
-                <a:spcPts val="200"/>
-              </a:spcAft>
-            </a:pPr>
-            <a:r>
-              <a:rPr sz="800" b="1">
-                <a:solidFill>
-                  <a:srgbClr val="78808C"/>
-                </a:solidFill>
-                <a:latin typeface="Consolas"/>
-              </a:rPr>
-              <a:t>PSYCHOLOGISCHE SICHERHEIT ALS GESPRÄCHSGRUNDLAGE</a:t>
-            </a:r>
-          </a:p>
-          <a:p>
-            <a:pPr marL="190500" indent="-190500">
-              <a:spcBef>
-                <a:spcPts val="400"/>
-              </a:spcBef>
-              <a:spcAft>
-                <a:spcPts val="200"/>
-              </a:spcAft>
-            </a:pPr>
-            <a:r>
-              <a:rPr sz="1300">
-                <a:solidFill>
-                  <a:srgbClr val="3D5466"/>
-                </a:solidFill>
-                <a:latin typeface="Arial"/>
-              </a:rPr>
-              <a:t>▸  Gleichwertigkeit: „Ich bin nicht hier, um Sie zu prüfen oder zu belehren, sondern um gemeinsam zu schauen, was für Ihre Zukunft sinnvoll ist."</a:t>
-            </a:r>
-          </a:p>
-          <a:p>
-            <a:pPr marL="190500" indent="-190500">
-              <a:spcBef>
-                <a:spcPts val="400"/>
-              </a:spcBef>
-              <a:spcAft>
-                <a:spcPts val="200"/>
-              </a:spcAft>
-            </a:pPr>
-            <a:r>
-              <a:rPr sz="1300">
-                <a:solidFill>
-                  <a:srgbClr val="3D5466"/>
-                </a:solidFill>
-                <a:latin typeface="Arial"/>
-              </a:rPr>
-              <a:t>▸  Vertraulichkeit: „Was Sie mir anvertrauen, bleibt zwischen uns."</a:t>
-            </a:r>
-          </a:p>
-          <a:p>
-            <a:pPr marL="190500" indent="-190500">
-              <a:spcBef>
-                <a:spcPts val="400"/>
-              </a:spcBef>
-              <a:spcAft>
-                <a:spcPts val="200"/>
-              </a:spcAft>
-            </a:pPr>
-            <a:r>
-              <a:rPr sz="1300">
-                <a:solidFill>
-                  <a:srgbClr val="3D5466"/>
-                </a:solidFill>
-                <a:latin typeface="Arial"/>
-              </a:rPr>
-              <a:t>▸  Kompetenz: Subtile Signale, dass der FK das Nachfolge-Thema ernst nimmt und Erfahrung hat.</a:t>
-            </a:r>
-          </a:p>
-          <a:p>
-            <a:pPr>
-              <a:spcBef>
-                <a:spcPts val="1000"/>
-              </a:spcBef>
-              <a:spcAft>
-                <a:spcPts val="200"/>
-              </a:spcAft>
-            </a:pPr>
-            <a:r>
-              <a:rPr sz="800" b="1">
-                <a:solidFill>
-                  <a:srgbClr val="78808C"/>
-                </a:solidFill>
-                <a:latin typeface="Consolas"/>
-              </a:rPr>
-              <a:t>DAS BOARD-ROOM-MINDSET</a:t>
-            </a:r>
-          </a:p>
-          <a:p>
-            <a:pPr marL="190500" indent="-190500">
-              <a:spcBef>
-                <a:spcPts val="400"/>
-              </a:spcBef>
-              <a:spcAft>
-                <a:spcPts val="200"/>
-              </a:spcAft>
-            </a:pPr>
-            <a:r>
-              <a:rPr sz="1300">
-                <a:solidFill>
-                  <a:srgbClr val="3D5466"/>
-                </a:solidFill>
-                <a:latin typeface="Arial"/>
-              </a:rPr>
-              <a:t>▸  Nicht unterordnend sprechen („Ich möchte ja nicht in Ihre Geschäfte reingrätschen, aber…") → stattdessen direkt: „Das habe ich in ähnlichen Fällen anders gesehen. Darf ich dazu eine Frage stellen?"</a:t>
-            </a:r>
-          </a:p>
-          <a:p>
-            <a:pPr marL="190500" indent="-190500">
-              <a:spcBef>
-                <a:spcPts val="400"/>
-              </a:spcBef>
-              <a:spcAft>
-                <a:spcPts val="200"/>
-              </a:spcAft>
-            </a:pPr>
-            <a:r>
-              <a:rPr sz="1300">
-                <a:solidFill>
-                  <a:srgbClr val="3D5466"/>
-                </a:solidFill>
-                <a:latin typeface="Arial"/>
-              </a:rPr>
-              <a:t>▸  Eigene Expertise einbringen ohne Demut: „Nachfolgen begleite ich seit Jahren. Wir sehen dabei Muster, die nicht sofort auffallen."</a:t>
-            </a:r>
-          </a:p>
-          <a:p>
-            <a:pPr marL="190500" indent="-190500">
-              <a:spcBef>
-                <a:spcPts val="400"/>
-              </a:spcBef>
-              <a:spcAft>
-                <a:spcPts val="200"/>
-              </a:spcAft>
-            </a:pPr>
-            <a:r>
-              <a:rPr sz="1300">
-                <a:solidFill>
-                  <a:srgbClr val="3D5466"/>
-                </a:solidFill>
-                <a:latin typeface="Arial"/>
-              </a:rPr>
-              <a:t>▸  Produktiven Widerspruch anbringen, wenn nötig: „Das ergibt für mich weniger Sinn, weil … Was denken Sie dazu?"</a:t>
-            </a:r>
-          </a:p>
-        </p:txBody>
-      </p:sp>
-      <p:sp>
-        <p:nvSpPr>
-          <p:cNvPr id="9" name="Rectangle 8"/>
-          <p:cNvSpPr/>
-          <p:nvPr/>
-        </p:nvSpPr>
-        <p:spPr>
-          <a:xfrm>
-            <a:off x="0" y="6510528"/>
-            <a:ext cx="12188952" cy="347472"/>
-          </a:xfrm>
-          <a:prstGeom prst="rect">
-            <a:avLst/>
-          </a:prstGeom>
-          <a:solidFill>
-            <a:srgbClr val="0A1937"/>
-          </a:solidFill>
-          <a:ln>
-            <a:noFill/>
-          </a:ln>
-        </p:spPr>
-        <p:style>
-          <a:lnRef idx="1">
-            <a:schemeClr val="accent1"/>
-          </a:lnRef>
-          <a:fillRef idx="3">
-            <a:schemeClr val="accent1"/>
-          </a:fillRef>
-          <a:effectRef idx="2">
-            <a:schemeClr val="accent1"/>
-          </a:effectRef>
-          <a:fontRef idx="minor">
-            <a:schemeClr val="lt1"/>
-          </a:fontRef>
-        </p:style>
-        <p:txBody>
-          <a:bodyPr rtlCol="0" anchor="ctr"/>
-          <a:lstStyle/>
-          <a:p>
-            <a:pPr algn="ctr"/>
-          </a:p>
-        </p:txBody>
-      </p:sp>
-      <p:sp>
-        <p:nvSpPr>
-          <p:cNvPr id="10" name="TextBox 9"/>
+              <a:t>Auf Augenhöhe ins Gespräch gehen – nicht als Anbieter, sondern als Sparringspartner.</a:t>
+            </a:r>
+          </a:p>
+        </p:txBody>
+      </p:sp>
+      <p:sp>
+        <p:nvSpPr>
+          <p:cNvPr id="7" name="TextBox 6"/>
           <p:cNvSpPr txBox="1"/>
           <p:nvPr/>
         </p:nvSpPr>
         <p:spPr>
           <a:xfrm>
-            <a:off x="685800" y="6583680"/>
-            <a:ext cx="6490411" cy="256032"/>
+            <a:off x="685800" y="6355080"/>
+            <a:ext cx="10817352" cy="274320"/>
           </a:xfrm>
           <a:prstGeom prst="rect">
             <a:avLst/>
@@ -8046,7 +11741,7 @@
             <a:r>
               <a:rPr sz="700">
                 <a:solidFill>
-                  <a:srgbClr val="A0B4D2"/>
+                  <a:srgbClr val="8CA0C3"/>
                 </a:solidFill>
                 <a:latin typeface="Consolas"/>
               </a:rPr>
@@ -8310,7 +12005,7 @@
                 </a:solidFill>
                 <a:latin typeface="Arial"/>
               </a:rPr>
-              <a:t>Theorie-Input: Fragetechniken auf Strategieebene</a:t>
+              <a:t>Das CEO-Gespräch: Mindset und psychologische Sicherheit</a:t>
             </a:r>
           </a:p>
         </p:txBody>
@@ -8332,27 +12027,27 @@
           <a:noFill/>
         </p:spPr>
         <p:txBody>
-          <a:bodyPr wrap="square">
+          <a:bodyPr wrap="square" anchor="ctr">
             <a:spAutoFit/>
           </a:bodyPr>
           <a:lstStyle/>
           <a:p>
-            <a:pPr>
+            <a:pPr marL="177800" indent="-177800">
               <a:spcBef>
-                <a:spcPts val="1000"/>
+                <a:spcPts val="600"/>
               </a:spcBef>
               <a:spcAft>
                 <a:spcPts val="200"/>
               </a:spcAft>
             </a:pPr>
             <a:r>
-              <a:rPr sz="800" b="1">
-                <a:solidFill>
-                  <a:srgbClr val="78808C"/>
-                </a:solidFill>
-                <a:latin typeface="Consolas"/>
-              </a:rPr>
-              <a:t>SYSTEMISCHE FRAGEN (JENSEITS VON SPIN)</a:t>
+              <a:rPr sz="1200" i="1">
+                <a:solidFill>
+                  <a:srgbClr val="3D5466"/>
+                </a:solidFill>
+                <a:latin typeface="Arial"/>
+              </a:rPr>
+              <a:t>→  Auf Augenhöhe fragt man – man argumentiert nicht. Echte Neugier öffnet einen Raum, den kein Produktpitch je erreicht.</a:t>
             </a:r>
           </a:p>
           <a:p>
@@ -8371,7 +12066,7 @@
                 </a:solidFill>
                 <a:latin typeface="Arial"/>
               </a:rPr>
-              <a:t>▸  Systemische Fragen machen die Vernetzung von Elementen sichtbar:</a:t>
+              <a:t>▸  Board-Room-Mindset: der Unternehmer spricht mit einem Denkpartner, nicht mit einem Verkäufer.</a:t>
             </a:r>
           </a:p>
           <a:p>
@@ -8390,178 +12085,7 @@
                 </a:solidFill>
                 <a:latin typeface="Arial"/>
               </a:rPr>
-              <a:t>▸  „Wie hängt Ihre Nachfolgeplanung mit der Situation Ihrer Kinder zusammen?"</a:t>
-            </a:r>
-          </a:p>
-          <a:p>
-            <a:pPr marL="190500" indent="-190500">
-              <a:spcBef>
-                <a:spcPts val="400"/>
-              </a:spcBef>
-              <a:spcAft>
-                <a:spcPts val="200"/>
-              </a:spcAft>
-            </a:pPr>
-            <a:r>
-              <a:rPr sz="1300">
-                <a:solidFill>
-                  <a:srgbClr val="3D5466"/>
-                </a:solidFill>
-                <a:latin typeface="Arial"/>
-              </a:rPr>
-              <a:t>▸  „Welche Rolle spielt Ihr Unternehmen in Ihrem Selbstverständnis – und was würde sich ändern, wenn Sie es übergeben?"</a:t>
-            </a:r>
-          </a:p>
-          <a:p>
-            <a:pPr marL="190500" indent="-190500">
-              <a:spcBef>
-                <a:spcPts val="400"/>
-              </a:spcBef>
-              <a:spcAft>
-                <a:spcPts val="200"/>
-              </a:spcAft>
-            </a:pPr>
-            <a:r>
-              <a:rPr sz="1300">
-                <a:solidFill>
-                  <a:srgbClr val="3D5466"/>
-                </a:solidFill>
-                <a:latin typeface="Arial"/>
-              </a:rPr>
-              <a:t>▸  „Welche Stakeholder (Mitarbeiter, Familie, Kunden, Bank) haben ein Interesse an einer Nachfolge – und wo könnte es Konflikte geben?"</a:t>
-            </a:r>
-          </a:p>
-          <a:p>
-            <a:pPr marL="190500" indent="-190500">
-              <a:spcBef>
-                <a:spcPts val="400"/>
-              </a:spcBef>
-              <a:spcAft>
-                <a:spcPts val="200"/>
-              </a:spcAft>
-            </a:pPr>
-            <a:r>
-              <a:rPr sz="1300">
-                <a:solidFill>
-                  <a:srgbClr val="3D5466"/>
-                </a:solidFill>
-                <a:latin typeface="Arial"/>
-              </a:rPr>
-              <a:t>▸  Zirkuläre Fragen (Penn, 1982 ) erforschen, wie andere den Unternehmer und sein Dilemma wahrnehmen:</a:t>
-            </a:r>
-          </a:p>
-          <a:p>
-            <a:pPr marL="190500" indent="-190500">
-              <a:spcBef>
-                <a:spcPts val="400"/>
-              </a:spcBef>
-              <a:spcAft>
-                <a:spcPts val="200"/>
-              </a:spcAft>
-            </a:pPr>
-            <a:r>
-              <a:rPr sz="1300">
-                <a:solidFill>
-                  <a:srgbClr val="3D5466"/>
-                </a:solidFill>
-                <a:latin typeface="Arial"/>
-              </a:rPr>
-              <a:t>▸  „Wie würde Ihr ältester Sohn die aktuelle Situation beschreiben – denken Sie?"</a:t>
-            </a:r>
-          </a:p>
-          <a:p>
-            <a:pPr marL="190500" indent="-190500">
-              <a:spcBef>
-                <a:spcPts val="400"/>
-              </a:spcBef>
-              <a:spcAft>
-                <a:spcPts val="200"/>
-              </a:spcAft>
-            </a:pPr>
-            <a:r>
-              <a:rPr sz="1300">
-                <a:solidFill>
-                  <a:srgbClr val="3D5466"/>
-                </a:solidFill>
-                <a:latin typeface="Arial"/>
-              </a:rPr>
-              <a:t>▸  „Was würde Ihr engster Mitarbeiter sagen, wenn ich ihn fragen würde, ob er eine Übergabe an Ihren Sohn für sinnvoll hält?"</a:t>
-            </a:r>
-          </a:p>
-          <a:p>
-            <a:pPr marL="190500" indent="-190500">
-              <a:spcBef>
-                <a:spcPts val="400"/>
-              </a:spcBef>
-              <a:spcAft>
-                <a:spcPts val="200"/>
-              </a:spcAft>
-            </a:pPr>
-            <a:r>
-              <a:rPr sz="1300">
-                <a:solidFill>
-                  <a:srgbClr val="3D5466"/>
-                </a:solidFill>
-                <a:latin typeface="Arial"/>
-              </a:rPr>
-              <a:t>▸  „Wenn wir in fünf Jahren hier säßen und Sie hätten die Nachfolge geregelt: Wie hätte Ihr Ehepartner den Prozess erlebt?"</a:t>
-            </a:r>
-          </a:p>
-          <a:p>
-            <a:pPr marL="190500" indent="-190500">
-              <a:spcBef>
-                <a:spcPts val="400"/>
-              </a:spcBef>
-              <a:spcAft>
-                <a:spcPts val="200"/>
-              </a:spcAft>
-            </a:pPr>
-            <a:r>
-              <a:rPr sz="1300">
-                <a:solidFill>
-                  <a:srgbClr val="3D5466"/>
-                </a:solidFill>
-                <a:latin typeface="Arial"/>
-              </a:rPr>
-              <a:t>▸  Zirkuläre Fragen decken implizite Ängste und Blockaden auf, ohne direkt zu fragen: „Haben Sie Angst vor Kontrollverlust?"</a:t>
-            </a:r>
-          </a:p>
-          <a:p>
-            <a:pPr>
-              <a:spcBef>
-                <a:spcPts val="1000"/>
-              </a:spcBef>
-              <a:spcAft>
-                <a:spcPts val="200"/>
-              </a:spcAft>
-            </a:pPr>
-            <a:r>
-              <a:rPr sz="800" b="1">
-                <a:solidFill>
-                  <a:srgbClr val="78808C"/>
-                </a:solidFill>
-                <a:latin typeface="Consolas"/>
-              </a:rPr>
-              <a:t>LÖSUNGSORIENTIERTE ZUKUNFTSFRAGEN (DE SHAZER, 1985)</a:t>
-            </a:r>
-          </a:p>
-          <a:p>
-            <a:pPr marL="190500" indent="-190500">
-              <a:spcBef>
-                <a:spcPts val="400"/>
-              </a:spcBef>
-              <a:spcAft>
-                <a:spcPts val="200"/>
-              </a:spcAft>
-            </a:pPr>
-            <a:r>
-              <a:rPr sz="1300">
-                <a:solidFill>
-                  <a:srgbClr val="3D5466"/>
-                </a:solidFill>
-                <a:latin typeface="Arial"/>
-              </a:rPr>
-              <a:t>▸  Die lösungsorientierte Gesprächsführung hilft, den Unternehmer aus Lähmung oder Verdrängung herauszuholen:</a:t>
+              <a:t>▸  Psychologische Sicherheit ist die Voraussetzung dafür, dass existenzielle Themen wie Nachfolge überhaupt zur Sprache kommen.</a:t>
             </a:r>
           </a:p>
         </p:txBody>
@@ -8677,7 +12201,7 @@
             <a:avLst/>
           </a:prstGeom>
           <a:solidFill>
-            <a:srgbClr val="EDEDF3"/>
+            <a:srgbClr val="1F2C56"/>
           </a:solidFill>
           <a:ln>
             <a:noFill/>
@@ -8707,57 +12231,14 @@
       </p:sp>
       <p:sp>
         <p:nvSpPr>
-          <p:cNvPr id="3" name="Rectangle 2"/>
-          <p:cNvSpPr/>
-          <p:nvPr/>
-        </p:nvSpPr>
-        <p:spPr>
-          <a:xfrm>
-            <a:off x="0" y="0"/>
-            <a:ext cx="12188952" cy="50292"/>
-          </a:xfrm>
-          <a:prstGeom prst="rect">
-            <a:avLst/>
-          </a:prstGeom>
-          <a:solidFill>
-            <a:srgbClr val="1F2C56"/>
-          </a:solidFill>
-          <a:ln>
-            <a:noFill/>
-          </a:ln>
-        </p:spPr>
-        <p:style>
-          <a:lnRef idx="1">
-            <a:schemeClr val="accent1"/>
-          </a:lnRef>
-          <a:fillRef idx="3">
-            <a:schemeClr val="accent1"/>
-          </a:fillRef>
-          <a:effectRef idx="2">
-            <a:schemeClr val="accent1"/>
-          </a:effectRef>
-          <a:fontRef idx="minor">
-            <a:schemeClr val="lt1"/>
-          </a:fontRef>
-        </p:style>
-        <p:txBody>
-          <a:bodyPr rtlCol="0" anchor="ctr"/>
-          <a:lstStyle/>
-          <a:p>
-            <a:pPr algn="ctr"/>
-          </a:p>
-        </p:txBody>
-      </p:sp>
-      <p:sp>
-        <p:nvSpPr>
-          <p:cNvPr id="4" name="TextBox 3"/>
+          <p:cNvPr id="3" name="TextBox 2"/>
           <p:cNvSpPr txBox="1"/>
           <p:nvPr/>
         </p:nvSpPr>
         <p:spPr>
           <a:xfrm>
-            <a:off x="685800" y="109728"/>
-            <a:ext cx="10817352" cy="228600"/>
+            <a:off x="685800" y="2377440"/>
+            <a:ext cx="10817352" cy="365760"/>
           </a:xfrm>
           <a:prstGeom prst="rect">
             <a:avLst/>
@@ -8772,70 +12253,27 @@
           <a:p>
             <a:pPr algn="l"/>
             <a:r>
-              <a:rPr sz="750">
-                <a:solidFill>
-                  <a:srgbClr val="78808C"/>
+              <a:rPr sz="1200">
+                <a:solidFill>
+                  <a:srgbClr val="D9C089"/>
                 </a:solidFill>
                 <a:latin typeface="Consolas"/>
               </a:rPr>
-              <a:t>M12  ·  INHALT</a:t>
-            </a:r>
-          </a:p>
-        </p:txBody>
-      </p:sp>
-      <p:sp>
-        <p:nvSpPr>
-          <p:cNvPr id="5" name="Rectangle 4"/>
+              <a:t>09:45–10:30</a:t>
+            </a:r>
+          </a:p>
+        </p:txBody>
+      </p:sp>
+      <p:sp>
+        <p:nvSpPr>
+          <p:cNvPr id="4" name="Rectangle 3"/>
           <p:cNvSpPr/>
           <p:nvPr/>
         </p:nvSpPr>
         <p:spPr>
           <a:xfrm>
-            <a:off x="0" y="1234440"/>
-            <a:ext cx="12188952" cy="12700"/>
-          </a:xfrm>
-          <a:prstGeom prst="rect">
-            <a:avLst/>
-          </a:prstGeom>
-          <a:solidFill>
-            <a:srgbClr val="D8DFE4"/>
-          </a:solidFill>
-          <a:ln>
-            <a:noFill/>
-          </a:ln>
-        </p:spPr>
-        <p:style>
-          <a:lnRef idx="1">
-            <a:schemeClr val="accent1"/>
-          </a:lnRef>
-          <a:fillRef idx="3">
-            <a:schemeClr val="accent1"/>
-          </a:fillRef>
-          <a:effectRef idx="2">
-            <a:schemeClr val="accent1"/>
-          </a:effectRef>
-          <a:fontRef idx="minor">
-            <a:schemeClr val="lt1"/>
-          </a:fontRef>
-        </p:style>
-        <p:txBody>
-          <a:bodyPr rtlCol="0" anchor="ctr"/>
-          <a:lstStyle/>
-          <a:p>
-            <a:pPr algn="ctr"/>
-          </a:p>
-        </p:txBody>
-      </p:sp>
-      <p:sp>
-        <p:nvSpPr>
-          <p:cNvPr id="6" name="Rectangle 5"/>
-          <p:cNvSpPr/>
-          <p:nvPr/>
-        </p:nvSpPr>
-        <p:spPr>
-          <a:xfrm>
-            <a:off x="685800" y="502920"/>
-            <a:ext cx="36576" cy="658368"/>
+            <a:off x="685800" y="2788920"/>
+            <a:ext cx="548640" cy="38100"/>
           </a:xfrm>
           <a:prstGeom prst="rect">
             <a:avLst/>
@@ -8871,14 +12309,14 @@
       </p:sp>
       <p:sp>
         <p:nvSpPr>
-          <p:cNvPr id="7" name="TextBox 6"/>
+          <p:cNvPr id="5" name="TextBox 4"/>
           <p:cNvSpPr txBox="1"/>
           <p:nvPr/>
         </p:nvSpPr>
         <p:spPr>
           <a:xfrm>
-            <a:off x="813816" y="502920"/>
-            <a:ext cx="10634472" cy="685800"/>
+            <a:off x="685800" y="3017520"/>
+            <a:ext cx="10817352" cy="1463040"/>
           </a:xfrm>
           <a:prstGeom prst="rect">
             <a:avLst/>
@@ -8893,27 +12331,27 @@
           <a:p>
             <a:pPr algn="l"/>
             <a:r>
-              <a:rPr sz="2400" b="1" i="0">
-                <a:solidFill>
-                  <a:srgbClr val="1F2C56"/>
+              <a:rPr sz="4000" b="1" i="0">
+                <a:solidFill>
+                  <a:srgbClr val="FFFFFF"/>
                 </a:solidFill>
                 <a:latin typeface="Arial"/>
               </a:rPr>
-              <a:t>Theorie-Input: Nachfolge-Typen und Prozess im Überblick</a:t>
-            </a:r>
-          </a:p>
-        </p:txBody>
-      </p:sp>
-      <p:sp>
-        <p:nvSpPr>
-          <p:cNvPr id="8" name="TextBox 7"/>
+              <a:t>Systemische Fragetechniken</a:t>
+            </a:r>
+          </a:p>
+        </p:txBody>
+      </p:sp>
+      <p:sp>
+        <p:nvSpPr>
+          <p:cNvPr id="6" name="TextBox 5"/>
           <p:cNvSpPr txBox="1"/>
           <p:nvPr/>
         </p:nvSpPr>
         <p:spPr>
           <a:xfrm>
-            <a:off x="685800" y="1417320"/>
-            <a:ext cx="10817352" cy="4892040"/>
+            <a:off x="685800" y="4480560"/>
+            <a:ext cx="8653881" cy="1280160"/>
           </a:xfrm>
           <a:prstGeom prst="rect">
             <a:avLst/>
@@ -8926,269 +12364,29 @@
           </a:bodyPr>
           <a:lstStyle/>
           <a:p>
-            <a:pPr>
-              <a:spcBef>
-                <a:spcPts val="1000"/>
-              </a:spcBef>
-              <a:spcAft>
-                <a:spcPts val="200"/>
-              </a:spcAft>
-            </a:pPr>
-            <a:r>
-              <a:rPr sz="800" b="1">
-                <a:solidFill>
-                  <a:srgbClr val="78808C"/>
-                </a:solidFill>
-                <a:latin typeface="Consolas"/>
-              </a:rPr>
-              <a:t>NACHFOLGEPROZESS – FÜNF PHASEN</a:t>
-            </a:r>
-          </a:p>
-          <a:p>
-            <a:pPr marL="190500" indent="-190500">
-              <a:spcBef>
-                <a:spcPts val="400"/>
-              </a:spcBef>
-              <a:spcAft>
-                <a:spcPts val="200"/>
-              </a:spcAft>
-            </a:pPr>
-            <a:r>
-              <a:rPr sz="1300">
-                <a:solidFill>
-                  <a:srgbClr val="3D5466"/>
+            <a:pPr algn="l"/>
+            <a:r>
+              <a:rPr sz="1600" b="0" i="0">
+                <a:solidFill>
+                  <a:srgbClr val="C8D2E6"/>
                 </a:solidFill>
                 <a:latin typeface="Arial"/>
               </a:rPr>
-              <a:t>▸  Erfolgreiche Unternehmernachfolgen benötigen empirisch 3–7 Jahre Vorlaufzeit (IfM Bonn, 2016 ):</a:t>
-            </a:r>
-          </a:p>
-          <a:p>
-            <a:pPr>
-              <a:spcBef>
-                <a:spcPts val="1000"/>
-              </a:spcBef>
-              <a:spcAft>
-                <a:spcPts val="200"/>
-              </a:spcAft>
-            </a:pPr>
-            <a:r>
-              <a:rPr sz="800" b="1">
-                <a:solidFill>
-                  <a:srgbClr val="78808C"/>
-                </a:solidFill>
-                <a:latin typeface="Consolas"/>
-              </a:rPr>
-              <a:t>REGULATORISCHE ECKPUNKTE (ORIENTIERUNGSRAHMEN)</a:t>
-            </a:r>
-          </a:p>
-          <a:p>
-            <a:pPr marL="190500" indent="-190500">
-              <a:spcBef>
-                <a:spcPts val="400"/>
-              </a:spcBef>
-              <a:spcAft>
-                <a:spcPts val="200"/>
-              </a:spcAft>
-            </a:pPr>
-            <a:r>
-              <a:rPr sz="1300">
-                <a:solidFill>
-                  <a:srgbClr val="3D5466"/>
-                </a:solidFill>
-                <a:latin typeface="Arial"/>
-              </a:rPr>
-              <a:t>▸  Der FK zeigt dem Unternehmer die wichtigsten Felder auf und verweist an Spezialisten:</a:t>
-            </a:r>
-          </a:p>
-          <a:p>
-            <a:pPr marL="190500" indent="-190500">
-              <a:spcBef>
-                <a:spcPts val="400"/>
-              </a:spcBef>
-              <a:spcAft>
-                <a:spcPts val="200"/>
-              </a:spcAft>
-            </a:pPr>
-            <a:r>
-              <a:rPr sz="1300">
-                <a:solidFill>
-                  <a:srgbClr val="3D5466"/>
-                </a:solidFill>
-                <a:latin typeface="Arial"/>
-              </a:rPr>
-              <a:t>▸  Erbschaftsteuer / Schenkungsteuer: § 13a ErbStG regelt die Begünstigungen für Betriebsvermögen bei familieninterner Übergabe (Verschonungsabschlag 85 %; Optionsverschonung 100 %; Behaltensfristen 5 bzw. 7 Jahre). Der persönliche Freibetrag nach § 16 Abs. 1 Nr. 2 ErbStG beträgt 400.000 EUR je Elternteil und je Kind – d.h. ein Kind kann im Erbfall von beiden Elternteilen zusammen bis zu 800.000 EUR steuerfrei erhalten. Wichtig: Dieser Freibetrag kann alle 10 Jahre erneut genutzt werden – eine schrittweise Schenkung über mehrere Jahre kann daher steuerlich deutlich günstiger sein als eine Einmal-Übertragung. Hinweis: Diese Orientierungsinformation ersetzt keine steuerrechtliche Beratung – stets Steuerberater einbinden.</a:t>
-            </a:r>
-          </a:p>
-          <a:p>
-            <a:pPr marL="190500" indent="-190500">
-              <a:spcBef>
-                <a:spcPts val="400"/>
-              </a:spcBef>
-              <a:spcAft>
-                <a:spcPts val="200"/>
-              </a:spcAft>
-            </a:pPr>
-            <a:r>
-              <a:rPr sz="1300">
-                <a:solidFill>
-                  <a:srgbClr val="3D5466"/>
-                </a:solidFill>
-                <a:latin typeface="Arial"/>
-              </a:rPr>
-              <a:t>▸  Gesellschaftsrechtliche Fragen (GmbH-G, HGB): Sind Gesellschafterverträge aktuell? Gibt es Vorkaufsrechte?</a:t>
-            </a:r>
-          </a:p>
-          <a:p>
-            <a:pPr marL="177800" indent="-177800">
-              <a:spcBef>
-                <a:spcPts val="600"/>
-              </a:spcBef>
-              <a:spcAft>
-                <a:spcPts val="200"/>
-              </a:spcAft>
-            </a:pPr>
-            <a:r>
-              <a:rPr sz="1200" i="1">
-                <a:solidFill>
-                  <a:srgbClr val="3D5466"/>
-                </a:solidFill>
-                <a:latin typeface="Arial"/>
-              </a:rPr>
-              <a:t>→  Praxishinweis: Der Steuerberater als Gatekeeper</a:t>
-            </a:r>
-          </a:p>
-          <a:p>
-            <a:pPr marL="177800" indent="-177800">
-              <a:spcBef>
-                <a:spcPts val="600"/>
-              </a:spcBef>
-              <a:spcAft>
-                <a:spcPts val="200"/>
-              </a:spcAft>
-            </a:pPr>
-            <a:r>
-              <a:rPr sz="1200" i="1">
-                <a:solidFill>
-                  <a:srgbClr val="3D5466"/>
-                </a:solidFill>
-                <a:latin typeface="Arial"/>
-              </a:rPr>
-              <a:t>→  Strategische Partnerschaft statt Konkurrenz:</a:t>
-            </a:r>
-          </a:p>
-          <a:p>
-            <a:pPr marL="177800" indent="-177800">
-              <a:spcBef>
-                <a:spcPts val="600"/>
-              </a:spcBef>
-              <a:spcAft>
-                <a:spcPts val="200"/>
-              </a:spcAft>
-            </a:pPr>
-            <a:r>
-              <a:rPr sz="1200" i="1">
-                <a:solidFill>
-                  <a:srgbClr val="3D5466"/>
-                </a:solidFill>
-                <a:latin typeface="Arial"/>
-              </a:rPr>
-              <a:t>→  - Gemeinsame Termine mit Steuerberater und Kunden als Stärke positionieren, nicht als Verlust von Kontrolle</a:t>
-            </a:r>
-          </a:p>
-          <a:p>
-            <a:pPr marL="177800" indent="-177800">
-              <a:spcBef>
-                <a:spcPts val="600"/>
-              </a:spcBef>
-              <a:spcAft>
-                <a:spcPts val="200"/>
-              </a:spcAft>
-            </a:pPr>
-            <a:r>
-              <a:rPr sz="1200" i="1">
-                <a:solidFill>
-                  <a:srgbClr val="3D5466"/>
-                </a:solidFill>
-                <a:latin typeface="Arial"/>
-              </a:rPr>
-              <a:t>→  - Dem Steuerberater nützliche Informationen geben (Finanzierbarkeits-Check), ohne das Mandat anzutasten</a:t>
-            </a:r>
-          </a:p>
-          <a:p>
-            <a:pPr marL="177800" indent="-177800">
-              <a:spcBef>
-                <a:spcPts val="600"/>
-              </a:spcBef>
-              <a:spcAft>
-                <a:spcPts val="200"/>
-              </a:spcAft>
-            </a:pPr>
-            <a:r>
-              <a:rPr sz="1200" i="1">
-                <a:solidFill>
-                  <a:srgbClr val="3D5466"/>
-                </a:solidFill>
-                <a:latin typeface="Arial"/>
-              </a:rPr>
-              <a:t>→  - Aufbau einer längerfristigen Beziehung: Steuerberater im Kammerbezirk kennenlernen, z.B. über IHK-Veranstaltungen oder gemeinsame Unternehmer-Foren</a:t>
-            </a:r>
-          </a:p>
-        </p:txBody>
-      </p:sp>
-      <p:sp>
-        <p:nvSpPr>
-          <p:cNvPr id="9" name="Rectangle 8"/>
-          <p:cNvSpPr/>
-          <p:nvPr/>
-        </p:nvSpPr>
-        <p:spPr>
-          <a:xfrm>
-            <a:off x="0" y="6510528"/>
-            <a:ext cx="12188952" cy="347472"/>
-          </a:xfrm>
-          <a:prstGeom prst="rect">
-            <a:avLst/>
-          </a:prstGeom>
-          <a:solidFill>
-            <a:srgbClr val="0A1937"/>
-          </a:solidFill>
-          <a:ln>
-            <a:noFill/>
-          </a:ln>
-        </p:spPr>
-        <p:style>
-          <a:lnRef idx="1">
-            <a:schemeClr val="accent1"/>
-          </a:lnRef>
-          <a:fillRef idx="3">
-            <a:schemeClr val="accent1"/>
-          </a:fillRef>
-          <a:effectRef idx="2">
-            <a:schemeClr val="accent1"/>
-          </a:effectRef>
-          <a:fontRef idx="minor">
-            <a:schemeClr val="lt1"/>
-          </a:fontRef>
-        </p:style>
-        <p:txBody>
-          <a:bodyPr rtlCol="0" anchor="ctr"/>
-          <a:lstStyle/>
-          <a:p>
-            <a:pPr algn="ctr"/>
-          </a:p>
-        </p:txBody>
-      </p:sp>
-      <p:sp>
-        <p:nvSpPr>
-          <p:cNvPr id="10" name="TextBox 9"/>
+              <a:t>Fragen stellen, die Perspektiven öffnen – statt Antworten zu verkaufen.</a:t>
+            </a:r>
+          </a:p>
+        </p:txBody>
+      </p:sp>
+      <p:sp>
+        <p:nvSpPr>
+          <p:cNvPr id="7" name="TextBox 6"/>
           <p:cNvSpPr txBox="1"/>
           <p:nvPr/>
         </p:nvSpPr>
         <p:spPr>
           <a:xfrm>
-            <a:off x="685800" y="6583680"/>
-            <a:ext cx="6490411" cy="256032"/>
+            <a:off x="685800" y="6355080"/>
+            <a:ext cx="10817352" cy="274320"/>
           </a:xfrm>
           <a:prstGeom prst="rect">
             <a:avLst/>
@@ -9205,7 +12403,7 @@
             <a:r>
               <a:rPr sz="700">
                 <a:solidFill>
-                  <a:srgbClr val="A0B4D2"/>
+                  <a:srgbClr val="8CA0C3"/>
                 </a:solidFill>
                 <a:latin typeface="Consolas"/>
               </a:rPr>
@@ -9247,7 +12445,7 @@
             <a:avLst/>
           </a:prstGeom>
           <a:solidFill>
-            <a:srgbClr val="FFFFFF"/>
+            <a:srgbClr val="EDEDF3"/>
           </a:solidFill>
           <a:ln>
             <a:noFill/>
@@ -9348,43 +12546,51 @@
                 </a:solidFill>
                 <a:latin typeface="Consolas"/>
               </a:rPr>
-              <a:t>M12  ·  SCHAUBILD</a:t>
-            </a:r>
-          </a:p>
-        </p:txBody>
-      </p:sp>
-      <p:sp>
-        <p:nvSpPr>
-          <p:cNvPr id="5" name="TextBox 4"/>
-          <p:cNvSpPr txBox="1"/>
-          <p:nvPr/>
-        </p:nvSpPr>
-        <p:spPr>
-          <a:xfrm>
-            <a:off x="685800" y="502920"/>
-            <a:ext cx="10817352" cy="594360"/>
-          </a:xfrm>
-          <a:prstGeom prst="rect">
-            <a:avLst/>
-          </a:prstGeom>
-          <a:noFill/>
-        </p:spPr>
-        <p:txBody>
-          <a:bodyPr wrap="square">
-            <a:spAutoFit/>
-          </a:bodyPr>
-          <a:lstStyle/>
-          <a:p>
-            <a:pPr algn="l"/>
-            <a:r>
-              <a:rPr sz="2000" b="1" i="0">
-                <a:solidFill>
-                  <a:srgbClr val="1F2C56"/>
-                </a:solidFill>
-                <a:latin typeface="Arial"/>
-              </a:rPr>
-              <a:t>Nachfolge-Phasenmodell</a:t>
-            </a:r>
+              <a:t>M12  ·  INHALT</a:t>
+            </a:r>
+          </a:p>
+        </p:txBody>
+      </p:sp>
+      <p:sp>
+        <p:nvSpPr>
+          <p:cNvPr id="5" name="Rectangle 4"/>
+          <p:cNvSpPr/>
+          <p:nvPr/>
+        </p:nvSpPr>
+        <p:spPr>
+          <a:xfrm>
+            <a:off x="0" y="1234440"/>
+            <a:ext cx="12188952" cy="12700"/>
+          </a:xfrm>
+          <a:prstGeom prst="rect">
+            <a:avLst/>
+          </a:prstGeom>
+          <a:solidFill>
+            <a:srgbClr val="D8DFE4"/>
+          </a:solidFill>
+          <a:ln>
+            <a:noFill/>
+          </a:ln>
+        </p:spPr>
+        <p:style>
+          <a:lnRef idx="1">
+            <a:schemeClr val="accent1"/>
+          </a:lnRef>
+          <a:fillRef idx="3">
+            <a:schemeClr val="accent1"/>
+          </a:fillRef>
+          <a:effectRef idx="2">
+            <a:schemeClr val="accent1"/>
+          </a:effectRef>
+          <a:fontRef idx="minor">
+            <a:schemeClr val="lt1"/>
+          </a:fontRef>
+        </p:style>
+        <p:txBody>
+          <a:bodyPr rtlCol="0" anchor="ctr"/>
+          <a:lstStyle/>
+          <a:p>
+            <a:pPr algn="ctr"/>
           </a:p>
         </p:txBody>
       </p:sp>
@@ -9396,8 +12602,8 @@
         </p:nvSpPr>
         <p:spPr>
           <a:xfrm>
-            <a:off x="685800" y="1143000"/>
-            <a:ext cx="10817352" cy="25400"/>
+            <a:off x="685800" y="502920"/>
+            <a:ext cx="36576" cy="658368"/>
           </a:xfrm>
           <a:prstGeom prst="rect">
             <a:avLst/>
@@ -9431,33 +12637,143 @@
           </a:p>
         </p:txBody>
       </p:sp>
-      <p:pic>
-        <p:nvPicPr>
-          <p:cNvPr id="7" name="Picture 6" descr="image.png"/>
-          <p:cNvPicPr>
-            <a:picLocks noChangeAspect="1"/>
-          </p:cNvPicPr>
-          <p:nvPr/>
-        </p:nvPicPr>
-        <p:blipFill>
-          <a:blip r:embed="rId2"/>
-          <a:stretch>
-            <a:fillRect/>
-          </a:stretch>
-        </p:blipFill>
-        <p:spPr>
-          <a:xfrm>
-            <a:off x="2163921" y="1325880"/>
-            <a:ext cx="7861110" cy="4937760"/>
-          </a:xfrm>
-          <a:prstGeom prst="rect">
-            <a:avLst/>
-          </a:prstGeom>
-        </p:spPr>
-      </p:pic>
-      <p:sp>
-        <p:nvSpPr>
-          <p:cNvPr id="8" name="Rectangle 7"/>
+      <p:sp>
+        <p:nvSpPr>
+          <p:cNvPr id="7" name="TextBox 6"/>
+          <p:cNvSpPr txBox="1"/>
+          <p:nvPr/>
+        </p:nvSpPr>
+        <p:spPr>
+          <a:xfrm>
+            <a:off x="813816" y="502920"/>
+            <a:ext cx="10634472" cy="685800"/>
+          </a:xfrm>
+          <a:prstGeom prst="rect">
+            <a:avLst/>
+          </a:prstGeom>
+          <a:noFill/>
+        </p:spPr>
+        <p:txBody>
+          <a:bodyPr wrap="square">
+            <a:spAutoFit/>
+          </a:bodyPr>
+          <a:lstStyle/>
+          <a:p>
+            <a:pPr algn="l"/>
+            <a:r>
+              <a:rPr sz="2400" b="1" i="0">
+                <a:solidFill>
+                  <a:srgbClr val="1F2C56"/>
+                </a:solidFill>
+                <a:latin typeface="Arial"/>
+              </a:rPr>
+              <a:t>Fragen, die eine andere Perspektive öffnen</a:t>
+            </a:r>
+          </a:p>
+        </p:txBody>
+      </p:sp>
+      <p:sp>
+        <p:nvSpPr>
+          <p:cNvPr id="8" name="TextBox 7"/>
+          <p:cNvSpPr txBox="1"/>
+          <p:nvPr/>
+        </p:nvSpPr>
+        <p:spPr>
+          <a:xfrm>
+            <a:off x="685800" y="1417320"/>
+            <a:ext cx="10817352" cy="4892040"/>
+          </a:xfrm>
+          <a:prstGeom prst="rect">
+            <a:avLst/>
+          </a:prstGeom>
+          <a:noFill/>
+        </p:spPr>
+        <p:txBody>
+          <a:bodyPr wrap="square" anchor="ctr">
+            <a:spAutoFit/>
+          </a:bodyPr>
+          <a:lstStyle/>
+          <a:p>
+            <a:pPr marL="177800" indent="-177800">
+              <a:spcBef>
+                <a:spcPts val="600"/>
+              </a:spcBef>
+              <a:spcAft>
+                <a:spcPts val="200"/>
+              </a:spcAft>
+            </a:pPr>
+            <a:r>
+              <a:rPr sz="1200" i="1">
+                <a:solidFill>
+                  <a:srgbClr val="3D5466"/>
+                </a:solidFill>
+                <a:latin typeface="Arial"/>
+              </a:rPr>
+              <a:t>→  SPIN löst Probleme – Nachfolge ist existenziell. Hier brauchen Sie systemische und zirkuläre Fragen, die Muster sichtbar machen.</a:t>
+            </a:r>
+          </a:p>
+          <a:p>
+            <a:pPr marL="190500" indent="-190500">
+              <a:spcBef>
+                <a:spcPts val="400"/>
+              </a:spcBef>
+              <a:spcAft>
+                <a:spcPts val="200"/>
+              </a:spcAft>
+            </a:pPr>
+            <a:r>
+              <a:rPr sz="1300">
+                <a:solidFill>
+                  <a:srgbClr val="3D5466"/>
+                </a:solidFill>
+                <a:latin typeface="Arial"/>
+              </a:rPr>
+              <a:t>▸  Wunderfrage: den gewünschten Zielzustand ohne Zwänge durchspielen.</a:t>
+            </a:r>
+          </a:p>
+          <a:p>
+            <a:pPr marL="190500" indent="-190500">
+              <a:spcBef>
+                <a:spcPts val="400"/>
+              </a:spcBef>
+              <a:spcAft>
+                <a:spcPts val="200"/>
+              </a:spcAft>
+            </a:pPr>
+            <a:r>
+              <a:rPr sz="1300">
+                <a:solidFill>
+                  <a:srgbClr val="3D5466"/>
+                </a:solidFill>
+                <a:latin typeface="Arial"/>
+              </a:rPr>
+              <a:t>▸  Zirkuläre Frage: erkunden, wie andere den Unternehmer und sein Dilemma wahrnehmen.</a:t>
+            </a:r>
+          </a:p>
+          <a:p>
+            <a:pPr marL="190500" indent="-190500">
+              <a:spcBef>
+                <a:spcPts val="400"/>
+              </a:spcBef>
+              <a:spcAft>
+                <a:spcPts val="200"/>
+              </a:spcAft>
+            </a:pPr>
+            <a:r>
+              <a:rPr sz="1300">
+                <a:solidFill>
+                  <a:srgbClr val="3D5466"/>
+                </a:solidFill>
+                <a:latin typeface="Arial"/>
+              </a:rPr>
+              <a:t>▸  Hypothetische Frage: Szenarien durchspielen, ohne festzulegen.</a:t>
+            </a:r>
+          </a:p>
+        </p:txBody>
+      </p:sp>
+      <p:sp>
+        <p:nvSpPr>
+          <p:cNvPr id="9" name="Rectangle 8"/>
           <p:cNvSpPr/>
           <p:nvPr/>
         </p:nvSpPr>
@@ -9500,7 +12816,7 @@
       </p:sp>
       <p:sp>
         <p:nvSpPr>
-          <p:cNvPr id="9" name="TextBox 8"/>
+          <p:cNvPr id="10" name="TextBox 9"/>
           <p:cNvSpPr txBox="1"/>
           <p:nvPr/>
         </p:nvSpPr>
@@ -9529,41 +12845,6 @@
                 <a:latin typeface="Consolas"/>
               </a:rPr>
               <a:t>FKB Campus  ·  M12</a:t>
-            </a:r>
-          </a:p>
-        </p:txBody>
-      </p:sp>
-      <p:sp>
-        <p:nvSpPr>
-          <p:cNvPr id="10" name="TextBox 9"/>
-          <p:cNvSpPr txBox="1"/>
-          <p:nvPr/>
-        </p:nvSpPr>
-        <p:spPr>
-          <a:xfrm>
-            <a:off x="7176211" y="6583680"/>
-            <a:ext cx="4326940" cy="256032"/>
-          </a:xfrm>
-          <a:prstGeom prst="rect">
-            <a:avLst/>
-          </a:prstGeom>
-          <a:noFill/>
-        </p:spPr>
-        <p:txBody>
-          <a:bodyPr wrap="none">
-            <a:spAutoFit/>
-          </a:bodyPr>
-          <a:lstStyle/>
-          <a:p>
-            <a:pPr algn="r"/>
-            <a:r>
-              <a:rPr sz="700">
-                <a:solidFill>
-                  <a:srgbClr val="A0B4D2"/>
-                </a:solidFill>
-                <a:latin typeface="Consolas"/>
-              </a:rPr>
-              <a:t>Schaubild</a:t>
             </a:r>
           </a:p>
         </p:txBody>
@@ -9601,7 +12882,7 @@
             <a:avLst/>
           </a:prstGeom>
           <a:solidFill>
-            <a:srgbClr val="EDEDF3"/>
+            <a:srgbClr val="1F2C56"/>
           </a:solidFill>
           <a:ln>
             <a:noFill/>
@@ -9631,57 +12912,14 @@
       </p:sp>
       <p:sp>
         <p:nvSpPr>
-          <p:cNvPr id="3" name="Rectangle 2"/>
-          <p:cNvSpPr/>
-          <p:nvPr/>
-        </p:nvSpPr>
-        <p:spPr>
-          <a:xfrm>
-            <a:off x="0" y="0"/>
-            <a:ext cx="12188952" cy="50292"/>
-          </a:xfrm>
-          <a:prstGeom prst="rect">
-            <a:avLst/>
-          </a:prstGeom>
-          <a:solidFill>
-            <a:srgbClr val="1F2C56"/>
-          </a:solidFill>
-          <a:ln>
-            <a:noFill/>
-          </a:ln>
-        </p:spPr>
-        <p:style>
-          <a:lnRef idx="1">
-            <a:schemeClr val="accent1"/>
-          </a:lnRef>
-          <a:fillRef idx="3">
-            <a:schemeClr val="accent1"/>
-          </a:fillRef>
-          <a:effectRef idx="2">
-            <a:schemeClr val="accent1"/>
-          </a:effectRef>
-          <a:fontRef idx="minor">
-            <a:schemeClr val="lt1"/>
-          </a:fontRef>
-        </p:style>
-        <p:txBody>
-          <a:bodyPr rtlCol="0" anchor="ctr"/>
-          <a:lstStyle/>
-          <a:p>
-            <a:pPr algn="ctr"/>
-          </a:p>
-        </p:txBody>
-      </p:sp>
-      <p:sp>
-        <p:nvSpPr>
-          <p:cNvPr id="4" name="TextBox 3"/>
+          <p:cNvPr id="3" name="TextBox 2"/>
           <p:cNvSpPr txBox="1"/>
           <p:nvPr/>
         </p:nvSpPr>
         <p:spPr>
           <a:xfrm>
-            <a:off x="685800" y="109728"/>
-            <a:ext cx="10817352" cy="228600"/>
+            <a:off x="685800" y="2377440"/>
+            <a:ext cx="10817352" cy="365760"/>
           </a:xfrm>
           <a:prstGeom prst="rect">
             <a:avLst/>
@@ -9696,70 +12934,27 @@
           <a:p>
             <a:pPr algn="l"/>
             <a:r>
-              <a:rPr sz="750">
-                <a:solidFill>
-                  <a:srgbClr val="78808C"/>
+              <a:rPr sz="1200">
+                <a:solidFill>
+                  <a:srgbClr val="D9C089"/>
                 </a:solidFill>
                 <a:latin typeface="Consolas"/>
               </a:rPr>
-              <a:t>M12  ·  INHALT</a:t>
-            </a:r>
-          </a:p>
-        </p:txBody>
-      </p:sp>
-      <p:sp>
-        <p:nvSpPr>
-          <p:cNvPr id="5" name="Rectangle 4"/>
+              <a:t>10:45–11:00</a:t>
+            </a:r>
+          </a:p>
+        </p:txBody>
+      </p:sp>
+      <p:sp>
+        <p:nvSpPr>
+          <p:cNvPr id="4" name="Rectangle 3"/>
           <p:cNvSpPr/>
           <p:nvPr/>
         </p:nvSpPr>
         <p:spPr>
           <a:xfrm>
-            <a:off x="0" y="1234440"/>
-            <a:ext cx="12188952" cy="12700"/>
-          </a:xfrm>
-          <a:prstGeom prst="rect">
-            <a:avLst/>
-          </a:prstGeom>
-          <a:solidFill>
-            <a:srgbClr val="D8DFE4"/>
-          </a:solidFill>
-          <a:ln>
-            <a:noFill/>
-          </a:ln>
-        </p:spPr>
-        <p:style>
-          <a:lnRef idx="1">
-            <a:schemeClr val="accent1"/>
-          </a:lnRef>
-          <a:fillRef idx="3">
-            <a:schemeClr val="accent1"/>
-          </a:fillRef>
-          <a:effectRef idx="2">
-            <a:schemeClr val="accent1"/>
-          </a:effectRef>
-          <a:fontRef idx="minor">
-            <a:schemeClr val="lt1"/>
-          </a:fontRef>
-        </p:style>
-        <p:txBody>
-          <a:bodyPr rtlCol="0" anchor="ctr"/>
-          <a:lstStyle/>
-          <a:p>
-            <a:pPr algn="ctr"/>
-          </a:p>
-        </p:txBody>
-      </p:sp>
-      <p:sp>
-        <p:nvSpPr>
-          <p:cNvPr id="6" name="Rectangle 5"/>
-          <p:cNvSpPr/>
-          <p:nvPr/>
-        </p:nvSpPr>
-        <p:spPr>
-          <a:xfrm>
-            <a:off x="685800" y="502920"/>
-            <a:ext cx="36576" cy="658368"/>
+            <a:off x="685800" y="2788920"/>
+            <a:ext cx="548640" cy="38100"/>
           </a:xfrm>
           <a:prstGeom prst="rect">
             <a:avLst/>
@@ -9795,14 +12990,14 @@
       </p:sp>
       <p:sp>
         <p:nvSpPr>
-          <p:cNvPr id="7" name="TextBox 6"/>
+          <p:cNvPr id="5" name="TextBox 4"/>
           <p:cNvSpPr txBox="1"/>
           <p:nvPr/>
         </p:nvSpPr>
         <p:spPr>
           <a:xfrm>
-            <a:off x="813816" y="502920"/>
-            <a:ext cx="10634472" cy="685800"/>
+            <a:off x="685800" y="3017520"/>
+            <a:ext cx="10817352" cy="1463040"/>
           </a:xfrm>
           <a:prstGeom prst="rect">
             <a:avLst/>
@@ -9817,27 +13012,27 @@
           <a:p>
             <a:pPr algn="l"/>
             <a:r>
-              <a:rPr sz="2400" b="1" i="0">
-                <a:solidFill>
-                  <a:srgbClr val="1F2C56"/>
+              <a:rPr sz="4000" b="1" i="0">
+                <a:solidFill>
+                  <a:srgbClr val="FFFFFF"/>
                 </a:solidFill>
                 <a:latin typeface="Arial"/>
               </a:rPr>
-              <a:t>Theorie-Input: Die emotionale Dimension der Nachfolge</a:t>
-            </a:r>
-          </a:p>
-        </p:txBody>
-      </p:sp>
-      <p:sp>
-        <p:nvSpPr>
-          <p:cNvPr id="8" name="TextBox 7"/>
+              <a:t>Nachfolge verstehen</a:t>
+            </a:r>
+          </a:p>
+        </p:txBody>
+      </p:sp>
+      <p:sp>
+        <p:nvSpPr>
+          <p:cNvPr id="6" name="TextBox 5"/>
           <p:cNvSpPr txBox="1"/>
           <p:nvPr/>
         </p:nvSpPr>
         <p:spPr>
           <a:xfrm>
-            <a:off x="685800" y="1417320"/>
-            <a:ext cx="10817352" cy="4892040"/>
+            <a:off x="685800" y="4480560"/>
+            <a:ext cx="8653881" cy="1280160"/>
           </a:xfrm>
           <a:prstGeom prst="rect">
             <a:avLst/>
@@ -9850,288 +13045,29 @@
           </a:bodyPr>
           <a:lstStyle/>
           <a:p>
-            <a:pPr>
-              <a:spcBef>
-                <a:spcPts val="1000"/>
-              </a:spcBef>
-              <a:spcAft>
-                <a:spcPts val="200"/>
-              </a:spcAft>
-            </a:pPr>
-            <a:r>
-              <a:rPr sz="800" b="1">
-                <a:solidFill>
-                  <a:srgbClr val="78808C"/>
-                </a:solidFill>
-                <a:latin typeface="Consolas"/>
-              </a:rPr>
-              <a:t>KONTROLLVERLUST UND IDENTITÄTSBEDROHUNG</a:t>
-            </a:r>
-          </a:p>
-          <a:p>
-            <a:pPr marL="190500" indent="-190500">
-              <a:spcBef>
-                <a:spcPts val="400"/>
-              </a:spcBef>
-              <a:spcAft>
-                <a:spcPts val="200"/>
-              </a:spcAft>
-            </a:pPr>
-            <a:r>
-              <a:rPr sz="1300">
-                <a:solidFill>
-                  <a:srgbClr val="3D5466"/>
+            <a:pPr algn="l"/>
+            <a:r>
+              <a:rPr sz="1600" b="0" i="0">
+                <a:solidFill>
+                  <a:srgbClr val="C8D2E6"/>
                 </a:solidFill>
                 <a:latin typeface="Arial"/>
               </a:rPr>
-              <a:t>▸  Diese existenzielle Angst wird oft verdrängt oder rationalisiert. Psychologisch handelt es sich um einen Trauerprozess (adaptiert nach Kübler-Ross, 1969 ):</a:t>
-            </a:r>
-          </a:p>
-          <a:p>
-            <a:pPr marL="190500" indent="-190500">
-              <a:spcBef>
-                <a:spcPts val="400"/>
-              </a:spcBef>
-              <a:spcAft>
-                <a:spcPts val="200"/>
-              </a:spcAft>
-            </a:pPr>
-            <a:r>
-              <a:rPr sz="1300">
-                <a:solidFill>
-                  <a:srgbClr val="3D5466"/>
-                </a:solidFill>
-                <a:latin typeface="Arial"/>
-              </a:rPr>
-              <a:t>▸  Verleugnung: „Das Thema ist noch gar nicht aktuell."</a:t>
-            </a:r>
-          </a:p>
-          <a:p>
-            <a:pPr marL="190500" indent="-190500">
-              <a:spcBef>
-                <a:spcPts val="400"/>
-              </a:spcBef>
-              <a:spcAft>
-                <a:spcPts val="200"/>
-              </a:spcAft>
-            </a:pPr>
-            <a:r>
-              <a:rPr sz="1300">
-                <a:solidFill>
-                  <a:srgbClr val="3D5466"/>
-                </a:solidFill>
-                <a:latin typeface="Arial"/>
-              </a:rPr>
-              <a:t>▸  Widerstand: „Mein Sohn ist noch nicht bereit."</a:t>
-            </a:r>
-          </a:p>
-          <a:p>
-            <a:pPr marL="190500" indent="-190500">
-              <a:spcBef>
-                <a:spcPts val="400"/>
-              </a:spcBef>
-              <a:spcAft>
-                <a:spcPts val="200"/>
-              </a:spcAft>
-            </a:pPr>
-            <a:r>
-              <a:rPr sz="1300">
-                <a:solidFill>
-                  <a:srgbClr val="3D5466"/>
-                </a:solidFill>
-                <a:latin typeface="Arial"/>
-              </a:rPr>
-              <a:t>▸  Verhandeln: „Vielleicht mache ich noch ein paar Jahre."</a:t>
-            </a:r>
-          </a:p>
-          <a:p>
-            <a:pPr marL="190500" indent="-190500">
-              <a:spcBef>
-                <a:spcPts val="400"/>
-              </a:spcBef>
-              <a:spcAft>
-                <a:spcPts val="200"/>
-              </a:spcAft>
-            </a:pPr>
-            <a:r>
-              <a:rPr sz="1300">
-                <a:solidFill>
-                  <a:srgbClr val="3D5466"/>
-                </a:solidFill>
-                <a:latin typeface="Arial"/>
-              </a:rPr>
-              <a:t>▸  Trauer: Tiefe emotionale Aufarbeitung des Loslassens.</a:t>
-            </a:r>
-          </a:p>
-          <a:p>
-            <a:pPr marL="190500" indent="-190500">
-              <a:spcBef>
-                <a:spcPts val="400"/>
-              </a:spcBef>
-              <a:spcAft>
-                <a:spcPts val="200"/>
-              </a:spcAft>
-            </a:pPr>
-            <a:r>
-              <a:rPr sz="1300">
-                <a:solidFill>
-                  <a:srgbClr val="3D5466"/>
-                </a:solidFill>
-                <a:latin typeface="Arial"/>
-              </a:rPr>
-              <a:t>▸  Akzeptanz: Umgestaltung der Identität: „Ich bin jetzt Mentor."</a:t>
-            </a:r>
-          </a:p>
-          <a:p>
-            <a:pPr marL="190500" indent="-190500">
-              <a:spcBef>
-                <a:spcPts val="400"/>
-              </a:spcBef>
-              <a:spcAft>
-                <a:spcPts val="200"/>
-              </a:spcAft>
-            </a:pPr>
-            <a:r>
-              <a:rPr sz="1300">
-                <a:solidFill>
-                  <a:srgbClr val="3D5466"/>
-                </a:solidFill>
-                <a:latin typeface="Arial"/>
-              </a:rPr>
-              <a:t>▸  Der FK, der diesen Prozess versteht, behandelt Loslasswiderstände nicht als Irrationalität, sondern als normal und bearbeitbar.</a:t>
-            </a:r>
-          </a:p>
-          <a:p>
-            <a:pPr>
-              <a:spcBef>
-                <a:spcPts val="1000"/>
-              </a:spcBef>
-              <a:spcAft>
-                <a:spcPts val="200"/>
-              </a:spcAft>
-            </a:pPr>
-            <a:r>
-              <a:rPr sz="800" b="1">
-                <a:solidFill>
-                  <a:srgbClr val="78808C"/>
-                </a:solidFill>
-                <a:latin typeface="Consolas"/>
-              </a:rPr>
-              <a:t>DAS VERMÄCHTNIS-DILEMMA</a:t>
-            </a:r>
-          </a:p>
-          <a:p>
-            <a:pPr marL="190500" indent="-190500">
-              <a:spcBef>
-                <a:spcPts val="400"/>
-              </a:spcBef>
-              <a:spcAft>
-                <a:spcPts val="200"/>
-              </a:spcAft>
-            </a:pPr>
-            <a:r>
-              <a:rPr sz="1300">
-                <a:solidFill>
-                  <a:srgbClr val="3D5466"/>
-                </a:solidFill>
-                <a:latin typeface="Arial"/>
-              </a:rPr>
-              <a:t>▸  Viele Unternehmer tragen zwei widersprüchliche Wünsche:</a:t>
-            </a:r>
-          </a:p>
-          <a:p>
-            <a:pPr marL="190500" indent="-190500">
-              <a:spcBef>
-                <a:spcPts val="400"/>
-              </a:spcBef>
-              <a:spcAft>
-                <a:spcPts val="200"/>
-              </a:spcAft>
-            </a:pPr>
-            <a:r>
-              <a:rPr sz="1300">
-                <a:solidFill>
-                  <a:srgbClr val="3D5466"/>
-                </a:solidFill>
-                <a:latin typeface="Arial"/>
-              </a:rPr>
-              <a:t>▸  Kontrolle bewahren: „Nur ich kann das Unternehmen richtig führen."</a:t>
-            </a:r>
-          </a:p>
-          <a:p>
-            <a:pPr marL="190500" indent="-190500">
-              <a:spcBef>
-                <a:spcPts val="400"/>
-              </a:spcBef>
-              <a:spcAft>
-                <a:spcPts val="200"/>
-              </a:spcAft>
-            </a:pPr>
-            <a:r>
-              <a:rPr sz="1300">
-                <a:solidFill>
-                  <a:srgbClr val="3D5466"/>
-                </a:solidFill>
-                <a:latin typeface="Arial"/>
-              </a:rPr>
-              <a:t>▸  Vermächtnis hinterlassen: „Mein Lebenswerk soll weiterleben und florieren."</a:t>
-            </a:r>
-          </a:p>
-        </p:txBody>
-      </p:sp>
-      <p:sp>
-        <p:nvSpPr>
-          <p:cNvPr id="9" name="Rectangle 8"/>
-          <p:cNvSpPr/>
-          <p:nvPr/>
-        </p:nvSpPr>
-        <p:spPr>
-          <a:xfrm>
-            <a:off x="0" y="6510528"/>
-            <a:ext cx="12188952" cy="347472"/>
-          </a:xfrm>
-          <a:prstGeom prst="rect">
-            <a:avLst/>
-          </a:prstGeom>
-          <a:solidFill>
-            <a:srgbClr val="0A1937"/>
-          </a:solidFill>
-          <a:ln>
-            <a:noFill/>
-          </a:ln>
-        </p:spPr>
-        <p:style>
-          <a:lnRef idx="1">
-            <a:schemeClr val="accent1"/>
-          </a:lnRef>
-          <a:fillRef idx="3">
-            <a:schemeClr val="accent1"/>
-          </a:fillRef>
-          <a:effectRef idx="2">
-            <a:schemeClr val="accent1"/>
-          </a:effectRef>
-          <a:fontRef idx="minor">
-            <a:schemeClr val="lt1"/>
-          </a:fontRef>
-        </p:style>
-        <p:txBody>
-          <a:bodyPr rtlCol="0" anchor="ctr"/>
-          <a:lstStyle/>
-          <a:p>
-            <a:pPr algn="ctr"/>
-          </a:p>
-        </p:txBody>
-      </p:sp>
-      <p:sp>
-        <p:nvSpPr>
-          <p:cNvPr id="10" name="TextBox 9"/>
+              <a:t>Nachfolge-Typen, Prozessphasen und die emotionale Dimension kennen.</a:t>
+            </a:r>
+          </a:p>
+        </p:txBody>
+      </p:sp>
+      <p:sp>
+        <p:nvSpPr>
+          <p:cNvPr id="7" name="TextBox 6"/>
           <p:cNvSpPr txBox="1"/>
           <p:nvPr/>
         </p:nvSpPr>
         <p:spPr>
           <a:xfrm>
-            <a:off x="685800" y="6583680"/>
-            <a:ext cx="6490411" cy="256032"/>
+            <a:off x="685800" y="6355080"/>
+            <a:ext cx="10817352" cy="274320"/>
           </a:xfrm>
           <a:prstGeom prst="rect">
             <a:avLst/>
@@ -10148,7 +13084,7 @@
             <a:r>
               <a:rPr sz="700">
                 <a:solidFill>
-                  <a:srgbClr val="A0B4D2"/>
+                  <a:srgbClr val="8CA0C3"/>
                 </a:solidFill>
                 <a:latin typeface="Consolas"/>
               </a:rPr>
